--- a/docs/benchmarking/presentacion-reportes-normativos-v3.pptx
+++ b/docs/benchmarking/presentacion-reportes-normativos-v3.pptx
@@ -603,7 +603,7 @@
           <a:p>
             <a:r>
               <a:rPr lang="en-US" dirty="0"/>
-              <a:t>Presentar las dos alternativas con neutralidad y dejar que el comité pregunte. La alternativa 1 es simple y equitativa pero no resuelve el problema de fondo: la responsabilidad sigue sin dueño diferenciado. La alternativa 2 alinea grado con complejidad y crea la cadena de confiabilidad, a cambio de definir criterios de selección transparentes. Una combinación es posible: alternativa 2 ahora y revisión de los plenos con la evaluación.</a:t>
+              <a:t>Presentar las dos alternativas con neutralidad y dejar que el comité pregunte. La alternativa 1 es simple y equitativa y reconoce a todo el equipo; la alternativa 2 además diferencia responsabilidades y crea una ruta de desarrollo. La alternativa 2 alinea grado con complejidad y crea la cadena de confiabilidad, a cambio de definir criterios de selección transparentes. Una combinación es posible: alternativa 2 ahora y revisión de los plenos con la evaluación.</a:t>
             </a:r>
             <a:endParaRPr lang="en-US" dirty="0"/>
           </a:p>
@@ -2707,7 +2707,7 @@
                 <a:ea typeface="Calibri" pitchFamily="34" charset="-122"/>
                 <a:cs typeface="Calibri" pitchFamily="34" charset="-120"/>
               </a:rPr>
-              <a:t>Los seis especialistas normativos pasan al grado siguiente. Reconoce el cambio del trabajo para todos, pero mantiene un equipo plano: nadie asume formalmente la validación ni los bloques críticos.</a:t>
+              <a:t>Los seis especialistas normativos pasan al grado siguiente. Reconoce el cambio del trabajo para todo el equipo y conserva el esquema actual de respaldo mutuo.</a:t>
             </a:r>
             <a:endParaRPr lang="en-US" sz="1050" dirty="0"/>
           </a:p>
@@ -3330,7 +3330,7 @@
                 <a:ea typeface="Calibri" pitchFamily="34" charset="-122"/>
                 <a:cs typeface="Calibri" pitchFamily="34" charset="-120"/>
               </a:rPr>
-              <a:t>Reconoce la diferencia de complejidad entre reportes: no</a:t>
+              <a:t>Reconoce las competencias adquiridas con el cambio de tareas</a:t>
             </a:r>
             <a:endParaRPr lang="en-US" sz="950" dirty="0"/>
           </a:p>
@@ -3351,7 +3351,7 @@
                 <a:ea typeface="Calibri" pitchFamily="34" charset="-122"/>
                 <a:cs typeface="Calibri" pitchFamily="34" charset="-120"/>
               </a:rPr>
-              <a:t>Separa quien prepara de quien valida: no cambia</a:t>
+              <a:t>Alinea la remuneración con las expectativas del mercado</a:t>
             </a:r>
             <a:endParaRPr lang="en-US" sz="950" dirty="0"/>
           </a:p>
@@ -3372,7 +3372,7 @@
                 <a:ea typeface="Calibri" pitchFamily="34" charset="-122"/>
                 <a:cs typeface="Calibri" pitchFamily="34" charset="-120"/>
               </a:rPr>
-              <a:t>Equidad interna: alta, todos por igual</a:t>
+              <a:t>Mantiene el respaldo mutuo entre pares: sin dependencia de una sola persona</a:t>
             </a:r>
             <a:endParaRPr lang="en-US" sz="950" dirty="0"/>
           </a:p>
@@ -3414,7 +3414,7 @@
                 <a:ea typeface="Calibri" pitchFamily="34" charset="-122"/>
                 <a:cs typeface="Calibri" pitchFamily="34" charset="-120"/>
               </a:rPr>
-              <a:t>Ruta de desarrollo: no la crea</a:t>
+              <a:t>Ruta de desarrollo: no abre expectativa de crecimiento posterior</a:t>
             </a:r>
             <a:endParaRPr lang="en-US" sz="950" dirty="0"/>
           </a:p>
@@ -4085,7 +4085,7 @@
                 <a:ea typeface="Calibri" pitchFamily="34" charset="-122"/>
                 <a:cs typeface="Calibri" pitchFamily="34" charset="-120"/>
               </a:rPr>
-              <a:t>Reconoce la diferencia de complejidad entre reportes: sí</a:t>
+              <a:t>Reconoce la diferencia de complejidad entre reportes</a:t>
             </a:r>
             <a:endParaRPr lang="en-US" sz="950" dirty="0"/>
           </a:p>
@@ -4106,7 +4106,7 @@
                 <a:ea typeface="Calibri" pitchFamily="34" charset="-122"/>
                 <a:cs typeface="Calibri" pitchFamily="34" charset="-120"/>
               </a:rPr>
-              <a:t>Separa quien prepara de quien valida: sí</a:t>
+              <a:t>Separa quien prepara de quien valida y firma</a:t>
             </a:r>
             <a:endParaRPr lang="en-US" sz="950" dirty="0"/>
           </a:p>
@@ -4169,7 +4169,7 @@
                 <a:ea typeface="Calibri" pitchFamily="34" charset="-122"/>
                 <a:cs typeface="Calibri" pitchFamily="34" charset="-120"/>
               </a:rPr>
-              <a:t>Ruta de desarrollo: pleno a senior</a:t>
+              <a:t>Ruta de desarrollo: de pleno a senior</a:t>
             </a:r>
             <a:endParaRPr lang="en-US" sz="950" dirty="0"/>
           </a:p>
@@ -10090,7 +10090,7 @@
                 <a:ea typeface="Calibri" pitchFamily="34" charset="-122"/>
                 <a:cs typeface="Calibri" pitchFamily="34" charset="-120"/>
               </a:rPr>
-              <a:t>Lo que proponemos hoy son tres pasos, ninguno con monto</a:t>
+              <a:t>Lo que proponemos hoy son tres pasos</a:t>
             </a:r>
             <a:endParaRPr lang="en-US" sz="2600" dirty="0"/>
           </a:p>
@@ -17347,7 +17347,7 @@
                 <a:ea typeface="Cambria" pitchFamily="34" charset="-122"/>
                 <a:cs typeface="Cambria" pitchFamily="34" charset="-120"/>
               </a:rPr>
-              <a:t>El trabajo cambió, la escala no: de Contabilidad de Entrada a Especialista Normativo</a:t>
+              <a:t>El trabajo cambió, la escala no: de Portabilidad de Entrada a Especialista Normativo</a:t>
             </a:r>
             <a:endParaRPr lang="en-US" sz="1700" dirty="0"/>
           </a:p>
@@ -17436,7 +17436,7 @@
                 <a:ea typeface="Cambria" pitchFamily="34" charset="-122"/>
                 <a:cs typeface="Cambria" pitchFamily="34" charset="-120"/>
               </a:rPr>
-              <a:t>Analista de Contabilidad de Entrada (Portabilidad Financiera)</a:t>
+              <a:t>Analista de Portabilidad de Entrada</a:t>
             </a:r>
             <a:endParaRPr lang="en-US" sz="750" dirty="0"/>
           </a:p>

--- a/docs/benchmarking/presentacion-reportes-normativos-v3.pptx
+++ b/docs/benchmarking/presentacion-reportes-normativos-v3.pptx
@@ -603,7 +603,7 @@
           <a:p>
             <a:r>
               <a:rPr lang="en-US" dirty="0"/>
-              <a:t>Presentar las dos alternativas con neutralidad y dejar que el comité pregunte. La alternativa 1 es simple y equitativa y reconoce a todo el equipo; la alternativa 2 además diferencia responsabilidades y crea una ruta de desarrollo. La alternativa 2 alinea grado con complejidad y crea la cadena de confiabilidad, a cambio de definir criterios de selección transparentes. Una combinación es posible: alternativa 2 ahora y revisión de los plenos con la evaluación.</a:t>
+              <a:t>Presentar las alternativas con neutralidad y dejar que el comité pregunte. La 1 es simple y equitativa y reconoce a todo el equipo; la 2 diferencia responsabilidades, alinea grado con complejidad y crea una ruta de desarrollo, a cambio de definir criterios de selección transparentes. Son combinables: la 2 ahora y revisión de los plenos con la evaluación.</a:t>
             </a:r>
             <a:endParaRPr lang="en-US" dirty="0"/>
           </a:p>
@@ -1571,7 +1571,7 @@
           <a:p>
             <a:r>
               <a:rPr lang="en-US" dirty="0"/>
-              <a:t>La estructura de hoy no distingue entre quien administra RDC40 y quien administra un archivo estadístico de tarjetas: mismo cargo, mismo grado. La propuesta crea dos posiciones senior, una normativa y una de datos y automatización, que asumen los bloques críticos y la validación, y deja cuatro plenos con una ruta de desarrollo. Objeción: "esto es crear jefaturas". Respuesta: no cambia la línea de mando; formaliza roles que ya se ejercen de hecho.</a:t>
+              <a:t>Mantener cualitativo. Si piden cifras: existen rangos públicos para cargos contables genéricos (Robert Half, Buk) que el área puede compartir por separado; el diagnóstico los validará con una encuesta formal.</a:t>
             </a:r>
             <a:endParaRPr lang="en-US" dirty="0"/>
           </a:p>
@@ -1659,7 +1659,7 @@
           <a:p>
             <a:r>
               <a:rPr lang="en-US" dirty="0"/>
-              <a:t>Mantener cualitativo. Si piden cifras: existen rangos públicos para cargos contables genéricos (Robert Half, Buk) que el área puede compartir por separado; el diagnóstico los validará con una encuesta formal.</a:t>
+              <a:t>Leer de izquierda a derecha: hoy, seis cargos con el mismo grado administran reportes de complejidad muy distinta. Los dos caminos parten del mismo diagnóstico. El primero reconoce a todo el equipo y mantiene la estructura; el segundo diferencia roles y crea una ruta de desarrollo. La lámina siguiente los compara criterio a criterio.</a:t>
             </a:r>
             <a:endParaRPr lang="en-US" dirty="0"/>
           </a:p>
@@ -2563,7 +2563,7 @@
                 <a:ea typeface="Calibri" pitchFamily="34" charset="-122"/>
                 <a:cs typeface="Calibri" pitchFamily="34" charset="-120"/>
               </a:rPr>
-              <a:t>Dos alternativas para alinear la escala con el trabajo; ambas sin monto en esta etapa</a:t>
+              <a:t>Las dos alternativas, criterio a criterio; ambas sin monto en esta etapa</a:t>
             </a:r>
             <a:endParaRPr lang="en-US" sz="2600" dirty="0"/>
           </a:p>
@@ -2571,24 +2571,100 @@
       </p:sp>
       <p:sp>
         <p:nvSpPr>
-          <p:cNvPr id="9" name="Shape 7"/>
+          <p:cNvPr id="9" name="Text 7"/>
+          <p:cNvSpPr txBox="1"/>
+          <p:nvPr/>
+        </p:nvSpPr>
+        <p:spPr>
+          <a:xfrm>
+            <a:off x="2651760" y="1645920"/>
+            <a:ext cx="4343400" cy="274320"/>
+          </a:xfrm>
+          <a:prstGeom prst="rect">
+            <a:avLst/>
+          </a:prstGeom>
+          <a:noFill/>
+          <a:ln/>
+        </p:spPr>
+        <p:txBody>
+          <a:bodyPr wrap="square" lIns="0" tIns="0" rIns="0" bIns="0" rtlCol="0" anchor="ctr"/>
+          <a:lstStyle/>
+          <a:p>
+            <a:pPr indent="0" marL="0">
+              <a:buNone/>
+            </a:pPr>
+            <a:r>
+              <a:rPr lang="en-US" sz="900" b="1" spc="200" kern="0" dirty="0">
+                <a:solidFill>
+                  <a:srgbClr val="4A6FA5"/>
+                </a:solidFill>
+                <a:latin typeface="Calibri" pitchFamily="34" charset="0"/>
+                <a:ea typeface="Calibri" pitchFamily="34" charset="-122"/>
+                <a:cs typeface="Calibri" pitchFamily="34" charset="-120"/>
+              </a:rPr>
+              <a:t>ALTERNATIVA 1 · UN GRADO MÁS PARA TODOS</a:t>
+            </a:r>
+            <a:endParaRPr lang="en-US" sz="900" dirty="0"/>
+          </a:p>
+        </p:txBody>
+      </p:sp>
+      <p:sp>
+        <p:nvSpPr>
+          <p:cNvPr id="10" name="Text 8"/>
+          <p:cNvSpPr txBox="1"/>
+          <p:nvPr/>
+        </p:nvSpPr>
+        <p:spPr>
+          <a:xfrm>
+            <a:off x="7178040" y="1645920"/>
+            <a:ext cx="4343400" cy="274320"/>
+          </a:xfrm>
+          <a:prstGeom prst="rect">
+            <a:avLst/>
+          </a:prstGeom>
+          <a:noFill/>
+          <a:ln/>
+        </p:spPr>
+        <p:txBody>
+          <a:bodyPr wrap="square" lIns="0" tIns="0" rIns="0" bIns="0" rtlCol="0" anchor="ctr"/>
+          <a:lstStyle/>
+          <a:p>
+            <a:pPr indent="0" marL="0">
+              <a:buNone/>
+            </a:pPr>
+            <a:r>
+              <a:rPr lang="en-US" sz="900" b="1" spc="200" kern="0" dirty="0">
+                <a:solidFill>
+                  <a:srgbClr val="4A6FA5"/>
+                </a:solidFill>
+                <a:latin typeface="Calibri" pitchFamily="34" charset="0"/>
+                <a:ea typeface="Calibri" pitchFamily="34" charset="-122"/>
+                <a:cs typeface="Calibri" pitchFamily="34" charset="-120"/>
+              </a:rPr>
+              <a:t>ALTERNATIVA 2 · DOS CARGOS SENIOR</a:t>
+            </a:r>
+            <a:endParaRPr lang="en-US" sz="900" dirty="0"/>
+          </a:p>
+        </p:txBody>
+      </p:sp>
+      <p:sp>
+        <p:nvSpPr>
+          <p:cNvPr id="11" name="Shape 9"/>
           <p:cNvSpPr/>
           <p:nvPr/>
         </p:nvSpPr>
         <p:spPr>
           <a:xfrm>
-            <a:off x="548640" y="1920240"/>
-            <a:ext cx="5440680" cy="4434840"/>
-          </a:xfrm>
-          <a:prstGeom prst="roundRect">
-            <a:avLst>
-              <a:gd name="adj" fmla="val 1237"/>
-            </a:avLst>
+            <a:off x="548640" y="1965960"/>
+            <a:ext cx="11091672" cy="457200"/>
+          </a:xfrm>
+          <a:prstGeom prst="rect">
+            <a:avLst/>
           </a:prstGeom>
           <a:solidFill>
             <a:srgbClr val="F6F7F9"/>
           </a:solidFill>
-          <a:ln w="9525">
+          <a:ln w="12700">
             <a:solidFill>
               <a:srgbClr val="F6F7F9"/>
             </a:solidFill>
@@ -2598,14 +2674,14 @@
       </p:sp>
       <p:sp>
         <p:nvSpPr>
-          <p:cNvPr id="10" name="Text 8"/>
-          <p:cNvSpPr txBox="1"/>
-          <p:nvPr/>
-        </p:nvSpPr>
-        <p:spPr>
-          <a:xfrm>
-            <a:off x="822960" y="2057400"/>
-            <a:ext cx="1828800" cy="228600"/>
+          <p:cNvPr id="12" name="Text 10"/>
+          <p:cNvSpPr txBox="1"/>
+          <p:nvPr/>
+        </p:nvSpPr>
+        <p:spPr>
+          <a:xfrm>
+            <a:off x="658368" y="1965960"/>
+            <a:ext cx="1810512" cy="457200"/>
           </a:xfrm>
           <a:prstGeom prst="rect">
             <a:avLst/>
@@ -2621,30 +2697,30 @@
               <a:buNone/>
             </a:pPr>
             <a:r>
-              <a:rPr lang="en-US" sz="850" b="1" spc="200" kern="0" dirty="0">
-                <a:solidFill>
-                  <a:srgbClr val="6A9B6E"/>
-                </a:solidFill>
-                <a:latin typeface="Calibri" pitchFamily="34" charset="0"/>
-                <a:ea typeface="Calibri" pitchFamily="34" charset="-122"/>
-                <a:cs typeface="Calibri" pitchFamily="34" charset="-120"/>
-              </a:rPr>
-              <a:t>ALTERNATIVA 1</a:t>
-            </a:r>
-            <a:endParaRPr lang="en-US" sz="850" dirty="0"/>
-          </a:p>
-        </p:txBody>
-      </p:sp>
-      <p:sp>
-        <p:nvSpPr>
-          <p:cNvPr id="11" name="Text 9"/>
-          <p:cNvSpPr txBox="1"/>
-          <p:nvPr/>
-        </p:nvSpPr>
-        <p:spPr>
-          <a:xfrm>
-            <a:off x="822960" y="2286000"/>
-            <a:ext cx="4892040" cy="411480"/>
+              <a:rPr lang="en-US" sz="1050" b="1" dirty="0">
+                <a:solidFill>
+                  <a:srgbClr val="2B2F36"/>
+                </a:solidFill>
+                <a:latin typeface="Calibri" pitchFamily="34" charset="0"/>
+                <a:ea typeface="Calibri" pitchFamily="34" charset="-122"/>
+                <a:cs typeface="Calibri" pitchFamily="34" charset="-120"/>
+              </a:rPr>
+              <a:t>Qué reconoce</a:t>
+            </a:r>
+            <a:endParaRPr lang="en-US" sz="1050" dirty="0"/>
+          </a:p>
+        </p:txBody>
+      </p:sp>
+      <p:sp>
+        <p:nvSpPr>
+          <p:cNvPr id="13" name="Text 11"/>
+          <p:cNvSpPr txBox="1"/>
+          <p:nvPr/>
+        </p:nvSpPr>
+        <p:spPr>
+          <a:xfrm>
+            <a:off x="2651760" y="1965960"/>
+            <a:ext cx="4160520" cy="457200"/>
           </a:xfrm>
           <a:prstGeom prst="rect">
             <a:avLst/>
@@ -2660,7 +2736,85 @@
               <a:buNone/>
             </a:pPr>
             <a:r>
-              <a:rPr lang="en-US" sz="1700" b="1" dirty="0">
+              <a:rPr lang="en-US" sz="1050" dirty="0">
+                <a:solidFill>
+                  <a:srgbClr val="5B6470"/>
+                </a:solidFill>
+                <a:latin typeface="Calibri" pitchFamily="34" charset="0"/>
+                <a:ea typeface="Calibri" pitchFamily="34" charset="-122"/>
+                <a:cs typeface="Calibri" pitchFamily="34" charset="-120"/>
+              </a:rPr>
+              <a:t>Las competencias adquiridas con el cambio de tareas, en los seis cargos</a:t>
+            </a:r>
+            <a:endParaRPr lang="en-US" sz="1050" dirty="0"/>
+          </a:p>
+        </p:txBody>
+      </p:sp>
+      <p:sp>
+        <p:nvSpPr>
+          <p:cNvPr id="14" name="Text 12"/>
+          <p:cNvSpPr txBox="1"/>
+          <p:nvPr/>
+        </p:nvSpPr>
+        <p:spPr>
+          <a:xfrm>
+            <a:off x="7178040" y="1965960"/>
+            <a:ext cx="4160520" cy="457200"/>
+          </a:xfrm>
+          <a:prstGeom prst="rect">
+            <a:avLst/>
+          </a:prstGeom>
+          <a:noFill/>
+          <a:ln/>
+        </p:spPr>
+        <p:txBody>
+          <a:bodyPr wrap="square" lIns="0" tIns="0" rIns="0" bIns="0" rtlCol="0" anchor="ctr"/>
+          <a:lstStyle/>
+          <a:p>
+            <a:pPr indent="0" marL="0">
+              <a:buNone/>
+            </a:pPr>
+            <a:r>
+              <a:rPr lang="en-US" sz="1050" dirty="0">
+                <a:solidFill>
+                  <a:srgbClr val="5B6470"/>
+                </a:solidFill>
+                <a:latin typeface="Calibri" pitchFamily="34" charset="0"/>
+                <a:ea typeface="Calibri" pitchFamily="34" charset="-122"/>
+                <a:cs typeface="Calibri" pitchFamily="34" charset="-120"/>
+              </a:rPr>
+              <a:t>Las competencias adquiridas y, además, la diferencia de complejidad entre reportes</a:t>
+            </a:r>
+            <a:endParaRPr lang="en-US" sz="1050" dirty="0"/>
+          </a:p>
+        </p:txBody>
+      </p:sp>
+      <p:sp>
+        <p:nvSpPr>
+          <p:cNvPr id="15" name="Text 13"/>
+          <p:cNvSpPr txBox="1"/>
+          <p:nvPr/>
+        </p:nvSpPr>
+        <p:spPr>
+          <a:xfrm>
+            <a:off x="658368" y="2423160"/>
+            <a:ext cx="1810512" cy="457200"/>
+          </a:xfrm>
+          <a:prstGeom prst="rect">
+            <a:avLst/>
+          </a:prstGeom>
+          <a:noFill/>
+          <a:ln/>
+        </p:spPr>
+        <p:txBody>
+          <a:bodyPr wrap="square" lIns="0" tIns="0" rIns="0" bIns="0" rtlCol="0" anchor="ctr"/>
+          <a:lstStyle/>
+          <a:p>
+            <a:pPr indent="0" marL="0">
+              <a:buNone/>
+            </a:pPr>
+            <a:r>
+              <a:rPr lang="en-US" sz="1050" b="1" dirty="0">
                 <a:solidFill>
                   <a:srgbClr val="2B2F36"/>
                 </a:solidFill>
@@ -2668,31 +2822,31 @@
                 <a:ea typeface="Calibri" pitchFamily="34" charset="-122"/>
                 <a:cs typeface="Calibri" pitchFamily="34" charset="-120"/>
               </a:rPr>
-              <a:t>Subir un grado a todo el equipo</a:t>
-            </a:r>
-            <a:endParaRPr lang="en-US" sz="1700" dirty="0"/>
-          </a:p>
-        </p:txBody>
-      </p:sp>
-      <p:sp>
-        <p:nvSpPr>
-          <p:cNvPr id="12" name="Text 10"/>
-          <p:cNvSpPr txBox="1"/>
-          <p:nvPr/>
-        </p:nvSpPr>
-        <p:spPr>
-          <a:xfrm>
-            <a:off x="822960" y="2724912"/>
-            <a:ext cx="4892040" cy="685800"/>
-          </a:xfrm>
-          <a:prstGeom prst="rect">
-            <a:avLst/>
-          </a:prstGeom>
-          <a:noFill/>
-          <a:ln/>
-        </p:spPr>
-        <p:txBody>
-          <a:bodyPr wrap="square" lIns="0" tIns="0" rIns="0" bIns="0" rtlCol="0" anchor="t"/>
+              <a:t>Remuneración</a:t>
+            </a:r>
+            <a:endParaRPr lang="en-US" sz="1050" dirty="0"/>
+          </a:p>
+        </p:txBody>
+      </p:sp>
+      <p:sp>
+        <p:nvSpPr>
+          <p:cNvPr id="16" name="Text 14"/>
+          <p:cNvSpPr txBox="1"/>
+          <p:nvPr/>
+        </p:nvSpPr>
+        <p:spPr>
+          <a:xfrm>
+            <a:off x="2651760" y="2423160"/>
+            <a:ext cx="4160520" cy="457200"/>
+          </a:xfrm>
+          <a:prstGeom prst="rect">
+            <a:avLst/>
+          </a:prstGeom>
+          <a:noFill/>
+          <a:ln/>
+        </p:spPr>
+        <p:txBody>
+          <a:bodyPr wrap="square" lIns="0" tIns="0" rIns="0" bIns="0" rtlCol="0" anchor="ctr"/>
           <a:lstStyle/>
           <a:p>
             <a:pPr indent="0" marL="0">
@@ -2707,7 +2861,7 @@
                 <a:ea typeface="Calibri" pitchFamily="34" charset="-122"/>
                 <a:cs typeface="Calibri" pitchFamily="34" charset="-120"/>
               </a:rPr>
-              <a:t>Los seis especialistas normativos pasan al grado siguiente. Reconoce el cambio del trabajo para todo el equipo y conserva el esquema actual de respaldo mutuo.</a:t>
+              <a:t>Se alinea con las expectativas del mercado para todo el equipo</a:t>
             </a:r>
             <a:endParaRPr lang="en-US" sz="1050" dirty="0"/>
           </a:p>
@@ -2715,152 +2869,42 @@
       </p:sp>
       <p:sp>
         <p:nvSpPr>
-          <p:cNvPr id="13" name="Shape 11"/>
-          <p:cNvSpPr/>
-          <p:nvPr/>
-        </p:nvSpPr>
-        <p:spPr>
-          <a:xfrm>
-            <a:off x="822960" y="4480560"/>
-            <a:ext cx="4892040" cy="0"/>
-          </a:xfrm>
-          <a:prstGeom prst="line">
-            <a:avLst/>
-          </a:prstGeom>
-          <a:noFill/>
-          <a:ln w="12700">
-            <a:solidFill>
-              <a:srgbClr val="E3E6EA"/>
-            </a:solidFill>
-            <a:prstDash val="solid"/>
-          </a:ln>
-        </p:spPr>
-      </p:sp>
-      <p:sp>
-        <p:nvSpPr>
-          <p:cNvPr id="14" name="Shape 12"/>
-          <p:cNvSpPr/>
-          <p:nvPr/>
-        </p:nvSpPr>
-        <p:spPr>
-          <a:xfrm>
-            <a:off x="822960" y="3840480"/>
-            <a:ext cx="4892040" cy="0"/>
-          </a:xfrm>
-          <a:prstGeom prst="line">
-            <a:avLst/>
-          </a:prstGeom>
-          <a:noFill/>
-          <a:ln w="12700">
-            <a:solidFill>
-              <a:srgbClr val="E3E6EA"/>
-            </a:solidFill>
-            <a:prstDash val="solid"/>
-          </a:ln>
-        </p:spPr>
-      </p:sp>
-      <p:sp>
-        <p:nvSpPr>
-          <p:cNvPr id="15" name="Text 13"/>
-          <p:cNvSpPr txBox="1"/>
-          <p:nvPr/>
-        </p:nvSpPr>
-        <p:spPr>
-          <a:xfrm>
-            <a:off x="4937760" y="3611880"/>
-            <a:ext cx="777240" cy="201168"/>
-          </a:xfrm>
-          <a:prstGeom prst="rect">
-            <a:avLst/>
-          </a:prstGeom>
-          <a:noFill/>
-          <a:ln/>
-        </p:spPr>
-        <p:txBody>
-          <a:bodyPr wrap="square" lIns="0" tIns="0" rIns="0" bIns="0" rtlCol="0" anchor="ctr"/>
-          <a:lstStyle/>
-          <a:p>
-            <a:pPr algn="r" indent="0" marL="0">
-              <a:buNone/>
-            </a:pPr>
-            <a:r>
-              <a:rPr lang="en-US" sz="800" dirty="0">
-                <a:solidFill>
-                  <a:srgbClr val="8A94A0"/>
-                </a:solidFill>
-                <a:latin typeface="Calibri" pitchFamily="34" charset="0"/>
-                <a:ea typeface="Calibri" pitchFamily="34" charset="-122"/>
-                <a:cs typeface="Calibri" pitchFamily="34" charset="-120"/>
-              </a:rPr>
-              <a:t>Grado +1</a:t>
-            </a:r>
-            <a:endParaRPr lang="en-US" sz="800" dirty="0"/>
-          </a:p>
-        </p:txBody>
-      </p:sp>
-      <p:sp>
-        <p:nvSpPr>
-          <p:cNvPr id="16" name="Text 14"/>
-          <p:cNvSpPr txBox="1"/>
-          <p:nvPr/>
-        </p:nvSpPr>
-        <p:spPr>
-          <a:xfrm>
-            <a:off x="4937760" y="4251960"/>
-            <a:ext cx="777240" cy="201168"/>
-          </a:xfrm>
-          <a:prstGeom prst="rect">
-            <a:avLst/>
-          </a:prstGeom>
-          <a:noFill/>
-          <a:ln/>
-        </p:spPr>
-        <p:txBody>
-          <a:bodyPr wrap="square" lIns="0" tIns="0" rIns="0" bIns="0" rtlCol="0" anchor="ctr"/>
-          <a:lstStyle/>
-          <a:p>
-            <a:pPr algn="r" indent="0" marL="0">
-              <a:buNone/>
-            </a:pPr>
-            <a:r>
-              <a:rPr lang="en-US" sz="800" dirty="0">
-                <a:solidFill>
-                  <a:srgbClr val="8A94A0"/>
-                </a:solidFill>
-                <a:latin typeface="Calibri" pitchFamily="34" charset="0"/>
-                <a:ea typeface="Calibri" pitchFamily="34" charset="-122"/>
-                <a:cs typeface="Calibri" pitchFamily="34" charset="-120"/>
-              </a:rPr>
-              <a:t>Grado actual</a:t>
-            </a:r>
-            <a:endParaRPr lang="en-US" sz="800" dirty="0"/>
-          </a:p>
-        </p:txBody>
-      </p:sp>
-      <p:sp>
-        <p:nvSpPr>
-          <p:cNvPr id="17" name="Shape 15"/>
-          <p:cNvSpPr/>
-          <p:nvPr/>
-        </p:nvSpPr>
-        <p:spPr>
-          <a:xfrm>
-            <a:off x="992124" y="3904488"/>
-            <a:ext cx="155448" cy="155448"/>
-          </a:xfrm>
-          <a:prstGeom prst="ellipse">
-            <a:avLst/>
-          </a:prstGeom>
-          <a:solidFill>
-            <a:srgbClr val="4A6FA5"/>
-          </a:solidFill>
-          <a:ln w="12700">
-            <a:solidFill>
-              <a:srgbClr val="4A6FA5"/>
-            </a:solidFill>
-            <a:prstDash val="solid"/>
-          </a:ln>
-        </p:spPr>
+          <p:cNvPr id="17" name="Text 15"/>
+          <p:cNvSpPr txBox="1"/>
+          <p:nvPr/>
+        </p:nvSpPr>
+        <p:spPr>
+          <a:xfrm>
+            <a:off x="7178040" y="2423160"/>
+            <a:ext cx="4160520" cy="457200"/>
+          </a:xfrm>
+          <a:prstGeom prst="rect">
+            <a:avLst/>
+          </a:prstGeom>
+          <a:noFill/>
+          <a:ln/>
+        </p:spPr>
+        <p:txBody>
+          <a:bodyPr wrap="square" lIns="0" tIns="0" rIns="0" bIns="0" rtlCol="0" anchor="ctr"/>
+          <a:lstStyle/>
+          <a:p>
+            <a:pPr indent="0" marL="0">
+              <a:buNone/>
+            </a:pPr>
+            <a:r>
+              <a:rPr lang="en-US" sz="1050" dirty="0">
+                <a:solidFill>
+                  <a:srgbClr val="5B6470"/>
+                </a:solidFill>
+                <a:latin typeface="Calibri" pitchFamily="34" charset="0"/>
+                <a:ea typeface="Calibri" pitchFamily="34" charset="-122"/>
+                <a:cs typeface="Calibri" pitchFamily="34" charset="-120"/>
+              </a:rPr>
+              <a:t>Se alinea en los dos cargos que asumen los bloques críticos</a:t>
+            </a:r>
+            <a:endParaRPr lang="en-US" sz="1050" dirty="0"/>
+          </a:p>
+        </p:txBody>
       </p:sp>
       <p:sp>
         <p:nvSpPr>
@@ -2870,576 +2914,16 @@
         </p:nvSpPr>
         <p:spPr>
           <a:xfrm>
-            <a:off x="914400" y="4075481"/>
-            <a:ext cx="310896" cy="286207"/>
-          </a:xfrm>
-          <a:prstGeom prst="roundRect">
-            <a:avLst>
-              <a:gd name="adj" fmla="val 19169"/>
-            </a:avLst>
-          </a:prstGeom>
-          <a:solidFill>
-            <a:srgbClr val="4A6FA5"/>
-          </a:solidFill>
-          <a:ln w="12700">
-            <a:solidFill>
-              <a:srgbClr val="4A6FA5"/>
-            </a:solidFill>
-            <a:prstDash val="solid"/>
-          </a:ln>
-        </p:spPr>
-      </p:sp>
-      <p:sp>
-        <p:nvSpPr>
-          <p:cNvPr id="19" name="Shape 17"/>
-          <p:cNvSpPr/>
-          <p:nvPr/>
-        </p:nvSpPr>
-        <p:spPr>
-          <a:xfrm>
-            <a:off x="1069848" y="4416552"/>
-            <a:ext cx="0" cy="137160"/>
-          </a:xfrm>
-          <a:prstGeom prst="line">
-            <a:avLst/>
-          </a:prstGeom>
-          <a:noFill/>
-          <a:ln w="19050">
-            <a:solidFill>
-              <a:srgbClr val="A9BEDC"/>
-            </a:solidFill>
-            <a:prstDash val="solid"/>
-            <a:tailEnd type="none"/>
-          </a:ln>
-        </p:spPr>
-      </p:sp>
-      <p:sp>
-        <p:nvSpPr>
-          <p:cNvPr id="20" name="Shape 18"/>
-          <p:cNvSpPr/>
-          <p:nvPr/>
-        </p:nvSpPr>
-        <p:spPr>
-          <a:xfrm>
-            <a:off x="1495044" y="3904488"/>
-            <a:ext cx="155448" cy="155448"/>
-          </a:xfrm>
-          <a:prstGeom prst="ellipse">
-            <a:avLst/>
-          </a:prstGeom>
-          <a:solidFill>
-            <a:srgbClr val="4A6FA5"/>
-          </a:solidFill>
-          <a:ln w="12700">
-            <a:solidFill>
-              <a:srgbClr val="4A6FA5"/>
-            </a:solidFill>
-            <a:prstDash val="solid"/>
-          </a:ln>
-        </p:spPr>
-      </p:sp>
-      <p:sp>
-        <p:nvSpPr>
-          <p:cNvPr id="21" name="Shape 19"/>
-          <p:cNvSpPr/>
-          <p:nvPr/>
-        </p:nvSpPr>
-        <p:spPr>
-          <a:xfrm>
-            <a:off x="1417320" y="4075481"/>
-            <a:ext cx="310896" cy="286207"/>
-          </a:xfrm>
-          <a:prstGeom prst="roundRect">
-            <a:avLst>
-              <a:gd name="adj" fmla="val 19169"/>
-            </a:avLst>
-          </a:prstGeom>
-          <a:solidFill>
-            <a:srgbClr val="4A6FA5"/>
-          </a:solidFill>
-          <a:ln w="12700">
-            <a:solidFill>
-              <a:srgbClr val="4A6FA5"/>
-            </a:solidFill>
-            <a:prstDash val="solid"/>
-          </a:ln>
-        </p:spPr>
-      </p:sp>
-      <p:sp>
-        <p:nvSpPr>
-          <p:cNvPr id="22" name="Shape 20"/>
-          <p:cNvSpPr/>
-          <p:nvPr/>
-        </p:nvSpPr>
-        <p:spPr>
-          <a:xfrm>
-            <a:off x="1572768" y="4416552"/>
-            <a:ext cx="0" cy="137160"/>
-          </a:xfrm>
-          <a:prstGeom prst="line">
-            <a:avLst/>
-          </a:prstGeom>
-          <a:noFill/>
-          <a:ln w="19050">
-            <a:solidFill>
-              <a:srgbClr val="A9BEDC"/>
-            </a:solidFill>
-            <a:prstDash val="solid"/>
-            <a:tailEnd type="none"/>
-          </a:ln>
-        </p:spPr>
-      </p:sp>
-      <p:sp>
-        <p:nvSpPr>
-          <p:cNvPr id="23" name="Shape 21"/>
-          <p:cNvSpPr/>
-          <p:nvPr/>
-        </p:nvSpPr>
-        <p:spPr>
-          <a:xfrm>
-            <a:off x="1997964" y="3904488"/>
-            <a:ext cx="155448" cy="155448"/>
-          </a:xfrm>
-          <a:prstGeom prst="ellipse">
-            <a:avLst/>
-          </a:prstGeom>
-          <a:solidFill>
-            <a:srgbClr val="4A6FA5"/>
-          </a:solidFill>
-          <a:ln w="12700">
-            <a:solidFill>
-              <a:srgbClr val="4A6FA5"/>
-            </a:solidFill>
-            <a:prstDash val="solid"/>
-          </a:ln>
-        </p:spPr>
-      </p:sp>
-      <p:sp>
-        <p:nvSpPr>
-          <p:cNvPr id="24" name="Shape 22"/>
-          <p:cNvSpPr/>
-          <p:nvPr/>
-        </p:nvSpPr>
-        <p:spPr>
-          <a:xfrm>
-            <a:off x="1920240" y="4075481"/>
-            <a:ext cx="310896" cy="286207"/>
-          </a:xfrm>
-          <a:prstGeom prst="roundRect">
-            <a:avLst>
-              <a:gd name="adj" fmla="val 19169"/>
-            </a:avLst>
-          </a:prstGeom>
-          <a:solidFill>
-            <a:srgbClr val="4A6FA5"/>
-          </a:solidFill>
-          <a:ln w="12700">
-            <a:solidFill>
-              <a:srgbClr val="4A6FA5"/>
-            </a:solidFill>
-            <a:prstDash val="solid"/>
-          </a:ln>
-        </p:spPr>
-      </p:sp>
-      <p:sp>
-        <p:nvSpPr>
-          <p:cNvPr id="25" name="Shape 23"/>
-          <p:cNvSpPr/>
-          <p:nvPr/>
-        </p:nvSpPr>
-        <p:spPr>
-          <a:xfrm>
-            <a:off x="2075688" y="4416552"/>
-            <a:ext cx="0" cy="137160"/>
-          </a:xfrm>
-          <a:prstGeom prst="line">
-            <a:avLst/>
-          </a:prstGeom>
-          <a:noFill/>
-          <a:ln w="19050">
-            <a:solidFill>
-              <a:srgbClr val="A9BEDC"/>
-            </a:solidFill>
-            <a:prstDash val="solid"/>
-            <a:tailEnd type="none"/>
-          </a:ln>
-        </p:spPr>
-      </p:sp>
-      <p:sp>
-        <p:nvSpPr>
-          <p:cNvPr id="26" name="Shape 24"/>
-          <p:cNvSpPr/>
-          <p:nvPr/>
-        </p:nvSpPr>
-        <p:spPr>
-          <a:xfrm>
-            <a:off x="2500884" y="3904488"/>
-            <a:ext cx="155448" cy="155448"/>
-          </a:xfrm>
-          <a:prstGeom prst="ellipse">
-            <a:avLst/>
-          </a:prstGeom>
-          <a:solidFill>
-            <a:srgbClr val="4A6FA5"/>
-          </a:solidFill>
-          <a:ln w="12700">
-            <a:solidFill>
-              <a:srgbClr val="4A6FA5"/>
-            </a:solidFill>
-            <a:prstDash val="solid"/>
-          </a:ln>
-        </p:spPr>
-      </p:sp>
-      <p:sp>
-        <p:nvSpPr>
-          <p:cNvPr id="27" name="Shape 25"/>
-          <p:cNvSpPr/>
-          <p:nvPr/>
-        </p:nvSpPr>
-        <p:spPr>
-          <a:xfrm>
-            <a:off x="2423160" y="4075481"/>
-            <a:ext cx="310896" cy="286207"/>
-          </a:xfrm>
-          <a:prstGeom prst="roundRect">
-            <a:avLst>
-              <a:gd name="adj" fmla="val 19169"/>
-            </a:avLst>
-          </a:prstGeom>
-          <a:solidFill>
-            <a:srgbClr val="4A6FA5"/>
-          </a:solidFill>
-          <a:ln w="12700">
-            <a:solidFill>
-              <a:srgbClr val="4A6FA5"/>
-            </a:solidFill>
-            <a:prstDash val="solid"/>
-          </a:ln>
-        </p:spPr>
-      </p:sp>
-      <p:sp>
-        <p:nvSpPr>
-          <p:cNvPr id="28" name="Shape 26"/>
-          <p:cNvSpPr/>
-          <p:nvPr/>
-        </p:nvSpPr>
-        <p:spPr>
-          <a:xfrm>
-            <a:off x="2578608" y="4416552"/>
-            <a:ext cx="0" cy="137160"/>
-          </a:xfrm>
-          <a:prstGeom prst="line">
-            <a:avLst/>
-          </a:prstGeom>
-          <a:noFill/>
-          <a:ln w="19050">
-            <a:solidFill>
-              <a:srgbClr val="A9BEDC"/>
-            </a:solidFill>
-            <a:prstDash val="solid"/>
-            <a:tailEnd type="none"/>
-          </a:ln>
-        </p:spPr>
-      </p:sp>
-      <p:sp>
-        <p:nvSpPr>
-          <p:cNvPr id="29" name="Shape 27"/>
-          <p:cNvSpPr/>
-          <p:nvPr/>
-        </p:nvSpPr>
-        <p:spPr>
-          <a:xfrm>
-            <a:off x="3003804" y="3904488"/>
-            <a:ext cx="155448" cy="155448"/>
-          </a:xfrm>
-          <a:prstGeom prst="ellipse">
-            <a:avLst/>
-          </a:prstGeom>
-          <a:solidFill>
-            <a:srgbClr val="4A6FA5"/>
-          </a:solidFill>
-          <a:ln w="12700">
-            <a:solidFill>
-              <a:srgbClr val="4A6FA5"/>
-            </a:solidFill>
-            <a:prstDash val="solid"/>
-          </a:ln>
-        </p:spPr>
-      </p:sp>
-      <p:sp>
-        <p:nvSpPr>
-          <p:cNvPr id="30" name="Shape 28"/>
-          <p:cNvSpPr/>
-          <p:nvPr/>
-        </p:nvSpPr>
-        <p:spPr>
-          <a:xfrm>
-            <a:off x="2926080" y="4075481"/>
-            <a:ext cx="310896" cy="286207"/>
-          </a:xfrm>
-          <a:prstGeom prst="roundRect">
-            <a:avLst>
-              <a:gd name="adj" fmla="val 19169"/>
-            </a:avLst>
-          </a:prstGeom>
-          <a:solidFill>
-            <a:srgbClr val="4A6FA5"/>
-          </a:solidFill>
-          <a:ln w="12700">
-            <a:solidFill>
-              <a:srgbClr val="4A6FA5"/>
-            </a:solidFill>
-            <a:prstDash val="solid"/>
-          </a:ln>
-        </p:spPr>
-      </p:sp>
-      <p:sp>
-        <p:nvSpPr>
-          <p:cNvPr id="31" name="Shape 29"/>
-          <p:cNvSpPr/>
-          <p:nvPr/>
-        </p:nvSpPr>
-        <p:spPr>
-          <a:xfrm>
-            <a:off x="3081528" y="4416552"/>
-            <a:ext cx="0" cy="137160"/>
-          </a:xfrm>
-          <a:prstGeom prst="line">
-            <a:avLst/>
-          </a:prstGeom>
-          <a:noFill/>
-          <a:ln w="19050">
-            <a:solidFill>
-              <a:srgbClr val="A9BEDC"/>
-            </a:solidFill>
-            <a:prstDash val="solid"/>
-            <a:tailEnd type="none"/>
-          </a:ln>
-        </p:spPr>
-      </p:sp>
-      <p:sp>
-        <p:nvSpPr>
-          <p:cNvPr id="32" name="Shape 30"/>
-          <p:cNvSpPr/>
-          <p:nvPr/>
-        </p:nvSpPr>
-        <p:spPr>
-          <a:xfrm>
-            <a:off x="3506724" y="3904488"/>
-            <a:ext cx="155448" cy="155448"/>
-          </a:xfrm>
-          <a:prstGeom prst="ellipse">
-            <a:avLst/>
-          </a:prstGeom>
-          <a:solidFill>
-            <a:srgbClr val="4A6FA5"/>
-          </a:solidFill>
-          <a:ln w="12700">
-            <a:solidFill>
-              <a:srgbClr val="4A6FA5"/>
-            </a:solidFill>
-            <a:prstDash val="solid"/>
-          </a:ln>
-        </p:spPr>
-      </p:sp>
-      <p:sp>
-        <p:nvSpPr>
-          <p:cNvPr id="33" name="Shape 31"/>
-          <p:cNvSpPr/>
-          <p:nvPr/>
-        </p:nvSpPr>
-        <p:spPr>
-          <a:xfrm>
-            <a:off x="3429000" y="4075481"/>
-            <a:ext cx="310896" cy="286207"/>
-          </a:xfrm>
-          <a:prstGeom prst="roundRect">
-            <a:avLst>
-              <a:gd name="adj" fmla="val 19169"/>
-            </a:avLst>
-          </a:prstGeom>
-          <a:solidFill>
-            <a:srgbClr val="4A6FA5"/>
-          </a:solidFill>
-          <a:ln w="12700">
-            <a:solidFill>
-              <a:srgbClr val="4A6FA5"/>
-            </a:solidFill>
-            <a:prstDash val="solid"/>
-          </a:ln>
-        </p:spPr>
-      </p:sp>
-      <p:sp>
-        <p:nvSpPr>
-          <p:cNvPr id="34" name="Shape 32"/>
-          <p:cNvSpPr/>
-          <p:nvPr/>
-        </p:nvSpPr>
-        <p:spPr>
-          <a:xfrm>
-            <a:off x="3584448" y="4416552"/>
-            <a:ext cx="0" cy="137160"/>
-          </a:xfrm>
-          <a:prstGeom prst="line">
-            <a:avLst/>
-          </a:prstGeom>
-          <a:noFill/>
-          <a:ln w="19050">
-            <a:solidFill>
-              <a:srgbClr val="A9BEDC"/>
-            </a:solidFill>
-            <a:prstDash val="solid"/>
-            <a:tailEnd type="none"/>
-          </a:ln>
-        </p:spPr>
-      </p:sp>
-      <p:sp>
-        <p:nvSpPr>
-          <p:cNvPr id="35" name="Text 33"/>
-          <p:cNvSpPr txBox="1"/>
-          <p:nvPr/>
-        </p:nvSpPr>
-        <p:spPr>
-          <a:xfrm>
-            <a:off x="822960" y="5120640"/>
-            <a:ext cx="4892040" cy="1188720"/>
-          </a:xfrm>
-          <a:prstGeom prst="rect">
-            <a:avLst/>
-          </a:prstGeom>
-          <a:noFill/>
-          <a:ln/>
-        </p:spPr>
-        <p:txBody>
-          <a:bodyPr wrap="square" lIns="0" tIns="0" rIns="0" bIns="0" rtlCol="0" anchor="t"/>
-          <a:lstStyle/>
-          <a:p>
-            <a:pPr marL="152400" indent="-152400">
-              <a:spcAft>
-                <a:spcPts val="600"/>
-              </a:spcAft>
-              <a:buSzPct val="100000"/>
-              <a:buChar char="•"/>
-            </a:pPr>
-            <a:r>
-              <a:rPr lang="en-US" sz="950" dirty="0">
-                <a:solidFill>
-                  <a:srgbClr val="5B6470"/>
-                </a:solidFill>
-                <a:latin typeface="Calibri" pitchFamily="34" charset="0"/>
-                <a:ea typeface="Calibri" pitchFamily="34" charset="-122"/>
-                <a:cs typeface="Calibri" pitchFamily="34" charset="-120"/>
-              </a:rPr>
-              <a:t>Reconoce las competencias adquiridas con el cambio de tareas</a:t>
-            </a:r>
-            <a:endParaRPr lang="en-US" sz="950" dirty="0"/>
-          </a:p>
-          <a:p>
-            <a:pPr marL="152400" indent="-152400">
-              <a:spcAft>
-                <a:spcPts val="600"/>
-              </a:spcAft>
-              <a:buSzPct val="100000"/>
-              <a:buChar char="•"/>
-            </a:pPr>
-            <a:r>
-              <a:rPr lang="en-US" sz="950" dirty="0">
-                <a:solidFill>
-                  <a:srgbClr val="5B6470"/>
-                </a:solidFill>
-                <a:latin typeface="Calibri" pitchFamily="34" charset="0"/>
-                <a:ea typeface="Calibri" pitchFamily="34" charset="-122"/>
-                <a:cs typeface="Calibri" pitchFamily="34" charset="-120"/>
-              </a:rPr>
-              <a:t>Alinea la remuneración con las expectativas del mercado</a:t>
-            </a:r>
-            <a:endParaRPr lang="en-US" sz="950" dirty="0"/>
-          </a:p>
-          <a:p>
-            <a:pPr marL="152400" indent="-152400">
-              <a:spcAft>
-                <a:spcPts val="600"/>
-              </a:spcAft>
-              <a:buSzPct val="100000"/>
-              <a:buChar char="•"/>
-            </a:pPr>
-            <a:r>
-              <a:rPr lang="en-US" sz="950" dirty="0">
-                <a:solidFill>
-                  <a:srgbClr val="5B6470"/>
-                </a:solidFill>
-                <a:latin typeface="Calibri" pitchFamily="34" charset="0"/>
-                <a:ea typeface="Calibri" pitchFamily="34" charset="-122"/>
-                <a:cs typeface="Calibri" pitchFamily="34" charset="-120"/>
-              </a:rPr>
-              <a:t>Mantiene el respaldo mutuo entre pares: sin dependencia de una sola persona</a:t>
-            </a:r>
-            <a:endParaRPr lang="en-US" sz="950" dirty="0"/>
-          </a:p>
-          <a:p>
-            <a:pPr marL="152400" indent="-152400">
-              <a:spcAft>
-                <a:spcPts val="600"/>
-              </a:spcAft>
-              <a:buSzPct val="100000"/>
-              <a:buChar char="•"/>
-            </a:pPr>
-            <a:r>
-              <a:rPr lang="en-US" sz="950" dirty="0">
-                <a:solidFill>
-                  <a:srgbClr val="5B6470"/>
-                </a:solidFill>
-                <a:latin typeface="Calibri" pitchFamily="34" charset="0"/>
-                <a:ea typeface="Calibri" pitchFamily="34" charset="-122"/>
-                <a:cs typeface="Calibri" pitchFamily="34" charset="-120"/>
-              </a:rPr>
-              <a:t>Alcance del ajuste: seis cargos</a:t>
-            </a:r>
-            <a:endParaRPr lang="en-US" sz="950" dirty="0"/>
-          </a:p>
-          <a:p>
-            <a:pPr marL="152400" indent="-152400">
-              <a:spcAft>
-                <a:spcPts val="600"/>
-              </a:spcAft>
-              <a:buSzPct val="100000"/>
-              <a:buChar char="•"/>
-            </a:pPr>
-            <a:r>
-              <a:rPr lang="en-US" sz="950" dirty="0">
-                <a:solidFill>
-                  <a:srgbClr val="5B6470"/>
-                </a:solidFill>
-                <a:latin typeface="Calibri" pitchFamily="34" charset="0"/>
-                <a:ea typeface="Calibri" pitchFamily="34" charset="-122"/>
-                <a:cs typeface="Calibri" pitchFamily="34" charset="-120"/>
-              </a:rPr>
-              <a:t>Ruta de desarrollo: no abre expectativa de crecimiento posterior</a:t>
-            </a:r>
-            <a:endParaRPr lang="en-US" sz="950" dirty="0"/>
-          </a:p>
-        </p:txBody>
-      </p:sp>
-      <p:sp>
-        <p:nvSpPr>
-          <p:cNvPr id="36" name="Shape 34"/>
-          <p:cNvSpPr/>
-          <p:nvPr/>
-        </p:nvSpPr>
-        <p:spPr>
-          <a:xfrm>
-            <a:off x="6172200" y="1920240"/>
-            <a:ext cx="5440680" cy="4434840"/>
-          </a:xfrm>
-          <a:prstGeom prst="roundRect">
-            <a:avLst>
-              <a:gd name="adj" fmla="val 1237"/>
-            </a:avLst>
+            <a:off x="548640" y="2880360"/>
+            <a:ext cx="11091672" cy="457200"/>
+          </a:xfrm>
+          <a:prstGeom prst="rect">
+            <a:avLst/>
           </a:prstGeom>
           <a:solidFill>
             <a:srgbClr val="F6F7F9"/>
           </a:solidFill>
-          <a:ln w="9525">
+          <a:ln w="12700">
             <a:solidFill>
               <a:srgbClr val="F6F7F9"/>
             </a:solidFill>
@@ -3449,14 +2933,14 @@
       </p:sp>
       <p:sp>
         <p:nvSpPr>
-          <p:cNvPr id="37" name="Text 35"/>
-          <p:cNvSpPr txBox="1"/>
-          <p:nvPr/>
-        </p:nvSpPr>
-        <p:spPr>
-          <a:xfrm>
-            <a:off x="6446520" y="2057400"/>
-            <a:ext cx="1828800" cy="228600"/>
+          <p:cNvPr id="19" name="Text 17"/>
+          <p:cNvSpPr txBox="1"/>
+          <p:nvPr/>
+        </p:nvSpPr>
+        <p:spPr>
+          <a:xfrm>
+            <a:off x="658368" y="2880360"/>
+            <a:ext cx="1810512" cy="457200"/>
           </a:xfrm>
           <a:prstGeom prst="rect">
             <a:avLst/>
@@ -3472,30 +2956,30 @@
               <a:buNone/>
             </a:pPr>
             <a:r>
-              <a:rPr lang="en-US" sz="850" b="1" spc="200" kern="0" dirty="0">
-                <a:solidFill>
-                  <a:srgbClr val="6A9B6E"/>
-                </a:solidFill>
-                <a:latin typeface="Calibri" pitchFamily="34" charset="0"/>
-                <a:ea typeface="Calibri" pitchFamily="34" charset="-122"/>
-                <a:cs typeface="Calibri" pitchFamily="34" charset="-120"/>
-              </a:rPr>
-              <a:t>ALTERNATIVA 2</a:t>
-            </a:r>
-            <a:endParaRPr lang="en-US" sz="850" dirty="0"/>
-          </a:p>
-        </p:txBody>
-      </p:sp>
-      <p:sp>
-        <p:nvSpPr>
-          <p:cNvPr id="38" name="Text 36"/>
-          <p:cNvSpPr txBox="1"/>
-          <p:nvPr/>
-        </p:nvSpPr>
-        <p:spPr>
-          <a:xfrm>
-            <a:off x="6446520" y="2286000"/>
-            <a:ext cx="4892040" cy="411480"/>
+              <a:rPr lang="en-US" sz="1050" b="1" dirty="0">
+                <a:solidFill>
+                  <a:srgbClr val="2B2F36"/>
+                </a:solidFill>
+                <a:latin typeface="Calibri" pitchFamily="34" charset="0"/>
+                <a:ea typeface="Calibri" pitchFamily="34" charset="-122"/>
+                <a:cs typeface="Calibri" pitchFamily="34" charset="-120"/>
+              </a:rPr>
+              <a:t>Estructura</a:t>
+            </a:r>
+            <a:endParaRPr lang="en-US" sz="1050" dirty="0"/>
+          </a:p>
+        </p:txBody>
+      </p:sp>
+      <p:sp>
+        <p:nvSpPr>
+          <p:cNvPr id="20" name="Text 18"/>
+          <p:cNvSpPr txBox="1"/>
+          <p:nvPr/>
+        </p:nvSpPr>
+        <p:spPr>
+          <a:xfrm>
+            <a:off x="2651760" y="2880360"/>
+            <a:ext cx="4160520" cy="457200"/>
           </a:xfrm>
           <a:prstGeom prst="rect">
             <a:avLst/>
@@ -3511,7 +2995,85 @@
               <a:buNone/>
             </a:pPr>
             <a:r>
-              <a:rPr lang="en-US" sz="1700" b="1" dirty="0">
+              <a:rPr lang="en-US" sz="1050" dirty="0">
+                <a:solidFill>
+                  <a:srgbClr val="5B6470"/>
+                </a:solidFill>
+                <a:latin typeface="Calibri" pitchFamily="34" charset="0"/>
+                <a:ea typeface="Calibri" pitchFamily="34" charset="-122"/>
+                <a:cs typeface="Calibri" pitchFamily="34" charset="-120"/>
+              </a:rPr>
+              <a:t>Plana: seis especialistas con el mismo grado</a:t>
+            </a:r>
+            <a:endParaRPr lang="en-US" sz="1050" dirty="0"/>
+          </a:p>
+        </p:txBody>
+      </p:sp>
+      <p:sp>
+        <p:nvSpPr>
+          <p:cNvPr id="21" name="Text 19"/>
+          <p:cNvSpPr txBox="1"/>
+          <p:nvPr/>
+        </p:nvSpPr>
+        <p:spPr>
+          <a:xfrm>
+            <a:off x="7178040" y="2880360"/>
+            <a:ext cx="4160520" cy="457200"/>
+          </a:xfrm>
+          <a:prstGeom prst="rect">
+            <a:avLst/>
+          </a:prstGeom>
+          <a:noFill/>
+          <a:ln/>
+        </p:spPr>
+        <p:txBody>
+          <a:bodyPr wrap="square" lIns="0" tIns="0" rIns="0" bIns="0" rtlCol="0" anchor="ctr"/>
+          <a:lstStyle/>
+          <a:p>
+            <a:pPr indent="0" marL="0">
+              <a:buNone/>
+            </a:pPr>
+            <a:r>
+              <a:rPr lang="en-US" sz="1050" dirty="0">
+                <a:solidFill>
+                  <a:srgbClr val="5B6470"/>
+                </a:solidFill>
+                <a:latin typeface="Calibri" pitchFamily="34" charset="0"/>
+                <a:ea typeface="Calibri" pitchFamily="34" charset="-122"/>
+                <a:cs typeface="Calibri" pitchFamily="34" charset="-120"/>
+              </a:rPr>
+              <a:t>Diferenciada: dos seniors y cuatro plenos</a:t>
+            </a:r>
+            <a:endParaRPr lang="en-US" sz="1050" dirty="0"/>
+          </a:p>
+        </p:txBody>
+      </p:sp>
+      <p:sp>
+        <p:nvSpPr>
+          <p:cNvPr id="22" name="Text 20"/>
+          <p:cNvSpPr txBox="1"/>
+          <p:nvPr/>
+        </p:nvSpPr>
+        <p:spPr>
+          <a:xfrm>
+            <a:off x="658368" y="3337560"/>
+            <a:ext cx="1810512" cy="457200"/>
+          </a:xfrm>
+          <a:prstGeom prst="rect">
+            <a:avLst/>
+          </a:prstGeom>
+          <a:noFill/>
+          <a:ln/>
+        </p:spPr>
+        <p:txBody>
+          <a:bodyPr wrap="square" lIns="0" tIns="0" rIns="0" bIns="0" rtlCol="0" anchor="ctr"/>
+          <a:lstStyle/>
+          <a:p>
+            <a:pPr indent="0" marL="0">
+              <a:buNone/>
+            </a:pPr>
+            <a:r>
+              <a:rPr lang="en-US" sz="1050" b="1" dirty="0">
                 <a:solidFill>
                   <a:srgbClr val="2B2F36"/>
                 </a:solidFill>
@@ -3519,31 +3081,31 @@
                 <a:ea typeface="Calibri" pitchFamily="34" charset="-122"/>
                 <a:cs typeface="Calibri" pitchFamily="34" charset="-120"/>
               </a:rPr>
-              <a:t>Dos cargos senior, un grado más</a:t>
-            </a:r>
-            <a:endParaRPr lang="en-US" sz="1700" dirty="0"/>
-          </a:p>
-        </p:txBody>
-      </p:sp>
-      <p:sp>
-        <p:nvSpPr>
-          <p:cNvPr id="39" name="Text 37"/>
-          <p:cNvSpPr txBox="1"/>
-          <p:nvPr/>
-        </p:nvSpPr>
-        <p:spPr>
-          <a:xfrm>
-            <a:off x="6446520" y="2724912"/>
-            <a:ext cx="4892040" cy="685800"/>
-          </a:xfrm>
-          <a:prstGeom prst="rect">
-            <a:avLst/>
-          </a:prstGeom>
-          <a:noFill/>
-          <a:ln/>
-        </p:spPr>
-        <p:txBody>
-          <a:bodyPr wrap="square" lIns="0" tIns="0" rIns="0" bIns="0" rtlCol="0" anchor="t"/>
+              <a:t>Validación y firma</a:t>
+            </a:r>
+            <a:endParaRPr lang="en-US" sz="1050" dirty="0"/>
+          </a:p>
+        </p:txBody>
+      </p:sp>
+      <p:sp>
+        <p:nvSpPr>
+          <p:cNvPr id="23" name="Text 21"/>
+          <p:cNvSpPr txBox="1"/>
+          <p:nvPr/>
+        </p:nvSpPr>
+        <p:spPr>
+          <a:xfrm>
+            <a:off x="2651760" y="3337560"/>
+            <a:ext cx="4160520" cy="457200"/>
+          </a:xfrm>
+          <a:prstGeom prst="rect">
+            <a:avLst/>
+          </a:prstGeom>
+          <a:noFill/>
+          <a:ln/>
+        </p:spPr>
+        <p:txBody>
+          <a:bodyPr wrap="square" lIns="0" tIns="0" rIns="0" bIns="0" rtlCol="0" anchor="ctr"/>
           <a:lstStyle/>
           <a:p>
             <a:pPr indent="0" marL="0">
@@ -3558,7 +3120,7 @@
                 <a:ea typeface="Calibri" pitchFamily="34" charset="-122"/>
                 <a:cs typeface="Calibri" pitchFamily="34" charset="-120"/>
               </a:rPr>
-              <a:t>Se crean un Senior Especialista Normativo y un Senior TI, un grado por sobre el actual; cuatro plenos mantienen el grado con ruta de desarrollo. Es la estructura de la lámina anterior.</a:t>
+              <a:t>Se mantienen en el Jefe Normativo</a:t>
             </a:r>
             <a:endParaRPr lang="en-US" sz="1050" dirty="0"/>
           </a:p>
@@ -3566,148 +3128,63 @@
       </p:sp>
       <p:sp>
         <p:nvSpPr>
-          <p:cNvPr id="40" name="Shape 38"/>
+          <p:cNvPr id="24" name="Text 22"/>
+          <p:cNvSpPr txBox="1"/>
+          <p:nvPr/>
+        </p:nvSpPr>
+        <p:spPr>
+          <a:xfrm>
+            <a:off x="7178040" y="3337560"/>
+            <a:ext cx="4160520" cy="457200"/>
+          </a:xfrm>
+          <a:prstGeom prst="rect">
+            <a:avLst/>
+          </a:prstGeom>
+          <a:noFill/>
+          <a:ln/>
+        </p:spPr>
+        <p:txBody>
+          <a:bodyPr wrap="square" lIns="0" tIns="0" rIns="0" bIns="0" rtlCol="0" anchor="ctr"/>
+          <a:lstStyle/>
+          <a:p>
+            <a:pPr indent="0" marL="0">
+              <a:buNone/>
+            </a:pPr>
+            <a:r>
+              <a:rPr lang="en-US" sz="1050" dirty="0">
+                <a:solidFill>
+                  <a:srgbClr val="5B6470"/>
+                </a:solidFill>
+                <a:latin typeface="Calibri" pitchFamily="34" charset="0"/>
+                <a:ea typeface="Calibri" pitchFamily="34" charset="-122"/>
+                <a:cs typeface="Calibri" pitchFamily="34" charset="-120"/>
+              </a:rPr>
+              <a:t>Los seniors validan sus bloques; el Jefe firma</a:t>
+            </a:r>
+            <a:endParaRPr lang="en-US" sz="1050" dirty="0"/>
+          </a:p>
+        </p:txBody>
+      </p:sp>
+      <p:sp>
+        <p:nvSpPr>
+          <p:cNvPr id="25" name="Shape 23"/>
           <p:cNvSpPr/>
           <p:nvPr/>
         </p:nvSpPr>
         <p:spPr>
           <a:xfrm>
-            <a:off x="6446520" y="4480560"/>
-            <a:ext cx="4892040" cy="0"/>
-          </a:xfrm>
-          <a:prstGeom prst="line">
-            <a:avLst/>
-          </a:prstGeom>
-          <a:noFill/>
-          <a:ln w="12700">
-            <a:solidFill>
-              <a:srgbClr val="E3E6EA"/>
-            </a:solidFill>
-            <a:prstDash val="solid"/>
-          </a:ln>
-        </p:spPr>
-      </p:sp>
-      <p:sp>
-        <p:nvSpPr>
-          <p:cNvPr id="41" name="Shape 39"/>
-          <p:cNvSpPr/>
-          <p:nvPr/>
-        </p:nvSpPr>
-        <p:spPr>
-          <a:xfrm>
-            <a:off x="6446520" y="3840480"/>
-            <a:ext cx="4892040" cy="0"/>
-          </a:xfrm>
-          <a:prstGeom prst="line">
-            <a:avLst/>
-          </a:prstGeom>
-          <a:noFill/>
-          <a:ln w="12700">
-            <a:solidFill>
-              <a:srgbClr val="E3E6EA"/>
-            </a:solidFill>
-            <a:prstDash val="solid"/>
-          </a:ln>
-        </p:spPr>
-      </p:sp>
-      <p:sp>
-        <p:nvSpPr>
-          <p:cNvPr id="42" name="Text 40"/>
-          <p:cNvSpPr txBox="1"/>
-          <p:nvPr/>
-        </p:nvSpPr>
-        <p:spPr>
-          <a:xfrm>
-            <a:off x="10561320" y="3611880"/>
-            <a:ext cx="777240" cy="201168"/>
-          </a:xfrm>
-          <a:prstGeom prst="rect">
-            <a:avLst/>
-          </a:prstGeom>
-          <a:noFill/>
-          <a:ln/>
-        </p:spPr>
-        <p:txBody>
-          <a:bodyPr wrap="square" lIns="0" tIns="0" rIns="0" bIns="0" rtlCol="0" anchor="ctr"/>
-          <a:lstStyle/>
-          <a:p>
-            <a:pPr algn="r" indent="0" marL="0">
-              <a:buNone/>
-            </a:pPr>
-            <a:r>
-              <a:rPr lang="en-US" sz="800" dirty="0">
-                <a:solidFill>
-                  <a:srgbClr val="8A94A0"/>
-                </a:solidFill>
-                <a:latin typeface="Calibri" pitchFamily="34" charset="0"/>
-                <a:ea typeface="Calibri" pitchFamily="34" charset="-122"/>
-                <a:cs typeface="Calibri" pitchFamily="34" charset="-120"/>
-              </a:rPr>
-              <a:t>Grado +1</a:t>
-            </a:r>
-            <a:endParaRPr lang="en-US" sz="800" dirty="0"/>
-          </a:p>
-        </p:txBody>
-      </p:sp>
-      <p:sp>
-        <p:nvSpPr>
-          <p:cNvPr id="43" name="Text 41"/>
-          <p:cNvSpPr txBox="1"/>
-          <p:nvPr/>
-        </p:nvSpPr>
-        <p:spPr>
-          <a:xfrm>
-            <a:off x="10561320" y="4251960"/>
-            <a:ext cx="777240" cy="201168"/>
-          </a:xfrm>
-          <a:prstGeom prst="rect">
-            <a:avLst/>
-          </a:prstGeom>
-          <a:noFill/>
-          <a:ln/>
-        </p:spPr>
-        <p:txBody>
-          <a:bodyPr wrap="square" lIns="0" tIns="0" rIns="0" bIns="0" rtlCol="0" anchor="ctr"/>
-          <a:lstStyle/>
-          <a:p>
-            <a:pPr algn="r" indent="0" marL="0">
-              <a:buNone/>
-            </a:pPr>
-            <a:r>
-              <a:rPr lang="en-US" sz="800" dirty="0">
-                <a:solidFill>
-                  <a:srgbClr val="8A94A0"/>
-                </a:solidFill>
-                <a:latin typeface="Calibri" pitchFamily="34" charset="0"/>
-                <a:ea typeface="Calibri" pitchFamily="34" charset="-122"/>
-                <a:cs typeface="Calibri" pitchFamily="34" charset="-120"/>
-              </a:rPr>
-              <a:t>Grado actual</a:t>
-            </a:r>
-            <a:endParaRPr lang="en-US" sz="800" dirty="0"/>
-          </a:p>
-        </p:txBody>
-      </p:sp>
-      <p:sp>
-        <p:nvSpPr>
-          <p:cNvPr id="44" name="Shape 42"/>
-          <p:cNvSpPr/>
-          <p:nvPr/>
-        </p:nvSpPr>
-        <p:spPr>
-          <a:xfrm>
-            <a:off x="6615684" y="3904488"/>
-            <a:ext cx="155448" cy="155448"/>
-          </a:xfrm>
-          <a:prstGeom prst="ellipse">
+            <a:off x="548640" y="3794760"/>
+            <a:ext cx="11091672" cy="457200"/>
+          </a:xfrm>
+          <a:prstGeom prst="rect">
             <a:avLst/>
           </a:prstGeom>
           <a:solidFill>
-            <a:srgbClr val="4A6FA5"/>
+            <a:srgbClr val="F6F7F9"/>
           </a:solidFill>
           <a:ln w="12700">
             <a:solidFill>
-              <a:srgbClr val="4A6FA5"/>
+              <a:srgbClr val="F6F7F9"/>
             </a:solidFill>
             <a:prstDash val="solid"/>
           </a:ln>
@@ -3715,26 +3192,258 @@
       </p:sp>
       <p:sp>
         <p:nvSpPr>
-          <p:cNvPr id="45" name="Shape 43"/>
+          <p:cNvPr id="26" name="Text 24"/>
+          <p:cNvSpPr txBox="1"/>
+          <p:nvPr/>
+        </p:nvSpPr>
+        <p:spPr>
+          <a:xfrm>
+            <a:off x="658368" y="3794760"/>
+            <a:ext cx="1810512" cy="457200"/>
+          </a:xfrm>
+          <a:prstGeom prst="rect">
+            <a:avLst/>
+          </a:prstGeom>
+          <a:noFill/>
+          <a:ln/>
+        </p:spPr>
+        <p:txBody>
+          <a:bodyPr wrap="square" lIns="0" tIns="0" rIns="0" bIns="0" rtlCol="0" anchor="ctr"/>
+          <a:lstStyle/>
+          <a:p>
+            <a:pPr indent="0" marL="0">
+              <a:buNone/>
+            </a:pPr>
+            <a:r>
+              <a:rPr lang="en-US" sz="1050" b="1" dirty="0">
+                <a:solidFill>
+                  <a:srgbClr val="2B2F36"/>
+                </a:solidFill>
+                <a:latin typeface="Calibri" pitchFamily="34" charset="0"/>
+                <a:ea typeface="Calibri" pitchFamily="34" charset="-122"/>
+                <a:cs typeface="Calibri" pitchFamily="34" charset="-120"/>
+              </a:rPr>
+              <a:t>Respaldo</a:t>
+            </a:r>
+            <a:endParaRPr lang="en-US" sz="1050" dirty="0"/>
+          </a:p>
+        </p:txBody>
+      </p:sp>
+      <p:sp>
+        <p:nvSpPr>
+          <p:cNvPr id="27" name="Text 25"/>
+          <p:cNvSpPr txBox="1"/>
+          <p:nvPr/>
+        </p:nvSpPr>
+        <p:spPr>
+          <a:xfrm>
+            <a:off x="2651760" y="3794760"/>
+            <a:ext cx="4160520" cy="457200"/>
+          </a:xfrm>
+          <a:prstGeom prst="rect">
+            <a:avLst/>
+          </a:prstGeom>
+          <a:noFill/>
+          <a:ln/>
+        </p:spPr>
+        <p:txBody>
+          <a:bodyPr wrap="square" lIns="0" tIns="0" rIns="0" bIns="0" rtlCol="0" anchor="ctr"/>
+          <a:lstStyle/>
+          <a:p>
+            <a:pPr indent="0" marL="0">
+              <a:buNone/>
+            </a:pPr>
+            <a:r>
+              <a:rPr lang="en-US" sz="1050" dirty="0">
+                <a:solidFill>
+                  <a:srgbClr val="5B6470"/>
+                </a:solidFill>
+                <a:latin typeface="Calibri" pitchFamily="34" charset="0"/>
+                <a:ea typeface="Calibri" pitchFamily="34" charset="-122"/>
+                <a:cs typeface="Calibri" pitchFamily="34" charset="-120"/>
+              </a:rPr>
+              <a:t>Mutuo entre pares: sin dependencia de una sola persona</a:t>
+            </a:r>
+            <a:endParaRPr lang="en-US" sz="1050" dirty="0"/>
+          </a:p>
+        </p:txBody>
+      </p:sp>
+      <p:sp>
+        <p:nvSpPr>
+          <p:cNvPr id="28" name="Text 26"/>
+          <p:cNvSpPr txBox="1"/>
+          <p:nvPr/>
+        </p:nvSpPr>
+        <p:spPr>
+          <a:xfrm>
+            <a:off x="7178040" y="3794760"/>
+            <a:ext cx="4160520" cy="457200"/>
+          </a:xfrm>
+          <a:prstGeom prst="rect">
+            <a:avLst/>
+          </a:prstGeom>
+          <a:noFill/>
+          <a:ln/>
+        </p:spPr>
+        <p:txBody>
+          <a:bodyPr wrap="square" lIns="0" tIns="0" rIns="0" bIns="0" rtlCol="0" anchor="ctr"/>
+          <a:lstStyle/>
+          <a:p>
+            <a:pPr indent="0" marL="0">
+              <a:buNone/>
+            </a:pPr>
+            <a:r>
+              <a:rPr lang="en-US" sz="1050" dirty="0">
+                <a:solidFill>
+                  <a:srgbClr val="5B6470"/>
+                </a:solidFill>
+                <a:latin typeface="Calibri" pitchFamily="34" charset="0"/>
+                <a:ea typeface="Calibri" pitchFamily="34" charset="-122"/>
+                <a:cs typeface="Calibri" pitchFamily="34" charset="-120"/>
+              </a:rPr>
+              <a:t>Seniors respaldan los bloques críticos; plenos se respaldan entre sí</a:t>
+            </a:r>
+            <a:endParaRPr lang="en-US" sz="1050" dirty="0"/>
+          </a:p>
+        </p:txBody>
+      </p:sp>
+      <p:sp>
+        <p:nvSpPr>
+          <p:cNvPr id="29" name="Text 27"/>
+          <p:cNvSpPr txBox="1"/>
+          <p:nvPr/>
+        </p:nvSpPr>
+        <p:spPr>
+          <a:xfrm>
+            <a:off x="658368" y="4251960"/>
+            <a:ext cx="1810512" cy="457200"/>
+          </a:xfrm>
+          <a:prstGeom prst="rect">
+            <a:avLst/>
+          </a:prstGeom>
+          <a:noFill/>
+          <a:ln/>
+        </p:spPr>
+        <p:txBody>
+          <a:bodyPr wrap="square" lIns="0" tIns="0" rIns="0" bIns="0" rtlCol="0" anchor="ctr"/>
+          <a:lstStyle/>
+          <a:p>
+            <a:pPr indent="0" marL="0">
+              <a:buNone/>
+            </a:pPr>
+            <a:r>
+              <a:rPr lang="en-US" sz="1050" b="1" dirty="0">
+                <a:solidFill>
+                  <a:srgbClr val="2B2F36"/>
+                </a:solidFill>
+                <a:latin typeface="Calibri" pitchFamily="34" charset="0"/>
+                <a:ea typeface="Calibri" pitchFamily="34" charset="-122"/>
+                <a:cs typeface="Calibri" pitchFamily="34" charset="-120"/>
+              </a:rPr>
+              <a:t>Equidad interna</a:t>
+            </a:r>
+            <a:endParaRPr lang="en-US" sz="1050" dirty="0"/>
+          </a:p>
+        </p:txBody>
+      </p:sp>
+      <p:sp>
+        <p:nvSpPr>
+          <p:cNvPr id="30" name="Text 28"/>
+          <p:cNvSpPr txBox="1"/>
+          <p:nvPr/>
+        </p:nvSpPr>
+        <p:spPr>
+          <a:xfrm>
+            <a:off x="2651760" y="4251960"/>
+            <a:ext cx="4160520" cy="457200"/>
+          </a:xfrm>
+          <a:prstGeom prst="rect">
+            <a:avLst/>
+          </a:prstGeom>
+          <a:noFill/>
+          <a:ln/>
+        </p:spPr>
+        <p:txBody>
+          <a:bodyPr wrap="square" lIns="0" tIns="0" rIns="0" bIns="0" rtlCol="0" anchor="ctr"/>
+          <a:lstStyle/>
+          <a:p>
+            <a:pPr indent="0" marL="0">
+              <a:buNone/>
+            </a:pPr>
+            <a:r>
+              <a:rPr lang="en-US" sz="1050" dirty="0">
+                <a:solidFill>
+                  <a:srgbClr val="5B6470"/>
+                </a:solidFill>
+                <a:latin typeface="Calibri" pitchFamily="34" charset="0"/>
+                <a:ea typeface="Calibri" pitchFamily="34" charset="-122"/>
+                <a:cs typeface="Calibri" pitchFamily="34" charset="-120"/>
+              </a:rPr>
+              <a:t>Igual para todos, sin criterios de selección</a:t>
+            </a:r>
+            <a:endParaRPr lang="en-US" sz="1050" dirty="0"/>
+          </a:p>
+        </p:txBody>
+      </p:sp>
+      <p:sp>
+        <p:nvSpPr>
+          <p:cNvPr id="31" name="Text 29"/>
+          <p:cNvSpPr txBox="1"/>
+          <p:nvPr/>
+        </p:nvSpPr>
+        <p:spPr>
+          <a:xfrm>
+            <a:off x="7178040" y="4251960"/>
+            <a:ext cx="4160520" cy="457200"/>
+          </a:xfrm>
+          <a:prstGeom prst="rect">
+            <a:avLst/>
+          </a:prstGeom>
+          <a:noFill/>
+          <a:ln/>
+        </p:spPr>
+        <p:txBody>
+          <a:bodyPr wrap="square" lIns="0" tIns="0" rIns="0" bIns="0" rtlCol="0" anchor="ctr"/>
+          <a:lstStyle/>
+          <a:p>
+            <a:pPr indent="0" marL="0">
+              <a:buNone/>
+            </a:pPr>
+            <a:r>
+              <a:rPr lang="en-US" sz="1050" dirty="0">
+                <a:solidFill>
+                  <a:srgbClr val="5B6470"/>
+                </a:solidFill>
+                <a:latin typeface="Calibri" pitchFamily="34" charset="0"/>
+                <a:ea typeface="Calibri" pitchFamily="34" charset="-122"/>
+                <a:cs typeface="Calibri" pitchFamily="34" charset="-120"/>
+              </a:rPr>
+              <a:t>Requiere criterios de selección claros y comunicados</a:t>
+            </a:r>
+            <a:endParaRPr lang="en-US" sz="1050" dirty="0"/>
+          </a:p>
+        </p:txBody>
+      </p:sp>
+      <p:sp>
+        <p:nvSpPr>
+          <p:cNvPr id="32" name="Shape 30"/>
           <p:cNvSpPr/>
           <p:nvPr/>
         </p:nvSpPr>
         <p:spPr>
           <a:xfrm>
-            <a:off x="6537960" y="4075481"/>
-            <a:ext cx="310896" cy="286207"/>
-          </a:xfrm>
-          <a:prstGeom prst="roundRect">
-            <a:avLst>
-              <a:gd name="adj" fmla="val 19169"/>
-            </a:avLst>
+            <a:off x="548640" y="4709160"/>
+            <a:ext cx="11091672" cy="457200"/>
+          </a:xfrm>
+          <a:prstGeom prst="rect">
+            <a:avLst/>
           </a:prstGeom>
           <a:solidFill>
-            <a:srgbClr val="4A6FA5"/>
+            <a:srgbClr val="F6F7F9"/>
           </a:solidFill>
           <a:ln w="12700">
             <a:solidFill>
-              <a:srgbClr val="4A6FA5"/>
+              <a:srgbClr val="F6F7F9"/>
             </a:solidFill>
             <a:prstDash val="solid"/>
           </a:ln>
@@ -3742,342 +3451,69 @@
       </p:sp>
       <p:sp>
         <p:nvSpPr>
-          <p:cNvPr id="46" name="Shape 44"/>
-          <p:cNvSpPr/>
-          <p:nvPr/>
-        </p:nvSpPr>
-        <p:spPr>
-          <a:xfrm>
-            <a:off x="6693408" y="4416552"/>
-            <a:ext cx="0" cy="137160"/>
-          </a:xfrm>
-          <a:prstGeom prst="line">
-            <a:avLst/>
-          </a:prstGeom>
-          <a:noFill/>
-          <a:ln w="19050">
-            <a:solidFill>
-              <a:srgbClr val="A9BEDC"/>
-            </a:solidFill>
-            <a:prstDash val="solid"/>
-            <a:tailEnd type="none"/>
-          </a:ln>
-        </p:spPr>
-      </p:sp>
-      <p:sp>
-        <p:nvSpPr>
-          <p:cNvPr id="47" name="Shape 45"/>
-          <p:cNvSpPr/>
-          <p:nvPr/>
-        </p:nvSpPr>
-        <p:spPr>
-          <a:xfrm>
-            <a:off x="7118604" y="3904488"/>
-            <a:ext cx="155448" cy="155448"/>
-          </a:xfrm>
-          <a:prstGeom prst="ellipse">
-            <a:avLst/>
-          </a:prstGeom>
-          <a:solidFill>
-            <a:srgbClr val="4A6FA5"/>
-          </a:solidFill>
-          <a:ln w="12700">
-            <a:solidFill>
-              <a:srgbClr val="4A6FA5"/>
-            </a:solidFill>
-            <a:prstDash val="solid"/>
-          </a:ln>
-        </p:spPr>
-      </p:sp>
-      <p:sp>
-        <p:nvSpPr>
-          <p:cNvPr id="48" name="Shape 46"/>
-          <p:cNvSpPr/>
-          <p:nvPr/>
-        </p:nvSpPr>
-        <p:spPr>
-          <a:xfrm>
-            <a:off x="7040880" y="4075481"/>
-            <a:ext cx="310896" cy="286207"/>
-          </a:xfrm>
-          <a:prstGeom prst="roundRect">
-            <a:avLst>
-              <a:gd name="adj" fmla="val 19169"/>
-            </a:avLst>
-          </a:prstGeom>
-          <a:solidFill>
-            <a:srgbClr val="4A6FA5"/>
-          </a:solidFill>
-          <a:ln w="12700">
-            <a:solidFill>
-              <a:srgbClr val="4A6FA5"/>
-            </a:solidFill>
-            <a:prstDash val="solid"/>
-          </a:ln>
-        </p:spPr>
-      </p:sp>
-      <p:sp>
-        <p:nvSpPr>
-          <p:cNvPr id="49" name="Shape 47"/>
-          <p:cNvSpPr/>
-          <p:nvPr/>
-        </p:nvSpPr>
-        <p:spPr>
-          <a:xfrm>
-            <a:off x="7196328" y="4416552"/>
-            <a:ext cx="0" cy="137160"/>
-          </a:xfrm>
-          <a:prstGeom prst="line">
-            <a:avLst/>
-          </a:prstGeom>
-          <a:noFill/>
-          <a:ln w="19050">
-            <a:solidFill>
-              <a:srgbClr val="A9BEDC"/>
-            </a:solidFill>
-            <a:prstDash val="solid"/>
-            <a:tailEnd type="none"/>
-          </a:ln>
-        </p:spPr>
-      </p:sp>
-      <p:sp>
-        <p:nvSpPr>
-          <p:cNvPr id="50" name="Shape 48"/>
-          <p:cNvSpPr/>
-          <p:nvPr/>
-        </p:nvSpPr>
-        <p:spPr>
-          <a:xfrm>
-            <a:off x="7621524" y="4544568"/>
-            <a:ext cx="155448" cy="155448"/>
-          </a:xfrm>
-          <a:prstGeom prst="ellipse">
-            <a:avLst/>
-          </a:prstGeom>
-          <a:solidFill>
-            <a:srgbClr val="9AA3AE"/>
-          </a:solidFill>
-          <a:ln w="12700">
-            <a:solidFill>
-              <a:srgbClr val="9AA3AE"/>
-            </a:solidFill>
-            <a:prstDash val="solid"/>
-          </a:ln>
-        </p:spPr>
-      </p:sp>
-      <p:sp>
-        <p:nvSpPr>
-          <p:cNvPr id="51" name="Shape 49"/>
-          <p:cNvSpPr/>
-          <p:nvPr/>
-        </p:nvSpPr>
-        <p:spPr>
-          <a:xfrm>
-            <a:off x="7543800" y="4715561"/>
-            <a:ext cx="310896" cy="286207"/>
-          </a:xfrm>
-          <a:prstGeom prst="roundRect">
-            <a:avLst>
-              <a:gd name="adj" fmla="val 19169"/>
-            </a:avLst>
-          </a:prstGeom>
-          <a:solidFill>
-            <a:srgbClr val="9AA3AE"/>
-          </a:solidFill>
-          <a:ln w="12700">
-            <a:solidFill>
-              <a:srgbClr val="9AA3AE"/>
-            </a:solidFill>
-            <a:prstDash val="solid"/>
-          </a:ln>
-        </p:spPr>
-      </p:sp>
-      <p:sp>
-        <p:nvSpPr>
-          <p:cNvPr id="52" name="Shape 50"/>
-          <p:cNvSpPr/>
-          <p:nvPr/>
-        </p:nvSpPr>
-        <p:spPr>
-          <a:xfrm>
-            <a:off x="8124444" y="4544568"/>
-            <a:ext cx="155448" cy="155448"/>
-          </a:xfrm>
-          <a:prstGeom prst="ellipse">
-            <a:avLst/>
-          </a:prstGeom>
-          <a:solidFill>
-            <a:srgbClr val="9AA3AE"/>
-          </a:solidFill>
-          <a:ln w="12700">
-            <a:solidFill>
-              <a:srgbClr val="9AA3AE"/>
-            </a:solidFill>
-            <a:prstDash val="solid"/>
-          </a:ln>
-        </p:spPr>
-      </p:sp>
-      <p:sp>
-        <p:nvSpPr>
-          <p:cNvPr id="53" name="Shape 51"/>
-          <p:cNvSpPr/>
-          <p:nvPr/>
-        </p:nvSpPr>
-        <p:spPr>
-          <a:xfrm>
-            <a:off x="8046720" y="4715561"/>
-            <a:ext cx="310896" cy="286207"/>
-          </a:xfrm>
-          <a:prstGeom prst="roundRect">
-            <a:avLst>
-              <a:gd name="adj" fmla="val 19169"/>
-            </a:avLst>
-          </a:prstGeom>
-          <a:solidFill>
-            <a:srgbClr val="9AA3AE"/>
-          </a:solidFill>
-          <a:ln w="12700">
-            <a:solidFill>
-              <a:srgbClr val="9AA3AE"/>
-            </a:solidFill>
-            <a:prstDash val="solid"/>
-          </a:ln>
-        </p:spPr>
-      </p:sp>
-      <p:sp>
-        <p:nvSpPr>
-          <p:cNvPr id="54" name="Shape 52"/>
-          <p:cNvSpPr/>
-          <p:nvPr/>
-        </p:nvSpPr>
-        <p:spPr>
-          <a:xfrm>
-            <a:off x="8627364" y="4544568"/>
-            <a:ext cx="155448" cy="155448"/>
-          </a:xfrm>
-          <a:prstGeom prst="ellipse">
-            <a:avLst/>
-          </a:prstGeom>
-          <a:solidFill>
-            <a:srgbClr val="9AA3AE"/>
-          </a:solidFill>
-          <a:ln w="12700">
-            <a:solidFill>
-              <a:srgbClr val="9AA3AE"/>
-            </a:solidFill>
-            <a:prstDash val="solid"/>
-          </a:ln>
-        </p:spPr>
-      </p:sp>
-      <p:sp>
-        <p:nvSpPr>
-          <p:cNvPr id="55" name="Shape 53"/>
-          <p:cNvSpPr/>
-          <p:nvPr/>
-        </p:nvSpPr>
-        <p:spPr>
-          <a:xfrm>
-            <a:off x="8549640" y="4715561"/>
-            <a:ext cx="310896" cy="286207"/>
-          </a:xfrm>
-          <a:prstGeom prst="roundRect">
-            <a:avLst>
-              <a:gd name="adj" fmla="val 19169"/>
-            </a:avLst>
-          </a:prstGeom>
-          <a:solidFill>
-            <a:srgbClr val="9AA3AE"/>
-          </a:solidFill>
-          <a:ln w="12700">
-            <a:solidFill>
-              <a:srgbClr val="9AA3AE"/>
-            </a:solidFill>
-            <a:prstDash val="solid"/>
-          </a:ln>
-        </p:spPr>
-      </p:sp>
-      <p:sp>
-        <p:nvSpPr>
-          <p:cNvPr id="56" name="Shape 54"/>
-          <p:cNvSpPr/>
-          <p:nvPr/>
-        </p:nvSpPr>
-        <p:spPr>
-          <a:xfrm>
-            <a:off x="9130284" y="4544568"/>
-            <a:ext cx="155448" cy="155448"/>
-          </a:xfrm>
-          <a:prstGeom prst="ellipse">
-            <a:avLst/>
-          </a:prstGeom>
-          <a:solidFill>
-            <a:srgbClr val="9AA3AE"/>
-          </a:solidFill>
-          <a:ln w="12700">
-            <a:solidFill>
-              <a:srgbClr val="9AA3AE"/>
-            </a:solidFill>
-            <a:prstDash val="solid"/>
-          </a:ln>
-        </p:spPr>
-      </p:sp>
-      <p:sp>
-        <p:nvSpPr>
-          <p:cNvPr id="57" name="Shape 55"/>
-          <p:cNvSpPr/>
-          <p:nvPr/>
-        </p:nvSpPr>
-        <p:spPr>
-          <a:xfrm>
-            <a:off x="9052560" y="4715561"/>
-            <a:ext cx="310896" cy="286207"/>
-          </a:xfrm>
-          <a:prstGeom prst="roundRect">
-            <a:avLst>
-              <a:gd name="adj" fmla="val 19169"/>
-            </a:avLst>
-          </a:prstGeom>
-          <a:solidFill>
-            <a:srgbClr val="9AA3AE"/>
-          </a:solidFill>
-          <a:ln w="12700">
-            <a:solidFill>
-              <a:srgbClr val="9AA3AE"/>
-            </a:solidFill>
-            <a:prstDash val="solid"/>
-          </a:ln>
-        </p:spPr>
-      </p:sp>
-      <p:sp>
-        <p:nvSpPr>
-          <p:cNvPr id="58" name="Text 56"/>
-          <p:cNvSpPr txBox="1"/>
-          <p:nvPr/>
-        </p:nvSpPr>
-        <p:spPr>
-          <a:xfrm>
-            <a:off x="6446520" y="5120640"/>
-            <a:ext cx="4892040" cy="1188720"/>
-          </a:xfrm>
-          <a:prstGeom prst="rect">
-            <a:avLst/>
-          </a:prstGeom>
-          <a:noFill/>
-          <a:ln/>
-        </p:spPr>
-        <p:txBody>
-          <a:bodyPr wrap="square" lIns="0" tIns="0" rIns="0" bIns="0" rtlCol="0" anchor="t"/>
-          <a:lstStyle/>
-          <a:p>
-            <a:pPr marL="152400" indent="-152400">
-              <a:spcAft>
-                <a:spcPts val="600"/>
-              </a:spcAft>
-              <a:buSzPct val="100000"/>
-              <a:buChar char="•"/>
-            </a:pPr>
-            <a:r>
-              <a:rPr lang="en-US" sz="950" dirty="0">
+          <p:cNvPr id="33" name="Text 31"/>
+          <p:cNvSpPr txBox="1"/>
+          <p:nvPr/>
+        </p:nvSpPr>
+        <p:spPr>
+          <a:xfrm>
+            <a:off x="658368" y="4709160"/>
+            <a:ext cx="1810512" cy="457200"/>
+          </a:xfrm>
+          <a:prstGeom prst="rect">
+            <a:avLst/>
+          </a:prstGeom>
+          <a:noFill/>
+          <a:ln/>
+        </p:spPr>
+        <p:txBody>
+          <a:bodyPr wrap="square" lIns="0" tIns="0" rIns="0" bIns="0" rtlCol="0" anchor="ctr"/>
+          <a:lstStyle/>
+          <a:p>
+            <a:pPr indent="0" marL="0">
+              <a:buNone/>
+            </a:pPr>
+            <a:r>
+              <a:rPr lang="en-US" sz="1050" b="1" dirty="0">
+                <a:solidFill>
+                  <a:srgbClr val="2B2F36"/>
+                </a:solidFill>
+                <a:latin typeface="Calibri" pitchFamily="34" charset="0"/>
+                <a:ea typeface="Calibri" pitchFamily="34" charset="-122"/>
+                <a:cs typeface="Calibri" pitchFamily="34" charset="-120"/>
+              </a:rPr>
+              <a:t>Alcance del ajuste</a:t>
+            </a:r>
+            <a:endParaRPr lang="en-US" sz="1050" dirty="0"/>
+          </a:p>
+        </p:txBody>
+      </p:sp>
+      <p:sp>
+        <p:nvSpPr>
+          <p:cNvPr id="34" name="Text 32"/>
+          <p:cNvSpPr txBox="1"/>
+          <p:nvPr/>
+        </p:nvSpPr>
+        <p:spPr>
+          <a:xfrm>
+            <a:off x="2651760" y="4709160"/>
+            <a:ext cx="4160520" cy="457200"/>
+          </a:xfrm>
+          <a:prstGeom prst="rect">
+            <a:avLst/>
+          </a:prstGeom>
+          <a:noFill/>
+          <a:ln/>
+        </p:spPr>
+        <p:txBody>
+          <a:bodyPr wrap="square" lIns="0" tIns="0" rIns="0" bIns="0" rtlCol="0" anchor="ctr"/>
+          <a:lstStyle/>
+          <a:p>
+            <a:pPr indent="0" marL="0">
+              <a:buNone/>
+            </a:pPr>
+            <a:r>
+              <a:rPr lang="en-US" sz="1050" dirty="0">
                 <a:solidFill>
                   <a:srgbClr val="5B6470"/>
                 </a:solidFill>
@@ -4085,20 +3521,38 @@
                 <a:ea typeface="Calibri" pitchFamily="34" charset="-122"/>
                 <a:cs typeface="Calibri" pitchFamily="34" charset="-120"/>
               </a:rPr>
-              <a:t>Reconoce la diferencia de complejidad entre reportes</a:t>
-            </a:r>
-            <a:endParaRPr lang="en-US" sz="950" dirty="0"/>
-          </a:p>
-          <a:p>
-            <a:pPr marL="152400" indent="-152400">
-              <a:spcAft>
-                <a:spcPts val="600"/>
-              </a:spcAft>
-              <a:buSzPct val="100000"/>
-              <a:buChar char="•"/>
-            </a:pPr>
-            <a:r>
-              <a:rPr lang="en-US" sz="950" dirty="0">
+              <a:t>Seis cargos</a:t>
+            </a:r>
+            <a:endParaRPr lang="en-US" sz="1050" dirty="0"/>
+          </a:p>
+        </p:txBody>
+      </p:sp>
+      <p:sp>
+        <p:nvSpPr>
+          <p:cNvPr id="35" name="Text 33"/>
+          <p:cNvSpPr txBox="1"/>
+          <p:nvPr/>
+        </p:nvSpPr>
+        <p:spPr>
+          <a:xfrm>
+            <a:off x="7178040" y="4709160"/>
+            <a:ext cx="4160520" cy="457200"/>
+          </a:xfrm>
+          <a:prstGeom prst="rect">
+            <a:avLst/>
+          </a:prstGeom>
+          <a:noFill/>
+          <a:ln/>
+        </p:spPr>
+        <p:txBody>
+          <a:bodyPr wrap="square" lIns="0" tIns="0" rIns="0" bIns="0" rtlCol="0" anchor="ctr"/>
+          <a:lstStyle/>
+          <a:p>
+            <a:pPr indent="0" marL="0">
+              <a:buNone/>
+            </a:pPr>
+            <a:r>
+              <a:rPr lang="en-US" sz="1050" dirty="0">
                 <a:solidFill>
                   <a:srgbClr val="5B6470"/>
                 </a:solidFill>
@@ -4106,20 +3560,77 @@
                 <a:ea typeface="Calibri" pitchFamily="34" charset="-122"/>
                 <a:cs typeface="Calibri" pitchFamily="34" charset="-120"/>
               </a:rPr>
-              <a:t>Separa quien prepara de quien valida y firma</a:t>
-            </a:r>
-            <a:endParaRPr lang="en-US" sz="950" dirty="0"/>
-          </a:p>
-          <a:p>
-            <a:pPr marL="152400" indent="-152400">
-              <a:spcAft>
-                <a:spcPts val="600"/>
-              </a:spcAft>
-              <a:buSzPct val="100000"/>
-              <a:buChar char="•"/>
-            </a:pPr>
-            <a:r>
-              <a:rPr lang="en-US" sz="950" dirty="0">
+              <a:t>Dos cargos</a:t>
+            </a:r>
+            <a:endParaRPr lang="en-US" sz="1050" dirty="0"/>
+          </a:p>
+        </p:txBody>
+      </p:sp>
+      <p:sp>
+        <p:nvSpPr>
+          <p:cNvPr id="36" name="Text 34"/>
+          <p:cNvSpPr txBox="1"/>
+          <p:nvPr/>
+        </p:nvSpPr>
+        <p:spPr>
+          <a:xfrm>
+            <a:off x="658368" y="5166360"/>
+            <a:ext cx="1810512" cy="457200"/>
+          </a:xfrm>
+          <a:prstGeom prst="rect">
+            <a:avLst/>
+          </a:prstGeom>
+          <a:noFill/>
+          <a:ln/>
+        </p:spPr>
+        <p:txBody>
+          <a:bodyPr wrap="square" lIns="0" tIns="0" rIns="0" bIns="0" rtlCol="0" anchor="ctr"/>
+          <a:lstStyle/>
+          <a:p>
+            <a:pPr indent="0" marL="0">
+              <a:buNone/>
+            </a:pPr>
+            <a:r>
+              <a:rPr lang="en-US" sz="1050" b="1" dirty="0">
+                <a:solidFill>
+                  <a:srgbClr val="2B2F36"/>
+                </a:solidFill>
+                <a:latin typeface="Calibri" pitchFamily="34" charset="0"/>
+                <a:ea typeface="Calibri" pitchFamily="34" charset="-122"/>
+                <a:cs typeface="Calibri" pitchFamily="34" charset="-120"/>
+              </a:rPr>
+              <a:t>Ruta de desarrollo</a:t>
+            </a:r>
+            <a:endParaRPr lang="en-US" sz="1050" dirty="0"/>
+          </a:p>
+        </p:txBody>
+      </p:sp>
+      <p:sp>
+        <p:nvSpPr>
+          <p:cNvPr id="37" name="Text 35"/>
+          <p:cNvSpPr txBox="1"/>
+          <p:nvPr/>
+        </p:nvSpPr>
+        <p:spPr>
+          <a:xfrm>
+            <a:off x="2651760" y="5166360"/>
+            <a:ext cx="4160520" cy="457200"/>
+          </a:xfrm>
+          <a:prstGeom prst="rect">
+            <a:avLst/>
+          </a:prstGeom>
+          <a:noFill/>
+          <a:ln/>
+        </p:spPr>
+        <p:txBody>
+          <a:bodyPr wrap="square" lIns="0" tIns="0" rIns="0" bIns="0" rtlCol="0" anchor="ctr"/>
+          <a:lstStyle/>
+          <a:p>
+            <a:pPr indent="0" marL="0">
+              <a:buNone/>
+            </a:pPr>
+            <a:r>
+              <a:rPr lang="en-US" sz="1050" dirty="0">
                 <a:solidFill>
                   <a:srgbClr val="5B6470"/>
                 </a:solidFill>
@@ -4127,20 +3638,38 @@
                 <a:ea typeface="Calibri" pitchFamily="34" charset="-122"/>
                 <a:cs typeface="Calibri" pitchFamily="34" charset="-120"/>
               </a:rPr>
-              <a:t>Equidad interna: exige criterios de selección claros</a:t>
-            </a:r>
-            <a:endParaRPr lang="en-US" sz="950" dirty="0"/>
-          </a:p>
-          <a:p>
-            <a:pPr marL="152400" indent="-152400">
-              <a:spcAft>
-                <a:spcPts val="600"/>
-              </a:spcAft>
-              <a:buSzPct val="100000"/>
-              <a:buChar char="•"/>
-            </a:pPr>
-            <a:r>
-              <a:rPr lang="en-US" sz="950" dirty="0">
+              <a:t>No abre expectativa de crecimiento posterior</a:t>
+            </a:r>
+            <a:endParaRPr lang="en-US" sz="1050" dirty="0"/>
+          </a:p>
+        </p:txBody>
+      </p:sp>
+      <p:sp>
+        <p:nvSpPr>
+          <p:cNvPr id="38" name="Text 36"/>
+          <p:cNvSpPr txBox="1"/>
+          <p:nvPr/>
+        </p:nvSpPr>
+        <p:spPr>
+          <a:xfrm>
+            <a:off x="7178040" y="5166360"/>
+            <a:ext cx="4160520" cy="457200"/>
+          </a:xfrm>
+          <a:prstGeom prst="rect">
+            <a:avLst/>
+          </a:prstGeom>
+          <a:noFill/>
+          <a:ln/>
+        </p:spPr>
+        <p:txBody>
+          <a:bodyPr wrap="square" lIns="0" tIns="0" rIns="0" bIns="0" rtlCol="0" anchor="ctr"/>
+          <a:lstStyle/>
+          <a:p>
+            <a:pPr indent="0" marL="0">
+              <a:buNone/>
+            </a:pPr>
+            <a:r>
+              <a:rPr lang="en-US" sz="1050" dirty="0">
                 <a:solidFill>
                   <a:srgbClr val="5B6470"/>
                 </a:solidFill>
@@ -4148,20 +3677,38 @@
                 <a:ea typeface="Calibri" pitchFamily="34" charset="-122"/>
                 <a:cs typeface="Calibri" pitchFamily="34" charset="-120"/>
               </a:rPr>
-              <a:t>Alcance del ajuste: dos cargos</a:t>
-            </a:r>
-            <a:endParaRPr lang="en-US" sz="950" dirty="0"/>
-          </a:p>
-          <a:p>
-            <a:pPr marL="152400" indent="-152400">
-              <a:spcAft>
-                <a:spcPts val="600"/>
-              </a:spcAft>
-              <a:buSzPct val="100000"/>
-              <a:buChar char="•"/>
-            </a:pPr>
-            <a:r>
-              <a:rPr lang="en-US" sz="950" dirty="0">
+              <a:t>Abre el paso de pleno a senior</a:t>
+            </a:r>
+            <a:endParaRPr lang="en-US" sz="1050" dirty="0"/>
+          </a:p>
+        </p:txBody>
+      </p:sp>
+      <p:sp>
+        <p:nvSpPr>
+          <p:cNvPr id="39" name="Text 37"/>
+          <p:cNvSpPr txBox="1"/>
+          <p:nvPr/>
+        </p:nvSpPr>
+        <p:spPr>
+          <a:xfrm>
+            <a:off x="548640" y="5806440"/>
+            <a:ext cx="11091672" cy="457200"/>
+          </a:xfrm>
+          <a:prstGeom prst="rect">
+            <a:avLst/>
+          </a:prstGeom>
+          <a:noFill/>
+          <a:ln/>
+        </p:spPr>
+        <p:txBody>
+          <a:bodyPr wrap="square" lIns="0" tIns="0" rIns="0" bIns="0" rtlCol="0" anchor="ctr"/>
+          <a:lstStyle/>
+          <a:p>
+            <a:pPr indent="0" marL="0">
+              <a:buNone/>
+            </a:pPr>
+            <a:r>
+              <a:rPr lang="en-US" sz="1050" i="1" dirty="0">
                 <a:solidFill>
                   <a:srgbClr val="5B6470"/>
                 </a:solidFill>
@@ -4169,48 +3716,9 @@
                 <a:ea typeface="Calibri" pitchFamily="34" charset="-122"/>
                 <a:cs typeface="Calibri" pitchFamily="34" charset="-120"/>
               </a:rPr>
-              <a:t>Ruta de desarrollo: de pleno a senior</a:t>
-            </a:r>
-            <a:endParaRPr lang="en-US" sz="950" dirty="0"/>
-          </a:p>
-        </p:txBody>
-      </p:sp>
-      <p:sp>
-        <p:nvSpPr>
-          <p:cNvPr id="59" name="Text 57"/>
-          <p:cNvSpPr txBox="1"/>
-          <p:nvPr/>
-        </p:nvSpPr>
-        <p:spPr>
-          <a:xfrm>
-            <a:off x="548640" y="6400800"/>
-            <a:ext cx="10360152" cy="228600"/>
-          </a:xfrm>
-          <a:prstGeom prst="rect">
-            <a:avLst/>
-          </a:prstGeom>
-          <a:noFill/>
-          <a:ln/>
-        </p:spPr>
-        <p:txBody>
-          <a:bodyPr wrap="square" lIns="0" tIns="0" rIns="0" bIns="0" rtlCol="0" anchor="ctr"/>
-          <a:lstStyle/>
-          <a:p>
-            <a:pPr indent="0" marL="0">
-              <a:buNone/>
-            </a:pPr>
-            <a:r>
-              <a:rPr lang="en-US" sz="800" dirty="0">
-                <a:solidFill>
-                  <a:srgbClr val="8A94A0"/>
-                </a:solidFill>
-                <a:latin typeface="Calibri" pitchFamily="34" charset="0"/>
-                <a:ea typeface="Calibri" pitchFamily="34" charset="-122"/>
-                <a:cs typeface="Calibri" pitchFamily="34" charset="-120"/>
-              </a:rPr>
-              <a:t>Comparación cualitativa. El costo de cada alternativa se presenta con el resultado de la evaluación del perfil de los cargos.</a:t>
-            </a:r>
-            <a:endParaRPr lang="en-US" sz="800" dirty="0"/>
+              <a:t>Ambas parten del mismo diagnóstico y son compatibles con una implementación por etapas. El costo de cada una se presenta al comité con el resultado de la evaluación del perfil de los cargos.</a:t>
+            </a:r>
+            <a:endParaRPr lang="en-US" sz="1050" dirty="0"/>
           </a:p>
         </p:txBody>
       </p:sp>
@@ -4752,7 +4260,7 @@
                 <a:ea typeface="Calibri" pitchFamily="34" charset="-122"/>
                 <a:cs typeface="Calibri" pitchFamily="34" charset="-120"/>
               </a:rPr>
-              <a:t>Roles diferenciados: seniors a cargo de los bloques críticos y de la validación; plenos con ruta de desarrollo.</a:t>
+              <a:t>Grados y roles alineados con la complejidad de los reportes, según la alternativa que se elija.</a:t>
             </a:r>
             <a:endParaRPr lang="en-US" sz="1150" dirty="0"/>
           </a:p>
@@ -10553,31 +10061,17 @@
               <a:buNone/>
             </a:pPr>
             <a:r>
-              <a:rPr lang="en-US" sz="1200" b="1" dirty="0">
+              <a:rPr lang="en-US" sz="1500" i="1" dirty="0">
                 <a:solidFill>
                   <a:srgbClr val="5B6470"/>
                 </a:solidFill>
-                <a:latin typeface="Calibri" pitchFamily="34" charset="0"/>
-                <a:ea typeface="Calibri" pitchFamily="34" charset="-122"/>
-                <a:cs typeface="Calibri" pitchFamily="34" charset="-120"/>
-              </a:rPr>
-              <a:t>Lo que no se propone hoy: </a:t>
-            </a:r>
-            <a:pPr indent="0" marL="0">
-              <a:buNone/>
-            </a:pPr>
-            <a:r>
-              <a:rPr lang="en-US" sz="1200" dirty="0">
-                <a:solidFill>
-                  <a:srgbClr val="5B6470"/>
-                </a:solidFill>
-                <a:latin typeface="Calibri" pitchFamily="34" charset="0"/>
-                <a:ea typeface="Calibri" pitchFamily="34" charset="-122"/>
-                <a:cs typeface="Calibri" pitchFamily="34" charset="-120"/>
-              </a:rPr>
-              <a:t>cifras de remuneración, dotación adicional ni cambios de estructura. Llegan al comité con el resultado de la evaluación.</a:t>
-            </a:r>
-            <a:endParaRPr lang="en-US" sz="1200" dirty="0"/>
+                <a:latin typeface="Cambria" pitchFamily="34" charset="0"/>
+                <a:ea typeface="Cambria" pitchFamily="34" charset="-122"/>
+                <a:cs typeface="Cambria" pitchFamily="34" charset="-120"/>
+              </a:rPr>
+              <a:t>Tres pasos, una misma idea: valorar los cargos por el trabajo que hoy realizan.</a:t>
+            </a:r>
+            <a:endParaRPr lang="en-US" sz="1500" dirty="0"/>
           </a:p>
         </p:txBody>
       </p:sp>
@@ -23636,7 +23130,7 @@
                 <a:ea typeface="Calibri" pitchFamily="34" charset="-122"/>
                 <a:cs typeface="Calibri" pitchFamily="34" charset="-120"/>
               </a:rPr>
-              <a:t>LA FUNCIÓN</a:t>
+              <a:t>EL MERCADO</a:t>
             </a:r>
             <a:endParaRPr lang="en-US" sz="850" dirty="0"/>
           </a:p>
@@ -23714,7 +23208,7 @@
                 <a:ea typeface="Calibri" pitchFamily="34" charset="-122"/>
                 <a:cs typeface="Calibri" pitchFamily="34" charset="-120"/>
               </a:rPr>
-              <a:t>De un equipo plano con un mismo grado a roles diferenciados según complejidad y competencias</a:t>
+              <a:t>Los bancos sistémicos ya tratan esta función como especializada; competimos por el mismo talento</a:t>
             </a:r>
             <a:endParaRPr lang="en-US" sz="2600" dirty="0"/>
           </a:p>
@@ -23722,65 +23216,26 @@
       </p:sp>
       <p:sp>
         <p:nvSpPr>
-          <p:cNvPr id="9" name="Text 7"/>
-          <p:cNvSpPr txBox="1"/>
-          <p:nvPr/>
-        </p:nvSpPr>
-        <p:spPr>
-          <a:xfrm>
-            <a:off x="548640" y="1874520"/>
-            <a:ext cx="1828800" cy="228600"/>
-          </a:xfrm>
-          <a:prstGeom prst="rect">
-            <a:avLst/>
-          </a:prstGeom>
-          <a:noFill/>
-          <a:ln/>
-        </p:spPr>
-        <p:txBody>
-          <a:bodyPr wrap="square" lIns="0" tIns="0" rIns="0" bIns="0" rtlCol="0" anchor="ctr"/>
-          <a:lstStyle/>
-          <a:p>
-            <a:pPr indent="0" marL="0">
-              <a:buNone/>
-            </a:pPr>
-            <a:r>
-              <a:rPr lang="en-US" sz="900" b="1" spc="200" kern="0" dirty="0">
-                <a:solidFill>
-                  <a:srgbClr val="9AA3AE"/>
-                </a:solidFill>
-                <a:latin typeface="Calibri" pitchFamily="34" charset="0"/>
-                <a:ea typeface="Calibri" pitchFamily="34" charset="-122"/>
-                <a:cs typeface="Calibri" pitchFamily="34" charset="-120"/>
-              </a:rPr>
-              <a:t>HOY</a:t>
-            </a:r>
-            <a:endParaRPr lang="en-US" sz="900" dirty="0"/>
-          </a:p>
-        </p:txBody>
-      </p:sp>
-      <p:sp>
-        <p:nvSpPr>
-          <p:cNvPr id="10" name="Shape 8"/>
+          <p:cNvPr id="9" name="Shape 7"/>
           <p:cNvSpPr/>
           <p:nvPr/>
         </p:nvSpPr>
         <p:spPr>
           <a:xfrm>
-            <a:off x="2423160" y="2194560"/>
-            <a:ext cx="1645920" cy="384048"/>
+            <a:off x="548640" y="1965960"/>
+            <a:ext cx="2606040" cy="3291840"/>
           </a:xfrm>
           <a:prstGeom prst="roundRect">
             <a:avLst>
-              <a:gd name="adj" fmla="val 14286"/>
+              <a:gd name="adj" fmla="val 2105"/>
             </a:avLst>
           </a:prstGeom>
           <a:solidFill>
-            <a:srgbClr val="EDF0F3"/>
+            <a:srgbClr val="F6F7F9"/>
           </a:solidFill>
-          <a:ln w="12700">
-            <a:solidFill>
-              <a:srgbClr val="EDF0F3"/>
+          <a:ln w="9525">
+            <a:solidFill>
+              <a:srgbClr val="F6F7F9"/>
             </a:solidFill>
             <a:prstDash val="solid"/>
           </a:ln>
@@ -23788,30 +23243,69 @@
       </p:sp>
       <p:sp>
         <p:nvSpPr>
+          <p:cNvPr id="10" name="Text 8"/>
+          <p:cNvSpPr txBox="1"/>
+          <p:nvPr/>
+        </p:nvSpPr>
+        <p:spPr>
+          <a:xfrm>
+            <a:off x="777240" y="2148840"/>
+            <a:ext cx="2148840" cy="548640"/>
+          </a:xfrm>
+          <a:prstGeom prst="rect">
+            <a:avLst/>
+          </a:prstGeom>
+          <a:noFill/>
+          <a:ln/>
+        </p:spPr>
+        <p:txBody>
+          <a:bodyPr wrap="square" lIns="0" tIns="0" rIns="0" bIns="0" rtlCol="0" anchor="ctr"/>
+          <a:lstStyle/>
+          <a:p>
+            <a:pPr indent="0" marL="0">
+              <a:buNone/>
+            </a:pPr>
+            <a:r>
+              <a:rPr lang="en-US" sz="1350" b="1" dirty="0">
+                <a:solidFill>
+                  <a:srgbClr val="2B2F36"/>
+                </a:solidFill>
+                <a:latin typeface="Calibri" pitchFamily="34" charset="0"/>
+                <a:ea typeface="Calibri" pitchFamily="34" charset="-122"/>
+                <a:cs typeface="Calibri" pitchFamily="34" charset="-120"/>
+              </a:rPr>
+              <a:t>Función especializada</a:t>
+            </a:r>
+            <a:endParaRPr lang="en-US" sz="1350" dirty="0"/>
+          </a:p>
+        </p:txBody>
+      </p:sp>
+      <p:sp>
+        <p:nvSpPr>
           <p:cNvPr id="11" name="Text 9"/>
           <p:cNvSpPr txBox="1"/>
           <p:nvPr/>
         </p:nvSpPr>
         <p:spPr>
           <a:xfrm>
-            <a:off x="2478024" y="2194560"/>
-            <a:ext cx="1536192" cy="384048"/>
-          </a:xfrm>
-          <a:prstGeom prst="rect">
-            <a:avLst/>
-          </a:prstGeom>
-          <a:noFill/>
-          <a:ln/>
-        </p:spPr>
-        <p:txBody>
-          <a:bodyPr wrap="square" lIns="0" tIns="0" rIns="0" bIns="0" rtlCol="0" anchor="ctr"/>
-          <a:lstStyle/>
-          <a:p>
-            <a:pPr algn="ctr" indent="0" marL="0">
-              <a:buNone/>
-            </a:pPr>
-            <a:r>
-              <a:rPr lang="en-US" sz="1000" b="1" dirty="0">
+            <a:off x="777240" y="2743200"/>
+            <a:ext cx="2148840" cy="2377440"/>
+          </a:xfrm>
+          <a:prstGeom prst="rect">
+            <a:avLst/>
+          </a:prstGeom>
+          <a:noFill/>
+          <a:ln/>
+        </p:spPr>
+        <p:txBody>
+          <a:bodyPr wrap="square" lIns="0" tIns="0" rIns="0" bIns="0" rtlCol="0" anchor="t"/>
+          <a:lstStyle/>
+          <a:p>
+            <a:pPr indent="0" marL="0">
+              <a:buNone/>
+            </a:pPr>
+            <a:r>
+              <a:rPr lang="en-US" sz="1050" dirty="0">
                 <a:solidFill>
                   <a:srgbClr val="5B6470"/>
                 </a:solidFill>
@@ -23819,9 +23313,9 @@
                 <a:ea typeface="Calibri" pitchFamily="34" charset="-122"/>
                 <a:cs typeface="Calibri" pitchFamily="34" charset="-120"/>
               </a:rPr>
-              <a:t>Subgerente</a:t>
-            </a:r>
-            <a:endParaRPr lang="en-US" sz="1000" dirty="0"/>
+              <a:t>La reportería regulatoria opera en unidades dedicadas, separadas de los procesos de producto, con dueños por bloque de archivos del MSI y un responsable del proceso completo.</a:t>
+            </a:r>
+            <a:endParaRPr lang="en-US" sz="1050" dirty="0"/>
           </a:p>
         </p:txBody>
       </p:sp>
@@ -23833,43 +23327,20 @@
         </p:nvSpPr>
         <p:spPr>
           <a:xfrm>
-            <a:off x="3246120" y="2578608"/>
-            <a:ext cx="0" cy="256032"/>
-          </a:xfrm>
-          <a:prstGeom prst="line">
-            <a:avLst/>
-          </a:prstGeom>
-          <a:noFill/>
-          <a:ln w="15875">
-            <a:solidFill>
-              <a:srgbClr val="E3E6EA"/>
-            </a:solidFill>
-            <a:prstDash val="solid"/>
-          </a:ln>
-        </p:spPr>
-      </p:sp>
-      <p:sp>
-        <p:nvSpPr>
-          <p:cNvPr id="13" name="Shape 11"/>
-          <p:cNvSpPr/>
-          <p:nvPr/>
-        </p:nvSpPr>
-        <p:spPr>
-          <a:xfrm>
-            <a:off x="2423160" y="2834640"/>
-            <a:ext cx="1645920" cy="384048"/>
+            <a:off x="3337560" y="1965960"/>
+            <a:ext cx="2606040" cy="3291840"/>
           </a:xfrm>
           <a:prstGeom prst="roundRect">
             <a:avLst>
-              <a:gd name="adj" fmla="val 14286"/>
+              <a:gd name="adj" fmla="val 2105"/>
             </a:avLst>
           </a:prstGeom>
           <a:solidFill>
-            <a:srgbClr val="EDF0F3"/>
+            <a:srgbClr val="F6F7F9"/>
           </a:solidFill>
-          <a:ln w="12700">
-            <a:solidFill>
-              <a:srgbClr val="EDF0F3"/>
+          <a:ln w="9525">
+            <a:solidFill>
+              <a:srgbClr val="F6F7F9"/>
             </a:solidFill>
             <a:prstDash val="solid"/>
           </a:ln>
@@ -23877,30 +23348,69 @@
       </p:sp>
       <p:sp>
         <p:nvSpPr>
+          <p:cNvPr id="13" name="Text 11"/>
+          <p:cNvSpPr txBox="1"/>
+          <p:nvPr/>
+        </p:nvSpPr>
+        <p:spPr>
+          <a:xfrm>
+            <a:off x="3566160" y="2148840"/>
+            <a:ext cx="2148840" cy="548640"/>
+          </a:xfrm>
+          <a:prstGeom prst="rect">
+            <a:avLst/>
+          </a:prstGeom>
+          <a:noFill/>
+          <a:ln/>
+        </p:spPr>
+        <p:txBody>
+          <a:bodyPr wrap="square" lIns="0" tIns="0" rIns="0" bIns="0" rtlCol="0" anchor="ctr"/>
+          <a:lstStyle/>
+          <a:p>
+            <a:pPr indent="0" marL="0">
+              <a:buNone/>
+            </a:pPr>
+            <a:r>
+              <a:rPr lang="en-US" sz="1350" b="1" dirty="0">
+                <a:solidFill>
+                  <a:srgbClr val="2B2F36"/>
+                </a:solidFill>
+                <a:latin typeface="Calibri" pitchFamily="34" charset="0"/>
+                <a:ea typeface="Calibri" pitchFamily="34" charset="-122"/>
+                <a:cs typeface="Calibri" pitchFamily="34" charset="-120"/>
+              </a:rPr>
+              <a:t>Escala diferenciada</a:t>
+            </a:r>
+            <a:endParaRPr lang="en-US" sz="1350" dirty="0"/>
+          </a:p>
+        </p:txBody>
+      </p:sp>
+      <p:sp>
+        <p:nvSpPr>
           <p:cNvPr id="14" name="Text 12"/>
           <p:cNvSpPr txBox="1"/>
           <p:nvPr/>
         </p:nvSpPr>
         <p:spPr>
           <a:xfrm>
-            <a:off x="2478024" y="2834640"/>
-            <a:ext cx="1536192" cy="384048"/>
-          </a:xfrm>
-          <a:prstGeom prst="rect">
-            <a:avLst/>
-          </a:prstGeom>
-          <a:noFill/>
-          <a:ln/>
-        </p:spPr>
-        <p:txBody>
-          <a:bodyPr wrap="square" lIns="0" tIns="0" rIns="0" bIns="0" rtlCol="0" anchor="ctr"/>
-          <a:lstStyle/>
-          <a:p>
-            <a:pPr algn="ctr" indent="0" marL="0">
-              <a:buNone/>
-            </a:pPr>
-            <a:r>
-              <a:rPr lang="en-US" sz="1000" b="1" dirty="0">
+            <a:off x="3566160" y="2743200"/>
+            <a:ext cx="2148840" cy="2377440"/>
+          </a:xfrm>
+          <a:prstGeom prst="rect">
+            <a:avLst/>
+          </a:prstGeom>
+          <a:noFill/>
+          <a:ln/>
+        </p:spPr>
+        <p:txBody>
+          <a:bodyPr wrap="square" lIns="0" tIns="0" rIns="0" bIns="0" rtlCol="0" anchor="t"/>
+          <a:lstStyle/>
+          <a:p>
+            <a:pPr indent="0" marL="0">
+              <a:buNone/>
+            </a:pPr>
+            <a:r>
+              <a:rPr lang="en-US" sz="1050" dirty="0">
                 <a:solidFill>
                   <a:srgbClr val="5B6470"/>
                 </a:solidFill>
@@ -23908,9 +23418,9 @@
                 <a:ea typeface="Calibri" pitchFamily="34" charset="-122"/>
                 <a:cs typeface="Calibri" pitchFamily="34" charset="-120"/>
               </a:rPr>
-              <a:t>Jefe Normativo</a:t>
-            </a:r>
-            <a:endParaRPr lang="en-US" sz="1000" dirty="0"/>
+              <a:t>Analista, analista senior, jefe y subgerente son grados distintos, con separación entre quien prepara y quien firma. Las referencias públicas ubican jefaturas y especialistas contables en bandas distintas a los analistas operativos.</a:t>
+            </a:r>
+            <a:endParaRPr lang="en-US" sz="1050" dirty="0"/>
           </a:p>
         </p:txBody>
       </p:sp>
@@ -23922,16 +23432,20 @@
         </p:nvSpPr>
         <p:spPr>
           <a:xfrm>
-            <a:off x="3246120" y="3218688"/>
-            <a:ext cx="0" cy="301752"/>
-          </a:xfrm>
-          <a:prstGeom prst="line">
-            <a:avLst/>
-          </a:prstGeom>
-          <a:noFill/>
-          <a:ln w="15875">
-            <a:solidFill>
-              <a:srgbClr val="E3E6EA"/>
+            <a:off x="6126480" y="1965960"/>
+            <a:ext cx="2606040" cy="3291840"/>
+          </a:xfrm>
+          <a:prstGeom prst="roundRect">
+            <a:avLst>
+              <a:gd name="adj" fmla="val 2105"/>
+            </a:avLst>
+          </a:prstGeom>
+          <a:solidFill>
+            <a:srgbClr val="F6F7F9"/>
+          </a:solidFill>
+          <a:ln w="9525">
+            <a:solidFill>
+              <a:srgbClr val="F6F7F9"/>
             </a:solidFill>
             <a:prstDash val="solid"/>
           </a:ln>
@@ -23939,49 +23453,81 @@
       </p:sp>
       <p:sp>
         <p:nvSpPr>
-          <p:cNvPr id="16" name="Shape 14"/>
-          <p:cNvSpPr/>
-          <p:nvPr/>
-        </p:nvSpPr>
-        <p:spPr>
-          <a:xfrm>
-            <a:off x="960120" y="3520440"/>
-            <a:ext cx="4572000" cy="0"/>
-          </a:xfrm>
-          <a:prstGeom prst="line">
-            <a:avLst/>
-          </a:prstGeom>
-          <a:noFill/>
-          <a:ln w="15875">
-            <a:solidFill>
-              <a:srgbClr val="E3E6EA"/>
-            </a:solidFill>
-            <a:prstDash val="solid"/>
-          </a:ln>
-        </p:spPr>
-      </p:sp>
-      <p:sp>
-        <p:nvSpPr>
-          <p:cNvPr id="17" name="Shape 15"/>
-          <p:cNvSpPr/>
-          <p:nvPr/>
-        </p:nvSpPr>
-        <p:spPr>
-          <a:xfrm>
-            <a:off x="1005840" y="3520440"/>
-            <a:ext cx="0" cy="228600"/>
-          </a:xfrm>
-          <a:prstGeom prst="line">
-            <a:avLst/>
-          </a:prstGeom>
-          <a:noFill/>
-          <a:ln w="15875">
-            <a:solidFill>
-              <a:srgbClr val="E3E6EA"/>
-            </a:solidFill>
-            <a:prstDash val="solid"/>
-          </a:ln>
-        </p:spPr>
+          <p:cNvPr id="16" name="Text 14"/>
+          <p:cNvSpPr txBox="1"/>
+          <p:nvPr/>
+        </p:nvSpPr>
+        <p:spPr>
+          <a:xfrm>
+            <a:off x="6355080" y="2148840"/>
+            <a:ext cx="2148840" cy="548640"/>
+          </a:xfrm>
+          <a:prstGeom prst="rect">
+            <a:avLst/>
+          </a:prstGeom>
+          <a:noFill/>
+          <a:ln/>
+        </p:spPr>
+        <p:txBody>
+          <a:bodyPr wrap="square" lIns="0" tIns="0" rIns="0" bIns="0" rtlCol="0" anchor="ctr"/>
+          <a:lstStyle/>
+          <a:p>
+            <a:pPr indent="0" marL="0">
+              <a:buNone/>
+            </a:pPr>
+            <a:r>
+              <a:rPr lang="en-US" sz="1350" b="1" dirty="0">
+                <a:solidFill>
+                  <a:srgbClr val="2B2F36"/>
+                </a:solidFill>
+                <a:latin typeface="Calibri" pitchFamily="34" charset="0"/>
+                <a:ea typeface="Calibri" pitchFamily="34" charset="-122"/>
+                <a:cs typeface="Calibri" pitchFamily="34" charset="-120"/>
+              </a:rPr>
+              <a:t>Competencias disputadas</a:t>
+            </a:r>
+            <a:endParaRPr lang="en-US" sz="1350" dirty="0"/>
+          </a:p>
+        </p:txBody>
+      </p:sp>
+      <p:sp>
+        <p:nvSpPr>
+          <p:cNvPr id="17" name="Text 15"/>
+          <p:cNvSpPr txBox="1"/>
+          <p:nvPr/>
+        </p:nvSpPr>
+        <p:spPr>
+          <a:xfrm>
+            <a:off x="6355080" y="2743200"/>
+            <a:ext cx="2148840" cy="2377440"/>
+          </a:xfrm>
+          <a:prstGeom prst="rect">
+            <a:avLst/>
+          </a:prstGeom>
+          <a:noFill/>
+          <a:ln/>
+        </p:spPr>
+        <p:txBody>
+          <a:bodyPr wrap="square" lIns="0" tIns="0" rIns="0" bIns="0" rtlCol="0" anchor="t"/>
+          <a:lstStyle/>
+          <a:p>
+            <a:pPr indent="0" marL="0">
+              <a:buNone/>
+            </a:pPr>
+            <a:r>
+              <a:rPr lang="en-US" sz="1050" dirty="0">
+                <a:solidFill>
+                  <a:srgbClr val="5B6470"/>
+                </a:solidFill>
+                <a:latin typeface="Calibri" pitchFamily="34" charset="0"/>
+                <a:ea typeface="Calibri" pitchFamily="34" charset="-122"/>
+                <a:cs typeface="Calibri" pitchFamily="34" charset="-120"/>
+              </a:rPr>
+              <a:t>SQL, plataformas de datos como Databricks y conocimiento del MSI, del REDEC y de Basilea III son el perfil que buscan Riesgo, Contabilidad, las áreas de datos y los pares. Un reemplazo se paga en meses de curva de aprendizaje.</a:t>
+            </a:r>
+            <a:endParaRPr lang="en-US" sz="1050" dirty="0"/>
+          </a:p>
+        </p:txBody>
       </p:sp>
       <p:sp>
         <p:nvSpPr>
@@ -23991,20 +23537,20 @@
         </p:nvSpPr>
         <p:spPr>
           <a:xfrm>
-            <a:off x="594360" y="3749040"/>
-            <a:ext cx="822960" cy="566928"/>
+            <a:off x="8915400" y="1965960"/>
+            <a:ext cx="2606040" cy="3291840"/>
           </a:xfrm>
           <a:prstGeom prst="roundRect">
             <a:avLst>
-              <a:gd name="adj" fmla="val 9677"/>
+              <a:gd name="adj" fmla="val 2105"/>
             </a:avLst>
           </a:prstGeom>
           <a:solidFill>
-            <a:srgbClr val="9AA3AE"/>
+            <a:srgbClr val="F6F7F9"/>
           </a:solidFill>
-          <a:ln w="12700">
-            <a:solidFill>
-              <a:srgbClr val="9AA3AE"/>
+          <a:ln w="9525">
+            <a:solidFill>
+              <a:srgbClr val="F6F7F9"/>
             </a:solidFill>
             <a:prstDash val="solid"/>
           </a:ln>
@@ -24018,1665 +23564,118 @@
         </p:nvSpPr>
         <p:spPr>
           <a:xfrm>
-            <a:off x="649224" y="3749040"/>
-            <a:ext cx="713232" cy="566928"/>
-          </a:xfrm>
-          <a:prstGeom prst="rect">
-            <a:avLst/>
-          </a:prstGeom>
-          <a:noFill/>
-          <a:ln/>
-        </p:spPr>
-        <p:txBody>
-          <a:bodyPr wrap="square" lIns="0" tIns="0" rIns="0" bIns="0" rtlCol="0" anchor="ctr"/>
-          <a:lstStyle/>
-          <a:p>
-            <a:pPr algn="ctr" indent="0" marL="0">
-              <a:buNone/>
-            </a:pPr>
-            <a:r>
-              <a:rPr lang="en-US" sz="750" b="1" dirty="0">
-                <a:solidFill>
-                  <a:srgbClr val="FFFFFF"/>
-                </a:solidFill>
-                <a:latin typeface="Calibri" pitchFamily="34" charset="0"/>
-                <a:ea typeface="Calibri" pitchFamily="34" charset="-122"/>
-                <a:cs typeface="Calibri" pitchFamily="34" charset="-120"/>
-              </a:rPr>
-              <a:t>Especialista</a:t>
-            </a:r>
-            <a:endParaRPr lang="en-US" sz="750" dirty="0"/>
-          </a:p>
-          <a:p>
-            <a:pPr algn="ctr" indent="0" marL="0">
-              <a:buNone/>
-            </a:pPr>
-            <a:r>
-              <a:rPr lang="en-US" sz="750" b="1" dirty="0">
-                <a:solidFill>
-                  <a:srgbClr val="FFFFFF"/>
-                </a:solidFill>
-                <a:latin typeface="Calibri" pitchFamily="34" charset="0"/>
-                <a:ea typeface="Calibri" pitchFamily="34" charset="-122"/>
-                <a:cs typeface="Calibri" pitchFamily="34" charset="-120"/>
-              </a:rPr>
-              <a:t>Normativo</a:t>
-            </a:r>
-            <a:endParaRPr lang="en-US" sz="750" dirty="0"/>
-          </a:p>
-        </p:txBody>
-      </p:sp>
-      <p:sp>
-        <p:nvSpPr>
-          <p:cNvPr id="20" name="Shape 18"/>
-          <p:cNvSpPr/>
-          <p:nvPr/>
-        </p:nvSpPr>
-        <p:spPr>
-          <a:xfrm>
-            <a:off x="1901952" y="3520440"/>
-            <a:ext cx="0" cy="228600"/>
-          </a:xfrm>
-          <a:prstGeom prst="line">
-            <a:avLst/>
-          </a:prstGeom>
-          <a:noFill/>
-          <a:ln w="15875">
-            <a:solidFill>
-              <a:srgbClr val="E3E6EA"/>
-            </a:solidFill>
-            <a:prstDash val="solid"/>
-          </a:ln>
-        </p:spPr>
-      </p:sp>
-      <p:sp>
-        <p:nvSpPr>
-          <p:cNvPr id="21" name="Shape 19"/>
-          <p:cNvSpPr/>
-          <p:nvPr/>
-        </p:nvSpPr>
-        <p:spPr>
-          <a:xfrm>
-            <a:off x="1490472" y="3749040"/>
-            <a:ext cx="822960" cy="566928"/>
-          </a:xfrm>
-          <a:prstGeom prst="roundRect">
-            <a:avLst>
-              <a:gd name="adj" fmla="val 9677"/>
-            </a:avLst>
-          </a:prstGeom>
-          <a:solidFill>
-            <a:srgbClr val="9AA3AE"/>
-          </a:solidFill>
-          <a:ln w="12700">
-            <a:solidFill>
-              <a:srgbClr val="9AA3AE"/>
-            </a:solidFill>
-            <a:prstDash val="solid"/>
-          </a:ln>
-        </p:spPr>
+            <a:off x="9144000" y="2148840"/>
+            <a:ext cx="2148840" cy="548640"/>
+          </a:xfrm>
+          <a:prstGeom prst="rect">
+            <a:avLst/>
+          </a:prstGeom>
+          <a:noFill/>
+          <a:ln/>
+        </p:spPr>
+        <p:txBody>
+          <a:bodyPr wrap="square" lIns="0" tIns="0" rIns="0" bIns="0" rtlCol="0" anchor="ctr"/>
+          <a:lstStyle/>
+          <a:p>
+            <a:pPr indent="0" marL="0">
+              <a:buNone/>
+            </a:pPr>
+            <a:r>
+              <a:rPr lang="en-US" sz="1350" b="1" dirty="0">
+                <a:solidFill>
+                  <a:srgbClr val="2B2F36"/>
+                </a:solidFill>
+                <a:latin typeface="Calibri" pitchFamily="34" charset="0"/>
+                <a:ea typeface="Calibri" pitchFamily="34" charset="-122"/>
+                <a:cs typeface="Calibri" pitchFamily="34" charset="-120"/>
+              </a:rPr>
+              <a:t>Perímetro en expansión</a:t>
+            </a:r>
+            <a:endParaRPr lang="en-US" sz="1350" dirty="0"/>
+          </a:p>
+        </p:txBody>
+      </p:sp>
+      <p:sp>
+        <p:nvSpPr>
+          <p:cNvPr id="20" name="Text 18"/>
+          <p:cNvSpPr txBox="1"/>
+          <p:nvPr/>
+        </p:nvSpPr>
+        <p:spPr>
+          <a:xfrm>
+            <a:off x="9144000" y="2743200"/>
+            <a:ext cx="2148840" cy="2377440"/>
+          </a:xfrm>
+          <a:prstGeom prst="rect">
+            <a:avLst/>
+          </a:prstGeom>
+          <a:noFill/>
+          <a:ln/>
+        </p:spPr>
+        <p:txBody>
+          <a:bodyPr wrap="square" lIns="0" tIns="0" rIns="0" bIns="0" rtlCol="0" anchor="t"/>
+          <a:lstStyle/>
+          <a:p>
+            <a:pPr indent="0" marL="0">
+              <a:buNone/>
+            </a:pPr>
+            <a:r>
+              <a:rPr lang="en-US" sz="1050" dirty="0">
+                <a:solidFill>
+                  <a:srgbClr val="5B6470"/>
+                </a:solidFill>
+                <a:latin typeface="Calibri" pitchFamily="34" charset="0"/>
+                <a:ea typeface="Calibri" pitchFamily="34" charset="-122"/>
+                <a:cs typeface="Calibri" pitchFamily="34" charset="-120"/>
+              </a:rPr>
+              <a:t>Registro de Deuda Consolidada, cierre de Basilea III y cambios permanentes al MSI aumentan la carga en todos los bancos, lo que intensifica la competencia por el mismo talento.</a:t>
+            </a:r>
+            <a:endParaRPr lang="en-US" sz="1050" dirty="0"/>
+          </a:p>
+        </p:txBody>
+      </p:sp>
+      <p:sp>
+        <p:nvSpPr>
+          <p:cNvPr id="21" name="Text 19"/>
+          <p:cNvSpPr txBox="1"/>
+          <p:nvPr/>
+        </p:nvSpPr>
+        <p:spPr>
+          <a:xfrm>
+            <a:off x="548640" y="5486400"/>
+            <a:ext cx="11091672" cy="457200"/>
+          </a:xfrm>
+          <a:prstGeom prst="rect">
+            <a:avLst/>
+          </a:prstGeom>
+          <a:noFill/>
+          <a:ln/>
+        </p:spPr>
+        <p:txBody>
+          <a:bodyPr wrap="square" lIns="0" tIns="0" rIns="0" bIns="0" rtlCol="0" anchor="ctr"/>
+          <a:lstStyle/>
+          <a:p>
+            <a:pPr indent="0" marL="0">
+              <a:buNone/>
+            </a:pPr>
+            <a:r>
+              <a:rPr lang="en-US" sz="1100" i="1" dirty="0">
+                <a:solidFill>
+                  <a:srgbClr val="5B6470"/>
+                </a:solidFill>
+                <a:latin typeface="Calibri" pitchFamily="34" charset="0"/>
+                <a:ea typeface="Calibri" pitchFamily="34" charset="-122"/>
+                <a:cs typeface="Calibri" pitchFamily="34" charset="-120"/>
+              </a:rPr>
+              <a:t>Referencia cualitativa a propósito: las cifras de mercado llegan al comité con el diagnóstico de la fase 1, validadas con una fuente formal de remuneraciones.</a:t>
+            </a:r>
+            <a:endParaRPr lang="en-US" sz="1100" dirty="0"/>
+          </a:p>
+        </p:txBody>
       </p:sp>
       <p:sp>
         <p:nvSpPr>
           <p:cNvPr id="22" name="Text 20"/>
-          <p:cNvSpPr txBox="1"/>
-          <p:nvPr/>
-        </p:nvSpPr>
-        <p:spPr>
-          <a:xfrm>
-            <a:off x="1545336" y="3749040"/>
-            <a:ext cx="713232" cy="566928"/>
-          </a:xfrm>
-          <a:prstGeom prst="rect">
-            <a:avLst/>
-          </a:prstGeom>
-          <a:noFill/>
-          <a:ln/>
-        </p:spPr>
-        <p:txBody>
-          <a:bodyPr wrap="square" lIns="0" tIns="0" rIns="0" bIns="0" rtlCol="0" anchor="ctr"/>
-          <a:lstStyle/>
-          <a:p>
-            <a:pPr algn="ctr" indent="0" marL="0">
-              <a:buNone/>
-            </a:pPr>
-            <a:r>
-              <a:rPr lang="en-US" sz="750" b="1" dirty="0">
-                <a:solidFill>
-                  <a:srgbClr val="FFFFFF"/>
-                </a:solidFill>
-                <a:latin typeface="Calibri" pitchFamily="34" charset="0"/>
-                <a:ea typeface="Calibri" pitchFamily="34" charset="-122"/>
-                <a:cs typeface="Calibri" pitchFamily="34" charset="-120"/>
-              </a:rPr>
-              <a:t>Especialista</a:t>
-            </a:r>
-            <a:endParaRPr lang="en-US" sz="750" dirty="0"/>
-          </a:p>
-          <a:p>
-            <a:pPr algn="ctr" indent="0" marL="0">
-              <a:buNone/>
-            </a:pPr>
-            <a:r>
-              <a:rPr lang="en-US" sz="750" b="1" dirty="0">
-                <a:solidFill>
-                  <a:srgbClr val="FFFFFF"/>
-                </a:solidFill>
-                <a:latin typeface="Calibri" pitchFamily="34" charset="0"/>
-                <a:ea typeface="Calibri" pitchFamily="34" charset="-122"/>
-                <a:cs typeface="Calibri" pitchFamily="34" charset="-120"/>
-              </a:rPr>
-              <a:t>Normativo</a:t>
-            </a:r>
-            <a:endParaRPr lang="en-US" sz="750" dirty="0"/>
-          </a:p>
-        </p:txBody>
-      </p:sp>
-      <p:sp>
-        <p:nvSpPr>
-          <p:cNvPr id="23" name="Shape 21"/>
-          <p:cNvSpPr/>
-          <p:nvPr/>
-        </p:nvSpPr>
-        <p:spPr>
-          <a:xfrm>
-            <a:off x="2798064" y="3520440"/>
-            <a:ext cx="0" cy="228600"/>
-          </a:xfrm>
-          <a:prstGeom prst="line">
-            <a:avLst/>
-          </a:prstGeom>
-          <a:noFill/>
-          <a:ln w="15875">
-            <a:solidFill>
-              <a:srgbClr val="E3E6EA"/>
-            </a:solidFill>
-            <a:prstDash val="solid"/>
-          </a:ln>
-        </p:spPr>
-      </p:sp>
-      <p:sp>
-        <p:nvSpPr>
-          <p:cNvPr id="24" name="Shape 22"/>
-          <p:cNvSpPr/>
-          <p:nvPr/>
-        </p:nvSpPr>
-        <p:spPr>
-          <a:xfrm>
-            <a:off x="2386584" y="3749040"/>
-            <a:ext cx="822960" cy="566928"/>
-          </a:xfrm>
-          <a:prstGeom prst="roundRect">
-            <a:avLst>
-              <a:gd name="adj" fmla="val 9677"/>
-            </a:avLst>
-          </a:prstGeom>
-          <a:solidFill>
-            <a:srgbClr val="9AA3AE"/>
-          </a:solidFill>
-          <a:ln w="12700">
-            <a:solidFill>
-              <a:srgbClr val="9AA3AE"/>
-            </a:solidFill>
-            <a:prstDash val="solid"/>
-          </a:ln>
-        </p:spPr>
-      </p:sp>
-      <p:sp>
-        <p:nvSpPr>
-          <p:cNvPr id="25" name="Text 23"/>
-          <p:cNvSpPr txBox="1"/>
-          <p:nvPr/>
-        </p:nvSpPr>
-        <p:spPr>
-          <a:xfrm>
-            <a:off x="2441448" y="3749040"/>
-            <a:ext cx="713232" cy="566928"/>
-          </a:xfrm>
-          <a:prstGeom prst="rect">
-            <a:avLst/>
-          </a:prstGeom>
-          <a:noFill/>
-          <a:ln/>
-        </p:spPr>
-        <p:txBody>
-          <a:bodyPr wrap="square" lIns="0" tIns="0" rIns="0" bIns="0" rtlCol="0" anchor="ctr"/>
-          <a:lstStyle/>
-          <a:p>
-            <a:pPr algn="ctr" indent="0" marL="0">
-              <a:buNone/>
-            </a:pPr>
-            <a:r>
-              <a:rPr lang="en-US" sz="750" b="1" dirty="0">
-                <a:solidFill>
-                  <a:srgbClr val="FFFFFF"/>
-                </a:solidFill>
-                <a:latin typeface="Calibri" pitchFamily="34" charset="0"/>
-                <a:ea typeface="Calibri" pitchFamily="34" charset="-122"/>
-                <a:cs typeface="Calibri" pitchFamily="34" charset="-120"/>
-              </a:rPr>
-              <a:t>Especialista</a:t>
-            </a:r>
-            <a:endParaRPr lang="en-US" sz="750" dirty="0"/>
-          </a:p>
-          <a:p>
-            <a:pPr algn="ctr" indent="0" marL="0">
-              <a:buNone/>
-            </a:pPr>
-            <a:r>
-              <a:rPr lang="en-US" sz="750" b="1" dirty="0">
-                <a:solidFill>
-                  <a:srgbClr val="FFFFFF"/>
-                </a:solidFill>
-                <a:latin typeface="Calibri" pitchFamily="34" charset="0"/>
-                <a:ea typeface="Calibri" pitchFamily="34" charset="-122"/>
-                <a:cs typeface="Calibri" pitchFamily="34" charset="-120"/>
-              </a:rPr>
-              <a:t>Normativo</a:t>
-            </a:r>
-            <a:endParaRPr lang="en-US" sz="750" dirty="0"/>
-          </a:p>
-        </p:txBody>
-      </p:sp>
-      <p:sp>
-        <p:nvSpPr>
-          <p:cNvPr id="26" name="Shape 24"/>
-          <p:cNvSpPr/>
-          <p:nvPr/>
-        </p:nvSpPr>
-        <p:spPr>
-          <a:xfrm>
-            <a:off x="3694176" y="3520440"/>
-            <a:ext cx="0" cy="228600"/>
-          </a:xfrm>
-          <a:prstGeom prst="line">
-            <a:avLst/>
-          </a:prstGeom>
-          <a:noFill/>
-          <a:ln w="15875">
-            <a:solidFill>
-              <a:srgbClr val="E3E6EA"/>
-            </a:solidFill>
-            <a:prstDash val="solid"/>
-          </a:ln>
-        </p:spPr>
-      </p:sp>
-      <p:sp>
-        <p:nvSpPr>
-          <p:cNvPr id="27" name="Shape 25"/>
-          <p:cNvSpPr/>
-          <p:nvPr/>
-        </p:nvSpPr>
-        <p:spPr>
-          <a:xfrm>
-            <a:off x="3282696" y="3749040"/>
-            <a:ext cx="822960" cy="566928"/>
-          </a:xfrm>
-          <a:prstGeom prst="roundRect">
-            <a:avLst>
-              <a:gd name="adj" fmla="val 9677"/>
-            </a:avLst>
-          </a:prstGeom>
-          <a:solidFill>
-            <a:srgbClr val="9AA3AE"/>
-          </a:solidFill>
-          <a:ln w="12700">
-            <a:solidFill>
-              <a:srgbClr val="9AA3AE"/>
-            </a:solidFill>
-            <a:prstDash val="solid"/>
-          </a:ln>
-        </p:spPr>
-      </p:sp>
-      <p:sp>
-        <p:nvSpPr>
-          <p:cNvPr id="28" name="Text 26"/>
-          <p:cNvSpPr txBox="1"/>
-          <p:nvPr/>
-        </p:nvSpPr>
-        <p:spPr>
-          <a:xfrm>
-            <a:off x="3337560" y="3749040"/>
-            <a:ext cx="713232" cy="566928"/>
-          </a:xfrm>
-          <a:prstGeom prst="rect">
-            <a:avLst/>
-          </a:prstGeom>
-          <a:noFill/>
-          <a:ln/>
-        </p:spPr>
-        <p:txBody>
-          <a:bodyPr wrap="square" lIns="0" tIns="0" rIns="0" bIns="0" rtlCol="0" anchor="ctr"/>
-          <a:lstStyle/>
-          <a:p>
-            <a:pPr algn="ctr" indent="0" marL="0">
-              <a:buNone/>
-            </a:pPr>
-            <a:r>
-              <a:rPr lang="en-US" sz="750" b="1" dirty="0">
-                <a:solidFill>
-                  <a:srgbClr val="FFFFFF"/>
-                </a:solidFill>
-                <a:latin typeface="Calibri" pitchFamily="34" charset="0"/>
-                <a:ea typeface="Calibri" pitchFamily="34" charset="-122"/>
-                <a:cs typeface="Calibri" pitchFamily="34" charset="-120"/>
-              </a:rPr>
-              <a:t>Especialista</a:t>
-            </a:r>
-            <a:endParaRPr lang="en-US" sz="750" dirty="0"/>
-          </a:p>
-          <a:p>
-            <a:pPr algn="ctr" indent="0" marL="0">
-              <a:buNone/>
-            </a:pPr>
-            <a:r>
-              <a:rPr lang="en-US" sz="750" b="1" dirty="0">
-                <a:solidFill>
-                  <a:srgbClr val="FFFFFF"/>
-                </a:solidFill>
-                <a:latin typeface="Calibri" pitchFamily="34" charset="0"/>
-                <a:ea typeface="Calibri" pitchFamily="34" charset="-122"/>
-                <a:cs typeface="Calibri" pitchFamily="34" charset="-120"/>
-              </a:rPr>
-              <a:t>Normativo</a:t>
-            </a:r>
-            <a:endParaRPr lang="en-US" sz="750" dirty="0"/>
-          </a:p>
-        </p:txBody>
-      </p:sp>
-      <p:sp>
-        <p:nvSpPr>
-          <p:cNvPr id="29" name="Shape 27"/>
-          <p:cNvSpPr/>
-          <p:nvPr/>
-        </p:nvSpPr>
-        <p:spPr>
-          <a:xfrm>
-            <a:off x="4590288" y="3520440"/>
-            <a:ext cx="0" cy="228600"/>
-          </a:xfrm>
-          <a:prstGeom prst="line">
-            <a:avLst/>
-          </a:prstGeom>
-          <a:noFill/>
-          <a:ln w="15875">
-            <a:solidFill>
-              <a:srgbClr val="E3E6EA"/>
-            </a:solidFill>
-            <a:prstDash val="solid"/>
-          </a:ln>
-        </p:spPr>
-      </p:sp>
-      <p:sp>
-        <p:nvSpPr>
-          <p:cNvPr id="30" name="Shape 28"/>
-          <p:cNvSpPr/>
-          <p:nvPr/>
-        </p:nvSpPr>
-        <p:spPr>
-          <a:xfrm>
-            <a:off x="4178808" y="3749040"/>
-            <a:ext cx="822960" cy="566928"/>
-          </a:xfrm>
-          <a:prstGeom prst="roundRect">
-            <a:avLst>
-              <a:gd name="adj" fmla="val 9677"/>
-            </a:avLst>
-          </a:prstGeom>
-          <a:solidFill>
-            <a:srgbClr val="9AA3AE"/>
-          </a:solidFill>
-          <a:ln w="12700">
-            <a:solidFill>
-              <a:srgbClr val="9AA3AE"/>
-            </a:solidFill>
-            <a:prstDash val="solid"/>
-          </a:ln>
-        </p:spPr>
-      </p:sp>
-      <p:sp>
-        <p:nvSpPr>
-          <p:cNvPr id="31" name="Text 29"/>
-          <p:cNvSpPr txBox="1"/>
-          <p:nvPr/>
-        </p:nvSpPr>
-        <p:spPr>
-          <a:xfrm>
-            <a:off x="4233672" y="3749040"/>
-            <a:ext cx="713232" cy="566928"/>
-          </a:xfrm>
-          <a:prstGeom prst="rect">
-            <a:avLst/>
-          </a:prstGeom>
-          <a:noFill/>
-          <a:ln/>
-        </p:spPr>
-        <p:txBody>
-          <a:bodyPr wrap="square" lIns="0" tIns="0" rIns="0" bIns="0" rtlCol="0" anchor="ctr"/>
-          <a:lstStyle/>
-          <a:p>
-            <a:pPr algn="ctr" indent="0" marL="0">
-              <a:buNone/>
-            </a:pPr>
-            <a:r>
-              <a:rPr lang="en-US" sz="750" b="1" dirty="0">
-                <a:solidFill>
-                  <a:srgbClr val="FFFFFF"/>
-                </a:solidFill>
-                <a:latin typeface="Calibri" pitchFamily="34" charset="0"/>
-                <a:ea typeface="Calibri" pitchFamily="34" charset="-122"/>
-                <a:cs typeface="Calibri" pitchFamily="34" charset="-120"/>
-              </a:rPr>
-              <a:t>Especialista</a:t>
-            </a:r>
-            <a:endParaRPr lang="en-US" sz="750" dirty="0"/>
-          </a:p>
-          <a:p>
-            <a:pPr algn="ctr" indent="0" marL="0">
-              <a:buNone/>
-            </a:pPr>
-            <a:r>
-              <a:rPr lang="en-US" sz="750" b="1" dirty="0">
-                <a:solidFill>
-                  <a:srgbClr val="FFFFFF"/>
-                </a:solidFill>
-                <a:latin typeface="Calibri" pitchFamily="34" charset="0"/>
-                <a:ea typeface="Calibri" pitchFamily="34" charset="-122"/>
-                <a:cs typeface="Calibri" pitchFamily="34" charset="-120"/>
-              </a:rPr>
-              <a:t>Normativo</a:t>
-            </a:r>
-            <a:endParaRPr lang="en-US" sz="750" dirty="0"/>
-          </a:p>
-        </p:txBody>
-      </p:sp>
-      <p:sp>
-        <p:nvSpPr>
-          <p:cNvPr id="32" name="Shape 30"/>
-          <p:cNvSpPr/>
-          <p:nvPr/>
-        </p:nvSpPr>
-        <p:spPr>
-          <a:xfrm>
-            <a:off x="5486400" y="3520440"/>
-            <a:ext cx="0" cy="228600"/>
-          </a:xfrm>
-          <a:prstGeom prst="line">
-            <a:avLst/>
-          </a:prstGeom>
-          <a:noFill/>
-          <a:ln w="15875">
-            <a:solidFill>
-              <a:srgbClr val="E3E6EA"/>
-            </a:solidFill>
-            <a:prstDash val="solid"/>
-          </a:ln>
-        </p:spPr>
-      </p:sp>
-      <p:sp>
-        <p:nvSpPr>
-          <p:cNvPr id="33" name="Shape 31"/>
-          <p:cNvSpPr/>
-          <p:nvPr/>
-        </p:nvSpPr>
-        <p:spPr>
-          <a:xfrm>
-            <a:off x="5074920" y="3749040"/>
-            <a:ext cx="822960" cy="566928"/>
-          </a:xfrm>
-          <a:prstGeom prst="roundRect">
-            <a:avLst>
-              <a:gd name="adj" fmla="val 9677"/>
-            </a:avLst>
-          </a:prstGeom>
-          <a:solidFill>
-            <a:srgbClr val="9AA3AE"/>
-          </a:solidFill>
-          <a:ln w="12700">
-            <a:solidFill>
-              <a:srgbClr val="9AA3AE"/>
-            </a:solidFill>
-            <a:prstDash val="solid"/>
-          </a:ln>
-        </p:spPr>
-      </p:sp>
-      <p:sp>
-        <p:nvSpPr>
-          <p:cNvPr id="34" name="Text 32"/>
-          <p:cNvSpPr txBox="1"/>
-          <p:nvPr/>
-        </p:nvSpPr>
-        <p:spPr>
-          <a:xfrm>
-            <a:off x="5129784" y="3749040"/>
-            <a:ext cx="713232" cy="566928"/>
-          </a:xfrm>
-          <a:prstGeom prst="rect">
-            <a:avLst/>
-          </a:prstGeom>
-          <a:noFill/>
-          <a:ln/>
-        </p:spPr>
-        <p:txBody>
-          <a:bodyPr wrap="square" lIns="0" tIns="0" rIns="0" bIns="0" rtlCol="0" anchor="ctr"/>
-          <a:lstStyle/>
-          <a:p>
-            <a:pPr algn="ctr" indent="0" marL="0">
-              <a:buNone/>
-            </a:pPr>
-            <a:r>
-              <a:rPr lang="en-US" sz="750" b="1" dirty="0">
-                <a:solidFill>
-                  <a:srgbClr val="FFFFFF"/>
-                </a:solidFill>
-                <a:latin typeface="Calibri" pitchFamily="34" charset="0"/>
-                <a:ea typeface="Calibri" pitchFamily="34" charset="-122"/>
-                <a:cs typeface="Calibri" pitchFamily="34" charset="-120"/>
-              </a:rPr>
-              <a:t>Especialista</a:t>
-            </a:r>
-            <a:endParaRPr lang="en-US" sz="750" dirty="0"/>
-          </a:p>
-          <a:p>
-            <a:pPr algn="ctr" indent="0" marL="0">
-              <a:buNone/>
-            </a:pPr>
-            <a:r>
-              <a:rPr lang="en-US" sz="750" b="1" dirty="0">
-                <a:solidFill>
-                  <a:srgbClr val="FFFFFF"/>
-                </a:solidFill>
-                <a:latin typeface="Calibri" pitchFamily="34" charset="0"/>
-                <a:ea typeface="Calibri" pitchFamily="34" charset="-122"/>
-                <a:cs typeface="Calibri" pitchFamily="34" charset="-120"/>
-              </a:rPr>
-              <a:t>Normativo</a:t>
-            </a:r>
-            <a:endParaRPr lang="en-US" sz="750" dirty="0"/>
-          </a:p>
-        </p:txBody>
-      </p:sp>
-      <p:sp>
-        <p:nvSpPr>
-          <p:cNvPr id="35" name="Shape 33"/>
-          <p:cNvSpPr/>
-          <p:nvPr/>
-        </p:nvSpPr>
-        <p:spPr>
-          <a:xfrm>
-            <a:off x="521208" y="4416552"/>
-            <a:ext cx="5449824" cy="274320"/>
-          </a:xfrm>
-          <a:prstGeom prst="roundRect">
-            <a:avLst>
-              <a:gd name="adj" fmla="val 16667"/>
-            </a:avLst>
-          </a:prstGeom>
-          <a:solidFill>
-            <a:srgbClr val="EDF0F3"/>
-          </a:solidFill>
-          <a:ln w="12700">
-            <a:solidFill>
-              <a:srgbClr val="EDF0F3"/>
-            </a:solidFill>
-            <a:prstDash val="solid"/>
-          </a:ln>
-        </p:spPr>
-      </p:sp>
-      <p:sp>
-        <p:nvSpPr>
-          <p:cNvPr id="36" name="Text 34"/>
-          <p:cNvSpPr txBox="1"/>
-          <p:nvPr/>
-        </p:nvSpPr>
-        <p:spPr>
-          <a:xfrm>
-            <a:off x="521208" y="4416552"/>
-            <a:ext cx="5449824" cy="274320"/>
-          </a:xfrm>
-          <a:prstGeom prst="rect">
-            <a:avLst/>
-          </a:prstGeom>
-          <a:noFill/>
-          <a:ln/>
-        </p:spPr>
-        <p:txBody>
-          <a:bodyPr wrap="square" lIns="0" tIns="0" rIns="0" bIns="0" rtlCol="0" anchor="ctr"/>
-          <a:lstStyle/>
-          <a:p>
-            <a:pPr algn="ctr" indent="0" marL="0">
-              <a:buNone/>
-            </a:pPr>
-            <a:r>
-              <a:rPr lang="en-US" sz="900" dirty="0">
-                <a:solidFill>
-                  <a:srgbClr val="5B6470"/>
-                </a:solidFill>
-                <a:latin typeface="Calibri" pitchFamily="34" charset="0"/>
-                <a:ea typeface="Calibri" pitchFamily="34" charset="-122"/>
-                <a:cs typeface="Calibri" pitchFamily="34" charset="-120"/>
-              </a:rPr>
-              <a:t>Seis cargos, un mismo grado, 18 reportes repartidos sin diferenciar complejidad</a:t>
-            </a:r>
-            <a:endParaRPr lang="en-US" sz="900" dirty="0"/>
-          </a:p>
-        </p:txBody>
-      </p:sp>
-      <p:sp>
-        <p:nvSpPr>
-          <p:cNvPr id="37" name="Shape 35"/>
-          <p:cNvSpPr/>
-          <p:nvPr/>
-        </p:nvSpPr>
-        <p:spPr>
-          <a:xfrm>
-            <a:off x="6080760" y="3291840"/>
-            <a:ext cx="502920" cy="365760"/>
-          </a:xfrm>
-          <a:prstGeom prst="rightArrow">
-            <a:avLst/>
-          </a:prstGeom>
-          <a:solidFill>
-            <a:srgbClr val="A9BEDC"/>
-          </a:solidFill>
-          <a:ln w="12700">
-            <a:solidFill>
-              <a:srgbClr val="A9BEDC"/>
-            </a:solidFill>
-            <a:prstDash val="solid"/>
-          </a:ln>
-        </p:spPr>
-      </p:sp>
-      <p:sp>
-        <p:nvSpPr>
-          <p:cNvPr id="38" name="Text 36"/>
-          <p:cNvSpPr txBox="1"/>
-          <p:nvPr/>
-        </p:nvSpPr>
-        <p:spPr>
-          <a:xfrm>
-            <a:off x="6629400" y="1874520"/>
-            <a:ext cx="1828800" cy="228600"/>
-          </a:xfrm>
-          <a:prstGeom prst="rect">
-            <a:avLst/>
-          </a:prstGeom>
-          <a:noFill/>
-          <a:ln/>
-        </p:spPr>
-        <p:txBody>
-          <a:bodyPr wrap="square" lIns="0" tIns="0" rIns="0" bIns="0" rtlCol="0" anchor="ctr"/>
-          <a:lstStyle/>
-          <a:p>
-            <a:pPr indent="0" marL="0">
-              <a:buNone/>
-            </a:pPr>
-            <a:r>
-              <a:rPr lang="en-US" sz="900" b="1" spc="200" kern="0" dirty="0">
-                <a:solidFill>
-                  <a:srgbClr val="4A6FA5"/>
-                </a:solidFill>
-                <a:latin typeface="Calibri" pitchFamily="34" charset="0"/>
-                <a:ea typeface="Calibri" pitchFamily="34" charset="-122"/>
-                <a:cs typeface="Calibri" pitchFamily="34" charset="-120"/>
-              </a:rPr>
-              <a:t>PROPUESTA</a:t>
-            </a:r>
-            <a:endParaRPr lang="en-US" sz="900" dirty="0"/>
-          </a:p>
-        </p:txBody>
-      </p:sp>
-      <p:sp>
-        <p:nvSpPr>
-          <p:cNvPr id="39" name="Shape 37"/>
-          <p:cNvSpPr/>
-          <p:nvPr/>
-        </p:nvSpPr>
-        <p:spPr>
-          <a:xfrm>
-            <a:off x="8311896" y="2194560"/>
-            <a:ext cx="1645920" cy="384048"/>
-          </a:xfrm>
-          <a:prstGeom prst="roundRect">
-            <a:avLst>
-              <a:gd name="adj" fmla="val 14286"/>
-            </a:avLst>
-          </a:prstGeom>
-          <a:solidFill>
-            <a:srgbClr val="E6ECF5"/>
-          </a:solidFill>
-          <a:ln w="12700">
-            <a:solidFill>
-              <a:srgbClr val="E6ECF5"/>
-            </a:solidFill>
-            <a:prstDash val="solid"/>
-          </a:ln>
-        </p:spPr>
-      </p:sp>
-      <p:sp>
-        <p:nvSpPr>
-          <p:cNvPr id="40" name="Text 38"/>
-          <p:cNvSpPr txBox="1"/>
-          <p:nvPr/>
-        </p:nvSpPr>
-        <p:spPr>
-          <a:xfrm>
-            <a:off x="8366760" y="2194560"/>
-            <a:ext cx="1536192" cy="384048"/>
-          </a:xfrm>
-          <a:prstGeom prst="rect">
-            <a:avLst/>
-          </a:prstGeom>
-          <a:noFill/>
-          <a:ln/>
-        </p:spPr>
-        <p:txBody>
-          <a:bodyPr wrap="square" lIns="0" tIns="0" rIns="0" bIns="0" rtlCol="0" anchor="ctr"/>
-          <a:lstStyle/>
-          <a:p>
-            <a:pPr algn="ctr" indent="0" marL="0">
-              <a:buNone/>
-            </a:pPr>
-            <a:r>
-              <a:rPr lang="en-US" sz="1000" b="1" dirty="0">
-                <a:solidFill>
-                  <a:srgbClr val="34517D"/>
-                </a:solidFill>
-                <a:latin typeface="Calibri" pitchFamily="34" charset="0"/>
-                <a:ea typeface="Calibri" pitchFamily="34" charset="-122"/>
-                <a:cs typeface="Calibri" pitchFamily="34" charset="-120"/>
-              </a:rPr>
-              <a:t>Subgerente</a:t>
-            </a:r>
-            <a:endParaRPr lang="en-US" sz="1000" dirty="0"/>
-          </a:p>
-        </p:txBody>
-      </p:sp>
-      <p:sp>
-        <p:nvSpPr>
-          <p:cNvPr id="41" name="Shape 39"/>
-          <p:cNvSpPr/>
-          <p:nvPr/>
-        </p:nvSpPr>
-        <p:spPr>
-          <a:xfrm>
-            <a:off x="9134856" y="2578608"/>
-            <a:ext cx="0" cy="256032"/>
-          </a:xfrm>
-          <a:prstGeom prst="line">
-            <a:avLst/>
-          </a:prstGeom>
-          <a:noFill/>
-          <a:ln w="15875">
-            <a:solidFill>
-              <a:srgbClr val="A9BEDC"/>
-            </a:solidFill>
-            <a:prstDash val="solid"/>
-          </a:ln>
-        </p:spPr>
-      </p:sp>
-      <p:sp>
-        <p:nvSpPr>
-          <p:cNvPr id="42" name="Shape 40"/>
-          <p:cNvSpPr/>
-          <p:nvPr/>
-        </p:nvSpPr>
-        <p:spPr>
-          <a:xfrm>
-            <a:off x="8311896" y="2834640"/>
-            <a:ext cx="1645920" cy="384048"/>
-          </a:xfrm>
-          <a:prstGeom prst="roundRect">
-            <a:avLst>
-              <a:gd name="adj" fmla="val 14286"/>
-            </a:avLst>
-          </a:prstGeom>
-          <a:solidFill>
-            <a:srgbClr val="E6ECF5"/>
-          </a:solidFill>
-          <a:ln w="12700">
-            <a:solidFill>
-              <a:srgbClr val="E6ECF5"/>
-            </a:solidFill>
-            <a:prstDash val="solid"/>
-          </a:ln>
-        </p:spPr>
-      </p:sp>
-      <p:sp>
-        <p:nvSpPr>
-          <p:cNvPr id="43" name="Text 41"/>
-          <p:cNvSpPr txBox="1"/>
-          <p:nvPr/>
-        </p:nvSpPr>
-        <p:spPr>
-          <a:xfrm>
-            <a:off x="8366760" y="2834640"/>
-            <a:ext cx="1536192" cy="384048"/>
-          </a:xfrm>
-          <a:prstGeom prst="rect">
-            <a:avLst/>
-          </a:prstGeom>
-          <a:noFill/>
-          <a:ln/>
-        </p:spPr>
-        <p:txBody>
-          <a:bodyPr wrap="square" lIns="0" tIns="0" rIns="0" bIns="0" rtlCol="0" anchor="ctr"/>
-          <a:lstStyle/>
-          <a:p>
-            <a:pPr algn="ctr" indent="0" marL="0">
-              <a:buNone/>
-            </a:pPr>
-            <a:r>
-              <a:rPr lang="en-US" sz="1000" b="1" dirty="0">
-                <a:solidFill>
-                  <a:srgbClr val="34517D"/>
-                </a:solidFill>
-                <a:latin typeface="Calibri" pitchFamily="34" charset="0"/>
-                <a:ea typeface="Calibri" pitchFamily="34" charset="-122"/>
-                <a:cs typeface="Calibri" pitchFamily="34" charset="-120"/>
-              </a:rPr>
-              <a:t>Jefe Normativo</a:t>
-            </a:r>
-            <a:endParaRPr lang="en-US" sz="1000" dirty="0"/>
-          </a:p>
-        </p:txBody>
-      </p:sp>
-      <p:sp>
-        <p:nvSpPr>
-          <p:cNvPr id="44" name="Shape 42"/>
-          <p:cNvSpPr/>
-          <p:nvPr/>
-        </p:nvSpPr>
-        <p:spPr>
-          <a:xfrm>
-            <a:off x="9134856" y="3218688"/>
-            <a:ext cx="0" cy="1216152"/>
-          </a:xfrm>
-          <a:prstGeom prst="line">
-            <a:avLst/>
-          </a:prstGeom>
-          <a:noFill/>
-          <a:ln w="15875">
-            <a:solidFill>
-              <a:srgbClr val="A9BEDC"/>
-            </a:solidFill>
-            <a:prstDash val="solid"/>
-          </a:ln>
-        </p:spPr>
-      </p:sp>
-      <p:sp>
-        <p:nvSpPr>
-          <p:cNvPr id="45" name="Shape 43"/>
-          <p:cNvSpPr/>
-          <p:nvPr/>
-        </p:nvSpPr>
-        <p:spPr>
-          <a:xfrm>
-            <a:off x="7123176" y="3685032"/>
-            <a:ext cx="4023360" cy="0"/>
-          </a:xfrm>
-          <a:prstGeom prst="line">
-            <a:avLst/>
-          </a:prstGeom>
-          <a:noFill/>
-          <a:ln w="15875">
-            <a:solidFill>
-              <a:srgbClr val="A9BEDC"/>
-            </a:solidFill>
-            <a:prstDash val="solid"/>
-          </a:ln>
-        </p:spPr>
-      </p:sp>
-      <p:sp>
-        <p:nvSpPr>
-          <p:cNvPr id="46" name="Shape 44"/>
-          <p:cNvSpPr/>
-          <p:nvPr/>
-        </p:nvSpPr>
-        <p:spPr>
-          <a:xfrm>
-            <a:off x="6940296" y="3429000"/>
-            <a:ext cx="1737360" cy="512064"/>
-          </a:xfrm>
-          <a:prstGeom prst="roundRect">
-            <a:avLst>
-              <a:gd name="adj" fmla="val 10714"/>
-            </a:avLst>
-          </a:prstGeom>
-          <a:solidFill>
-            <a:srgbClr val="34517D"/>
-          </a:solidFill>
-          <a:ln w="12700">
-            <a:solidFill>
-              <a:srgbClr val="34517D"/>
-            </a:solidFill>
-            <a:prstDash val="solid"/>
-          </a:ln>
-        </p:spPr>
-      </p:sp>
-      <p:sp>
-        <p:nvSpPr>
-          <p:cNvPr id="47" name="Text 45"/>
-          <p:cNvSpPr txBox="1"/>
-          <p:nvPr/>
-        </p:nvSpPr>
-        <p:spPr>
-          <a:xfrm>
-            <a:off x="6995160" y="3429000"/>
-            <a:ext cx="1627632" cy="512064"/>
-          </a:xfrm>
-          <a:prstGeom prst="rect">
-            <a:avLst/>
-          </a:prstGeom>
-          <a:noFill/>
-          <a:ln/>
-        </p:spPr>
-        <p:txBody>
-          <a:bodyPr wrap="square" lIns="0" tIns="0" rIns="0" bIns="0" rtlCol="0" anchor="ctr"/>
-          <a:lstStyle/>
-          <a:p>
-            <a:pPr algn="ctr" indent="0" marL="0">
-              <a:buNone/>
-            </a:pPr>
-            <a:r>
-              <a:rPr lang="en-US" sz="900" b="1" dirty="0">
-                <a:solidFill>
-                  <a:srgbClr val="FFFFFF"/>
-                </a:solidFill>
-                <a:latin typeface="Calibri" pitchFamily="34" charset="0"/>
-                <a:ea typeface="Calibri" pitchFamily="34" charset="-122"/>
-                <a:cs typeface="Calibri" pitchFamily="34" charset="-120"/>
-              </a:rPr>
-              <a:t>Senior Especialista</a:t>
-            </a:r>
-            <a:endParaRPr lang="en-US" sz="900" dirty="0"/>
-          </a:p>
-          <a:p>
-            <a:pPr algn="ctr" indent="0" marL="0">
-              <a:buNone/>
-            </a:pPr>
-            <a:r>
-              <a:rPr lang="en-US" sz="900" b="1" dirty="0">
-                <a:solidFill>
-                  <a:srgbClr val="FFFFFF"/>
-                </a:solidFill>
-                <a:latin typeface="Calibri" pitchFamily="34" charset="0"/>
-                <a:ea typeface="Calibri" pitchFamily="34" charset="-122"/>
-                <a:cs typeface="Calibri" pitchFamily="34" charset="-120"/>
-              </a:rPr>
-              <a:t>Normativo</a:t>
-            </a:r>
-            <a:endParaRPr lang="en-US" sz="900" dirty="0"/>
-          </a:p>
-        </p:txBody>
-      </p:sp>
-      <p:sp>
-        <p:nvSpPr>
-          <p:cNvPr id="48" name="Shape 46"/>
-          <p:cNvSpPr/>
-          <p:nvPr/>
-        </p:nvSpPr>
-        <p:spPr>
-          <a:xfrm>
-            <a:off x="9592056" y="3429000"/>
-            <a:ext cx="1737360" cy="512064"/>
-          </a:xfrm>
-          <a:prstGeom prst="roundRect">
-            <a:avLst>
-              <a:gd name="adj" fmla="val 10714"/>
-            </a:avLst>
-          </a:prstGeom>
-          <a:solidFill>
-            <a:srgbClr val="34517D"/>
-          </a:solidFill>
-          <a:ln w="12700">
-            <a:solidFill>
-              <a:srgbClr val="34517D"/>
-            </a:solidFill>
-            <a:prstDash val="solid"/>
-          </a:ln>
-        </p:spPr>
-      </p:sp>
-      <p:sp>
-        <p:nvSpPr>
-          <p:cNvPr id="49" name="Text 47"/>
-          <p:cNvSpPr txBox="1"/>
-          <p:nvPr/>
-        </p:nvSpPr>
-        <p:spPr>
-          <a:xfrm>
-            <a:off x="9646920" y="3429000"/>
-            <a:ext cx="1627632" cy="512064"/>
-          </a:xfrm>
-          <a:prstGeom prst="rect">
-            <a:avLst/>
-          </a:prstGeom>
-          <a:noFill/>
-          <a:ln/>
-        </p:spPr>
-        <p:txBody>
-          <a:bodyPr wrap="square" lIns="0" tIns="0" rIns="0" bIns="0" rtlCol="0" anchor="ctr"/>
-          <a:lstStyle/>
-          <a:p>
-            <a:pPr algn="ctr" indent="0" marL="0">
-              <a:buNone/>
-            </a:pPr>
-            <a:r>
-              <a:rPr lang="en-US" sz="900" b="1" dirty="0">
-                <a:solidFill>
-                  <a:srgbClr val="FFFFFF"/>
-                </a:solidFill>
-                <a:latin typeface="Calibri" pitchFamily="34" charset="0"/>
-                <a:ea typeface="Calibri" pitchFamily="34" charset="-122"/>
-                <a:cs typeface="Calibri" pitchFamily="34" charset="-120"/>
-              </a:rPr>
-              <a:t>Senior TI</a:t>
-            </a:r>
-            <a:endParaRPr lang="en-US" sz="900" dirty="0"/>
-          </a:p>
-          <a:p>
-            <a:pPr algn="ctr" indent="0" marL="0">
-              <a:buNone/>
-            </a:pPr>
-            <a:r>
-              <a:rPr lang="en-US" sz="900" b="1" dirty="0">
-                <a:solidFill>
-                  <a:srgbClr val="FFFFFF"/>
-                </a:solidFill>
-                <a:latin typeface="Calibri" pitchFamily="34" charset="0"/>
-                <a:ea typeface="Calibri" pitchFamily="34" charset="-122"/>
-                <a:cs typeface="Calibri" pitchFamily="34" charset="-120"/>
-              </a:rPr>
-              <a:t>(datos y automatización)</a:t>
-            </a:r>
-            <a:endParaRPr lang="en-US" sz="900" dirty="0"/>
-          </a:p>
-        </p:txBody>
-      </p:sp>
-      <p:sp>
-        <p:nvSpPr>
-          <p:cNvPr id="50" name="Shape 48"/>
-          <p:cNvSpPr/>
-          <p:nvPr/>
-        </p:nvSpPr>
-        <p:spPr>
-          <a:xfrm>
-            <a:off x="7283196" y="4434840"/>
-            <a:ext cx="3703320" cy="0"/>
-          </a:xfrm>
-          <a:prstGeom prst="line">
-            <a:avLst/>
-          </a:prstGeom>
-          <a:noFill/>
-          <a:ln w="15875">
-            <a:solidFill>
-              <a:srgbClr val="A9BEDC"/>
-            </a:solidFill>
-            <a:prstDash val="solid"/>
-          </a:ln>
-        </p:spPr>
-      </p:sp>
-      <p:sp>
-        <p:nvSpPr>
-          <p:cNvPr id="51" name="Shape 49"/>
-          <p:cNvSpPr/>
-          <p:nvPr/>
-        </p:nvSpPr>
-        <p:spPr>
-          <a:xfrm>
-            <a:off x="7283196" y="4434840"/>
-            <a:ext cx="0" cy="201168"/>
-          </a:xfrm>
-          <a:prstGeom prst="line">
-            <a:avLst/>
-          </a:prstGeom>
-          <a:noFill/>
-          <a:ln w="15875">
-            <a:solidFill>
-              <a:srgbClr val="A9BEDC"/>
-            </a:solidFill>
-            <a:prstDash val="solid"/>
-          </a:ln>
-        </p:spPr>
-      </p:sp>
-      <p:sp>
-        <p:nvSpPr>
-          <p:cNvPr id="52" name="Shape 50"/>
-          <p:cNvSpPr/>
-          <p:nvPr/>
-        </p:nvSpPr>
-        <p:spPr>
-          <a:xfrm>
-            <a:off x="6734556" y="4617720"/>
-            <a:ext cx="1097280" cy="457200"/>
-          </a:xfrm>
-          <a:prstGeom prst="roundRect">
-            <a:avLst>
-              <a:gd name="adj" fmla="val 12000"/>
-            </a:avLst>
-          </a:prstGeom>
-          <a:solidFill>
-            <a:srgbClr val="4A6FA5"/>
-          </a:solidFill>
-          <a:ln w="12700">
-            <a:solidFill>
-              <a:srgbClr val="4A6FA5"/>
-            </a:solidFill>
-            <a:prstDash val="solid"/>
-          </a:ln>
-        </p:spPr>
-      </p:sp>
-      <p:sp>
-        <p:nvSpPr>
-          <p:cNvPr id="53" name="Text 51"/>
-          <p:cNvSpPr txBox="1"/>
-          <p:nvPr/>
-        </p:nvSpPr>
-        <p:spPr>
-          <a:xfrm>
-            <a:off x="6789420" y="4617720"/>
-            <a:ext cx="987552" cy="457200"/>
-          </a:xfrm>
-          <a:prstGeom prst="rect">
-            <a:avLst/>
-          </a:prstGeom>
-          <a:noFill/>
-          <a:ln/>
-        </p:spPr>
-        <p:txBody>
-          <a:bodyPr wrap="square" lIns="0" tIns="0" rIns="0" bIns="0" rtlCol="0" anchor="ctr"/>
-          <a:lstStyle/>
-          <a:p>
-            <a:pPr algn="ctr" indent="0" marL="0">
-              <a:buNone/>
-            </a:pPr>
-            <a:r>
-              <a:rPr lang="en-US" sz="900" b="1" dirty="0">
-                <a:solidFill>
-                  <a:srgbClr val="FFFFFF"/>
-                </a:solidFill>
-                <a:latin typeface="Calibri" pitchFamily="34" charset="0"/>
-                <a:ea typeface="Calibri" pitchFamily="34" charset="-122"/>
-                <a:cs typeface="Calibri" pitchFamily="34" charset="-120"/>
-              </a:rPr>
-              <a:t>Especialista</a:t>
-            </a:r>
-            <a:endParaRPr lang="en-US" sz="900" dirty="0"/>
-          </a:p>
-          <a:p>
-            <a:pPr algn="ctr" indent="0" marL="0">
-              <a:buNone/>
-            </a:pPr>
-            <a:r>
-              <a:rPr lang="en-US" sz="900" b="1" dirty="0">
-                <a:solidFill>
-                  <a:srgbClr val="FFFFFF"/>
-                </a:solidFill>
-                <a:latin typeface="Calibri" pitchFamily="34" charset="0"/>
-                <a:ea typeface="Calibri" pitchFamily="34" charset="-122"/>
-                <a:cs typeface="Calibri" pitchFamily="34" charset="-120"/>
-              </a:rPr>
-              <a:t>Pleno</a:t>
-            </a:r>
-            <a:endParaRPr lang="en-US" sz="900" dirty="0"/>
-          </a:p>
-        </p:txBody>
-      </p:sp>
-      <p:sp>
-        <p:nvSpPr>
-          <p:cNvPr id="54" name="Shape 52"/>
-          <p:cNvSpPr/>
-          <p:nvPr/>
-        </p:nvSpPr>
-        <p:spPr>
-          <a:xfrm>
-            <a:off x="8517636" y="4434840"/>
-            <a:ext cx="0" cy="201168"/>
-          </a:xfrm>
-          <a:prstGeom prst="line">
-            <a:avLst/>
-          </a:prstGeom>
-          <a:noFill/>
-          <a:ln w="15875">
-            <a:solidFill>
-              <a:srgbClr val="A9BEDC"/>
-            </a:solidFill>
-            <a:prstDash val="solid"/>
-          </a:ln>
-        </p:spPr>
-      </p:sp>
-      <p:sp>
-        <p:nvSpPr>
-          <p:cNvPr id="55" name="Shape 53"/>
-          <p:cNvSpPr/>
-          <p:nvPr/>
-        </p:nvSpPr>
-        <p:spPr>
-          <a:xfrm>
-            <a:off x="7968996" y="4617720"/>
-            <a:ext cx="1097280" cy="457200"/>
-          </a:xfrm>
-          <a:prstGeom prst="roundRect">
-            <a:avLst>
-              <a:gd name="adj" fmla="val 12000"/>
-            </a:avLst>
-          </a:prstGeom>
-          <a:solidFill>
-            <a:srgbClr val="4A6FA5"/>
-          </a:solidFill>
-          <a:ln w="12700">
-            <a:solidFill>
-              <a:srgbClr val="4A6FA5"/>
-            </a:solidFill>
-            <a:prstDash val="solid"/>
-          </a:ln>
-        </p:spPr>
-      </p:sp>
-      <p:sp>
-        <p:nvSpPr>
-          <p:cNvPr id="56" name="Text 54"/>
-          <p:cNvSpPr txBox="1"/>
-          <p:nvPr/>
-        </p:nvSpPr>
-        <p:spPr>
-          <a:xfrm>
-            <a:off x="8023860" y="4617720"/>
-            <a:ext cx="987552" cy="457200"/>
-          </a:xfrm>
-          <a:prstGeom prst="rect">
-            <a:avLst/>
-          </a:prstGeom>
-          <a:noFill/>
-          <a:ln/>
-        </p:spPr>
-        <p:txBody>
-          <a:bodyPr wrap="square" lIns="0" tIns="0" rIns="0" bIns="0" rtlCol="0" anchor="ctr"/>
-          <a:lstStyle/>
-          <a:p>
-            <a:pPr algn="ctr" indent="0" marL="0">
-              <a:buNone/>
-            </a:pPr>
-            <a:r>
-              <a:rPr lang="en-US" sz="900" b="1" dirty="0">
-                <a:solidFill>
-                  <a:srgbClr val="FFFFFF"/>
-                </a:solidFill>
-                <a:latin typeface="Calibri" pitchFamily="34" charset="0"/>
-                <a:ea typeface="Calibri" pitchFamily="34" charset="-122"/>
-                <a:cs typeface="Calibri" pitchFamily="34" charset="-120"/>
-              </a:rPr>
-              <a:t>Especialista</a:t>
-            </a:r>
-            <a:endParaRPr lang="en-US" sz="900" dirty="0"/>
-          </a:p>
-          <a:p>
-            <a:pPr algn="ctr" indent="0" marL="0">
-              <a:buNone/>
-            </a:pPr>
-            <a:r>
-              <a:rPr lang="en-US" sz="900" b="1" dirty="0">
-                <a:solidFill>
-                  <a:srgbClr val="FFFFFF"/>
-                </a:solidFill>
-                <a:latin typeface="Calibri" pitchFamily="34" charset="0"/>
-                <a:ea typeface="Calibri" pitchFamily="34" charset="-122"/>
-                <a:cs typeface="Calibri" pitchFamily="34" charset="-120"/>
-              </a:rPr>
-              <a:t>Pleno</a:t>
-            </a:r>
-            <a:endParaRPr lang="en-US" sz="900" dirty="0"/>
-          </a:p>
-        </p:txBody>
-      </p:sp>
-      <p:sp>
-        <p:nvSpPr>
-          <p:cNvPr id="57" name="Shape 55"/>
-          <p:cNvSpPr/>
-          <p:nvPr/>
-        </p:nvSpPr>
-        <p:spPr>
-          <a:xfrm>
-            <a:off x="9752076" y="4434840"/>
-            <a:ext cx="0" cy="201168"/>
-          </a:xfrm>
-          <a:prstGeom prst="line">
-            <a:avLst/>
-          </a:prstGeom>
-          <a:noFill/>
-          <a:ln w="15875">
-            <a:solidFill>
-              <a:srgbClr val="A9BEDC"/>
-            </a:solidFill>
-            <a:prstDash val="solid"/>
-          </a:ln>
-        </p:spPr>
-      </p:sp>
-      <p:sp>
-        <p:nvSpPr>
-          <p:cNvPr id="58" name="Shape 56"/>
-          <p:cNvSpPr/>
-          <p:nvPr/>
-        </p:nvSpPr>
-        <p:spPr>
-          <a:xfrm>
-            <a:off x="9203436" y="4617720"/>
-            <a:ext cx="1097280" cy="457200"/>
-          </a:xfrm>
-          <a:prstGeom prst="roundRect">
-            <a:avLst>
-              <a:gd name="adj" fmla="val 12000"/>
-            </a:avLst>
-          </a:prstGeom>
-          <a:solidFill>
-            <a:srgbClr val="4A6FA5"/>
-          </a:solidFill>
-          <a:ln w="12700">
-            <a:solidFill>
-              <a:srgbClr val="4A6FA5"/>
-            </a:solidFill>
-            <a:prstDash val="solid"/>
-          </a:ln>
-        </p:spPr>
-      </p:sp>
-      <p:sp>
-        <p:nvSpPr>
-          <p:cNvPr id="59" name="Text 57"/>
-          <p:cNvSpPr txBox="1"/>
-          <p:nvPr/>
-        </p:nvSpPr>
-        <p:spPr>
-          <a:xfrm>
-            <a:off x="9258300" y="4617720"/>
-            <a:ext cx="987552" cy="457200"/>
-          </a:xfrm>
-          <a:prstGeom prst="rect">
-            <a:avLst/>
-          </a:prstGeom>
-          <a:noFill/>
-          <a:ln/>
-        </p:spPr>
-        <p:txBody>
-          <a:bodyPr wrap="square" lIns="0" tIns="0" rIns="0" bIns="0" rtlCol="0" anchor="ctr"/>
-          <a:lstStyle/>
-          <a:p>
-            <a:pPr algn="ctr" indent="0" marL="0">
-              <a:buNone/>
-            </a:pPr>
-            <a:r>
-              <a:rPr lang="en-US" sz="900" b="1" dirty="0">
-                <a:solidFill>
-                  <a:srgbClr val="FFFFFF"/>
-                </a:solidFill>
-                <a:latin typeface="Calibri" pitchFamily="34" charset="0"/>
-                <a:ea typeface="Calibri" pitchFamily="34" charset="-122"/>
-                <a:cs typeface="Calibri" pitchFamily="34" charset="-120"/>
-              </a:rPr>
-              <a:t>Especialista</a:t>
-            </a:r>
-            <a:endParaRPr lang="en-US" sz="900" dirty="0"/>
-          </a:p>
-          <a:p>
-            <a:pPr algn="ctr" indent="0" marL="0">
-              <a:buNone/>
-            </a:pPr>
-            <a:r>
-              <a:rPr lang="en-US" sz="900" b="1" dirty="0">
-                <a:solidFill>
-                  <a:srgbClr val="FFFFFF"/>
-                </a:solidFill>
-                <a:latin typeface="Calibri" pitchFamily="34" charset="0"/>
-                <a:ea typeface="Calibri" pitchFamily="34" charset="-122"/>
-                <a:cs typeface="Calibri" pitchFamily="34" charset="-120"/>
-              </a:rPr>
-              <a:t>Pleno</a:t>
-            </a:r>
-            <a:endParaRPr lang="en-US" sz="900" dirty="0"/>
-          </a:p>
-        </p:txBody>
-      </p:sp>
-      <p:sp>
-        <p:nvSpPr>
-          <p:cNvPr id="60" name="Shape 58"/>
-          <p:cNvSpPr/>
-          <p:nvPr/>
-        </p:nvSpPr>
-        <p:spPr>
-          <a:xfrm>
-            <a:off x="10986516" y="4434840"/>
-            <a:ext cx="0" cy="201168"/>
-          </a:xfrm>
-          <a:prstGeom prst="line">
-            <a:avLst/>
-          </a:prstGeom>
-          <a:noFill/>
-          <a:ln w="15875">
-            <a:solidFill>
-              <a:srgbClr val="A9BEDC"/>
-            </a:solidFill>
-            <a:prstDash val="solid"/>
-          </a:ln>
-        </p:spPr>
-      </p:sp>
-      <p:sp>
-        <p:nvSpPr>
-          <p:cNvPr id="61" name="Shape 59"/>
-          <p:cNvSpPr/>
-          <p:nvPr/>
-        </p:nvSpPr>
-        <p:spPr>
-          <a:xfrm>
-            <a:off x="10437876" y="4617720"/>
-            <a:ext cx="1097280" cy="457200"/>
-          </a:xfrm>
-          <a:prstGeom prst="roundRect">
-            <a:avLst>
-              <a:gd name="adj" fmla="val 12000"/>
-            </a:avLst>
-          </a:prstGeom>
-          <a:solidFill>
-            <a:srgbClr val="4A6FA5"/>
-          </a:solidFill>
-          <a:ln w="12700">
-            <a:solidFill>
-              <a:srgbClr val="4A6FA5"/>
-            </a:solidFill>
-            <a:prstDash val="solid"/>
-          </a:ln>
-        </p:spPr>
-      </p:sp>
-      <p:sp>
-        <p:nvSpPr>
-          <p:cNvPr id="62" name="Text 60"/>
-          <p:cNvSpPr txBox="1"/>
-          <p:nvPr/>
-        </p:nvSpPr>
-        <p:spPr>
-          <a:xfrm>
-            <a:off x="10492740" y="4617720"/>
-            <a:ext cx="987552" cy="457200"/>
-          </a:xfrm>
-          <a:prstGeom prst="rect">
-            <a:avLst/>
-          </a:prstGeom>
-          <a:noFill/>
-          <a:ln/>
-        </p:spPr>
-        <p:txBody>
-          <a:bodyPr wrap="square" lIns="0" tIns="0" rIns="0" bIns="0" rtlCol="0" anchor="ctr"/>
-          <a:lstStyle/>
-          <a:p>
-            <a:pPr algn="ctr" indent="0" marL="0">
-              <a:buNone/>
-            </a:pPr>
-            <a:r>
-              <a:rPr lang="en-US" sz="900" b="1" dirty="0">
-                <a:solidFill>
-                  <a:srgbClr val="FFFFFF"/>
-                </a:solidFill>
-                <a:latin typeface="Calibri" pitchFamily="34" charset="0"/>
-                <a:ea typeface="Calibri" pitchFamily="34" charset="-122"/>
-                <a:cs typeface="Calibri" pitchFamily="34" charset="-120"/>
-              </a:rPr>
-              <a:t>Especialista</a:t>
-            </a:r>
-            <a:endParaRPr lang="en-US" sz="900" dirty="0"/>
-          </a:p>
-          <a:p>
-            <a:pPr algn="ctr" indent="0" marL="0">
-              <a:buNone/>
-            </a:pPr>
-            <a:r>
-              <a:rPr lang="en-US" sz="900" b="1" dirty="0">
-                <a:solidFill>
-                  <a:srgbClr val="FFFFFF"/>
-                </a:solidFill>
-                <a:latin typeface="Calibri" pitchFamily="34" charset="0"/>
-                <a:ea typeface="Calibri" pitchFamily="34" charset="-122"/>
-                <a:cs typeface="Calibri" pitchFamily="34" charset="-120"/>
-              </a:rPr>
-              <a:t>Pleno</a:t>
-            </a:r>
-            <a:endParaRPr lang="en-US" sz="900" dirty="0"/>
-          </a:p>
-        </p:txBody>
-      </p:sp>
-      <p:sp>
-        <p:nvSpPr>
-          <p:cNvPr id="63" name="Text 61"/>
-          <p:cNvSpPr txBox="1"/>
-          <p:nvPr/>
-        </p:nvSpPr>
-        <p:spPr>
-          <a:xfrm>
-            <a:off x="6629400" y="5212080"/>
-            <a:ext cx="5010912" cy="502920"/>
-          </a:xfrm>
-          <a:prstGeom prst="rect">
-            <a:avLst/>
-          </a:prstGeom>
-          <a:noFill/>
-          <a:ln/>
-        </p:spPr>
-        <p:txBody>
-          <a:bodyPr wrap="square" lIns="0" tIns="0" rIns="0" bIns="0" rtlCol="0" anchor="t"/>
-          <a:lstStyle/>
-          <a:p>
-            <a:pPr indent="0" marL="0">
-              <a:buNone/>
-            </a:pPr>
-            <a:r>
-              <a:rPr lang="en-US" sz="900" b="1" dirty="0">
-                <a:solidFill>
-                  <a:srgbClr val="2B2F36"/>
-                </a:solidFill>
-                <a:latin typeface="Calibri" pitchFamily="34" charset="0"/>
-                <a:ea typeface="Calibri" pitchFamily="34" charset="-122"/>
-                <a:cs typeface="Calibri" pitchFamily="34" charset="-120"/>
-              </a:rPr>
-              <a:t>Seniors: </a:t>
-            </a:r>
-            <a:pPr indent="0" marL="0">
-              <a:buNone/>
-            </a:pPr>
-            <a:r>
-              <a:rPr lang="en-US" sz="900" dirty="0">
-                <a:solidFill>
-                  <a:srgbClr val="5B6470"/>
-                </a:solidFill>
-                <a:latin typeface="Calibri" pitchFamily="34" charset="0"/>
-                <a:ea typeface="Calibri" pitchFamily="34" charset="-122"/>
-                <a:cs typeface="Calibri" pitchFamily="34" charset="-120"/>
-              </a:rPr>
-              <a:t>dueños de los bloques críticos (Deudores y REDEC; datos, automatización y controles). Preparan y validan D10 y los RDC; responden observaciones técnicas. Un grado por sobre el actual.</a:t>
-            </a:r>
-            <a:endParaRPr lang="en-US" sz="900" dirty="0"/>
-          </a:p>
-        </p:txBody>
-      </p:sp>
-      <p:sp>
-        <p:nvSpPr>
-          <p:cNvPr id="64" name="Text 62"/>
-          <p:cNvSpPr txBox="1"/>
-          <p:nvPr/>
-        </p:nvSpPr>
-        <p:spPr>
-          <a:xfrm>
-            <a:off x="6629400" y="5715000"/>
-            <a:ext cx="5010912" cy="502920"/>
-          </a:xfrm>
-          <a:prstGeom prst="rect">
-            <a:avLst/>
-          </a:prstGeom>
-          <a:noFill/>
-          <a:ln/>
-        </p:spPr>
-        <p:txBody>
-          <a:bodyPr wrap="square" lIns="0" tIns="0" rIns="0" bIns="0" rtlCol="0" anchor="t"/>
-          <a:lstStyle/>
-          <a:p>
-            <a:pPr indent="0" marL="0">
-              <a:buNone/>
-            </a:pPr>
-            <a:r>
-              <a:rPr lang="en-US" sz="900" b="1" dirty="0">
-                <a:solidFill>
-                  <a:srgbClr val="2B2F36"/>
-                </a:solidFill>
-                <a:latin typeface="Calibri" pitchFamily="34" charset="0"/>
-                <a:ea typeface="Calibri" pitchFamily="34" charset="-122"/>
-                <a:cs typeface="Calibri" pitchFamily="34" charset="-120"/>
-              </a:rPr>
-              <a:t>Plenos: </a:t>
-            </a:r>
-            <a:pPr indent="0" marL="0">
-              <a:buNone/>
-            </a:pPr>
-            <a:r>
-              <a:rPr lang="en-US" sz="900" dirty="0">
-                <a:solidFill>
-                  <a:srgbClr val="5B6470"/>
-                </a:solidFill>
-                <a:latin typeface="Calibri" pitchFamily="34" charset="0"/>
-                <a:ea typeface="Calibri" pitchFamily="34" charset="-122"/>
-                <a:cs typeface="Calibri" pitchFamily="34" charset="-120"/>
-              </a:rPr>
-              <a:t>ejecutan la rutina mensual y la alta frecuencia bajo control dual, con ruta de desarrollo hacia senior. </a:t>
-            </a:r>
-            <a:pPr indent="0" marL="0">
-              <a:buNone/>
-            </a:pPr>
-            <a:r>
-              <a:rPr lang="en-US" sz="900" b="1" dirty="0">
-                <a:solidFill>
-                  <a:srgbClr val="2B2F36"/>
-                </a:solidFill>
-                <a:latin typeface="Calibri" pitchFamily="34" charset="0"/>
-                <a:ea typeface="Calibri" pitchFamily="34" charset="-122"/>
-                <a:cs typeface="Calibri" pitchFamily="34" charset="-120"/>
-              </a:rPr>
-              <a:t>Jefe: </a:t>
-            </a:r>
-            <a:pPr indent="0" marL="0">
-              <a:buNone/>
-            </a:pPr>
-            <a:r>
-              <a:rPr lang="en-US" sz="900" dirty="0">
-                <a:solidFill>
-                  <a:srgbClr val="5B6470"/>
-                </a:solidFill>
-                <a:latin typeface="Calibri" pitchFamily="34" charset="0"/>
-                <a:ea typeface="Calibri" pitchFamily="34" charset="-122"/>
-                <a:cs typeface="Calibri" pitchFamily="34" charset="-120"/>
-              </a:rPr>
-              <a:t>firma, calendario regulatorio y relación con el supervisor.</a:t>
-            </a:r>
-            <a:endParaRPr lang="en-US" sz="900" dirty="0"/>
-          </a:p>
-        </p:txBody>
-      </p:sp>
-      <p:sp>
-        <p:nvSpPr>
-          <p:cNvPr id="65" name="Text 63"/>
           <p:cNvSpPr txBox="1"/>
           <p:nvPr/>
         </p:nvSpPr>
@@ -25707,7 +23706,7 @@
                 <a:ea typeface="Calibri" pitchFamily="34" charset="-122"/>
                 <a:cs typeface="Calibri" pitchFamily="34" charset="-120"/>
               </a:rPr>
-              <a:t>Regla de diseño: quien prepara nunca firma; ningún reporte crítico depende de una sola persona. Estructura propuesta por el área; grados a validar con Personas.</a:t>
+              <a:t>Cada afirmación está respaldada en el documento "Respaldo de afirmaciones de mercado", entregado junto con esta presentación, con sus fuentes públicas.</a:t>
             </a:r>
             <a:endParaRPr lang="en-US" sz="800" dirty="0"/>
           </a:p>
@@ -25871,7 +23870,7 @@
                 <a:ea typeface="Calibri" pitchFamily="34" charset="-122"/>
                 <a:cs typeface="Calibri" pitchFamily="34" charset="-120"/>
               </a:rPr>
-              <a:t>EL MERCADO</a:t>
+              <a:t>LOS CAMINOS</a:t>
             </a:r>
             <a:endParaRPr lang="en-US" sz="850" dirty="0"/>
           </a:p>
@@ -25949,7 +23948,7 @@
                 <a:ea typeface="Calibri" pitchFamily="34" charset="-122"/>
                 <a:cs typeface="Calibri" pitchFamily="34" charset="-120"/>
               </a:rPr>
-              <a:t>Los bancos sistémicos ya tratan esta función como especializada; competimos por el mismo talento</a:t>
+              <a:t>De un equipo plano con un mismo grado a dos caminos para alinear la estructura con el trabajo</a:t>
             </a:r>
             <a:endParaRPr lang="en-US" sz="2600" dirty="0"/>
           </a:p>
@@ -25963,12 +23962,12 @@
         </p:nvSpPr>
         <p:spPr>
           <a:xfrm>
-            <a:off x="548640" y="1965960"/>
-            <a:ext cx="2606040" cy="3291840"/>
+            <a:off x="548640" y="1874520"/>
+            <a:ext cx="3514344" cy="4069080"/>
           </a:xfrm>
           <a:prstGeom prst="roundRect">
             <a:avLst>
-              <a:gd name="adj" fmla="val 2105"/>
+              <a:gd name="adj" fmla="val 1561"/>
             </a:avLst>
           </a:prstGeom>
           <a:solidFill>
@@ -25990,8 +23989,8 @@
         </p:nvSpPr>
         <p:spPr>
           <a:xfrm>
-            <a:off x="777240" y="2148840"/>
-            <a:ext cx="2148840" cy="548640"/>
+            <a:off x="731520" y="1965960"/>
+            <a:ext cx="3148584" cy="256032"/>
           </a:xfrm>
           <a:prstGeom prst="rect">
             <a:avLst/>
@@ -26007,81 +24006,957 @@
               <a:buNone/>
             </a:pPr>
             <a:r>
-              <a:rPr lang="en-US" sz="1350" b="1" dirty="0">
-                <a:solidFill>
-                  <a:srgbClr val="2B2F36"/>
-                </a:solidFill>
-                <a:latin typeface="Calibri" pitchFamily="34" charset="0"/>
-                <a:ea typeface="Calibri" pitchFamily="34" charset="-122"/>
-                <a:cs typeface="Calibri" pitchFamily="34" charset="-120"/>
-              </a:rPr>
-              <a:t>Función especializada</a:t>
-            </a:r>
-            <a:endParaRPr lang="en-US" sz="1350" dirty="0"/>
-          </a:p>
-        </p:txBody>
-      </p:sp>
-      <p:sp>
-        <p:nvSpPr>
-          <p:cNvPr id="11" name="Text 9"/>
-          <p:cNvSpPr txBox="1"/>
-          <p:nvPr/>
-        </p:nvSpPr>
-        <p:spPr>
-          <a:xfrm>
-            <a:off x="777240" y="2743200"/>
-            <a:ext cx="2148840" cy="2377440"/>
-          </a:xfrm>
-          <a:prstGeom prst="rect">
-            <a:avLst/>
-          </a:prstGeom>
-          <a:noFill/>
-          <a:ln/>
-        </p:spPr>
-        <p:txBody>
-          <a:bodyPr wrap="square" lIns="0" tIns="0" rIns="0" bIns="0" rtlCol="0" anchor="t"/>
-          <a:lstStyle/>
-          <a:p>
-            <a:pPr indent="0" marL="0">
-              <a:buNone/>
-            </a:pPr>
-            <a:r>
-              <a:rPr lang="en-US" sz="1050" dirty="0">
-                <a:solidFill>
-                  <a:srgbClr val="5B6470"/>
-                </a:solidFill>
-                <a:latin typeface="Calibri" pitchFamily="34" charset="0"/>
-                <a:ea typeface="Calibri" pitchFamily="34" charset="-122"/>
-                <a:cs typeface="Calibri" pitchFamily="34" charset="-120"/>
-              </a:rPr>
-              <a:t>La reportería regulatoria opera en unidades dedicadas, separadas de los procesos de producto, con dueños por bloque de archivos del MSI y un responsable del proceso completo.</a:t>
-            </a:r>
-            <a:endParaRPr lang="en-US" sz="1050" dirty="0"/>
-          </a:p>
-        </p:txBody>
-      </p:sp>
-      <p:sp>
-        <p:nvSpPr>
-          <p:cNvPr id="12" name="Shape 10"/>
+              <a:rPr lang="en-US" sz="900" b="1" spc="200" kern="0" dirty="0">
+                <a:solidFill>
+                  <a:srgbClr val="9AA3AE"/>
+                </a:solidFill>
+                <a:latin typeface="Calibri" pitchFamily="34" charset="0"/>
+                <a:ea typeface="Calibri" pitchFamily="34" charset="-122"/>
+                <a:cs typeface="Calibri" pitchFamily="34" charset="-120"/>
+              </a:rPr>
+              <a:t>HOY</a:t>
+            </a:r>
+            <a:endParaRPr lang="en-US" sz="900" dirty="0"/>
+          </a:p>
+        </p:txBody>
+      </p:sp>
+      <p:sp>
+        <p:nvSpPr>
+          <p:cNvPr id="11" name="Shape 9"/>
           <p:cNvSpPr/>
           <p:nvPr/>
         </p:nvSpPr>
         <p:spPr>
           <a:xfrm>
-            <a:off x="3337560" y="1965960"/>
-            <a:ext cx="2606040" cy="3291840"/>
+            <a:off x="1620012" y="2377440"/>
+            <a:ext cx="1371600" cy="329184"/>
           </a:xfrm>
           <a:prstGeom prst="roundRect">
             <a:avLst>
-              <a:gd name="adj" fmla="val 2105"/>
+              <a:gd name="adj" fmla="val 13889"/>
             </a:avLst>
           </a:prstGeom>
           <a:solidFill>
-            <a:srgbClr val="F6F7F9"/>
+            <a:srgbClr val="E0E4E9"/>
+          </a:solidFill>
+          <a:ln w="12700">
+            <a:solidFill>
+              <a:srgbClr val="E0E4E9"/>
+            </a:solidFill>
+            <a:prstDash val="solid"/>
+          </a:ln>
+        </p:spPr>
+      </p:sp>
+      <p:sp>
+        <p:nvSpPr>
+          <p:cNvPr id="12" name="Text 10"/>
+          <p:cNvSpPr txBox="1"/>
+          <p:nvPr/>
+        </p:nvSpPr>
+        <p:spPr>
+          <a:xfrm>
+            <a:off x="1656588" y="2377440"/>
+            <a:ext cx="1298448" cy="329184"/>
+          </a:xfrm>
+          <a:prstGeom prst="rect">
+            <a:avLst/>
+          </a:prstGeom>
+          <a:noFill/>
+          <a:ln/>
+        </p:spPr>
+        <p:txBody>
+          <a:bodyPr wrap="square" lIns="0" tIns="0" rIns="0" bIns="0" rtlCol="0" anchor="ctr"/>
+          <a:lstStyle/>
+          <a:p>
+            <a:pPr algn="ctr" indent="0" marL="0">
+              <a:buNone/>
+            </a:pPr>
+            <a:r>
+              <a:rPr lang="en-US" sz="850" b="1" dirty="0">
+                <a:solidFill>
+                  <a:srgbClr val="5B6470"/>
+                </a:solidFill>
+                <a:latin typeface="Calibri" pitchFamily="34" charset="0"/>
+                <a:ea typeface="Calibri" pitchFamily="34" charset="-122"/>
+                <a:cs typeface="Calibri" pitchFamily="34" charset="-120"/>
+              </a:rPr>
+              <a:t>Subgerente</a:t>
+            </a:r>
+            <a:endParaRPr lang="en-US" sz="850" dirty="0"/>
+          </a:p>
+        </p:txBody>
+      </p:sp>
+      <p:sp>
+        <p:nvSpPr>
+          <p:cNvPr id="13" name="Shape 11"/>
+          <p:cNvSpPr/>
+          <p:nvPr/>
+        </p:nvSpPr>
+        <p:spPr>
+          <a:xfrm>
+            <a:off x="2305812" y="2706624"/>
+            <a:ext cx="0" cy="201168"/>
+          </a:xfrm>
+          <a:prstGeom prst="line">
+            <a:avLst/>
+          </a:prstGeom>
+          <a:noFill/>
+          <a:ln w="15875">
+            <a:solidFill>
+              <a:srgbClr val="E3E6EA"/>
+            </a:solidFill>
+            <a:prstDash val="solid"/>
+          </a:ln>
+        </p:spPr>
+      </p:sp>
+      <p:sp>
+        <p:nvSpPr>
+          <p:cNvPr id="14" name="Shape 12"/>
+          <p:cNvSpPr/>
+          <p:nvPr/>
+        </p:nvSpPr>
+        <p:spPr>
+          <a:xfrm>
+            <a:off x="1620012" y="2907792"/>
+            <a:ext cx="1371600" cy="329184"/>
+          </a:xfrm>
+          <a:prstGeom prst="roundRect">
+            <a:avLst>
+              <a:gd name="adj" fmla="val 13889"/>
+            </a:avLst>
+          </a:prstGeom>
+          <a:solidFill>
+            <a:srgbClr val="E0E4E9"/>
+          </a:solidFill>
+          <a:ln w="12700">
+            <a:solidFill>
+              <a:srgbClr val="E0E4E9"/>
+            </a:solidFill>
+            <a:prstDash val="solid"/>
+          </a:ln>
+        </p:spPr>
+      </p:sp>
+      <p:sp>
+        <p:nvSpPr>
+          <p:cNvPr id="15" name="Text 13"/>
+          <p:cNvSpPr txBox="1"/>
+          <p:nvPr/>
+        </p:nvSpPr>
+        <p:spPr>
+          <a:xfrm>
+            <a:off x="1656588" y="2907792"/>
+            <a:ext cx="1298448" cy="329184"/>
+          </a:xfrm>
+          <a:prstGeom prst="rect">
+            <a:avLst/>
+          </a:prstGeom>
+          <a:noFill/>
+          <a:ln/>
+        </p:spPr>
+        <p:txBody>
+          <a:bodyPr wrap="square" lIns="0" tIns="0" rIns="0" bIns="0" rtlCol="0" anchor="ctr"/>
+          <a:lstStyle/>
+          <a:p>
+            <a:pPr algn="ctr" indent="0" marL="0">
+              <a:buNone/>
+            </a:pPr>
+            <a:r>
+              <a:rPr lang="en-US" sz="850" b="1" dirty="0">
+                <a:solidFill>
+                  <a:srgbClr val="5B6470"/>
+                </a:solidFill>
+                <a:latin typeface="Calibri" pitchFamily="34" charset="0"/>
+                <a:ea typeface="Calibri" pitchFamily="34" charset="-122"/>
+                <a:cs typeface="Calibri" pitchFamily="34" charset="-120"/>
+              </a:rPr>
+              <a:t>Jefe Normativo</a:t>
+            </a:r>
+            <a:endParaRPr lang="en-US" sz="850" dirty="0"/>
+          </a:p>
+        </p:txBody>
+      </p:sp>
+      <p:sp>
+        <p:nvSpPr>
+          <p:cNvPr id="16" name="Shape 14"/>
+          <p:cNvSpPr/>
+          <p:nvPr/>
+        </p:nvSpPr>
+        <p:spPr>
+          <a:xfrm>
+            <a:off x="2305812" y="3236976"/>
+            <a:ext cx="0" cy="256032"/>
+          </a:xfrm>
+          <a:prstGeom prst="line">
+            <a:avLst/>
+          </a:prstGeom>
+          <a:noFill/>
+          <a:ln w="15875">
+            <a:solidFill>
+              <a:srgbClr val="E3E6EA"/>
+            </a:solidFill>
+            <a:prstDash val="solid"/>
+          </a:ln>
+        </p:spPr>
+      </p:sp>
+      <p:sp>
+        <p:nvSpPr>
+          <p:cNvPr id="17" name="Shape 15"/>
+          <p:cNvSpPr/>
+          <p:nvPr/>
+        </p:nvSpPr>
+        <p:spPr>
+          <a:xfrm>
+            <a:off x="888492" y="3493008"/>
+            <a:ext cx="2834640" cy="0"/>
+          </a:xfrm>
+          <a:prstGeom prst="line">
+            <a:avLst/>
+          </a:prstGeom>
+          <a:noFill/>
+          <a:ln w="15875">
+            <a:solidFill>
+              <a:srgbClr val="E3E6EA"/>
+            </a:solidFill>
+            <a:prstDash val="solid"/>
+          </a:ln>
+        </p:spPr>
+      </p:sp>
+      <p:sp>
+        <p:nvSpPr>
+          <p:cNvPr id="18" name="Shape 16"/>
+          <p:cNvSpPr/>
+          <p:nvPr/>
+        </p:nvSpPr>
+        <p:spPr>
+          <a:xfrm>
+            <a:off x="888492" y="3493008"/>
+            <a:ext cx="0" cy="164592"/>
+          </a:xfrm>
+          <a:prstGeom prst="line">
+            <a:avLst/>
+          </a:prstGeom>
+          <a:noFill/>
+          <a:ln w="15875">
+            <a:solidFill>
+              <a:srgbClr val="E3E6EA"/>
+            </a:solidFill>
+            <a:prstDash val="solid"/>
+          </a:ln>
+        </p:spPr>
+      </p:sp>
+      <p:sp>
+        <p:nvSpPr>
+          <p:cNvPr id="19" name="Shape 17"/>
+          <p:cNvSpPr/>
+          <p:nvPr/>
+        </p:nvSpPr>
+        <p:spPr>
+          <a:xfrm>
+            <a:off x="632460" y="3657600"/>
+            <a:ext cx="512064" cy="566928"/>
+          </a:xfrm>
+          <a:prstGeom prst="roundRect">
+            <a:avLst>
+              <a:gd name="adj" fmla="val 8929"/>
+            </a:avLst>
+          </a:prstGeom>
+          <a:solidFill>
+            <a:srgbClr val="9AA3AE"/>
+          </a:solidFill>
+          <a:ln w="12700">
+            <a:solidFill>
+              <a:srgbClr val="9AA3AE"/>
+            </a:solidFill>
+            <a:prstDash val="solid"/>
+          </a:ln>
+        </p:spPr>
+      </p:sp>
+      <p:sp>
+        <p:nvSpPr>
+          <p:cNvPr id="20" name="Text 18"/>
+          <p:cNvSpPr txBox="1"/>
+          <p:nvPr/>
+        </p:nvSpPr>
+        <p:spPr>
+          <a:xfrm>
+            <a:off x="669036" y="3657600"/>
+            <a:ext cx="438912" cy="566928"/>
+          </a:xfrm>
+          <a:prstGeom prst="rect">
+            <a:avLst/>
+          </a:prstGeom>
+          <a:noFill/>
+          <a:ln/>
+        </p:spPr>
+        <p:txBody>
+          <a:bodyPr wrap="square" lIns="0" tIns="0" rIns="0" bIns="0" rtlCol="0" anchor="ctr"/>
+          <a:lstStyle/>
+          <a:p>
+            <a:pPr algn="ctr" indent="0" marL="0">
+              <a:buNone/>
+            </a:pPr>
+            <a:r>
+              <a:rPr lang="en-US" sz="700" b="1" dirty="0">
+                <a:solidFill>
+                  <a:srgbClr val="FFFFFF"/>
+                </a:solidFill>
+                <a:latin typeface="Calibri" pitchFamily="34" charset="0"/>
+                <a:ea typeface="Calibri" pitchFamily="34" charset="-122"/>
+                <a:cs typeface="Calibri" pitchFamily="34" charset="-120"/>
+              </a:rPr>
+              <a:t>Espe-</a:t>
+            </a:r>
+            <a:endParaRPr lang="en-US" sz="700" dirty="0"/>
+          </a:p>
+          <a:p>
+            <a:pPr algn="ctr" indent="0" marL="0">
+              <a:buNone/>
+            </a:pPr>
+            <a:r>
+              <a:rPr lang="en-US" sz="700" b="1" dirty="0">
+                <a:solidFill>
+                  <a:srgbClr val="FFFFFF"/>
+                </a:solidFill>
+                <a:latin typeface="Calibri" pitchFamily="34" charset="0"/>
+                <a:ea typeface="Calibri" pitchFamily="34" charset="-122"/>
+                <a:cs typeface="Calibri" pitchFamily="34" charset="-120"/>
+              </a:rPr>
+              <a:t>cialista</a:t>
+            </a:r>
+            <a:endParaRPr lang="en-US" sz="700" dirty="0"/>
+          </a:p>
+        </p:txBody>
+      </p:sp>
+      <p:sp>
+        <p:nvSpPr>
+          <p:cNvPr id="21" name="Shape 19"/>
+          <p:cNvSpPr/>
+          <p:nvPr/>
+        </p:nvSpPr>
+        <p:spPr>
+          <a:xfrm>
+            <a:off x="1455420" y="3493008"/>
+            <a:ext cx="0" cy="164592"/>
+          </a:xfrm>
+          <a:prstGeom prst="line">
+            <a:avLst/>
+          </a:prstGeom>
+          <a:noFill/>
+          <a:ln w="15875">
+            <a:solidFill>
+              <a:srgbClr val="E3E6EA"/>
+            </a:solidFill>
+            <a:prstDash val="solid"/>
+          </a:ln>
+        </p:spPr>
+      </p:sp>
+      <p:sp>
+        <p:nvSpPr>
+          <p:cNvPr id="22" name="Shape 20"/>
+          <p:cNvSpPr/>
+          <p:nvPr/>
+        </p:nvSpPr>
+        <p:spPr>
+          <a:xfrm>
+            <a:off x="1199388" y="3657600"/>
+            <a:ext cx="512064" cy="566928"/>
+          </a:xfrm>
+          <a:prstGeom prst="roundRect">
+            <a:avLst>
+              <a:gd name="adj" fmla="val 8929"/>
+            </a:avLst>
+          </a:prstGeom>
+          <a:solidFill>
+            <a:srgbClr val="9AA3AE"/>
+          </a:solidFill>
+          <a:ln w="12700">
+            <a:solidFill>
+              <a:srgbClr val="9AA3AE"/>
+            </a:solidFill>
+            <a:prstDash val="solid"/>
+          </a:ln>
+        </p:spPr>
+      </p:sp>
+      <p:sp>
+        <p:nvSpPr>
+          <p:cNvPr id="23" name="Text 21"/>
+          <p:cNvSpPr txBox="1"/>
+          <p:nvPr/>
+        </p:nvSpPr>
+        <p:spPr>
+          <a:xfrm>
+            <a:off x="1235964" y="3657600"/>
+            <a:ext cx="438912" cy="566928"/>
+          </a:xfrm>
+          <a:prstGeom prst="rect">
+            <a:avLst/>
+          </a:prstGeom>
+          <a:noFill/>
+          <a:ln/>
+        </p:spPr>
+        <p:txBody>
+          <a:bodyPr wrap="square" lIns="0" tIns="0" rIns="0" bIns="0" rtlCol="0" anchor="ctr"/>
+          <a:lstStyle/>
+          <a:p>
+            <a:pPr algn="ctr" indent="0" marL="0">
+              <a:buNone/>
+            </a:pPr>
+            <a:r>
+              <a:rPr lang="en-US" sz="700" b="1" dirty="0">
+                <a:solidFill>
+                  <a:srgbClr val="FFFFFF"/>
+                </a:solidFill>
+                <a:latin typeface="Calibri" pitchFamily="34" charset="0"/>
+                <a:ea typeface="Calibri" pitchFamily="34" charset="-122"/>
+                <a:cs typeface="Calibri" pitchFamily="34" charset="-120"/>
+              </a:rPr>
+              <a:t>Espe-</a:t>
+            </a:r>
+            <a:endParaRPr lang="en-US" sz="700" dirty="0"/>
+          </a:p>
+          <a:p>
+            <a:pPr algn="ctr" indent="0" marL="0">
+              <a:buNone/>
+            </a:pPr>
+            <a:r>
+              <a:rPr lang="en-US" sz="700" b="1" dirty="0">
+                <a:solidFill>
+                  <a:srgbClr val="FFFFFF"/>
+                </a:solidFill>
+                <a:latin typeface="Calibri" pitchFamily="34" charset="0"/>
+                <a:ea typeface="Calibri" pitchFamily="34" charset="-122"/>
+                <a:cs typeface="Calibri" pitchFamily="34" charset="-120"/>
+              </a:rPr>
+              <a:t>cialista</a:t>
+            </a:r>
+            <a:endParaRPr lang="en-US" sz="700" dirty="0"/>
+          </a:p>
+        </p:txBody>
+      </p:sp>
+      <p:sp>
+        <p:nvSpPr>
+          <p:cNvPr id="24" name="Shape 22"/>
+          <p:cNvSpPr/>
+          <p:nvPr/>
+        </p:nvSpPr>
+        <p:spPr>
+          <a:xfrm>
+            <a:off x="2022348" y="3493008"/>
+            <a:ext cx="0" cy="164592"/>
+          </a:xfrm>
+          <a:prstGeom prst="line">
+            <a:avLst/>
+          </a:prstGeom>
+          <a:noFill/>
+          <a:ln w="15875">
+            <a:solidFill>
+              <a:srgbClr val="E3E6EA"/>
+            </a:solidFill>
+            <a:prstDash val="solid"/>
+          </a:ln>
+        </p:spPr>
+      </p:sp>
+      <p:sp>
+        <p:nvSpPr>
+          <p:cNvPr id="25" name="Shape 23"/>
+          <p:cNvSpPr/>
+          <p:nvPr/>
+        </p:nvSpPr>
+        <p:spPr>
+          <a:xfrm>
+            <a:off x="1766316" y="3657600"/>
+            <a:ext cx="512064" cy="566928"/>
+          </a:xfrm>
+          <a:prstGeom prst="roundRect">
+            <a:avLst>
+              <a:gd name="adj" fmla="val 8929"/>
+            </a:avLst>
+          </a:prstGeom>
+          <a:solidFill>
+            <a:srgbClr val="9AA3AE"/>
+          </a:solidFill>
+          <a:ln w="12700">
+            <a:solidFill>
+              <a:srgbClr val="9AA3AE"/>
+            </a:solidFill>
+            <a:prstDash val="solid"/>
+          </a:ln>
+        </p:spPr>
+      </p:sp>
+      <p:sp>
+        <p:nvSpPr>
+          <p:cNvPr id="26" name="Text 24"/>
+          <p:cNvSpPr txBox="1"/>
+          <p:nvPr/>
+        </p:nvSpPr>
+        <p:spPr>
+          <a:xfrm>
+            <a:off x="1802892" y="3657600"/>
+            <a:ext cx="438912" cy="566928"/>
+          </a:xfrm>
+          <a:prstGeom prst="rect">
+            <a:avLst/>
+          </a:prstGeom>
+          <a:noFill/>
+          <a:ln/>
+        </p:spPr>
+        <p:txBody>
+          <a:bodyPr wrap="square" lIns="0" tIns="0" rIns="0" bIns="0" rtlCol="0" anchor="ctr"/>
+          <a:lstStyle/>
+          <a:p>
+            <a:pPr algn="ctr" indent="0" marL="0">
+              <a:buNone/>
+            </a:pPr>
+            <a:r>
+              <a:rPr lang="en-US" sz="700" b="1" dirty="0">
+                <a:solidFill>
+                  <a:srgbClr val="FFFFFF"/>
+                </a:solidFill>
+                <a:latin typeface="Calibri" pitchFamily="34" charset="0"/>
+                <a:ea typeface="Calibri" pitchFamily="34" charset="-122"/>
+                <a:cs typeface="Calibri" pitchFamily="34" charset="-120"/>
+              </a:rPr>
+              <a:t>Espe-</a:t>
+            </a:r>
+            <a:endParaRPr lang="en-US" sz="700" dirty="0"/>
+          </a:p>
+          <a:p>
+            <a:pPr algn="ctr" indent="0" marL="0">
+              <a:buNone/>
+            </a:pPr>
+            <a:r>
+              <a:rPr lang="en-US" sz="700" b="1" dirty="0">
+                <a:solidFill>
+                  <a:srgbClr val="FFFFFF"/>
+                </a:solidFill>
+                <a:latin typeface="Calibri" pitchFamily="34" charset="0"/>
+                <a:ea typeface="Calibri" pitchFamily="34" charset="-122"/>
+                <a:cs typeface="Calibri" pitchFamily="34" charset="-120"/>
+              </a:rPr>
+              <a:t>cialista</a:t>
+            </a:r>
+            <a:endParaRPr lang="en-US" sz="700" dirty="0"/>
+          </a:p>
+        </p:txBody>
+      </p:sp>
+      <p:sp>
+        <p:nvSpPr>
+          <p:cNvPr id="27" name="Shape 25"/>
+          <p:cNvSpPr/>
+          <p:nvPr/>
+        </p:nvSpPr>
+        <p:spPr>
+          <a:xfrm>
+            <a:off x="2589276" y="3493008"/>
+            <a:ext cx="0" cy="164592"/>
+          </a:xfrm>
+          <a:prstGeom prst="line">
+            <a:avLst/>
+          </a:prstGeom>
+          <a:noFill/>
+          <a:ln w="15875">
+            <a:solidFill>
+              <a:srgbClr val="E3E6EA"/>
+            </a:solidFill>
+            <a:prstDash val="solid"/>
+          </a:ln>
+        </p:spPr>
+      </p:sp>
+      <p:sp>
+        <p:nvSpPr>
+          <p:cNvPr id="28" name="Shape 26"/>
+          <p:cNvSpPr/>
+          <p:nvPr/>
+        </p:nvSpPr>
+        <p:spPr>
+          <a:xfrm>
+            <a:off x="2333244" y="3657600"/>
+            <a:ext cx="512064" cy="566928"/>
+          </a:xfrm>
+          <a:prstGeom prst="roundRect">
+            <a:avLst>
+              <a:gd name="adj" fmla="val 8929"/>
+            </a:avLst>
+          </a:prstGeom>
+          <a:solidFill>
+            <a:srgbClr val="9AA3AE"/>
+          </a:solidFill>
+          <a:ln w="12700">
+            <a:solidFill>
+              <a:srgbClr val="9AA3AE"/>
+            </a:solidFill>
+            <a:prstDash val="solid"/>
+          </a:ln>
+        </p:spPr>
+      </p:sp>
+      <p:sp>
+        <p:nvSpPr>
+          <p:cNvPr id="29" name="Text 27"/>
+          <p:cNvSpPr txBox="1"/>
+          <p:nvPr/>
+        </p:nvSpPr>
+        <p:spPr>
+          <a:xfrm>
+            <a:off x="2369820" y="3657600"/>
+            <a:ext cx="438912" cy="566928"/>
+          </a:xfrm>
+          <a:prstGeom prst="rect">
+            <a:avLst/>
+          </a:prstGeom>
+          <a:noFill/>
+          <a:ln/>
+        </p:spPr>
+        <p:txBody>
+          <a:bodyPr wrap="square" lIns="0" tIns="0" rIns="0" bIns="0" rtlCol="0" anchor="ctr"/>
+          <a:lstStyle/>
+          <a:p>
+            <a:pPr algn="ctr" indent="0" marL="0">
+              <a:buNone/>
+            </a:pPr>
+            <a:r>
+              <a:rPr lang="en-US" sz="700" b="1" dirty="0">
+                <a:solidFill>
+                  <a:srgbClr val="FFFFFF"/>
+                </a:solidFill>
+                <a:latin typeface="Calibri" pitchFamily="34" charset="0"/>
+                <a:ea typeface="Calibri" pitchFamily="34" charset="-122"/>
+                <a:cs typeface="Calibri" pitchFamily="34" charset="-120"/>
+              </a:rPr>
+              <a:t>Espe-</a:t>
+            </a:r>
+            <a:endParaRPr lang="en-US" sz="700" dirty="0"/>
+          </a:p>
+          <a:p>
+            <a:pPr algn="ctr" indent="0" marL="0">
+              <a:buNone/>
+            </a:pPr>
+            <a:r>
+              <a:rPr lang="en-US" sz="700" b="1" dirty="0">
+                <a:solidFill>
+                  <a:srgbClr val="FFFFFF"/>
+                </a:solidFill>
+                <a:latin typeface="Calibri" pitchFamily="34" charset="0"/>
+                <a:ea typeface="Calibri" pitchFamily="34" charset="-122"/>
+                <a:cs typeface="Calibri" pitchFamily="34" charset="-120"/>
+              </a:rPr>
+              <a:t>cialista</a:t>
+            </a:r>
+            <a:endParaRPr lang="en-US" sz="700" dirty="0"/>
+          </a:p>
+        </p:txBody>
+      </p:sp>
+      <p:sp>
+        <p:nvSpPr>
+          <p:cNvPr id="30" name="Shape 28"/>
+          <p:cNvSpPr/>
+          <p:nvPr/>
+        </p:nvSpPr>
+        <p:spPr>
+          <a:xfrm>
+            <a:off x="3156204" y="3493008"/>
+            <a:ext cx="0" cy="164592"/>
+          </a:xfrm>
+          <a:prstGeom prst="line">
+            <a:avLst/>
+          </a:prstGeom>
+          <a:noFill/>
+          <a:ln w="15875">
+            <a:solidFill>
+              <a:srgbClr val="E3E6EA"/>
+            </a:solidFill>
+            <a:prstDash val="solid"/>
+          </a:ln>
+        </p:spPr>
+      </p:sp>
+      <p:sp>
+        <p:nvSpPr>
+          <p:cNvPr id="31" name="Shape 29"/>
+          <p:cNvSpPr/>
+          <p:nvPr/>
+        </p:nvSpPr>
+        <p:spPr>
+          <a:xfrm>
+            <a:off x="2900172" y="3657600"/>
+            <a:ext cx="512064" cy="566928"/>
+          </a:xfrm>
+          <a:prstGeom prst="roundRect">
+            <a:avLst>
+              <a:gd name="adj" fmla="val 8929"/>
+            </a:avLst>
+          </a:prstGeom>
+          <a:solidFill>
+            <a:srgbClr val="9AA3AE"/>
+          </a:solidFill>
+          <a:ln w="12700">
+            <a:solidFill>
+              <a:srgbClr val="9AA3AE"/>
+            </a:solidFill>
+            <a:prstDash val="solid"/>
+          </a:ln>
+        </p:spPr>
+      </p:sp>
+      <p:sp>
+        <p:nvSpPr>
+          <p:cNvPr id="32" name="Text 30"/>
+          <p:cNvSpPr txBox="1"/>
+          <p:nvPr/>
+        </p:nvSpPr>
+        <p:spPr>
+          <a:xfrm>
+            <a:off x="2936748" y="3657600"/>
+            <a:ext cx="438912" cy="566928"/>
+          </a:xfrm>
+          <a:prstGeom prst="rect">
+            <a:avLst/>
+          </a:prstGeom>
+          <a:noFill/>
+          <a:ln/>
+        </p:spPr>
+        <p:txBody>
+          <a:bodyPr wrap="square" lIns="0" tIns="0" rIns="0" bIns="0" rtlCol="0" anchor="ctr"/>
+          <a:lstStyle/>
+          <a:p>
+            <a:pPr algn="ctr" indent="0" marL="0">
+              <a:buNone/>
+            </a:pPr>
+            <a:r>
+              <a:rPr lang="en-US" sz="700" b="1" dirty="0">
+                <a:solidFill>
+                  <a:srgbClr val="FFFFFF"/>
+                </a:solidFill>
+                <a:latin typeface="Calibri" pitchFamily="34" charset="0"/>
+                <a:ea typeface="Calibri" pitchFamily="34" charset="-122"/>
+                <a:cs typeface="Calibri" pitchFamily="34" charset="-120"/>
+              </a:rPr>
+              <a:t>Espe-</a:t>
+            </a:r>
+            <a:endParaRPr lang="en-US" sz="700" dirty="0"/>
+          </a:p>
+          <a:p>
+            <a:pPr algn="ctr" indent="0" marL="0">
+              <a:buNone/>
+            </a:pPr>
+            <a:r>
+              <a:rPr lang="en-US" sz="700" b="1" dirty="0">
+                <a:solidFill>
+                  <a:srgbClr val="FFFFFF"/>
+                </a:solidFill>
+                <a:latin typeface="Calibri" pitchFamily="34" charset="0"/>
+                <a:ea typeface="Calibri" pitchFamily="34" charset="-122"/>
+                <a:cs typeface="Calibri" pitchFamily="34" charset="-120"/>
+              </a:rPr>
+              <a:t>cialista</a:t>
+            </a:r>
+            <a:endParaRPr lang="en-US" sz="700" dirty="0"/>
+          </a:p>
+        </p:txBody>
+      </p:sp>
+      <p:sp>
+        <p:nvSpPr>
+          <p:cNvPr id="33" name="Shape 31"/>
+          <p:cNvSpPr/>
+          <p:nvPr/>
+        </p:nvSpPr>
+        <p:spPr>
+          <a:xfrm>
+            <a:off x="3723132" y="3493008"/>
+            <a:ext cx="0" cy="164592"/>
+          </a:xfrm>
+          <a:prstGeom prst="line">
+            <a:avLst/>
+          </a:prstGeom>
+          <a:noFill/>
+          <a:ln w="15875">
+            <a:solidFill>
+              <a:srgbClr val="E3E6EA"/>
+            </a:solidFill>
+            <a:prstDash val="solid"/>
+          </a:ln>
+        </p:spPr>
+      </p:sp>
+      <p:sp>
+        <p:nvSpPr>
+          <p:cNvPr id="34" name="Shape 32"/>
+          <p:cNvSpPr/>
+          <p:nvPr/>
+        </p:nvSpPr>
+        <p:spPr>
+          <a:xfrm>
+            <a:off x="3467100" y="3657600"/>
+            <a:ext cx="512064" cy="566928"/>
+          </a:xfrm>
+          <a:prstGeom prst="roundRect">
+            <a:avLst>
+              <a:gd name="adj" fmla="val 8929"/>
+            </a:avLst>
+          </a:prstGeom>
+          <a:solidFill>
+            <a:srgbClr val="9AA3AE"/>
+          </a:solidFill>
+          <a:ln w="12700">
+            <a:solidFill>
+              <a:srgbClr val="9AA3AE"/>
+            </a:solidFill>
+            <a:prstDash val="solid"/>
+          </a:ln>
+        </p:spPr>
+      </p:sp>
+      <p:sp>
+        <p:nvSpPr>
+          <p:cNvPr id="35" name="Text 33"/>
+          <p:cNvSpPr txBox="1"/>
+          <p:nvPr/>
+        </p:nvSpPr>
+        <p:spPr>
+          <a:xfrm>
+            <a:off x="3503676" y="3657600"/>
+            <a:ext cx="438912" cy="566928"/>
+          </a:xfrm>
+          <a:prstGeom prst="rect">
+            <a:avLst/>
+          </a:prstGeom>
+          <a:noFill/>
+          <a:ln/>
+        </p:spPr>
+        <p:txBody>
+          <a:bodyPr wrap="square" lIns="0" tIns="0" rIns="0" bIns="0" rtlCol="0" anchor="ctr"/>
+          <a:lstStyle/>
+          <a:p>
+            <a:pPr algn="ctr" indent="0" marL="0">
+              <a:buNone/>
+            </a:pPr>
+            <a:r>
+              <a:rPr lang="en-US" sz="700" b="1" dirty="0">
+                <a:solidFill>
+                  <a:srgbClr val="FFFFFF"/>
+                </a:solidFill>
+                <a:latin typeface="Calibri" pitchFamily="34" charset="0"/>
+                <a:ea typeface="Calibri" pitchFamily="34" charset="-122"/>
+                <a:cs typeface="Calibri" pitchFamily="34" charset="-120"/>
+              </a:rPr>
+              <a:t>Espe-</a:t>
+            </a:r>
+            <a:endParaRPr lang="en-US" sz="700" dirty="0"/>
+          </a:p>
+          <a:p>
+            <a:pPr algn="ctr" indent="0" marL="0">
+              <a:buNone/>
+            </a:pPr>
+            <a:r>
+              <a:rPr lang="en-US" sz="700" b="1" dirty="0">
+                <a:solidFill>
+                  <a:srgbClr val="FFFFFF"/>
+                </a:solidFill>
+                <a:latin typeface="Calibri" pitchFamily="34" charset="0"/>
+                <a:ea typeface="Calibri" pitchFamily="34" charset="-122"/>
+                <a:cs typeface="Calibri" pitchFamily="34" charset="-120"/>
+              </a:rPr>
+              <a:t>cialista</a:t>
+            </a:r>
+            <a:endParaRPr lang="en-US" sz="700" dirty="0"/>
+          </a:p>
+        </p:txBody>
+      </p:sp>
+      <p:sp>
+        <p:nvSpPr>
+          <p:cNvPr id="36" name="Text 34"/>
+          <p:cNvSpPr txBox="1"/>
+          <p:nvPr/>
+        </p:nvSpPr>
+        <p:spPr>
+          <a:xfrm>
+            <a:off x="548640" y="4343400"/>
+            <a:ext cx="3514344" cy="274320"/>
+          </a:xfrm>
+          <a:prstGeom prst="rect">
+            <a:avLst/>
+          </a:prstGeom>
+          <a:noFill/>
+          <a:ln/>
+        </p:spPr>
+        <p:txBody>
+          <a:bodyPr wrap="square" lIns="0" tIns="0" rIns="0" bIns="0" rtlCol="0" anchor="ctr"/>
+          <a:lstStyle/>
+          <a:p>
+            <a:pPr algn="ctr" indent="0" marL="0">
+              <a:buNone/>
+            </a:pPr>
+            <a:r>
+              <a:rPr lang="en-US" sz="900" dirty="0">
+                <a:solidFill>
+                  <a:srgbClr val="5B6470"/>
+                </a:solidFill>
+                <a:latin typeface="Calibri" pitchFamily="34" charset="0"/>
+                <a:ea typeface="Calibri" pitchFamily="34" charset="-122"/>
+                <a:cs typeface="Calibri" pitchFamily="34" charset="-120"/>
+              </a:rPr>
+              <a:t>Seis Especialistas Normativos, un mismo grado</a:t>
+            </a:r>
+            <a:endParaRPr lang="en-US" sz="900" dirty="0"/>
+          </a:p>
+        </p:txBody>
+      </p:sp>
+      <p:sp>
+        <p:nvSpPr>
+          <p:cNvPr id="37" name="Text 35"/>
+          <p:cNvSpPr txBox="1"/>
+          <p:nvPr/>
+        </p:nvSpPr>
+        <p:spPr>
+          <a:xfrm>
+            <a:off x="731520" y="5074920"/>
+            <a:ext cx="3148584" cy="822960"/>
+          </a:xfrm>
+          <a:prstGeom prst="rect">
+            <a:avLst/>
+          </a:prstGeom>
+          <a:noFill/>
+          <a:ln/>
+        </p:spPr>
+        <p:txBody>
+          <a:bodyPr wrap="square" lIns="0" tIns="0" rIns="0" bIns="0" rtlCol="0" anchor="t"/>
+          <a:lstStyle/>
+          <a:p>
+            <a:pPr indent="0" marL="0">
+              <a:buNone/>
+            </a:pPr>
+            <a:r>
+              <a:rPr lang="en-US" sz="950" dirty="0">
+                <a:solidFill>
+                  <a:srgbClr val="5B6470"/>
+                </a:solidFill>
+                <a:latin typeface="Calibri" pitchFamily="34" charset="0"/>
+                <a:ea typeface="Calibri" pitchFamily="34" charset="-122"/>
+                <a:cs typeface="Calibri" pitchFamily="34" charset="-120"/>
+              </a:rPr>
+              <a:t>Los 18 reportes se reparten sin diferenciar complejidad ni competencias; la validación y la firma recaen en el Jefe.</a:t>
+            </a:r>
+            <a:endParaRPr lang="en-US" sz="950" dirty="0"/>
+          </a:p>
+        </p:txBody>
+      </p:sp>
+      <p:sp>
+        <p:nvSpPr>
+          <p:cNvPr id="38" name="Shape 36"/>
+          <p:cNvSpPr/>
+          <p:nvPr/>
+        </p:nvSpPr>
+        <p:spPr>
+          <a:xfrm>
+            <a:off x="4337304" y="1874520"/>
+            <a:ext cx="3514344" cy="4069080"/>
+          </a:xfrm>
+          <a:prstGeom prst="roundRect">
+            <a:avLst>
+              <a:gd name="adj" fmla="val 1561"/>
+            </a:avLst>
+          </a:prstGeom>
+          <a:solidFill>
+            <a:srgbClr val="FFFFFF"/>
           </a:solidFill>
           <a:ln w="9525">
             <a:solidFill>
-              <a:srgbClr val="F6F7F9"/>
+              <a:srgbClr val="E3E6EA"/>
             </a:solidFill>
             <a:prstDash val="solid"/>
           </a:ln>
@@ -26089,14 +24964,14 @@
       </p:sp>
       <p:sp>
         <p:nvSpPr>
-          <p:cNvPr id="13" name="Text 11"/>
-          <p:cNvSpPr txBox="1"/>
-          <p:nvPr/>
-        </p:nvSpPr>
-        <p:spPr>
-          <a:xfrm>
-            <a:off x="3566160" y="2148840"/>
-            <a:ext cx="2148840" cy="548640"/>
+          <p:cNvPr id="39" name="Text 37"/>
+          <p:cNvSpPr txBox="1"/>
+          <p:nvPr/>
+        </p:nvSpPr>
+        <p:spPr>
+          <a:xfrm>
+            <a:off x="4520184" y="1965960"/>
+            <a:ext cx="3148584" cy="256032"/>
           </a:xfrm>
           <a:prstGeom prst="rect">
             <a:avLst/>
@@ -26112,81 +24987,1341 @@
               <a:buNone/>
             </a:pPr>
             <a:r>
-              <a:rPr lang="en-US" sz="1350" b="1" dirty="0">
-                <a:solidFill>
-                  <a:srgbClr val="2B2F36"/>
-                </a:solidFill>
-                <a:latin typeface="Calibri" pitchFamily="34" charset="0"/>
-                <a:ea typeface="Calibri" pitchFamily="34" charset="-122"/>
-                <a:cs typeface="Calibri" pitchFamily="34" charset="-120"/>
-              </a:rPr>
-              <a:t>Escala diferenciada</a:t>
-            </a:r>
-            <a:endParaRPr lang="en-US" sz="1350" dirty="0"/>
-          </a:p>
-        </p:txBody>
-      </p:sp>
-      <p:sp>
-        <p:nvSpPr>
-          <p:cNvPr id="14" name="Text 12"/>
-          <p:cNvSpPr txBox="1"/>
-          <p:nvPr/>
-        </p:nvSpPr>
-        <p:spPr>
-          <a:xfrm>
-            <a:off x="3566160" y="2743200"/>
-            <a:ext cx="2148840" cy="2377440"/>
-          </a:xfrm>
-          <a:prstGeom prst="rect">
-            <a:avLst/>
-          </a:prstGeom>
-          <a:noFill/>
-          <a:ln/>
-        </p:spPr>
-        <p:txBody>
-          <a:bodyPr wrap="square" lIns="0" tIns="0" rIns="0" bIns="0" rtlCol="0" anchor="t"/>
-          <a:lstStyle/>
-          <a:p>
-            <a:pPr indent="0" marL="0">
-              <a:buNone/>
-            </a:pPr>
-            <a:r>
-              <a:rPr lang="en-US" sz="1050" dirty="0">
-                <a:solidFill>
-                  <a:srgbClr val="5B6470"/>
-                </a:solidFill>
-                <a:latin typeface="Calibri" pitchFamily="34" charset="0"/>
-                <a:ea typeface="Calibri" pitchFamily="34" charset="-122"/>
-                <a:cs typeface="Calibri" pitchFamily="34" charset="-120"/>
-              </a:rPr>
-              <a:t>Analista, analista senior, jefe y subgerente son grados distintos, con separación entre quien prepara y quien firma. Las referencias públicas ubican jefaturas y especialistas contables en bandas distintas a los analistas operativos.</a:t>
-            </a:r>
-            <a:endParaRPr lang="en-US" sz="1050" dirty="0"/>
-          </a:p>
-        </p:txBody>
-      </p:sp>
-      <p:sp>
-        <p:nvSpPr>
-          <p:cNvPr id="15" name="Shape 13"/>
+              <a:rPr lang="en-US" sz="900" b="1" spc="200" kern="0" dirty="0">
+                <a:solidFill>
+                  <a:srgbClr val="4A6FA5"/>
+                </a:solidFill>
+                <a:latin typeface="Calibri" pitchFamily="34" charset="0"/>
+                <a:ea typeface="Calibri" pitchFamily="34" charset="-122"/>
+                <a:cs typeface="Calibri" pitchFamily="34" charset="-120"/>
+              </a:rPr>
+              <a:t>ALTERNATIVA 1 · UN GRADO MÁS PARA TODOS</a:t>
+            </a:r>
+            <a:endParaRPr lang="en-US" sz="900" dirty="0"/>
+          </a:p>
+        </p:txBody>
+      </p:sp>
+      <p:sp>
+        <p:nvSpPr>
+          <p:cNvPr id="40" name="Shape 38"/>
           <p:cNvSpPr/>
           <p:nvPr/>
         </p:nvSpPr>
         <p:spPr>
           <a:xfrm>
-            <a:off x="6126480" y="1965960"/>
-            <a:ext cx="2606040" cy="3291840"/>
+            <a:off x="5408676" y="2377440"/>
+            <a:ext cx="1371600" cy="329184"/>
           </a:xfrm>
           <a:prstGeom prst="roundRect">
             <a:avLst>
-              <a:gd name="adj" fmla="val 2105"/>
+              <a:gd name="adj" fmla="val 13889"/>
             </a:avLst>
           </a:prstGeom>
           <a:solidFill>
-            <a:srgbClr val="F6F7F9"/>
+            <a:srgbClr val="E6ECF5"/>
+          </a:solidFill>
+          <a:ln w="12700">
+            <a:solidFill>
+              <a:srgbClr val="E6ECF5"/>
+            </a:solidFill>
+            <a:prstDash val="solid"/>
+          </a:ln>
+        </p:spPr>
+      </p:sp>
+      <p:sp>
+        <p:nvSpPr>
+          <p:cNvPr id="41" name="Text 39"/>
+          <p:cNvSpPr txBox="1"/>
+          <p:nvPr/>
+        </p:nvSpPr>
+        <p:spPr>
+          <a:xfrm>
+            <a:off x="5445252" y="2377440"/>
+            <a:ext cx="1298448" cy="329184"/>
+          </a:xfrm>
+          <a:prstGeom prst="rect">
+            <a:avLst/>
+          </a:prstGeom>
+          <a:noFill/>
+          <a:ln/>
+        </p:spPr>
+        <p:txBody>
+          <a:bodyPr wrap="square" lIns="0" tIns="0" rIns="0" bIns="0" rtlCol="0" anchor="ctr"/>
+          <a:lstStyle/>
+          <a:p>
+            <a:pPr algn="ctr" indent="0" marL="0">
+              <a:buNone/>
+            </a:pPr>
+            <a:r>
+              <a:rPr lang="en-US" sz="850" b="1" dirty="0">
+                <a:solidFill>
+                  <a:srgbClr val="34517D"/>
+                </a:solidFill>
+                <a:latin typeface="Calibri" pitchFamily="34" charset="0"/>
+                <a:ea typeface="Calibri" pitchFamily="34" charset="-122"/>
+                <a:cs typeface="Calibri" pitchFamily="34" charset="-120"/>
+              </a:rPr>
+              <a:t>Subgerente</a:t>
+            </a:r>
+            <a:endParaRPr lang="en-US" sz="850" dirty="0"/>
+          </a:p>
+        </p:txBody>
+      </p:sp>
+      <p:sp>
+        <p:nvSpPr>
+          <p:cNvPr id="42" name="Shape 40"/>
+          <p:cNvSpPr/>
+          <p:nvPr/>
+        </p:nvSpPr>
+        <p:spPr>
+          <a:xfrm>
+            <a:off x="6094476" y="2706624"/>
+            <a:ext cx="0" cy="201168"/>
+          </a:xfrm>
+          <a:prstGeom prst="line">
+            <a:avLst/>
+          </a:prstGeom>
+          <a:noFill/>
+          <a:ln w="15875">
+            <a:solidFill>
+              <a:srgbClr val="A9BEDC"/>
+            </a:solidFill>
+            <a:prstDash val="solid"/>
+          </a:ln>
+        </p:spPr>
+      </p:sp>
+      <p:sp>
+        <p:nvSpPr>
+          <p:cNvPr id="43" name="Shape 41"/>
+          <p:cNvSpPr/>
+          <p:nvPr/>
+        </p:nvSpPr>
+        <p:spPr>
+          <a:xfrm>
+            <a:off x="5408676" y="2907792"/>
+            <a:ext cx="1371600" cy="329184"/>
+          </a:xfrm>
+          <a:prstGeom prst="roundRect">
+            <a:avLst>
+              <a:gd name="adj" fmla="val 13889"/>
+            </a:avLst>
+          </a:prstGeom>
+          <a:solidFill>
+            <a:srgbClr val="E6ECF5"/>
+          </a:solidFill>
+          <a:ln w="12700">
+            <a:solidFill>
+              <a:srgbClr val="E6ECF5"/>
+            </a:solidFill>
+            <a:prstDash val="solid"/>
+          </a:ln>
+        </p:spPr>
+      </p:sp>
+      <p:sp>
+        <p:nvSpPr>
+          <p:cNvPr id="44" name="Text 42"/>
+          <p:cNvSpPr txBox="1"/>
+          <p:nvPr/>
+        </p:nvSpPr>
+        <p:spPr>
+          <a:xfrm>
+            <a:off x="5445252" y="2907792"/>
+            <a:ext cx="1298448" cy="329184"/>
+          </a:xfrm>
+          <a:prstGeom prst="rect">
+            <a:avLst/>
+          </a:prstGeom>
+          <a:noFill/>
+          <a:ln/>
+        </p:spPr>
+        <p:txBody>
+          <a:bodyPr wrap="square" lIns="0" tIns="0" rIns="0" bIns="0" rtlCol="0" anchor="ctr"/>
+          <a:lstStyle/>
+          <a:p>
+            <a:pPr algn="ctr" indent="0" marL="0">
+              <a:buNone/>
+            </a:pPr>
+            <a:r>
+              <a:rPr lang="en-US" sz="850" b="1" dirty="0">
+                <a:solidFill>
+                  <a:srgbClr val="34517D"/>
+                </a:solidFill>
+                <a:latin typeface="Calibri" pitchFamily="34" charset="0"/>
+                <a:ea typeface="Calibri" pitchFamily="34" charset="-122"/>
+                <a:cs typeface="Calibri" pitchFamily="34" charset="-120"/>
+              </a:rPr>
+              <a:t>Jefe Normativo</a:t>
+            </a:r>
+            <a:endParaRPr lang="en-US" sz="850" dirty="0"/>
+          </a:p>
+        </p:txBody>
+      </p:sp>
+      <p:sp>
+        <p:nvSpPr>
+          <p:cNvPr id="45" name="Shape 43"/>
+          <p:cNvSpPr/>
+          <p:nvPr/>
+        </p:nvSpPr>
+        <p:spPr>
+          <a:xfrm>
+            <a:off x="6094476" y="3236976"/>
+            <a:ext cx="0" cy="256032"/>
+          </a:xfrm>
+          <a:prstGeom prst="line">
+            <a:avLst/>
+          </a:prstGeom>
+          <a:noFill/>
+          <a:ln w="15875">
+            <a:solidFill>
+              <a:srgbClr val="A9BEDC"/>
+            </a:solidFill>
+            <a:prstDash val="solid"/>
+          </a:ln>
+        </p:spPr>
+      </p:sp>
+      <p:sp>
+        <p:nvSpPr>
+          <p:cNvPr id="46" name="Shape 44"/>
+          <p:cNvSpPr/>
+          <p:nvPr/>
+        </p:nvSpPr>
+        <p:spPr>
+          <a:xfrm>
+            <a:off x="4677156" y="3493008"/>
+            <a:ext cx="2834640" cy="0"/>
+          </a:xfrm>
+          <a:prstGeom prst="line">
+            <a:avLst/>
+          </a:prstGeom>
+          <a:noFill/>
+          <a:ln w="15875">
+            <a:solidFill>
+              <a:srgbClr val="A9BEDC"/>
+            </a:solidFill>
+            <a:prstDash val="solid"/>
+          </a:ln>
+        </p:spPr>
+      </p:sp>
+      <p:sp>
+        <p:nvSpPr>
+          <p:cNvPr id="47" name="Shape 45"/>
+          <p:cNvSpPr/>
+          <p:nvPr/>
+        </p:nvSpPr>
+        <p:spPr>
+          <a:xfrm>
+            <a:off x="4677156" y="3493008"/>
+            <a:ext cx="0" cy="164592"/>
+          </a:xfrm>
+          <a:prstGeom prst="line">
+            <a:avLst/>
+          </a:prstGeom>
+          <a:noFill/>
+          <a:ln w="15875">
+            <a:solidFill>
+              <a:srgbClr val="A9BEDC"/>
+            </a:solidFill>
+            <a:prstDash val="solid"/>
+          </a:ln>
+        </p:spPr>
+      </p:sp>
+      <p:sp>
+        <p:nvSpPr>
+          <p:cNvPr id="48" name="Shape 46"/>
+          <p:cNvSpPr/>
+          <p:nvPr/>
+        </p:nvSpPr>
+        <p:spPr>
+          <a:xfrm>
+            <a:off x="4421124" y="3657600"/>
+            <a:ext cx="512064" cy="566928"/>
+          </a:xfrm>
+          <a:prstGeom prst="roundRect">
+            <a:avLst>
+              <a:gd name="adj" fmla="val 8929"/>
+            </a:avLst>
+          </a:prstGeom>
+          <a:solidFill>
+            <a:srgbClr val="4A6FA5"/>
+          </a:solidFill>
+          <a:ln w="12700">
+            <a:solidFill>
+              <a:srgbClr val="4A6FA5"/>
+            </a:solidFill>
+            <a:prstDash val="solid"/>
+          </a:ln>
+        </p:spPr>
+      </p:sp>
+      <p:sp>
+        <p:nvSpPr>
+          <p:cNvPr id="49" name="Text 47"/>
+          <p:cNvSpPr txBox="1"/>
+          <p:nvPr/>
+        </p:nvSpPr>
+        <p:spPr>
+          <a:xfrm>
+            <a:off x="4457700" y="3657600"/>
+            <a:ext cx="438912" cy="566928"/>
+          </a:xfrm>
+          <a:prstGeom prst="rect">
+            <a:avLst/>
+          </a:prstGeom>
+          <a:noFill/>
+          <a:ln/>
+        </p:spPr>
+        <p:txBody>
+          <a:bodyPr wrap="square" lIns="0" tIns="0" rIns="0" bIns="0" rtlCol="0" anchor="ctr"/>
+          <a:lstStyle/>
+          <a:p>
+            <a:pPr algn="ctr" indent="0" marL="0">
+              <a:buNone/>
+            </a:pPr>
+            <a:r>
+              <a:rPr lang="en-US" sz="700" b="1" dirty="0">
+                <a:solidFill>
+                  <a:srgbClr val="FFFFFF"/>
+                </a:solidFill>
+                <a:latin typeface="Calibri" pitchFamily="34" charset="0"/>
+                <a:ea typeface="Calibri" pitchFamily="34" charset="-122"/>
+                <a:cs typeface="Calibri" pitchFamily="34" charset="-120"/>
+              </a:rPr>
+              <a:t>Espe-</a:t>
+            </a:r>
+            <a:endParaRPr lang="en-US" sz="700" dirty="0"/>
+          </a:p>
+          <a:p>
+            <a:pPr algn="ctr" indent="0" marL="0">
+              <a:buNone/>
+            </a:pPr>
+            <a:r>
+              <a:rPr lang="en-US" sz="700" b="1" dirty="0">
+                <a:solidFill>
+                  <a:srgbClr val="FFFFFF"/>
+                </a:solidFill>
+                <a:latin typeface="Calibri" pitchFamily="34" charset="0"/>
+                <a:ea typeface="Calibri" pitchFamily="34" charset="-122"/>
+                <a:cs typeface="Calibri" pitchFamily="34" charset="-120"/>
+              </a:rPr>
+              <a:t>cialista</a:t>
+            </a:r>
+            <a:endParaRPr lang="en-US" sz="700" dirty="0"/>
+          </a:p>
+        </p:txBody>
+      </p:sp>
+      <p:sp>
+        <p:nvSpPr>
+          <p:cNvPr id="50" name="Shape 48"/>
+          <p:cNvSpPr/>
+          <p:nvPr/>
+        </p:nvSpPr>
+        <p:spPr>
+          <a:xfrm>
+            <a:off x="5244084" y="3493008"/>
+            <a:ext cx="0" cy="164592"/>
+          </a:xfrm>
+          <a:prstGeom prst="line">
+            <a:avLst/>
+          </a:prstGeom>
+          <a:noFill/>
+          <a:ln w="15875">
+            <a:solidFill>
+              <a:srgbClr val="A9BEDC"/>
+            </a:solidFill>
+            <a:prstDash val="solid"/>
+          </a:ln>
+        </p:spPr>
+      </p:sp>
+      <p:sp>
+        <p:nvSpPr>
+          <p:cNvPr id="51" name="Shape 49"/>
+          <p:cNvSpPr/>
+          <p:nvPr/>
+        </p:nvSpPr>
+        <p:spPr>
+          <a:xfrm>
+            <a:off x="4988052" y="3657600"/>
+            <a:ext cx="512064" cy="566928"/>
+          </a:xfrm>
+          <a:prstGeom prst="roundRect">
+            <a:avLst>
+              <a:gd name="adj" fmla="val 8929"/>
+            </a:avLst>
+          </a:prstGeom>
+          <a:solidFill>
+            <a:srgbClr val="4A6FA5"/>
+          </a:solidFill>
+          <a:ln w="12700">
+            <a:solidFill>
+              <a:srgbClr val="4A6FA5"/>
+            </a:solidFill>
+            <a:prstDash val="solid"/>
+          </a:ln>
+        </p:spPr>
+      </p:sp>
+      <p:sp>
+        <p:nvSpPr>
+          <p:cNvPr id="52" name="Text 50"/>
+          <p:cNvSpPr txBox="1"/>
+          <p:nvPr/>
+        </p:nvSpPr>
+        <p:spPr>
+          <a:xfrm>
+            <a:off x="5024628" y="3657600"/>
+            <a:ext cx="438912" cy="566928"/>
+          </a:xfrm>
+          <a:prstGeom prst="rect">
+            <a:avLst/>
+          </a:prstGeom>
+          <a:noFill/>
+          <a:ln/>
+        </p:spPr>
+        <p:txBody>
+          <a:bodyPr wrap="square" lIns="0" tIns="0" rIns="0" bIns="0" rtlCol="0" anchor="ctr"/>
+          <a:lstStyle/>
+          <a:p>
+            <a:pPr algn="ctr" indent="0" marL="0">
+              <a:buNone/>
+            </a:pPr>
+            <a:r>
+              <a:rPr lang="en-US" sz="700" b="1" dirty="0">
+                <a:solidFill>
+                  <a:srgbClr val="FFFFFF"/>
+                </a:solidFill>
+                <a:latin typeface="Calibri" pitchFamily="34" charset="0"/>
+                <a:ea typeface="Calibri" pitchFamily="34" charset="-122"/>
+                <a:cs typeface="Calibri" pitchFamily="34" charset="-120"/>
+              </a:rPr>
+              <a:t>Espe-</a:t>
+            </a:r>
+            <a:endParaRPr lang="en-US" sz="700" dirty="0"/>
+          </a:p>
+          <a:p>
+            <a:pPr algn="ctr" indent="0" marL="0">
+              <a:buNone/>
+            </a:pPr>
+            <a:r>
+              <a:rPr lang="en-US" sz="700" b="1" dirty="0">
+                <a:solidFill>
+                  <a:srgbClr val="FFFFFF"/>
+                </a:solidFill>
+                <a:latin typeface="Calibri" pitchFamily="34" charset="0"/>
+                <a:ea typeface="Calibri" pitchFamily="34" charset="-122"/>
+                <a:cs typeface="Calibri" pitchFamily="34" charset="-120"/>
+              </a:rPr>
+              <a:t>cialista</a:t>
+            </a:r>
+            <a:endParaRPr lang="en-US" sz="700" dirty="0"/>
+          </a:p>
+        </p:txBody>
+      </p:sp>
+      <p:sp>
+        <p:nvSpPr>
+          <p:cNvPr id="53" name="Shape 51"/>
+          <p:cNvSpPr/>
+          <p:nvPr/>
+        </p:nvSpPr>
+        <p:spPr>
+          <a:xfrm>
+            <a:off x="5811012" y="3493008"/>
+            <a:ext cx="0" cy="164592"/>
+          </a:xfrm>
+          <a:prstGeom prst="line">
+            <a:avLst/>
+          </a:prstGeom>
+          <a:noFill/>
+          <a:ln w="15875">
+            <a:solidFill>
+              <a:srgbClr val="A9BEDC"/>
+            </a:solidFill>
+            <a:prstDash val="solid"/>
+          </a:ln>
+        </p:spPr>
+      </p:sp>
+      <p:sp>
+        <p:nvSpPr>
+          <p:cNvPr id="54" name="Shape 52"/>
+          <p:cNvSpPr/>
+          <p:nvPr/>
+        </p:nvSpPr>
+        <p:spPr>
+          <a:xfrm>
+            <a:off x="5554980" y="3657600"/>
+            <a:ext cx="512064" cy="566928"/>
+          </a:xfrm>
+          <a:prstGeom prst="roundRect">
+            <a:avLst>
+              <a:gd name="adj" fmla="val 8929"/>
+            </a:avLst>
+          </a:prstGeom>
+          <a:solidFill>
+            <a:srgbClr val="4A6FA5"/>
+          </a:solidFill>
+          <a:ln w="12700">
+            <a:solidFill>
+              <a:srgbClr val="4A6FA5"/>
+            </a:solidFill>
+            <a:prstDash val="solid"/>
+          </a:ln>
+        </p:spPr>
+      </p:sp>
+      <p:sp>
+        <p:nvSpPr>
+          <p:cNvPr id="55" name="Text 53"/>
+          <p:cNvSpPr txBox="1"/>
+          <p:nvPr/>
+        </p:nvSpPr>
+        <p:spPr>
+          <a:xfrm>
+            <a:off x="5591556" y="3657600"/>
+            <a:ext cx="438912" cy="566928"/>
+          </a:xfrm>
+          <a:prstGeom prst="rect">
+            <a:avLst/>
+          </a:prstGeom>
+          <a:noFill/>
+          <a:ln/>
+        </p:spPr>
+        <p:txBody>
+          <a:bodyPr wrap="square" lIns="0" tIns="0" rIns="0" bIns="0" rtlCol="0" anchor="ctr"/>
+          <a:lstStyle/>
+          <a:p>
+            <a:pPr algn="ctr" indent="0" marL="0">
+              <a:buNone/>
+            </a:pPr>
+            <a:r>
+              <a:rPr lang="en-US" sz="700" b="1" dirty="0">
+                <a:solidFill>
+                  <a:srgbClr val="FFFFFF"/>
+                </a:solidFill>
+                <a:latin typeface="Calibri" pitchFamily="34" charset="0"/>
+                <a:ea typeface="Calibri" pitchFamily="34" charset="-122"/>
+                <a:cs typeface="Calibri" pitchFamily="34" charset="-120"/>
+              </a:rPr>
+              <a:t>Espe-</a:t>
+            </a:r>
+            <a:endParaRPr lang="en-US" sz="700" dirty="0"/>
+          </a:p>
+          <a:p>
+            <a:pPr algn="ctr" indent="0" marL="0">
+              <a:buNone/>
+            </a:pPr>
+            <a:r>
+              <a:rPr lang="en-US" sz="700" b="1" dirty="0">
+                <a:solidFill>
+                  <a:srgbClr val="FFFFFF"/>
+                </a:solidFill>
+                <a:latin typeface="Calibri" pitchFamily="34" charset="0"/>
+                <a:ea typeface="Calibri" pitchFamily="34" charset="-122"/>
+                <a:cs typeface="Calibri" pitchFamily="34" charset="-120"/>
+              </a:rPr>
+              <a:t>cialista</a:t>
+            </a:r>
+            <a:endParaRPr lang="en-US" sz="700" dirty="0"/>
+          </a:p>
+        </p:txBody>
+      </p:sp>
+      <p:sp>
+        <p:nvSpPr>
+          <p:cNvPr id="56" name="Shape 54"/>
+          <p:cNvSpPr/>
+          <p:nvPr/>
+        </p:nvSpPr>
+        <p:spPr>
+          <a:xfrm>
+            <a:off x="6377940" y="3493008"/>
+            <a:ext cx="0" cy="164592"/>
+          </a:xfrm>
+          <a:prstGeom prst="line">
+            <a:avLst/>
+          </a:prstGeom>
+          <a:noFill/>
+          <a:ln w="15875">
+            <a:solidFill>
+              <a:srgbClr val="A9BEDC"/>
+            </a:solidFill>
+            <a:prstDash val="solid"/>
+          </a:ln>
+        </p:spPr>
+      </p:sp>
+      <p:sp>
+        <p:nvSpPr>
+          <p:cNvPr id="57" name="Shape 55"/>
+          <p:cNvSpPr/>
+          <p:nvPr/>
+        </p:nvSpPr>
+        <p:spPr>
+          <a:xfrm>
+            <a:off x="6121908" y="3657600"/>
+            <a:ext cx="512064" cy="566928"/>
+          </a:xfrm>
+          <a:prstGeom prst="roundRect">
+            <a:avLst>
+              <a:gd name="adj" fmla="val 8929"/>
+            </a:avLst>
+          </a:prstGeom>
+          <a:solidFill>
+            <a:srgbClr val="4A6FA5"/>
+          </a:solidFill>
+          <a:ln w="12700">
+            <a:solidFill>
+              <a:srgbClr val="4A6FA5"/>
+            </a:solidFill>
+            <a:prstDash val="solid"/>
+          </a:ln>
+        </p:spPr>
+      </p:sp>
+      <p:sp>
+        <p:nvSpPr>
+          <p:cNvPr id="58" name="Text 56"/>
+          <p:cNvSpPr txBox="1"/>
+          <p:nvPr/>
+        </p:nvSpPr>
+        <p:spPr>
+          <a:xfrm>
+            <a:off x="6158484" y="3657600"/>
+            <a:ext cx="438912" cy="566928"/>
+          </a:xfrm>
+          <a:prstGeom prst="rect">
+            <a:avLst/>
+          </a:prstGeom>
+          <a:noFill/>
+          <a:ln/>
+        </p:spPr>
+        <p:txBody>
+          <a:bodyPr wrap="square" lIns="0" tIns="0" rIns="0" bIns="0" rtlCol="0" anchor="ctr"/>
+          <a:lstStyle/>
+          <a:p>
+            <a:pPr algn="ctr" indent="0" marL="0">
+              <a:buNone/>
+            </a:pPr>
+            <a:r>
+              <a:rPr lang="en-US" sz="700" b="1" dirty="0">
+                <a:solidFill>
+                  <a:srgbClr val="FFFFFF"/>
+                </a:solidFill>
+                <a:latin typeface="Calibri" pitchFamily="34" charset="0"/>
+                <a:ea typeface="Calibri" pitchFamily="34" charset="-122"/>
+                <a:cs typeface="Calibri" pitchFamily="34" charset="-120"/>
+              </a:rPr>
+              <a:t>Espe-</a:t>
+            </a:r>
+            <a:endParaRPr lang="en-US" sz="700" dirty="0"/>
+          </a:p>
+          <a:p>
+            <a:pPr algn="ctr" indent="0" marL="0">
+              <a:buNone/>
+            </a:pPr>
+            <a:r>
+              <a:rPr lang="en-US" sz="700" b="1" dirty="0">
+                <a:solidFill>
+                  <a:srgbClr val="FFFFFF"/>
+                </a:solidFill>
+                <a:latin typeface="Calibri" pitchFamily="34" charset="0"/>
+                <a:ea typeface="Calibri" pitchFamily="34" charset="-122"/>
+                <a:cs typeface="Calibri" pitchFamily="34" charset="-120"/>
+              </a:rPr>
+              <a:t>cialista</a:t>
+            </a:r>
+            <a:endParaRPr lang="en-US" sz="700" dirty="0"/>
+          </a:p>
+        </p:txBody>
+      </p:sp>
+      <p:sp>
+        <p:nvSpPr>
+          <p:cNvPr id="59" name="Shape 57"/>
+          <p:cNvSpPr/>
+          <p:nvPr/>
+        </p:nvSpPr>
+        <p:spPr>
+          <a:xfrm>
+            <a:off x="6944868" y="3493008"/>
+            <a:ext cx="0" cy="164592"/>
+          </a:xfrm>
+          <a:prstGeom prst="line">
+            <a:avLst/>
+          </a:prstGeom>
+          <a:noFill/>
+          <a:ln w="15875">
+            <a:solidFill>
+              <a:srgbClr val="A9BEDC"/>
+            </a:solidFill>
+            <a:prstDash val="solid"/>
+          </a:ln>
+        </p:spPr>
+      </p:sp>
+      <p:sp>
+        <p:nvSpPr>
+          <p:cNvPr id="60" name="Shape 58"/>
+          <p:cNvSpPr/>
+          <p:nvPr/>
+        </p:nvSpPr>
+        <p:spPr>
+          <a:xfrm>
+            <a:off x="6688836" y="3657600"/>
+            <a:ext cx="512064" cy="566928"/>
+          </a:xfrm>
+          <a:prstGeom prst="roundRect">
+            <a:avLst>
+              <a:gd name="adj" fmla="val 8929"/>
+            </a:avLst>
+          </a:prstGeom>
+          <a:solidFill>
+            <a:srgbClr val="4A6FA5"/>
+          </a:solidFill>
+          <a:ln w="12700">
+            <a:solidFill>
+              <a:srgbClr val="4A6FA5"/>
+            </a:solidFill>
+            <a:prstDash val="solid"/>
+          </a:ln>
+        </p:spPr>
+      </p:sp>
+      <p:sp>
+        <p:nvSpPr>
+          <p:cNvPr id="61" name="Text 59"/>
+          <p:cNvSpPr txBox="1"/>
+          <p:nvPr/>
+        </p:nvSpPr>
+        <p:spPr>
+          <a:xfrm>
+            <a:off x="6725412" y="3657600"/>
+            <a:ext cx="438912" cy="566928"/>
+          </a:xfrm>
+          <a:prstGeom prst="rect">
+            <a:avLst/>
+          </a:prstGeom>
+          <a:noFill/>
+          <a:ln/>
+        </p:spPr>
+        <p:txBody>
+          <a:bodyPr wrap="square" lIns="0" tIns="0" rIns="0" bIns="0" rtlCol="0" anchor="ctr"/>
+          <a:lstStyle/>
+          <a:p>
+            <a:pPr algn="ctr" indent="0" marL="0">
+              <a:buNone/>
+            </a:pPr>
+            <a:r>
+              <a:rPr lang="en-US" sz="700" b="1" dirty="0">
+                <a:solidFill>
+                  <a:srgbClr val="FFFFFF"/>
+                </a:solidFill>
+                <a:latin typeface="Calibri" pitchFamily="34" charset="0"/>
+                <a:ea typeface="Calibri" pitchFamily="34" charset="-122"/>
+                <a:cs typeface="Calibri" pitchFamily="34" charset="-120"/>
+              </a:rPr>
+              <a:t>Espe-</a:t>
+            </a:r>
+            <a:endParaRPr lang="en-US" sz="700" dirty="0"/>
+          </a:p>
+          <a:p>
+            <a:pPr algn="ctr" indent="0" marL="0">
+              <a:buNone/>
+            </a:pPr>
+            <a:r>
+              <a:rPr lang="en-US" sz="700" b="1" dirty="0">
+                <a:solidFill>
+                  <a:srgbClr val="FFFFFF"/>
+                </a:solidFill>
+                <a:latin typeface="Calibri" pitchFamily="34" charset="0"/>
+                <a:ea typeface="Calibri" pitchFamily="34" charset="-122"/>
+                <a:cs typeface="Calibri" pitchFamily="34" charset="-120"/>
+              </a:rPr>
+              <a:t>cialista</a:t>
+            </a:r>
+            <a:endParaRPr lang="en-US" sz="700" dirty="0"/>
+          </a:p>
+        </p:txBody>
+      </p:sp>
+      <p:sp>
+        <p:nvSpPr>
+          <p:cNvPr id="62" name="Shape 60"/>
+          <p:cNvSpPr/>
+          <p:nvPr/>
+        </p:nvSpPr>
+        <p:spPr>
+          <a:xfrm>
+            <a:off x="7511796" y="3493008"/>
+            <a:ext cx="0" cy="164592"/>
+          </a:xfrm>
+          <a:prstGeom prst="line">
+            <a:avLst/>
+          </a:prstGeom>
+          <a:noFill/>
+          <a:ln w="15875">
+            <a:solidFill>
+              <a:srgbClr val="A9BEDC"/>
+            </a:solidFill>
+            <a:prstDash val="solid"/>
+          </a:ln>
+        </p:spPr>
+      </p:sp>
+      <p:sp>
+        <p:nvSpPr>
+          <p:cNvPr id="63" name="Shape 61"/>
+          <p:cNvSpPr/>
+          <p:nvPr/>
+        </p:nvSpPr>
+        <p:spPr>
+          <a:xfrm>
+            <a:off x="7255764" y="3657600"/>
+            <a:ext cx="512064" cy="566928"/>
+          </a:xfrm>
+          <a:prstGeom prst="roundRect">
+            <a:avLst>
+              <a:gd name="adj" fmla="val 8929"/>
+            </a:avLst>
+          </a:prstGeom>
+          <a:solidFill>
+            <a:srgbClr val="4A6FA5"/>
+          </a:solidFill>
+          <a:ln w="12700">
+            <a:solidFill>
+              <a:srgbClr val="4A6FA5"/>
+            </a:solidFill>
+            <a:prstDash val="solid"/>
+          </a:ln>
+        </p:spPr>
+      </p:sp>
+      <p:sp>
+        <p:nvSpPr>
+          <p:cNvPr id="64" name="Text 62"/>
+          <p:cNvSpPr txBox="1"/>
+          <p:nvPr/>
+        </p:nvSpPr>
+        <p:spPr>
+          <a:xfrm>
+            <a:off x="7292340" y="3657600"/>
+            <a:ext cx="438912" cy="566928"/>
+          </a:xfrm>
+          <a:prstGeom prst="rect">
+            <a:avLst/>
+          </a:prstGeom>
+          <a:noFill/>
+          <a:ln/>
+        </p:spPr>
+        <p:txBody>
+          <a:bodyPr wrap="square" lIns="0" tIns="0" rIns="0" bIns="0" rtlCol="0" anchor="ctr"/>
+          <a:lstStyle/>
+          <a:p>
+            <a:pPr algn="ctr" indent="0" marL="0">
+              <a:buNone/>
+            </a:pPr>
+            <a:r>
+              <a:rPr lang="en-US" sz="700" b="1" dirty="0">
+                <a:solidFill>
+                  <a:srgbClr val="FFFFFF"/>
+                </a:solidFill>
+                <a:latin typeface="Calibri" pitchFamily="34" charset="0"/>
+                <a:ea typeface="Calibri" pitchFamily="34" charset="-122"/>
+                <a:cs typeface="Calibri" pitchFamily="34" charset="-120"/>
+              </a:rPr>
+              <a:t>Espe-</a:t>
+            </a:r>
+            <a:endParaRPr lang="en-US" sz="700" dirty="0"/>
+          </a:p>
+          <a:p>
+            <a:pPr algn="ctr" indent="0" marL="0">
+              <a:buNone/>
+            </a:pPr>
+            <a:r>
+              <a:rPr lang="en-US" sz="700" b="1" dirty="0">
+                <a:solidFill>
+                  <a:srgbClr val="FFFFFF"/>
+                </a:solidFill>
+                <a:latin typeface="Calibri" pitchFamily="34" charset="0"/>
+                <a:ea typeface="Calibri" pitchFamily="34" charset="-122"/>
+                <a:cs typeface="Calibri" pitchFamily="34" charset="-120"/>
+              </a:rPr>
+              <a:t>cialista</a:t>
+            </a:r>
+            <a:endParaRPr lang="en-US" sz="700" dirty="0"/>
+          </a:p>
+        </p:txBody>
+      </p:sp>
+      <p:sp>
+        <p:nvSpPr>
+          <p:cNvPr id="65" name="Shape 63"/>
+          <p:cNvSpPr/>
+          <p:nvPr/>
+        </p:nvSpPr>
+        <p:spPr>
+          <a:xfrm>
+            <a:off x="4750308" y="3529584"/>
+            <a:ext cx="274320" cy="274320"/>
+          </a:xfrm>
+          <a:prstGeom prst="ellipse">
+            <a:avLst/>
+          </a:prstGeom>
+          <a:solidFill>
+            <a:srgbClr val="6A9B6E"/>
+          </a:solidFill>
+          <a:ln w="12700">
+            <a:solidFill>
+              <a:srgbClr val="FFFFFF"/>
+            </a:solidFill>
+            <a:prstDash val="solid"/>
+          </a:ln>
+        </p:spPr>
+      </p:sp>
+      <p:sp>
+        <p:nvSpPr>
+          <p:cNvPr id="66" name="Text 64"/>
+          <p:cNvSpPr txBox="1"/>
+          <p:nvPr/>
+        </p:nvSpPr>
+        <p:spPr>
+          <a:xfrm>
+            <a:off x="4750308" y="3529584"/>
+            <a:ext cx="274320" cy="274320"/>
+          </a:xfrm>
+          <a:prstGeom prst="rect">
+            <a:avLst/>
+          </a:prstGeom>
+          <a:noFill/>
+          <a:ln/>
+        </p:spPr>
+        <p:txBody>
+          <a:bodyPr wrap="square" lIns="0" tIns="0" rIns="0" bIns="0" rtlCol="0" anchor="ctr"/>
+          <a:lstStyle/>
+          <a:p>
+            <a:pPr algn="ctr" indent="0" marL="0">
+              <a:buNone/>
+            </a:pPr>
+            <a:r>
+              <a:rPr lang="en-US" sz="800" b="1" dirty="0">
+                <a:solidFill>
+                  <a:srgbClr val="FFFFFF"/>
+                </a:solidFill>
+                <a:latin typeface="Calibri" pitchFamily="34" charset="0"/>
+                <a:ea typeface="Calibri" pitchFamily="34" charset="-122"/>
+                <a:cs typeface="Calibri" pitchFamily="34" charset="-120"/>
+              </a:rPr>
+              <a:t>+1</a:t>
+            </a:r>
+            <a:endParaRPr lang="en-US" sz="800" dirty="0"/>
+          </a:p>
+        </p:txBody>
+      </p:sp>
+      <p:sp>
+        <p:nvSpPr>
+          <p:cNvPr id="67" name="Shape 65"/>
+          <p:cNvSpPr/>
+          <p:nvPr/>
+        </p:nvSpPr>
+        <p:spPr>
+          <a:xfrm>
+            <a:off x="5317236" y="3529584"/>
+            <a:ext cx="274320" cy="274320"/>
+          </a:xfrm>
+          <a:prstGeom prst="ellipse">
+            <a:avLst/>
+          </a:prstGeom>
+          <a:solidFill>
+            <a:srgbClr val="6A9B6E"/>
+          </a:solidFill>
+          <a:ln w="12700">
+            <a:solidFill>
+              <a:srgbClr val="FFFFFF"/>
+            </a:solidFill>
+            <a:prstDash val="solid"/>
+          </a:ln>
+        </p:spPr>
+      </p:sp>
+      <p:sp>
+        <p:nvSpPr>
+          <p:cNvPr id="68" name="Text 66"/>
+          <p:cNvSpPr txBox="1"/>
+          <p:nvPr/>
+        </p:nvSpPr>
+        <p:spPr>
+          <a:xfrm>
+            <a:off x="5317236" y="3529584"/>
+            <a:ext cx="274320" cy="274320"/>
+          </a:xfrm>
+          <a:prstGeom prst="rect">
+            <a:avLst/>
+          </a:prstGeom>
+          <a:noFill/>
+          <a:ln/>
+        </p:spPr>
+        <p:txBody>
+          <a:bodyPr wrap="square" lIns="0" tIns="0" rIns="0" bIns="0" rtlCol="0" anchor="ctr"/>
+          <a:lstStyle/>
+          <a:p>
+            <a:pPr algn="ctr" indent="0" marL="0">
+              <a:buNone/>
+            </a:pPr>
+            <a:r>
+              <a:rPr lang="en-US" sz="800" b="1" dirty="0">
+                <a:solidFill>
+                  <a:srgbClr val="FFFFFF"/>
+                </a:solidFill>
+                <a:latin typeface="Calibri" pitchFamily="34" charset="0"/>
+                <a:ea typeface="Calibri" pitchFamily="34" charset="-122"/>
+                <a:cs typeface="Calibri" pitchFamily="34" charset="-120"/>
+              </a:rPr>
+              <a:t>+1</a:t>
+            </a:r>
+            <a:endParaRPr lang="en-US" sz="800" dirty="0"/>
+          </a:p>
+        </p:txBody>
+      </p:sp>
+      <p:sp>
+        <p:nvSpPr>
+          <p:cNvPr id="69" name="Shape 67"/>
+          <p:cNvSpPr/>
+          <p:nvPr/>
+        </p:nvSpPr>
+        <p:spPr>
+          <a:xfrm>
+            <a:off x="5884164" y="3529584"/>
+            <a:ext cx="274320" cy="274320"/>
+          </a:xfrm>
+          <a:prstGeom prst="ellipse">
+            <a:avLst/>
+          </a:prstGeom>
+          <a:solidFill>
+            <a:srgbClr val="6A9B6E"/>
+          </a:solidFill>
+          <a:ln w="12700">
+            <a:solidFill>
+              <a:srgbClr val="FFFFFF"/>
+            </a:solidFill>
+            <a:prstDash val="solid"/>
+          </a:ln>
+        </p:spPr>
+      </p:sp>
+      <p:sp>
+        <p:nvSpPr>
+          <p:cNvPr id="70" name="Text 68"/>
+          <p:cNvSpPr txBox="1"/>
+          <p:nvPr/>
+        </p:nvSpPr>
+        <p:spPr>
+          <a:xfrm>
+            <a:off x="5884164" y="3529584"/>
+            <a:ext cx="274320" cy="274320"/>
+          </a:xfrm>
+          <a:prstGeom prst="rect">
+            <a:avLst/>
+          </a:prstGeom>
+          <a:noFill/>
+          <a:ln/>
+        </p:spPr>
+        <p:txBody>
+          <a:bodyPr wrap="square" lIns="0" tIns="0" rIns="0" bIns="0" rtlCol="0" anchor="ctr"/>
+          <a:lstStyle/>
+          <a:p>
+            <a:pPr algn="ctr" indent="0" marL="0">
+              <a:buNone/>
+            </a:pPr>
+            <a:r>
+              <a:rPr lang="en-US" sz="800" b="1" dirty="0">
+                <a:solidFill>
+                  <a:srgbClr val="FFFFFF"/>
+                </a:solidFill>
+                <a:latin typeface="Calibri" pitchFamily="34" charset="0"/>
+                <a:ea typeface="Calibri" pitchFamily="34" charset="-122"/>
+                <a:cs typeface="Calibri" pitchFamily="34" charset="-120"/>
+              </a:rPr>
+              <a:t>+1</a:t>
+            </a:r>
+            <a:endParaRPr lang="en-US" sz="800" dirty="0"/>
+          </a:p>
+        </p:txBody>
+      </p:sp>
+      <p:sp>
+        <p:nvSpPr>
+          <p:cNvPr id="71" name="Shape 69"/>
+          <p:cNvSpPr/>
+          <p:nvPr/>
+        </p:nvSpPr>
+        <p:spPr>
+          <a:xfrm>
+            <a:off x="6451092" y="3529584"/>
+            <a:ext cx="274320" cy="274320"/>
+          </a:xfrm>
+          <a:prstGeom prst="ellipse">
+            <a:avLst/>
+          </a:prstGeom>
+          <a:solidFill>
+            <a:srgbClr val="6A9B6E"/>
+          </a:solidFill>
+          <a:ln w="12700">
+            <a:solidFill>
+              <a:srgbClr val="FFFFFF"/>
+            </a:solidFill>
+            <a:prstDash val="solid"/>
+          </a:ln>
+        </p:spPr>
+      </p:sp>
+      <p:sp>
+        <p:nvSpPr>
+          <p:cNvPr id="72" name="Text 70"/>
+          <p:cNvSpPr txBox="1"/>
+          <p:nvPr/>
+        </p:nvSpPr>
+        <p:spPr>
+          <a:xfrm>
+            <a:off x="6451092" y="3529584"/>
+            <a:ext cx="274320" cy="274320"/>
+          </a:xfrm>
+          <a:prstGeom prst="rect">
+            <a:avLst/>
+          </a:prstGeom>
+          <a:noFill/>
+          <a:ln/>
+        </p:spPr>
+        <p:txBody>
+          <a:bodyPr wrap="square" lIns="0" tIns="0" rIns="0" bIns="0" rtlCol="0" anchor="ctr"/>
+          <a:lstStyle/>
+          <a:p>
+            <a:pPr algn="ctr" indent="0" marL="0">
+              <a:buNone/>
+            </a:pPr>
+            <a:r>
+              <a:rPr lang="en-US" sz="800" b="1" dirty="0">
+                <a:solidFill>
+                  <a:srgbClr val="FFFFFF"/>
+                </a:solidFill>
+                <a:latin typeface="Calibri" pitchFamily="34" charset="0"/>
+                <a:ea typeface="Calibri" pitchFamily="34" charset="-122"/>
+                <a:cs typeface="Calibri" pitchFamily="34" charset="-120"/>
+              </a:rPr>
+              <a:t>+1</a:t>
+            </a:r>
+            <a:endParaRPr lang="en-US" sz="800" dirty="0"/>
+          </a:p>
+        </p:txBody>
+      </p:sp>
+      <p:sp>
+        <p:nvSpPr>
+          <p:cNvPr id="73" name="Shape 71"/>
+          <p:cNvSpPr/>
+          <p:nvPr/>
+        </p:nvSpPr>
+        <p:spPr>
+          <a:xfrm>
+            <a:off x="7018020" y="3529584"/>
+            <a:ext cx="274320" cy="274320"/>
+          </a:xfrm>
+          <a:prstGeom prst="ellipse">
+            <a:avLst/>
+          </a:prstGeom>
+          <a:solidFill>
+            <a:srgbClr val="6A9B6E"/>
+          </a:solidFill>
+          <a:ln w="12700">
+            <a:solidFill>
+              <a:srgbClr val="FFFFFF"/>
+            </a:solidFill>
+            <a:prstDash val="solid"/>
+          </a:ln>
+        </p:spPr>
+      </p:sp>
+      <p:sp>
+        <p:nvSpPr>
+          <p:cNvPr id="74" name="Text 72"/>
+          <p:cNvSpPr txBox="1"/>
+          <p:nvPr/>
+        </p:nvSpPr>
+        <p:spPr>
+          <a:xfrm>
+            <a:off x="7018020" y="3529584"/>
+            <a:ext cx="274320" cy="274320"/>
+          </a:xfrm>
+          <a:prstGeom prst="rect">
+            <a:avLst/>
+          </a:prstGeom>
+          <a:noFill/>
+          <a:ln/>
+        </p:spPr>
+        <p:txBody>
+          <a:bodyPr wrap="square" lIns="0" tIns="0" rIns="0" bIns="0" rtlCol="0" anchor="ctr"/>
+          <a:lstStyle/>
+          <a:p>
+            <a:pPr algn="ctr" indent="0" marL="0">
+              <a:buNone/>
+            </a:pPr>
+            <a:r>
+              <a:rPr lang="en-US" sz="800" b="1" dirty="0">
+                <a:solidFill>
+                  <a:srgbClr val="FFFFFF"/>
+                </a:solidFill>
+                <a:latin typeface="Calibri" pitchFamily="34" charset="0"/>
+                <a:ea typeface="Calibri" pitchFamily="34" charset="-122"/>
+                <a:cs typeface="Calibri" pitchFamily="34" charset="-120"/>
+              </a:rPr>
+              <a:t>+1</a:t>
+            </a:r>
+            <a:endParaRPr lang="en-US" sz="800" dirty="0"/>
+          </a:p>
+        </p:txBody>
+      </p:sp>
+      <p:sp>
+        <p:nvSpPr>
+          <p:cNvPr id="75" name="Shape 73"/>
+          <p:cNvSpPr/>
+          <p:nvPr/>
+        </p:nvSpPr>
+        <p:spPr>
+          <a:xfrm>
+            <a:off x="7584948" y="3529584"/>
+            <a:ext cx="274320" cy="274320"/>
+          </a:xfrm>
+          <a:prstGeom prst="ellipse">
+            <a:avLst/>
+          </a:prstGeom>
+          <a:solidFill>
+            <a:srgbClr val="6A9B6E"/>
+          </a:solidFill>
+          <a:ln w="12700">
+            <a:solidFill>
+              <a:srgbClr val="FFFFFF"/>
+            </a:solidFill>
+            <a:prstDash val="solid"/>
+          </a:ln>
+        </p:spPr>
+      </p:sp>
+      <p:sp>
+        <p:nvSpPr>
+          <p:cNvPr id="76" name="Text 74"/>
+          <p:cNvSpPr txBox="1"/>
+          <p:nvPr/>
+        </p:nvSpPr>
+        <p:spPr>
+          <a:xfrm>
+            <a:off x="7584948" y="3529584"/>
+            <a:ext cx="274320" cy="274320"/>
+          </a:xfrm>
+          <a:prstGeom prst="rect">
+            <a:avLst/>
+          </a:prstGeom>
+          <a:noFill/>
+          <a:ln/>
+        </p:spPr>
+        <p:txBody>
+          <a:bodyPr wrap="square" lIns="0" tIns="0" rIns="0" bIns="0" rtlCol="0" anchor="ctr"/>
+          <a:lstStyle/>
+          <a:p>
+            <a:pPr algn="ctr" indent="0" marL="0">
+              <a:buNone/>
+            </a:pPr>
+            <a:r>
+              <a:rPr lang="en-US" sz="800" b="1" dirty="0">
+                <a:solidFill>
+                  <a:srgbClr val="FFFFFF"/>
+                </a:solidFill>
+                <a:latin typeface="Calibri" pitchFamily="34" charset="0"/>
+                <a:ea typeface="Calibri" pitchFamily="34" charset="-122"/>
+                <a:cs typeface="Calibri" pitchFamily="34" charset="-120"/>
+              </a:rPr>
+              <a:t>+1</a:t>
+            </a:r>
+            <a:endParaRPr lang="en-US" sz="800" dirty="0"/>
+          </a:p>
+        </p:txBody>
+      </p:sp>
+      <p:sp>
+        <p:nvSpPr>
+          <p:cNvPr id="77" name="Text 75"/>
+          <p:cNvSpPr txBox="1"/>
+          <p:nvPr/>
+        </p:nvSpPr>
+        <p:spPr>
+          <a:xfrm>
+            <a:off x="4337304" y="4343400"/>
+            <a:ext cx="3514344" cy="274320"/>
+          </a:xfrm>
+          <a:prstGeom prst="rect">
+            <a:avLst/>
+          </a:prstGeom>
+          <a:noFill/>
+          <a:ln/>
+        </p:spPr>
+        <p:txBody>
+          <a:bodyPr wrap="square" lIns="0" tIns="0" rIns="0" bIns="0" rtlCol="0" anchor="ctr"/>
+          <a:lstStyle/>
+          <a:p>
+            <a:pPr algn="ctr" indent="0" marL="0">
+              <a:buNone/>
+            </a:pPr>
+            <a:r>
+              <a:rPr lang="en-US" sz="900" dirty="0">
+                <a:solidFill>
+                  <a:srgbClr val="5B6470"/>
+                </a:solidFill>
+                <a:latin typeface="Calibri" pitchFamily="34" charset="0"/>
+                <a:ea typeface="Calibri" pitchFamily="34" charset="-122"/>
+                <a:cs typeface="Calibri" pitchFamily="34" charset="-120"/>
+              </a:rPr>
+              <a:t>Seis Especialistas Normativos, grado +1</a:t>
+            </a:r>
+            <a:endParaRPr lang="en-US" sz="900" dirty="0"/>
+          </a:p>
+        </p:txBody>
+      </p:sp>
+      <p:sp>
+        <p:nvSpPr>
+          <p:cNvPr id="78" name="Text 76"/>
+          <p:cNvSpPr txBox="1"/>
+          <p:nvPr/>
+        </p:nvSpPr>
+        <p:spPr>
+          <a:xfrm>
+            <a:off x="4520184" y="5074920"/>
+            <a:ext cx="3148584" cy="822960"/>
+          </a:xfrm>
+          <a:prstGeom prst="rect">
+            <a:avLst/>
+          </a:prstGeom>
+          <a:noFill/>
+          <a:ln/>
+        </p:spPr>
+        <p:txBody>
+          <a:bodyPr wrap="square" lIns="0" tIns="0" rIns="0" bIns="0" rtlCol="0" anchor="t"/>
+          <a:lstStyle/>
+          <a:p>
+            <a:pPr indent="0" marL="0">
+              <a:buNone/>
+            </a:pPr>
+            <a:r>
+              <a:rPr lang="en-US" sz="950" dirty="0">
+                <a:solidFill>
+                  <a:srgbClr val="5B6470"/>
+                </a:solidFill>
+                <a:latin typeface="Calibri" pitchFamily="34" charset="0"/>
+                <a:ea typeface="Calibri" pitchFamily="34" charset="-122"/>
+                <a:cs typeface="Calibri" pitchFamily="34" charset="-120"/>
+              </a:rPr>
+              <a:t>Reconoce las competencias adquiridas en todo el equipo y conserva el respaldo mutuo entre pares. La estructura sigue siendo plana.</a:t>
+            </a:r>
+            <a:endParaRPr lang="en-US" sz="950" dirty="0"/>
+          </a:p>
+        </p:txBody>
+      </p:sp>
+      <p:sp>
+        <p:nvSpPr>
+          <p:cNvPr id="79" name="Shape 77"/>
+          <p:cNvSpPr/>
+          <p:nvPr/>
+        </p:nvSpPr>
+        <p:spPr>
+          <a:xfrm>
+            <a:off x="8125968" y="1874520"/>
+            <a:ext cx="3514344" cy="4069080"/>
+          </a:xfrm>
+          <a:prstGeom prst="roundRect">
+            <a:avLst>
+              <a:gd name="adj" fmla="val 1561"/>
+            </a:avLst>
+          </a:prstGeom>
+          <a:solidFill>
+            <a:srgbClr val="FFFFFF"/>
           </a:solidFill>
           <a:ln w="9525">
             <a:solidFill>
-              <a:srgbClr val="F6F7F9"/>
+              <a:srgbClr val="E3E6EA"/>
             </a:solidFill>
             <a:prstDash val="solid"/>
           </a:ln>
@@ -26194,14 +26329,14 @@
       </p:sp>
       <p:sp>
         <p:nvSpPr>
-          <p:cNvPr id="16" name="Text 14"/>
-          <p:cNvSpPr txBox="1"/>
-          <p:nvPr/>
-        </p:nvSpPr>
-        <p:spPr>
-          <a:xfrm>
-            <a:off x="6355080" y="2148840"/>
-            <a:ext cx="2148840" cy="548640"/>
+          <p:cNvPr id="80" name="Text 78"/>
+          <p:cNvSpPr txBox="1"/>
+          <p:nvPr/>
+        </p:nvSpPr>
+        <p:spPr>
+          <a:xfrm>
+            <a:off x="8308848" y="1965960"/>
+            <a:ext cx="3148584" cy="256032"/>
           </a:xfrm>
           <a:prstGeom prst="rect">
             <a:avLst/>
@@ -26217,81 +26352,42 @@
               <a:buNone/>
             </a:pPr>
             <a:r>
-              <a:rPr lang="en-US" sz="1350" b="1" dirty="0">
-                <a:solidFill>
-                  <a:srgbClr val="2B2F36"/>
-                </a:solidFill>
-                <a:latin typeface="Calibri" pitchFamily="34" charset="0"/>
-                <a:ea typeface="Calibri" pitchFamily="34" charset="-122"/>
-                <a:cs typeface="Calibri" pitchFamily="34" charset="-120"/>
-              </a:rPr>
-              <a:t>Competencias disputadas</a:t>
-            </a:r>
-            <a:endParaRPr lang="en-US" sz="1350" dirty="0"/>
-          </a:p>
-        </p:txBody>
-      </p:sp>
-      <p:sp>
-        <p:nvSpPr>
-          <p:cNvPr id="17" name="Text 15"/>
-          <p:cNvSpPr txBox="1"/>
-          <p:nvPr/>
-        </p:nvSpPr>
-        <p:spPr>
-          <a:xfrm>
-            <a:off x="6355080" y="2743200"/>
-            <a:ext cx="2148840" cy="2377440"/>
-          </a:xfrm>
-          <a:prstGeom prst="rect">
-            <a:avLst/>
-          </a:prstGeom>
-          <a:noFill/>
-          <a:ln/>
-        </p:spPr>
-        <p:txBody>
-          <a:bodyPr wrap="square" lIns="0" tIns="0" rIns="0" bIns="0" rtlCol="0" anchor="t"/>
-          <a:lstStyle/>
-          <a:p>
-            <a:pPr indent="0" marL="0">
-              <a:buNone/>
-            </a:pPr>
-            <a:r>
-              <a:rPr lang="en-US" sz="1050" dirty="0">
-                <a:solidFill>
-                  <a:srgbClr val="5B6470"/>
-                </a:solidFill>
-                <a:latin typeface="Calibri" pitchFamily="34" charset="0"/>
-                <a:ea typeface="Calibri" pitchFamily="34" charset="-122"/>
-                <a:cs typeface="Calibri" pitchFamily="34" charset="-120"/>
-              </a:rPr>
-              <a:t>SQL, plataformas de datos como Databricks y conocimiento del MSI, del REDEC y de Basilea III son el perfil que buscan Riesgo, Contabilidad, las áreas de datos y los pares. Un reemplazo se paga en meses de curva de aprendizaje.</a:t>
-            </a:r>
-            <a:endParaRPr lang="en-US" sz="1050" dirty="0"/>
-          </a:p>
-        </p:txBody>
-      </p:sp>
-      <p:sp>
-        <p:nvSpPr>
-          <p:cNvPr id="18" name="Shape 16"/>
+              <a:rPr lang="en-US" sz="900" b="1" spc="200" kern="0" dirty="0">
+                <a:solidFill>
+                  <a:srgbClr val="4A6FA5"/>
+                </a:solidFill>
+                <a:latin typeface="Calibri" pitchFamily="34" charset="0"/>
+                <a:ea typeface="Calibri" pitchFamily="34" charset="-122"/>
+                <a:cs typeface="Calibri" pitchFamily="34" charset="-120"/>
+              </a:rPr>
+              <a:t>ALTERNATIVA 2 · DOS CARGOS SENIOR</a:t>
+            </a:r>
+            <a:endParaRPr lang="en-US" sz="900" dirty="0"/>
+          </a:p>
+        </p:txBody>
+      </p:sp>
+      <p:sp>
+        <p:nvSpPr>
+          <p:cNvPr id="81" name="Shape 79"/>
           <p:cNvSpPr/>
           <p:nvPr/>
         </p:nvSpPr>
         <p:spPr>
           <a:xfrm>
-            <a:off x="8915400" y="1965960"/>
-            <a:ext cx="2606040" cy="3291840"/>
+            <a:off x="9197340" y="2377440"/>
+            <a:ext cx="1371600" cy="329184"/>
           </a:xfrm>
           <a:prstGeom prst="roundRect">
             <a:avLst>
-              <a:gd name="adj" fmla="val 2105"/>
+              <a:gd name="adj" fmla="val 13889"/>
             </a:avLst>
           </a:prstGeom>
           <a:solidFill>
-            <a:srgbClr val="F6F7F9"/>
+            <a:srgbClr val="E6ECF5"/>
           </a:solidFill>
-          <a:ln w="9525">
-            <a:solidFill>
-              <a:srgbClr val="F6F7F9"/>
+          <a:ln w="12700">
+            <a:solidFill>
+              <a:srgbClr val="E6ECF5"/>
             </a:solidFill>
             <a:prstDash val="solid"/>
           </a:ln>
@@ -26299,69 +26395,916 @@
       </p:sp>
       <p:sp>
         <p:nvSpPr>
-          <p:cNvPr id="19" name="Text 17"/>
-          <p:cNvSpPr txBox="1"/>
-          <p:nvPr/>
-        </p:nvSpPr>
-        <p:spPr>
-          <a:xfrm>
-            <a:off x="9144000" y="2148840"/>
-            <a:ext cx="2148840" cy="548640"/>
-          </a:xfrm>
-          <a:prstGeom prst="rect">
-            <a:avLst/>
-          </a:prstGeom>
-          <a:noFill/>
-          <a:ln/>
-        </p:spPr>
-        <p:txBody>
-          <a:bodyPr wrap="square" lIns="0" tIns="0" rIns="0" bIns="0" rtlCol="0" anchor="ctr"/>
+          <p:cNvPr id="82" name="Text 80"/>
+          <p:cNvSpPr txBox="1"/>
+          <p:nvPr/>
+        </p:nvSpPr>
+        <p:spPr>
+          <a:xfrm>
+            <a:off x="9233916" y="2377440"/>
+            <a:ext cx="1298448" cy="329184"/>
+          </a:xfrm>
+          <a:prstGeom prst="rect">
+            <a:avLst/>
+          </a:prstGeom>
+          <a:noFill/>
+          <a:ln/>
+        </p:spPr>
+        <p:txBody>
+          <a:bodyPr wrap="square" lIns="0" tIns="0" rIns="0" bIns="0" rtlCol="0" anchor="ctr"/>
+          <a:lstStyle/>
+          <a:p>
+            <a:pPr algn="ctr" indent="0" marL="0">
+              <a:buNone/>
+            </a:pPr>
+            <a:r>
+              <a:rPr lang="en-US" sz="850" b="1" dirty="0">
+                <a:solidFill>
+                  <a:srgbClr val="34517D"/>
+                </a:solidFill>
+                <a:latin typeface="Calibri" pitchFamily="34" charset="0"/>
+                <a:ea typeface="Calibri" pitchFamily="34" charset="-122"/>
+                <a:cs typeface="Calibri" pitchFamily="34" charset="-120"/>
+              </a:rPr>
+              <a:t>Subgerente</a:t>
+            </a:r>
+            <a:endParaRPr lang="en-US" sz="850" dirty="0"/>
+          </a:p>
+        </p:txBody>
+      </p:sp>
+      <p:sp>
+        <p:nvSpPr>
+          <p:cNvPr id="83" name="Shape 81"/>
+          <p:cNvSpPr/>
+          <p:nvPr/>
+        </p:nvSpPr>
+        <p:spPr>
+          <a:xfrm>
+            <a:off x="9883140" y="2706624"/>
+            <a:ext cx="0" cy="201168"/>
+          </a:xfrm>
+          <a:prstGeom prst="line">
+            <a:avLst/>
+          </a:prstGeom>
+          <a:noFill/>
+          <a:ln w="15875">
+            <a:solidFill>
+              <a:srgbClr val="A9BEDC"/>
+            </a:solidFill>
+            <a:prstDash val="solid"/>
+          </a:ln>
+        </p:spPr>
+      </p:sp>
+      <p:sp>
+        <p:nvSpPr>
+          <p:cNvPr id="84" name="Shape 82"/>
+          <p:cNvSpPr/>
+          <p:nvPr/>
+        </p:nvSpPr>
+        <p:spPr>
+          <a:xfrm>
+            <a:off x="9197340" y="2907792"/>
+            <a:ext cx="1371600" cy="329184"/>
+          </a:xfrm>
+          <a:prstGeom prst="roundRect">
+            <a:avLst>
+              <a:gd name="adj" fmla="val 13889"/>
+            </a:avLst>
+          </a:prstGeom>
+          <a:solidFill>
+            <a:srgbClr val="E6ECF5"/>
+          </a:solidFill>
+          <a:ln w="12700">
+            <a:solidFill>
+              <a:srgbClr val="E6ECF5"/>
+            </a:solidFill>
+            <a:prstDash val="solid"/>
+          </a:ln>
+        </p:spPr>
+      </p:sp>
+      <p:sp>
+        <p:nvSpPr>
+          <p:cNvPr id="85" name="Text 83"/>
+          <p:cNvSpPr txBox="1"/>
+          <p:nvPr/>
+        </p:nvSpPr>
+        <p:spPr>
+          <a:xfrm>
+            <a:off x="9233916" y="2907792"/>
+            <a:ext cx="1298448" cy="329184"/>
+          </a:xfrm>
+          <a:prstGeom prst="rect">
+            <a:avLst/>
+          </a:prstGeom>
+          <a:noFill/>
+          <a:ln/>
+        </p:spPr>
+        <p:txBody>
+          <a:bodyPr wrap="square" lIns="0" tIns="0" rIns="0" bIns="0" rtlCol="0" anchor="ctr"/>
+          <a:lstStyle/>
+          <a:p>
+            <a:pPr algn="ctr" indent="0" marL="0">
+              <a:buNone/>
+            </a:pPr>
+            <a:r>
+              <a:rPr lang="en-US" sz="850" b="1" dirty="0">
+                <a:solidFill>
+                  <a:srgbClr val="34517D"/>
+                </a:solidFill>
+                <a:latin typeface="Calibri" pitchFamily="34" charset="0"/>
+                <a:ea typeface="Calibri" pitchFamily="34" charset="-122"/>
+                <a:cs typeface="Calibri" pitchFamily="34" charset="-120"/>
+              </a:rPr>
+              <a:t>Jefe Normativo</a:t>
+            </a:r>
+            <a:endParaRPr lang="en-US" sz="850" dirty="0"/>
+          </a:p>
+        </p:txBody>
+      </p:sp>
+      <p:sp>
+        <p:nvSpPr>
+          <p:cNvPr id="86" name="Shape 84"/>
+          <p:cNvSpPr/>
+          <p:nvPr/>
+        </p:nvSpPr>
+        <p:spPr>
+          <a:xfrm>
+            <a:off x="9883140" y="3236976"/>
+            <a:ext cx="0" cy="1014984"/>
+          </a:xfrm>
+          <a:prstGeom prst="line">
+            <a:avLst/>
+          </a:prstGeom>
+          <a:noFill/>
+          <a:ln w="15875">
+            <a:solidFill>
+              <a:srgbClr val="A9BEDC"/>
+            </a:solidFill>
+            <a:prstDash val="solid"/>
+          </a:ln>
+        </p:spPr>
+      </p:sp>
+      <p:sp>
+        <p:nvSpPr>
+          <p:cNvPr id="87" name="Shape 85"/>
+          <p:cNvSpPr/>
+          <p:nvPr/>
+        </p:nvSpPr>
+        <p:spPr>
+          <a:xfrm>
+            <a:off x="8465820" y="3611880"/>
+            <a:ext cx="2834640" cy="0"/>
+          </a:xfrm>
+          <a:prstGeom prst="line">
+            <a:avLst/>
+          </a:prstGeom>
+          <a:noFill/>
+          <a:ln w="15875">
+            <a:solidFill>
+              <a:srgbClr val="A9BEDC"/>
+            </a:solidFill>
+            <a:prstDash val="solid"/>
+          </a:ln>
+        </p:spPr>
+      </p:sp>
+      <p:sp>
+        <p:nvSpPr>
+          <p:cNvPr id="88" name="Shape 86"/>
+          <p:cNvSpPr/>
+          <p:nvPr/>
+        </p:nvSpPr>
+        <p:spPr>
+          <a:xfrm>
+            <a:off x="8191500" y="3383280"/>
+            <a:ext cx="1234440" cy="457200"/>
+          </a:xfrm>
+          <a:prstGeom prst="roundRect">
+            <a:avLst>
+              <a:gd name="adj" fmla="val 10000"/>
+            </a:avLst>
+          </a:prstGeom>
+          <a:solidFill>
+            <a:srgbClr val="34517D"/>
+          </a:solidFill>
+          <a:ln w="12700">
+            <a:solidFill>
+              <a:srgbClr val="34517D"/>
+            </a:solidFill>
+            <a:prstDash val="solid"/>
+          </a:ln>
+        </p:spPr>
+      </p:sp>
+      <p:sp>
+        <p:nvSpPr>
+          <p:cNvPr id="89" name="Text 87"/>
+          <p:cNvSpPr txBox="1"/>
+          <p:nvPr/>
+        </p:nvSpPr>
+        <p:spPr>
+          <a:xfrm>
+            <a:off x="8228076" y="3383280"/>
+            <a:ext cx="1161288" cy="457200"/>
+          </a:xfrm>
+          <a:prstGeom prst="rect">
+            <a:avLst/>
+          </a:prstGeom>
+          <a:noFill/>
+          <a:ln/>
+        </p:spPr>
+        <p:txBody>
+          <a:bodyPr wrap="square" lIns="0" tIns="0" rIns="0" bIns="0" rtlCol="0" anchor="ctr"/>
+          <a:lstStyle/>
+          <a:p>
+            <a:pPr algn="ctr" indent="0" marL="0">
+              <a:buNone/>
+            </a:pPr>
+            <a:r>
+              <a:rPr lang="en-US" sz="750" b="1" dirty="0">
+                <a:solidFill>
+                  <a:srgbClr val="FFFFFF"/>
+                </a:solidFill>
+                <a:latin typeface="Calibri" pitchFamily="34" charset="0"/>
+                <a:ea typeface="Calibri" pitchFamily="34" charset="-122"/>
+                <a:cs typeface="Calibri" pitchFamily="34" charset="-120"/>
+              </a:rPr>
+              <a:t>Senior Especialista</a:t>
+            </a:r>
+            <a:endParaRPr lang="en-US" sz="750" dirty="0"/>
+          </a:p>
+          <a:p>
+            <a:pPr algn="ctr" indent="0" marL="0">
+              <a:buNone/>
+            </a:pPr>
+            <a:r>
+              <a:rPr lang="en-US" sz="750" b="1" dirty="0">
+                <a:solidFill>
+                  <a:srgbClr val="FFFFFF"/>
+                </a:solidFill>
+                <a:latin typeface="Calibri" pitchFamily="34" charset="0"/>
+                <a:ea typeface="Calibri" pitchFamily="34" charset="-122"/>
+                <a:cs typeface="Calibri" pitchFamily="34" charset="-120"/>
+              </a:rPr>
+              <a:t>Normativo</a:t>
+            </a:r>
+            <a:endParaRPr lang="en-US" sz="750" dirty="0"/>
+          </a:p>
+        </p:txBody>
+      </p:sp>
+      <p:sp>
+        <p:nvSpPr>
+          <p:cNvPr id="90" name="Shape 88"/>
+          <p:cNvSpPr/>
+          <p:nvPr/>
+        </p:nvSpPr>
+        <p:spPr>
+          <a:xfrm>
+            <a:off x="9288780" y="3273552"/>
+            <a:ext cx="274320" cy="274320"/>
+          </a:xfrm>
+          <a:prstGeom prst="ellipse">
+            <a:avLst/>
+          </a:prstGeom>
+          <a:solidFill>
+            <a:srgbClr val="6A9B6E"/>
+          </a:solidFill>
+          <a:ln w="12700">
+            <a:solidFill>
+              <a:srgbClr val="FFFFFF"/>
+            </a:solidFill>
+            <a:prstDash val="solid"/>
+          </a:ln>
+        </p:spPr>
+      </p:sp>
+      <p:sp>
+        <p:nvSpPr>
+          <p:cNvPr id="91" name="Text 89"/>
+          <p:cNvSpPr txBox="1"/>
+          <p:nvPr/>
+        </p:nvSpPr>
+        <p:spPr>
+          <a:xfrm>
+            <a:off x="9288780" y="3273552"/>
+            <a:ext cx="274320" cy="274320"/>
+          </a:xfrm>
+          <a:prstGeom prst="rect">
+            <a:avLst/>
+          </a:prstGeom>
+          <a:noFill/>
+          <a:ln/>
+        </p:spPr>
+        <p:txBody>
+          <a:bodyPr wrap="square" lIns="0" tIns="0" rIns="0" bIns="0" rtlCol="0" anchor="ctr"/>
+          <a:lstStyle/>
+          <a:p>
+            <a:pPr algn="ctr" indent="0" marL="0">
+              <a:buNone/>
+            </a:pPr>
+            <a:r>
+              <a:rPr lang="en-US" sz="800" b="1" dirty="0">
+                <a:solidFill>
+                  <a:srgbClr val="FFFFFF"/>
+                </a:solidFill>
+                <a:latin typeface="Calibri" pitchFamily="34" charset="0"/>
+                <a:ea typeface="Calibri" pitchFamily="34" charset="-122"/>
+                <a:cs typeface="Calibri" pitchFamily="34" charset="-120"/>
+              </a:rPr>
+              <a:t>+1</a:t>
+            </a:r>
+            <a:endParaRPr lang="en-US" sz="800" dirty="0"/>
+          </a:p>
+        </p:txBody>
+      </p:sp>
+      <p:sp>
+        <p:nvSpPr>
+          <p:cNvPr id="92" name="Shape 90"/>
+          <p:cNvSpPr/>
+          <p:nvPr/>
+        </p:nvSpPr>
+        <p:spPr>
+          <a:xfrm>
+            <a:off x="10340340" y="3383280"/>
+            <a:ext cx="1234440" cy="457200"/>
+          </a:xfrm>
+          <a:prstGeom prst="roundRect">
+            <a:avLst>
+              <a:gd name="adj" fmla="val 10000"/>
+            </a:avLst>
+          </a:prstGeom>
+          <a:solidFill>
+            <a:srgbClr val="34517D"/>
+          </a:solidFill>
+          <a:ln w="12700">
+            <a:solidFill>
+              <a:srgbClr val="34517D"/>
+            </a:solidFill>
+            <a:prstDash val="solid"/>
+          </a:ln>
+        </p:spPr>
+      </p:sp>
+      <p:sp>
+        <p:nvSpPr>
+          <p:cNvPr id="93" name="Text 91"/>
+          <p:cNvSpPr txBox="1"/>
+          <p:nvPr/>
+        </p:nvSpPr>
+        <p:spPr>
+          <a:xfrm>
+            <a:off x="10376916" y="3383280"/>
+            <a:ext cx="1161288" cy="457200"/>
+          </a:xfrm>
+          <a:prstGeom prst="rect">
+            <a:avLst/>
+          </a:prstGeom>
+          <a:noFill/>
+          <a:ln/>
+        </p:spPr>
+        <p:txBody>
+          <a:bodyPr wrap="square" lIns="0" tIns="0" rIns="0" bIns="0" rtlCol="0" anchor="ctr"/>
+          <a:lstStyle/>
+          <a:p>
+            <a:pPr algn="ctr" indent="0" marL="0">
+              <a:buNone/>
+            </a:pPr>
+            <a:r>
+              <a:rPr lang="en-US" sz="750" b="1" dirty="0">
+                <a:solidFill>
+                  <a:srgbClr val="FFFFFF"/>
+                </a:solidFill>
+                <a:latin typeface="Calibri" pitchFamily="34" charset="0"/>
+                <a:ea typeface="Calibri" pitchFamily="34" charset="-122"/>
+                <a:cs typeface="Calibri" pitchFamily="34" charset="-120"/>
+              </a:rPr>
+              <a:t>Senior TI</a:t>
+            </a:r>
+            <a:endParaRPr lang="en-US" sz="750" dirty="0"/>
+          </a:p>
+          <a:p>
+            <a:pPr algn="ctr" indent="0" marL="0">
+              <a:buNone/>
+            </a:pPr>
+            <a:r>
+              <a:rPr lang="en-US" sz="750" b="1" dirty="0">
+                <a:solidFill>
+                  <a:srgbClr val="FFFFFF"/>
+                </a:solidFill>
+                <a:latin typeface="Calibri" pitchFamily="34" charset="0"/>
+                <a:ea typeface="Calibri" pitchFamily="34" charset="-122"/>
+                <a:cs typeface="Calibri" pitchFamily="34" charset="-120"/>
+              </a:rPr>
+              <a:t>(datos y automatización)</a:t>
+            </a:r>
+            <a:endParaRPr lang="en-US" sz="750" dirty="0"/>
+          </a:p>
+        </p:txBody>
+      </p:sp>
+      <p:sp>
+        <p:nvSpPr>
+          <p:cNvPr id="94" name="Shape 92"/>
+          <p:cNvSpPr/>
+          <p:nvPr/>
+        </p:nvSpPr>
+        <p:spPr>
+          <a:xfrm>
+            <a:off x="11437620" y="3273552"/>
+            <a:ext cx="274320" cy="274320"/>
+          </a:xfrm>
+          <a:prstGeom prst="ellipse">
+            <a:avLst/>
+          </a:prstGeom>
+          <a:solidFill>
+            <a:srgbClr val="6A9B6E"/>
+          </a:solidFill>
+          <a:ln w="12700">
+            <a:solidFill>
+              <a:srgbClr val="FFFFFF"/>
+            </a:solidFill>
+            <a:prstDash val="solid"/>
+          </a:ln>
+        </p:spPr>
+      </p:sp>
+      <p:sp>
+        <p:nvSpPr>
+          <p:cNvPr id="95" name="Text 93"/>
+          <p:cNvSpPr txBox="1"/>
+          <p:nvPr/>
+        </p:nvSpPr>
+        <p:spPr>
+          <a:xfrm>
+            <a:off x="11437620" y="3273552"/>
+            <a:ext cx="274320" cy="274320"/>
+          </a:xfrm>
+          <a:prstGeom prst="rect">
+            <a:avLst/>
+          </a:prstGeom>
+          <a:noFill/>
+          <a:ln/>
+        </p:spPr>
+        <p:txBody>
+          <a:bodyPr wrap="square" lIns="0" tIns="0" rIns="0" bIns="0" rtlCol="0" anchor="ctr"/>
+          <a:lstStyle/>
+          <a:p>
+            <a:pPr algn="ctr" indent="0" marL="0">
+              <a:buNone/>
+            </a:pPr>
+            <a:r>
+              <a:rPr lang="en-US" sz="800" b="1" dirty="0">
+                <a:solidFill>
+                  <a:srgbClr val="FFFFFF"/>
+                </a:solidFill>
+                <a:latin typeface="Calibri" pitchFamily="34" charset="0"/>
+                <a:ea typeface="Calibri" pitchFamily="34" charset="-122"/>
+                <a:cs typeface="Calibri" pitchFamily="34" charset="-120"/>
+              </a:rPr>
+              <a:t>+1</a:t>
+            </a:r>
+            <a:endParaRPr lang="en-US" sz="800" dirty="0"/>
+          </a:p>
+        </p:txBody>
+      </p:sp>
+      <p:sp>
+        <p:nvSpPr>
+          <p:cNvPr id="96" name="Shape 94"/>
+          <p:cNvSpPr/>
+          <p:nvPr/>
+        </p:nvSpPr>
+        <p:spPr>
+          <a:xfrm>
+            <a:off x="8676132" y="4251960"/>
+            <a:ext cx="2414016" cy="0"/>
+          </a:xfrm>
+          <a:prstGeom prst="line">
+            <a:avLst/>
+          </a:prstGeom>
+          <a:noFill/>
+          <a:ln w="15875">
+            <a:solidFill>
+              <a:srgbClr val="A9BEDC"/>
+            </a:solidFill>
+            <a:prstDash val="solid"/>
+          </a:ln>
+        </p:spPr>
+      </p:sp>
+      <p:sp>
+        <p:nvSpPr>
+          <p:cNvPr id="97" name="Shape 95"/>
+          <p:cNvSpPr/>
+          <p:nvPr/>
+        </p:nvSpPr>
+        <p:spPr>
+          <a:xfrm>
+            <a:off x="8676132" y="4251960"/>
+            <a:ext cx="0" cy="164592"/>
+          </a:xfrm>
+          <a:prstGeom prst="line">
+            <a:avLst/>
+          </a:prstGeom>
+          <a:noFill/>
+          <a:ln w="15875">
+            <a:solidFill>
+              <a:srgbClr val="A9BEDC"/>
+            </a:solidFill>
+            <a:prstDash val="solid"/>
+          </a:ln>
+        </p:spPr>
+      </p:sp>
+      <p:sp>
+        <p:nvSpPr>
+          <p:cNvPr id="98" name="Shape 96"/>
+          <p:cNvSpPr/>
+          <p:nvPr/>
+        </p:nvSpPr>
+        <p:spPr>
+          <a:xfrm>
+            <a:off x="8319516" y="4416552"/>
+            <a:ext cx="713232" cy="384048"/>
+          </a:xfrm>
+          <a:prstGeom prst="roundRect">
+            <a:avLst>
+              <a:gd name="adj" fmla="val 11905"/>
+            </a:avLst>
+          </a:prstGeom>
+          <a:solidFill>
+            <a:srgbClr val="4A6FA5"/>
+          </a:solidFill>
+          <a:ln w="12700">
+            <a:solidFill>
+              <a:srgbClr val="4A6FA5"/>
+            </a:solidFill>
+            <a:prstDash val="solid"/>
+          </a:ln>
+        </p:spPr>
+      </p:sp>
+      <p:sp>
+        <p:nvSpPr>
+          <p:cNvPr id="99" name="Text 97"/>
+          <p:cNvSpPr txBox="1"/>
+          <p:nvPr/>
+        </p:nvSpPr>
+        <p:spPr>
+          <a:xfrm>
+            <a:off x="8356092" y="4416552"/>
+            <a:ext cx="640080" cy="384048"/>
+          </a:xfrm>
+          <a:prstGeom prst="rect">
+            <a:avLst/>
+          </a:prstGeom>
+          <a:noFill/>
+          <a:ln/>
+        </p:spPr>
+        <p:txBody>
+          <a:bodyPr wrap="square" lIns="0" tIns="0" rIns="0" bIns="0" rtlCol="0" anchor="ctr"/>
+          <a:lstStyle/>
+          <a:p>
+            <a:pPr algn="ctr" indent="0" marL="0">
+              <a:buNone/>
+            </a:pPr>
+            <a:r>
+              <a:rPr lang="en-US" sz="800" b="1" dirty="0">
+                <a:solidFill>
+                  <a:srgbClr val="FFFFFF"/>
+                </a:solidFill>
+                <a:latin typeface="Calibri" pitchFamily="34" charset="0"/>
+                <a:ea typeface="Calibri" pitchFamily="34" charset="-122"/>
+                <a:cs typeface="Calibri" pitchFamily="34" charset="-120"/>
+              </a:rPr>
+              <a:t>Pleno</a:t>
+            </a:r>
+            <a:endParaRPr lang="en-US" sz="800" dirty="0"/>
+          </a:p>
+        </p:txBody>
+      </p:sp>
+      <p:sp>
+        <p:nvSpPr>
+          <p:cNvPr id="100" name="Shape 98"/>
+          <p:cNvSpPr/>
+          <p:nvPr/>
+        </p:nvSpPr>
+        <p:spPr>
+          <a:xfrm>
+            <a:off x="9480804" y="4251960"/>
+            <a:ext cx="0" cy="164592"/>
+          </a:xfrm>
+          <a:prstGeom prst="line">
+            <a:avLst/>
+          </a:prstGeom>
+          <a:noFill/>
+          <a:ln w="15875">
+            <a:solidFill>
+              <a:srgbClr val="A9BEDC"/>
+            </a:solidFill>
+            <a:prstDash val="solid"/>
+          </a:ln>
+        </p:spPr>
+      </p:sp>
+      <p:sp>
+        <p:nvSpPr>
+          <p:cNvPr id="101" name="Shape 99"/>
+          <p:cNvSpPr/>
+          <p:nvPr/>
+        </p:nvSpPr>
+        <p:spPr>
+          <a:xfrm>
+            <a:off x="9124188" y="4416552"/>
+            <a:ext cx="713232" cy="384048"/>
+          </a:xfrm>
+          <a:prstGeom prst="roundRect">
+            <a:avLst>
+              <a:gd name="adj" fmla="val 11905"/>
+            </a:avLst>
+          </a:prstGeom>
+          <a:solidFill>
+            <a:srgbClr val="4A6FA5"/>
+          </a:solidFill>
+          <a:ln w="12700">
+            <a:solidFill>
+              <a:srgbClr val="4A6FA5"/>
+            </a:solidFill>
+            <a:prstDash val="solid"/>
+          </a:ln>
+        </p:spPr>
+      </p:sp>
+      <p:sp>
+        <p:nvSpPr>
+          <p:cNvPr id="102" name="Text 100"/>
+          <p:cNvSpPr txBox="1"/>
+          <p:nvPr/>
+        </p:nvSpPr>
+        <p:spPr>
+          <a:xfrm>
+            <a:off x="9160764" y="4416552"/>
+            <a:ext cx="640080" cy="384048"/>
+          </a:xfrm>
+          <a:prstGeom prst="rect">
+            <a:avLst/>
+          </a:prstGeom>
+          <a:noFill/>
+          <a:ln/>
+        </p:spPr>
+        <p:txBody>
+          <a:bodyPr wrap="square" lIns="0" tIns="0" rIns="0" bIns="0" rtlCol="0" anchor="ctr"/>
+          <a:lstStyle/>
+          <a:p>
+            <a:pPr algn="ctr" indent="0" marL="0">
+              <a:buNone/>
+            </a:pPr>
+            <a:r>
+              <a:rPr lang="en-US" sz="800" b="1" dirty="0">
+                <a:solidFill>
+                  <a:srgbClr val="FFFFFF"/>
+                </a:solidFill>
+                <a:latin typeface="Calibri" pitchFamily="34" charset="0"/>
+                <a:ea typeface="Calibri" pitchFamily="34" charset="-122"/>
+                <a:cs typeface="Calibri" pitchFamily="34" charset="-120"/>
+              </a:rPr>
+              <a:t>Pleno</a:t>
+            </a:r>
+            <a:endParaRPr lang="en-US" sz="800" dirty="0"/>
+          </a:p>
+        </p:txBody>
+      </p:sp>
+      <p:sp>
+        <p:nvSpPr>
+          <p:cNvPr id="103" name="Shape 101"/>
+          <p:cNvSpPr/>
+          <p:nvPr/>
+        </p:nvSpPr>
+        <p:spPr>
+          <a:xfrm>
+            <a:off x="10285476" y="4251960"/>
+            <a:ext cx="0" cy="164592"/>
+          </a:xfrm>
+          <a:prstGeom prst="line">
+            <a:avLst/>
+          </a:prstGeom>
+          <a:noFill/>
+          <a:ln w="15875">
+            <a:solidFill>
+              <a:srgbClr val="A9BEDC"/>
+            </a:solidFill>
+            <a:prstDash val="solid"/>
+          </a:ln>
+        </p:spPr>
+      </p:sp>
+      <p:sp>
+        <p:nvSpPr>
+          <p:cNvPr id="104" name="Shape 102"/>
+          <p:cNvSpPr/>
+          <p:nvPr/>
+        </p:nvSpPr>
+        <p:spPr>
+          <a:xfrm>
+            <a:off x="9928860" y="4416552"/>
+            <a:ext cx="713232" cy="384048"/>
+          </a:xfrm>
+          <a:prstGeom prst="roundRect">
+            <a:avLst>
+              <a:gd name="adj" fmla="val 11905"/>
+            </a:avLst>
+          </a:prstGeom>
+          <a:solidFill>
+            <a:srgbClr val="4A6FA5"/>
+          </a:solidFill>
+          <a:ln w="12700">
+            <a:solidFill>
+              <a:srgbClr val="4A6FA5"/>
+            </a:solidFill>
+            <a:prstDash val="solid"/>
+          </a:ln>
+        </p:spPr>
+      </p:sp>
+      <p:sp>
+        <p:nvSpPr>
+          <p:cNvPr id="105" name="Text 103"/>
+          <p:cNvSpPr txBox="1"/>
+          <p:nvPr/>
+        </p:nvSpPr>
+        <p:spPr>
+          <a:xfrm>
+            <a:off x="9965436" y="4416552"/>
+            <a:ext cx="640080" cy="384048"/>
+          </a:xfrm>
+          <a:prstGeom prst="rect">
+            <a:avLst/>
+          </a:prstGeom>
+          <a:noFill/>
+          <a:ln/>
+        </p:spPr>
+        <p:txBody>
+          <a:bodyPr wrap="square" lIns="0" tIns="0" rIns="0" bIns="0" rtlCol="0" anchor="ctr"/>
+          <a:lstStyle/>
+          <a:p>
+            <a:pPr algn="ctr" indent="0" marL="0">
+              <a:buNone/>
+            </a:pPr>
+            <a:r>
+              <a:rPr lang="en-US" sz="800" b="1" dirty="0">
+                <a:solidFill>
+                  <a:srgbClr val="FFFFFF"/>
+                </a:solidFill>
+                <a:latin typeface="Calibri" pitchFamily="34" charset="0"/>
+                <a:ea typeface="Calibri" pitchFamily="34" charset="-122"/>
+                <a:cs typeface="Calibri" pitchFamily="34" charset="-120"/>
+              </a:rPr>
+              <a:t>Pleno</a:t>
+            </a:r>
+            <a:endParaRPr lang="en-US" sz="800" dirty="0"/>
+          </a:p>
+        </p:txBody>
+      </p:sp>
+      <p:sp>
+        <p:nvSpPr>
+          <p:cNvPr id="106" name="Shape 104"/>
+          <p:cNvSpPr/>
+          <p:nvPr/>
+        </p:nvSpPr>
+        <p:spPr>
+          <a:xfrm>
+            <a:off x="11090148" y="4251960"/>
+            <a:ext cx="0" cy="164592"/>
+          </a:xfrm>
+          <a:prstGeom prst="line">
+            <a:avLst/>
+          </a:prstGeom>
+          <a:noFill/>
+          <a:ln w="15875">
+            <a:solidFill>
+              <a:srgbClr val="A9BEDC"/>
+            </a:solidFill>
+            <a:prstDash val="solid"/>
+          </a:ln>
+        </p:spPr>
+      </p:sp>
+      <p:sp>
+        <p:nvSpPr>
+          <p:cNvPr id="107" name="Shape 105"/>
+          <p:cNvSpPr/>
+          <p:nvPr/>
+        </p:nvSpPr>
+        <p:spPr>
+          <a:xfrm>
+            <a:off x="10733532" y="4416552"/>
+            <a:ext cx="713232" cy="384048"/>
+          </a:xfrm>
+          <a:prstGeom prst="roundRect">
+            <a:avLst>
+              <a:gd name="adj" fmla="val 11905"/>
+            </a:avLst>
+          </a:prstGeom>
+          <a:solidFill>
+            <a:srgbClr val="4A6FA5"/>
+          </a:solidFill>
+          <a:ln w="12700">
+            <a:solidFill>
+              <a:srgbClr val="4A6FA5"/>
+            </a:solidFill>
+            <a:prstDash val="solid"/>
+          </a:ln>
+        </p:spPr>
+      </p:sp>
+      <p:sp>
+        <p:nvSpPr>
+          <p:cNvPr id="108" name="Text 106"/>
+          <p:cNvSpPr txBox="1"/>
+          <p:nvPr/>
+        </p:nvSpPr>
+        <p:spPr>
+          <a:xfrm>
+            <a:off x="10770108" y="4416552"/>
+            <a:ext cx="640080" cy="384048"/>
+          </a:xfrm>
+          <a:prstGeom prst="rect">
+            <a:avLst/>
+          </a:prstGeom>
+          <a:noFill/>
+          <a:ln/>
+        </p:spPr>
+        <p:txBody>
+          <a:bodyPr wrap="square" lIns="0" tIns="0" rIns="0" bIns="0" rtlCol="0" anchor="ctr"/>
+          <a:lstStyle/>
+          <a:p>
+            <a:pPr algn="ctr" indent="0" marL="0">
+              <a:buNone/>
+            </a:pPr>
+            <a:r>
+              <a:rPr lang="en-US" sz="800" b="1" dirty="0">
+                <a:solidFill>
+                  <a:srgbClr val="FFFFFF"/>
+                </a:solidFill>
+                <a:latin typeface="Calibri" pitchFamily="34" charset="0"/>
+                <a:ea typeface="Calibri" pitchFamily="34" charset="-122"/>
+                <a:cs typeface="Calibri" pitchFamily="34" charset="-120"/>
+              </a:rPr>
+              <a:t>Pleno</a:t>
+            </a:r>
+            <a:endParaRPr lang="en-US" sz="800" dirty="0"/>
+          </a:p>
+        </p:txBody>
+      </p:sp>
+      <p:sp>
+        <p:nvSpPr>
+          <p:cNvPr id="109" name="Text 107"/>
+          <p:cNvSpPr txBox="1"/>
+          <p:nvPr/>
+        </p:nvSpPr>
+        <p:spPr>
+          <a:xfrm>
+            <a:off x="8125968" y="4828032"/>
+            <a:ext cx="3514344" cy="237744"/>
+          </a:xfrm>
+          <a:prstGeom prst="rect">
+            <a:avLst/>
+          </a:prstGeom>
+          <a:noFill/>
+          <a:ln/>
+        </p:spPr>
+        <p:txBody>
+          <a:bodyPr wrap="square" lIns="0" tIns="0" rIns="0" bIns="0" rtlCol="0" anchor="ctr"/>
+          <a:lstStyle/>
+          <a:p>
+            <a:pPr algn="ctr" indent="0" marL="0">
+              <a:buNone/>
+            </a:pPr>
+            <a:r>
+              <a:rPr lang="en-US" sz="900" dirty="0">
+                <a:solidFill>
+                  <a:srgbClr val="5B6470"/>
+                </a:solidFill>
+                <a:latin typeface="Calibri" pitchFamily="34" charset="0"/>
+                <a:ea typeface="Calibri" pitchFamily="34" charset="-122"/>
+                <a:cs typeface="Calibri" pitchFamily="34" charset="-120"/>
+              </a:rPr>
+              <a:t>Dos seniors, grado +1; cuatro plenos</a:t>
+            </a:r>
+            <a:endParaRPr lang="en-US" sz="900" dirty="0"/>
+          </a:p>
+        </p:txBody>
+      </p:sp>
+      <p:sp>
+        <p:nvSpPr>
+          <p:cNvPr id="110" name="Text 108"/>
+          <p:cNvSpPr txBox="1"/>
+          <p:nvPr/>
+        </p:nvSpPr>
+        <p:spPr>
+          <a:xfrm>
+            <a:off x="8308848" y="5074920"/>
+            <a:ext cx="3148584" cy="822960"/>
+          </a:xfrm>
+          <a:prstGeom prst="rect">
+            <a:avLst/>
+          </a:prstGeom>
+          <a:noFill/>
+          <a:ln/>
+        </p:spPr>
+        <p:txBody>
+          <a:bodyPr wrap="square" lIns="0" tIns="0" rIns="0" bIns="0" rtlCol="0" anchor="t"/>
           <a:lstStyle/>
           <a:p>
             <a:pPr indent="0" marL="0">
               <a:buNone/>
             </a:pPr>
             <a:r>
-              <a:rPr lang="en-US" sz="1350" b="1" dirty="0">
-                <a:solidFill>
-                  <a:srgbClr val="2B2F36"/>
-                </a:solidFill>
-                <a:latin typeface="Calibri" pitchFamily="34" charset="0"/>
-                <a:ea typeface="Calibri" pitchFamily="34" charset="-122"/>
-                <a:cs typeface="Calibri" pitchFamily="34" charset="-120"/>
-              </a:rPr>
-              <a:t>Perímetro en expansión</a:t>
-            </a:r>
-            <a:endParaRPr lang="en-US" sz="1350" dirty="0"/>
-          </a:p>
-        </p:txBody>
-      </p:sp>
-      <p:sp>
-        <p:nvSpPr>
-          <p:cNvPr id="20" name="Text 18"/>
-          <p:cNvSpPr txBox="1"/>
-          <p:nvPr/>
-        </p:nvSpPr>
-        <p:spPr>
-          <a:xfrm>
-            <a:off x="9144000" y="2743200"/>
-            <a:ext cx="2148840" cy="2377440"/>
-          </a:xfrm>
-          <a:prstGeom prst="rect">
-            <a:avLst/>
-          </a:prstGeom>
-          <a:noFill/>
-          <a:ln/>
-        </p:spPr>
-        <p:txBody>
-          <a:bodyPr wrap="square" lIns="0" tIns="0" rIns="0" bIns="0" rtlCol="0" anchor="t"/>
-          <a:lstStyle/>
-          <a:p>
-            <a:pPr indent="0" marL="0">
-              <a:buNone/>
-            </a:pPr>
-            <a:r>
-              <a:rPr lang="en-US" sz="1050" dirty="0">
+              <a:rPr lang="en-US" sz="950" dirty="0">
                 <a:solidFill>
                   <a:srgbClr val="5B6470"/>
                 </a:solidFill>
@@ -26369,54 +27312,15 @@
                 <a:ea typeface="Calibri" pitchFamily="34" charset="-122"/>
                 <a:cs typeface="Calibri" pitchFamily="34" charset="-120"/>
               </a:rPr>
-              <a:t>Registro de Deuda Consolidada, cierre de Basilea III y cambios permanentes al MSI aumentan la carga en todos los bancos, lo que intensifica la competencia por el mismo talento.</a:t>
-            </a:r>
-            <a:endParaRPr lang="en-US" sz="1050" dirty="0"/>
-          </a:p>
-        </p:txBody>
-      </p:sp>
-      <p:sp>
-        <p:nvSpPr>
-          <p:cNvPr id="21" name="Text 19"/>
-          <p:cNvSpPr txBox="1"/>
-          <p:nvPr/>
-        </p:nvSpPr>
-        <p:spPr>
-          <a:xfrm>
-            <a:off x="548640" y="5486400"/>
-            <a:ext cx="11091672" cy="457200"/>
-          </a:xfrm>
-          <a:prstGeom prst="rect">
-            <a:avLst/>
-          </a:prstGeom>
-          <a:noFill/>
-          <a:ln/>
-        </p:spPr>
-        <p:txBody>
-          <a:bodyPr wrap="square" lIns="0" tIns="0" rIns="0" bIns="0" rtlCol="0" anchor="ctr"/>
-          <a:lstStyle/>
-          <a:p>
-            <a:pPr indent="0" marL="0">
-              <a:buNone/>
-            </a:pPr>
-            <a:r>
-              <a:rPr lang="en-US" sz="1100" i="1" dirty="0">
-                <a:solidFill>
-                  <a:srgbClr val="5B6470"/>
-                </a:solidFill>
-                <a:latin typeface="Calibri" pitchFamily="34" charset="0"/>
-                <a:ea typeface="Calibri" pitchFamily="34" charset="-122"/>
-                <a:cs typeface="Calibri" pitchFamily="34" charset="-120"/>
-              </a:rPr>
-              <a:t>Referencia cualitativa a propósito: las cifras de mercado llegan al comité con el diagnóstico de la fase 1, validadas con una fuente formal de remuneraciones.</a:t>
-            </a:r>
-            <a:endParaRPr lang="en-US" sz="1100" dirty="0"/>
-          </a:p>
-        </p:txBody>
-      </p:sp>
-      <p:sp>
-        <p:nvSpPr>
-          <p:cNvPr id="22" name="Text 20"/>
+              <a:t>Los seniors asumen los bloques críticos (Deudores y REDEC; datos, automatización y controles) y la validación; los plenos ejecutan bajo control dual con ruta a senior.</a:t>
+            </a:r>
+            <a:endParaRPr lang="en-US" sz="950" dirty="0"/>
+          </a:p>
+        </p:txBody>
+      </p:sp>
+      <p:sp>
+        <p:nvSpPr>
+          <p:cNvPr id="111" name="Text 109"/>
           <p:cNvSpPr txBox="1"/>
           <p:nvPr/>
         </p:nvSpPr>
@@ -26447,7 +27351,7 @@
                 <a:ea typeface="Calibri" pitchFamily="34" charset="-122"/>
                 <a:cs typeface="Calibri" pitchFamily="34" charset="-120"/>
               </a:rPr>
-              <a:t>Cada afirmación está respaldada en el documento "Respaldo de afirmaciones de mercado", entregado junto con esta presentación, con sus fuentes públicas.</a:t>
+              <a:t>Regla común: quien prepara nunca firma; ningún reporte crítico depende de una sola persona. Grados a validar con Personas en la evaluación.</a:t>
             </a:r>
             <a:endParaRPr lang="en-US" sz="800" dirty="0"/>
           </a:p>

--- a/docs/benchmarking/presentacion-reportes-normativos-v3.pptx
+++ b/docs/benchmarking/presentacion-reportes-normativos-v3.pptx
@@ -603,7 +603,7 @@
           <a:p>
             <a:r>
               <a:rPr lang="en-US" dirty="0"/>
-              <a:t>Presentar las alternativas con neutralidad y dejar que el comité pregunte. La 1 es simple y equitativa y reconoce a todo el equipo; la 2 diferencia responsabilidades, alinea grado con complejidad y crea una ruta de desarrollo, a cambio de definir criterios de selección transparentes. Son combinables: la 2 ahora y revisión de los plenos con la evaluación.</a:t>
+              <a:t>Presentar las alternativas con neutralidad y dejar que el comité pregunte. La 1 es simple y equitativa y reconoce a todo el equipo; la 2 también sube un grado a todos y, además, diferencia responsabilidades con dos seniors dos grados más, alineando grado con complejidad y creando una ruta de desarrollo, a cambio de definir criterios de selección transparentes.</a:t>
             </a:r>
             <a:endParaRPr lang="en-US" dirty="0"/>
           </a:p>
@@ -1659,7 +1659,7 @@
           <a:p>
             <a:r>
               <a:rPr lang="en-US" dirty="0"/>
-              <a:t>Leer de izquierda a derecha: hoy, seis cargos con el mismo grado administran reportes de complejidad muy distinta. Los dos caminos parten del mismo diagnóstico. El primero reconoce a todo el equipo y mantiene la estructura; el segundo diferencia roles y crea una ruta de desarrollo. La lámina siguiente los compara criterio a criterio.</a:t>
+              <a:t>Leer de izquierda a derecha: hoy, seis cargos con el mismo grado administran reportes de complejidad muy distinta. Los dos caminos parten del mismo diagnóstico. El primero reconoce a todo el equipo con un grado más y mantiene la estructura; el segundo también sube un grado a todos y diferencia roles con dos seniors dos grados más, creando una ruta de desarrollo. La lámina siguiente los compara criterio a criterio.</a:t>
             </a:r>
             <a:endParaRPr lang="en-US" dirty="0"/>
           </a:p>
@@ -2900,7 +2900,7 @@
                 <a:ea typeface="Calibri" pitchFamily="34" charset="-122"/>
                 <a:cs typeface="Calibri" pitchFamily="34" charset="-120"/>
               </a:rPr>
-              <a:t>Se alinea en los dos cargos que asumen los bloques críticos</a:t>
+              <a:t>Se alinea para todo el equipo, con mayor reconocimiento en los dos cargos que asumen los bloques críticos</a:t>
             </a:r>
             <a:endParaRPr lang="en-US" sz="1050" dirty="0"/>
           </a:p>
@@ -3003,7 +3003,7 @@
                 <a:ea typeface="Calibri" pitchFamily="34" charset="-122"/>
                 <a:cs typeface="Calibri" pitchFamily="34" charset="-120"/>
               </a:rPr>
-              <a:t>Plana: seis especialistas con el mismo grado</a:t>
+              <a:t>Plana: seis especialistas con el mismo grado, un nivel más</a:t>
             </a:r>
             <a:endParaRPr lang="en-US" sz="1050" dirty="0"/>
           </a:p>
@@ -3042,7 +3042,7 @@
                 <a:ea typeface="Calibri" pitchFamily="34" charset="-122"/>
                 <a:cs typeface="Calibri" pitchFamily="34" charset="-120"/>
               </a:rPr>
-              <a:t>Diferenciada: dos seniors y cuatro plenos</a:t>
+              <a:t>Diferenciada: dos seniors dos niveles más y cuatro plenos un nivel más</a:t>
             </a:r>
             <a:endParaRPr lang="en-US" sz="1050" dirty="0"/>
           </a:p>
@@ -3521,7 +3521,7 @@
                 <a:ea typeface="Calibri" pitchFamily="34" charset="-122"/>
                 <a:cs typeface="Calibri" pitchFamily="34" charset="-120"/>
               </a:rPr>
-              <a:t>Seis cargos</a:t>
+              <a:t>Seis cargos, un grado cada uno</a:t>
             </a:r>
             <a:endParaRPr lang="en-US" sz="1050" dirty="0"/>
           </a:p>
@@ -3560,7 +3560,7 @@
                 <a:ea typeface="Calibri" pitchFamily="34" charset="-122"/>
                 <a:cs typeface="Calibri" pitchFamily="34" charset="-120"/>
               </a:rPr>
-              <a:t>Dos cargos</a:t>
+              <a:t>Seis cargos: dos suben dos grados y cuatro suben uno</a:t>
             </a:r>
             <a:endParaRPr lang="en-US" sz="1050" dirty="0"/>
           </a:p>
@@ -26708,7 +26708,7 @@
                 <a:ea typeface="Calibri" pitchFamily="34" charset="-122"/>
                 <a:cs typeface="Calibri" pitchFamily="34" charset="-120"/>
               </a:rPr>
-              <a:t>+1</a:t>
+              <a:t>+2</a:t>
             </a:r>
             <a:endParaRPr lang="en-US" sz="800" dirty="0"/>
           </a:p>
@@ -26855,7 +26855,7 @@
                 <a:ea typeface="Calibri" pitchFamily="34" charset="-122"/>
                 <a:cs typeface="Calibri" pitchFamily="34" charset="-120"/>
               </a:rPr>
-              <a:t>+1</a:t>
+              <a:t>+2</a:t>
             </a:r>
             <a:endParaRPr lang="en-US" sz="800" dirty="0"/>
           </a:p>
@@ -27242,7 +27242,263 @@
       </p:sp>
       <p:sp>
         <p:nvSpPr>
-          <p:cNvPr id="109" name="Text 107"/>
+          <p:cNvPr id="109" name="Shape 107"/>
+          <p:cNvSpPr/>
+          <p:nvPr/>
+        </p:nvSpPr>
+        <p:spPr>
+          <a:xfrm>
+            <a:off x="8868156" y="4297680"/>
+            <a:ext cx="274320" cy="274320"/>
+          </a:xfrm>
+          <a:prstGeom prst="ellipse">
+            <a:avLst/>
+          </a:prstGeom>
+          <a:solidFill>
+            <a:srgbClr val="6A9B6E"/>
+          </a:solidFill>
+          <a:ln w="12700">
+            <a:solidFill>
+              <a:srgbClr val="FFFFFF"/>
+            </a:solidFill>
+            <a:prstDash val="solid"/>
+          </a:ln>
+        </p:spPr>
+      </p:sp>
+      <p:sp>
+        <p:nvSpPr>
+          <p:cNvPr id="110" name="Text 108"/>
+          <p:cNvSpPr txBox="1"/>
+          <p:nvPr/>
+        </p:nvSpPr>
+        <p:spPr>
+          <a:xfrm>
+            <a:off x="8868156" y="4297680"/>
+            <a:ext cx="274320" cy="274320"/>
+          </a:xfrm>
+          <a:prstGeom prst="rect">
+            <a:avLst/>
+          </a:prstGeom>
+          <a:noFill/>
+          <a:ln/>
+        </p:spPr>
+        <p:txBody>
+          <a:bodyPr wrap="square" lIns="0" tIns="0" rIns="0" bIns="0" rtlCol="0" anchor="ctr"/>
+          <a:lstStyle/>
+          <a:p>
+            <a:pPr algn="ctr" indent="0" marL="0">
+              <a:buNone/>
+            </a:pPr>
+            <a:r>
+              <a:rPr lang="en-US" sz="800" b="1" dirty="0">
+                <a:solidFill>
+                  <a:srgbClr val="FFFFFF"/>
+                </a:solidFill>
+                <a:latin typeface="Calibri" pitchFamily="34" charset="0"/>
+                <a:ea typeface="Calibri" pitchFamily="34" charset="-122"/>
+                <a:cs typeface="Calibri" pitchFamily="34" charset="-120"/>
+              </a:rPr>
+              <a:t>+1</a:t>
+            </a:r>
+            <a:endParaRPr lang="en-US" sz="800" dirty="0"/>
+          </a:p>
+        </p:txBody>
+      </p:sp>
+      <p:sp>
+        <p:nvSpPr>
+          <p:cNvPr id="111" name="Shape 109"/>
+          <p:cNvSpPr/>
+          <p:nvPr/>
+        </p:nvSpPr>
+        <p:spPr>
+          <a:xfrm>
+            <a:off x="9672828" y="4297680"/>
+            <a:ext cx="274320" cy="274320"/>
+          </a:xfrm>
+          <a:prstGeom prst="ellipse">
+            <a:avLst/>
+          </a:prstGeom>
+          <a:solidFill>
+            <a:srgbClr val="6A9B6E"/>
+          </a:solidFill>
+          <a:ln w="12700">
+            <a:solidFill>
+              <a:srgbClr val="FFFFFF"/>
+            </a:solidFill>
+            <a:prstDash val="solid"/>
+          </a:ln>
+        </p:spPr>
+      </p:sp>
+      <p:sp>
+        <p:nvSpPr>
+          <p:cNvPr id="112" name="Text 110"/>
+          <p:cNvSpPr txBox="1"/>
+          <p:nvPr/>
+        </p:nvSpPr>
+        <p:spPr>
+          <a:xfrm>
+            <a:off x="9672828" y="4297680"/>
+            <a:ext cx="274320" cy="274320"/>
+          </a:xfrm>
+          <a:prstGeom prst="rect">
+            <a:avLst/>
+          </a:prstGeom>
+          <a:noFill/>
+          <a:ln/>
+        </p:spPr>
+        <p:txBody>
+          <a:bodyPr wrap="square" lIns="0" tIns="0" rIns="0" bIns="0" rtlCol="0" anchor="ctr"/>
+          <a:lstStyle/>
+          <a:p>
+            <a:pPr algn="ctr" indent="0" marL="0">
+              <a:buNone/>
+            </a:pPr>
+            <a:r>
+              <a:rPr lang="en-US" sz="800" b="1" dirty="0">
+                <a:solidFill>
+                  <a:srgbClr val="FFFFFF"/>
+                </a:solidFill>
+                <a:latin typeface="Calibri" pitchFamily="34" charset="0"/>
+                <a:ea typeface="Calibri" pitchFamily="34" charset="-122"/>
+                <a:cs typeface="Calibri" pitchFamily="34" charset="-120"/>
+              </a:rPr>
+              <a:t>+1</a:t>
+            </a:r>
+            <a:endParaRPr lang="en-US" sz="800" dirty="0"/>
+          </a:p>
+        </p:txBody>
+      </p:sp>
+      <p:sp>
+        <p:nvSpPr>
+          <p:cNvPr id="113" name="Shape 111"/>
+          <p:cNvSpPr/>
+          <p:nvPr/>
+        </p:nvSpPr>
+        <p:spPr>
+          <a:xfrm>
+            <a:off x="10477500" y="4297680"/>
+            <a:ext cx="274320" cy="274320"/>
+          </a:xfrm>
+          <a:prstGeom prst="ellipse">
+            <a:avLst/>
+          </a:prstGeom>
+          <a:solidFill>
+            <a:srgbClr val="6A9B6E"/>
+          </a:solidFill>
+          <a:ln w="12700">
+            <a:solidFill>
+              <a:srgbClr val="FFFFFF"/>
+            </a:solidFill>
+            <a:prstDash val="solid"/>
+          </a:ln>
+        </p:spPr>
+      </p:sp>
+      <p:sp>
+        <p:nvSpPr>
+          <p:cNvPr id="114" name="Text 112"/>
+          <p:cNvSpPr txBox="1"/>
+          <p:nvPr/>
+        </p:nvSpPr>
+        <p:spPr>
+          <a:xfrm>
+            <a:off x="10477500" y="4297680"/>
+            <a:ext cx="274320" cy="274320"/>
+          </a:xfrm>
+          <a:prstGeom prst="rect">
+            <a:avLst/>
+          </a:prstGeom>
+          <a:noFill/>
+          <a:ln/>
+        </p:spPr>
+        <p:txBody>
+          <a:bodyPr wrap="square" lIns="0" tIns="0" rIns="0" bIns="0" rtlCol="0" anchor="ctr"/>
+          <a:lstStyle/>
+          <a:p>
+            <a:pPr algn="ctr" indent="0" marL="0">
+              <a:buNone/>
+            </a:pPr>
+            <a:r>
+              <a:rPr lang="en-US" sz="800" b="1" dirty="0">
+                <a:solidFill>
+                  <a:srgbClr val="FFFFFF"/>
+                </a:solidFill>
+                <a:latin typeface="Calibri" pitchFamily="34" charset="0"/>
+                <a:ea typeface="Calibri" pitchFamily="34" charset="-122"/>
+                <a:cs typeface="Calibri" pitchFamily="34" charset="-120"/>
+              </a:rPr>
+              <a:t>+1</a:t>
+            </a:r>
+            <a:endParaRPr lang="en-US" sz="800" dirty="0"/>
+          </a:p>
+        </p:txBody>
+      </p:sp>
+      <p:sp>
+        <p:nvSpPr>
+          <p:cNvPr id="115" name="Shape 113"/>
+          <p:cNvSpPr/>
+          <p:nvPr/>
+        </p:nvSpPr>
+        <p:spPr>
+          <a:xfrm>
+            <a:off x="11282172" y="4297680"/>
+            <a:ext cx="274320" cy="274320"/>
+          </a:xfrm>
+          <a:prstGeom prst="ellipse">
+            <a:avLst/>
+          </a:prstGeom>
+          <a:solidFill>
+            <a:srgbClr val="6A9B6E"/>
+          </a:solidFill>
+          <a:ln w="12700">
+            <a:solidFill>
+              <a:srgbClr val="FFFFFF"/>
+            </a:solidFill>
+            <a:prstDash val="solid"/>
+          </a:ln>
+        </p:spPr>
+      </p:sp>
+      <p:sp>
+        <p:nvSpPr>
+          <p:cNvPr id="116" name="Text 114"/>
+          <p:cNvSpPr txBox="1"/>
+          <p:nvPr/>
+        </p:nvSpPr>
+        <p:spPr>
+          <a:xfrm>
+            <a:off x="11282172" y="4297680"/>
+            <a:ext cx="274320" cy="274320"/>
+          </a:xfrm>
+          <a:prstGeom prst="rect">
+            <a:avLst/>
+          </a:prstGeom>
+          <a:noFill/>
+          <a:ln/>
+        </p:spPr>
+        <p:txBody>
+          <a:bodyPr wrap="square" lIns="0" tIns="0" rIns="0" bIns="0" rtlCol="0" anchor="ctr"/>
+          <a:lstStyle/>
+          <a:p>
+            <a:pPr algn="ctr" indent="0" marL="0">
+              <a:buNone/>
+            </a:pPr>
+            <a:r>
+              <a:rPr lang="en-US" sz="800" b="1" dirty="0">
+                <a:solidFill>
+                  <a:srgbClr val="FFFFFF"/>
+                </a:solidFill>
+                <a:latin typeface="Calibri" pitchFamily="34" charset="0"/>
+                <a:ea typeface="Calibri" pitchFamily="34" charset="-122"/>
+                <a:cs typeface="Calibri" pitchFamily="34" charset="-120"/>
+              </a:rPr>
+              <a:t>+1</a:t>
+            </a:r>
+            <a:endParaRPr lang="en-US" sz="800" dirty="0"/>
+          </a:p>
+        </p:txBody>
+      </p:sp>
+      <p:sp>
+        <p:nvSpPr>
+          <p:cNvPr id="117" name="Text 115"/>
           <p:cNvSpPr txBox="1"/>
           <p:nvPr/>
         </p:nvSpPr>
@@ -27273,7 +27529,7 @@
                 <a:ea typeface="Calibri" pitchFamily="34" charset="-122"/>
                 <a:cs typeface="Calibri" pitchFamily="34" charset="-120"/>
               </a:rPr>
-              <a:t>Dos seniors, grado +1; cuatro plenos</a:t>
+              <a:t>Dos seniors, grado +2; cuatro plenos, grado +1</a:t>
             </a:r>
             <a:endParaRPr lang="en-US" sz="900" dirty="0"/>
           </a:p>
@@ -27281,7 +27537,7 @@
       </p:sp>
       <p:sp>
         <p:nvSpPr>
-          <p:cNvPr id="110" name="Text 108"/>
+          <p:cNvPr id="118" name="Text 116"/>
           <p:cNvSpPr txBox="1"/>
           <p:nvPr/>
         </p:nvSpPr>
@@ -27312,7 +27568,7 @@
                 <a:ea typeface="Calibri" pitchFamily="34" charset="-122"/>
                 <a:cs typeface="Calibri" pitchFamily="34" charset="-120"/>
               </a:rPr>
-              <a:t>Los seniors asumen los bloques críticos (Deudores y REDEC; datos, automatización y controles) y la validación; los plenos ejecutan bajo control dual con ruta a senior.</a:t>
+              <a:t>Todo el equipo sube un grado; los dos seniors suben dos, asumen los bloques críticos (Deudores y REDEC; datos, automatización y controles) y la validación. Los plenos ejecutan bajo control dual con ruta a senior.</a:t>
             </a:r>
             <a:endParaRPr lang="en-US" sz="950" dirty="0"/>
           </a:p>
@@ -27320,7 +27576,7 @@
       </p:sp>
       <p:sp>
         <p:nvSpPr>
-          <p:cNvPr id="111" name="Text 109"/>
+          <p:cNvPr id="119" name="Text 117"/>
           <p:cNvSpPr txBox="1"/>
           <p:nvPr/>
         </p:nvSpPr>

--- a/docs/benchmarking/presentacion-reportes-normativos-v3.pptx
+++ b/docs/benchmarking/presentacion-reportes-normativos-v3.pptx
@@ -603,7 +603,7 @@
           <a:p>
             <a:r>
               <a:rPr lang="en-US" dirty="0"/>
-              <a:t>Presentar las alternativas con neutralidad y dejar que el comité pregunte. La 1 es simple y equitativa y reconoce a todo el equipo; la 2 también sube un grado a todos y, además, diferencia responsabilidades con dos seniors dos grados más, alineando grado con complejidad y creando una ruta de desarrollo, a cambio de definir criterios de selección transparentes.</a:t>
+              <a:t>Recomendar explícitamente la alternativa 1: sube un grado a todo el equipo y dos a los seniors que asumen los bloques críticos y la validación; alinea grado con complejidad, crea la cadena de confiabilidad y abre una ruta de desarrollo. La alternativa 2 queda como opción simple y equitativa si el comité prefiere no diferenciar roles en esta etapa. Objeción probable: criterios de selección de los seniors; respuesta: se definen con Personas en la evaluación, con la rúbrica de competencias.</a:t>
             </a:r>
             <a:endParaRPr lang="en-US" dirty="0"/>
           </a:p>
@@ -1659,7 +1659,7 @@
           <a:p>
             <a:r>
               <a:rPr lang="en-US" dirty="0"/>
-              <a:t>Leer de izquierda a derecha: hoy, seis cargos con el mismo grado administran reportes de complejidad muy distinta. Los dos caminos parten del mismo diagnóstico. El primero reconoce a todo el equipo con un grado más y mantiene la estructura; el segundo también sube un grado a todos y diferencia roles con dos seniors dos grados más, creando una ruta de desarrollo. La lámina siguiente los compara criterio a criterio.</a:t>
+              <a:t>Leer de izquierda a derecha: hoy, seis cargos con el mismo grado administran reportes de complejidad muy distinta. La alternativa recomendada sube un grado a todo el equipo y dos a los seniors que asumen los bloques críticos y la validación: reconoce a todos y además alinea grado con complejidad y abre una ruta de desarrollo. La alternativa 2 reconoce a todos pero mantiene la estructura plana. La lámina siguiente compara ambas criterio a criterio.</a:t>
             </a:r>
             <a:endParaRPr lang="en-US" dirty="0"/>
           </a:p>
@@ -2571,14 +2571,41 @@
       </p:sp>
       <p:sp>
         <p:nvSpPr>
-          <p:cNvPr id="9" name="Text 7"/>
+          <p:cNvPr id="9" name="Shape 7"/>
+          <p:cNvSpPr/>
+          <p:nvPr/>
+        </p:nvSpPr>
+        <p:spPr>
+          <a:xfrm>
+            <a:off x="2514600" y="1581912"/>
+            <a:ext cx="4434840" cy="4114800"/>
+          </a:xfrm>
+          <a:prstGeom prst="roundRect">
+            <a:avLst>
+              <a:gd name="adj" fmla="val 1333"/>
+            </a:avLst>
+          </a:prstGeom>
+          <a:solidFill>
+            <a:srgbClr val="E8F0E8"/>
+          </a:solidFill>
+          <a:ln w="9525">
+            <a:solidFill>
+              <a:srgbClr val="6A9B6E"/>
+            </a:solidFill>
+            <a:prstDash val="solid"/>
+          </a:ln>
+        </p:spPr>
+      </p:sp>
+      <p:sp>
+        <p:nvSpPr>
+          <p:cNvPr id="10" name="Text 8"/>
           <p:cNvSpPr txBox="1"/>
           <p:nvPr/>
         </p:nvSpPr>
         <p:spPr>
           <a:xfrm>
             <a:off x="2651760" y="1645920"/>
-            <a:ext cx="4343400" cy="274320"/>
+            <a:ext cx="3063240" cy="274320"/>
           </a:xfrm>
           <a:prstGeom prst="rect">
             <a:avLst/>
@@ -2596,13 +2623,13 @@
             <a:r>
               <a:rPr lang="en-US" sz="900" b="1" spc="200" kern="0" dirty="0">
                 <a:solidFill>
-                  <a:srgbClr val="4A6FA5"/>
-                </a:solidFill>
-                <a:latin typeface="Calibri" pitchFamily="34" charset="0"/>
-                <a:ea typeface="Calibri" pitchFamily="34" charset="-122"/>
-                <a:cs typeface="Calibri" pitchFamily="34" charset="-120"/>
-              </a:rPr>
-              <a:t>ALTERNATIVA 1 · UN GRADO MÁS PARA TODOS</a:t>
+                  <a:srgbClr val="4F7A53"/>
+                </a:solidFill>
+                <a:latin typeface="Calibri" pitchFamily="34" charset="0"/>
+                <a:ea typeface="Calibri" pitchFamily="34" charset="-122"/>
+                <a:cs typeface="Calibri" pitchFamily="34" charset="-120"/>
+              </a:rPr>
+              <a:t>ALTERNATIVA 1 · DOS CARGOS SENIOR</a:t>
             </a:r>
             <a:endParaRPr lang="en-US" sz="900" dirty="0"/>
           </a:p>
@@ -2610,7 +2637,73 @@
       </p:sp>
       <p:sp>
         <p:nvSpPr>
-          <p:cNvPr id="10" name="Text 8"/>
+          <p:cNvPr id="11" name="Shape 9"/>
+          <p:cNvSpPr/>
+          <p:nvPr/>
+        </p:nvSpPr>
+        <p:spPr>
+          <a:xfrm>
+            <a:off x="5623560" y="1655064"/>
+            <a:ext cx="1143000" cy="237744"/>
+          </a:xfrm>
+          <a:prstGeom prst="roundRect">
+            <a:avLst>
+              <a:gd name="adj" fmla="val 50000"/>
+            </a:avLst>
+          </a:prstGeom>
+          <a:solidFill>
+            <a:srgbClr val="6A9B6E"/>
+          </a:solidFill>
+          <a:ln w="12700">
+            <a:solidFill>
+              <a:srgbClr val="6A9B6E"/>
+            </a:solidFill>
+            <a:prstDash val="solid"/>
+          </a:ln>
+        </p:spPr>
+      </p:sp>
+      <p:sp>
+        <p:nvSpPr>
+          <p:cNvPr id="12" name="Text 10"/>
+          <p:cNvSpPr txBox="1"/>
+          <p:nvPr/>
+        </p:nvSpPr>
+        <p:spPr>
+          <a:xfrm>
+            <a:off x="5623560" y="1655064"/>
+            <a:ext cx="1143000" cy="237744"/>
+          </a:xfrm>
+          <a:prstGeom prst="rect">
+            <a:avLst/>
+          </a:prstGeom>
+          <a:noFill/>
+          <a:ln/>
+        </p:spPr>
+        <p:txBody>
+          <a:bodyPr wrap="square" lIns="0" tIns="0" rIns="0" bIns="0" rtlCol="0" anchor="ctr"/>
+          <a:lstStyle/>
+          <a:p>
+            <a:pPr algn="ctr" indent="0" marL="0">
+              <a:buNone/>
+            </a:pPr>
+            <a:r>
+              <a:rPr lang="en-US" sz="750" b="1" spc="150" kern="0" dirty="0">
+                <a:solidFill>
+                  <a:srgbClr val="FFFFFF"/>
+                </a:solidFill>
+                <a:latin typeface="Calibri" pitchFamily="34" charset="0"/>
+                <a:ea typeface="Calibri" pitchFamily="34" charset="-122"/>
+                <a:cs typeface="Calibri" pitchFamily="34" charset="-120"/>
+              </a:rPr>
+              <a:t>RECOMENDADA</a:t>
+            </a:r>
+            <a:endParaRPr lang="en-US" sz="750" dirty="0"/>
+          </a:p>
+        </p:txBody>
+      </p:sp>
+      <p:sp>
+        <p:nvSpPr>
+          <p:cNvPr id="13" name="Text 11"/>
           <p:cNvSpPr txBox="1"/>
           <p:nvPr/>
         </p:nvSpPr>
@@ -2635,13 +2728,13 @@
             <a:r>
               <a:rPr lang="en-US" sz="900" b="1" spc="200" kern="0" dirty="0">
                 <a:solidFill>
-                  <a:srgbClr val="4A6FA5"/>
-                </a:solidFill>
-                <a:latin typeface="Calibri" pitchFamily="34" charset="0"/>
-                <a:ea typeface="Calibri" pitchFamily="34" charset="-122"/>
-                <a:cs typeface="Calibri" pitchFamily="34" charset="-120"/>
-              </a:rPr>
-              <a:t>ALTERNATIVA 2 · DOS CARGOS SENIOR</a:t>
+                  <a:srgbClr val="8A94A0"/>
+                </a:solidFill>
+                <a:latin typeface="Calibri" pitchFamily="34" charset="0"/>
+                <a:ea typeface="Calibri" pitchFamily="34" charset="-122"/>
+                <a:cs typeface="Calibri" pitchFamily="34" charset="-120"/>
+              </a:rPr>
+              <a:t>ALTERNATIVA 2 · UN GRADO MÁS PARA TODOS</a:t>
             </a:r>
             <a:endParaRPr lang="en-US" sz="900" dirty="0"/>
           </a:p>
@@ -2649,14 +2742,14 @@
       </p:sp>
       <p:sp>
         <p:nvSpPr>
-          <p:cNvPr id="11" name="Shape 9"/>
+          <p:cNvPr id="14" name="Shape 12"/>
           <p:cNvSpPr/>
           <p:nvPr/>
         </p:nvSpPr>
         <p:spPr>
           <a:xfrm>
             <a:off x="548640" y="1965960"/>
-            <a:ext cx="11091672" cy="457200"/>
+            <a:ext cx="1965960" cy="457200"/>
           </a:xfrm>
           <a:prstGeom prst="rect">
             <a:avLst/>
@@ -2674,248 +2767,14 @@
       </p:sp>
       <p:sp>
         <p:nvSpPr>
-          <p:cNvPr id="12" name="Text 10"/>
-          <p:cNvSpPr txBox="1"/>
-          <p:nvPr/>
-        </p:nvSpPr>
-        <p:spPr>
-          <a:xfrm>
-            <a:off x="658368" y="1965960"/>
-            <a:ext cx="1810512" cy="457200"/>
-          </a:xfrm>
-          <a:prstGeom prst="rect">
-            <a:avLst/>
-          </a:prstGeom>
-          <a:noFill/>
-          <a:ln/>
-        </p:spPr>
-        <p:txBody>
-          <a:bodyPr wrap="square" lIns="0" tIns="0" rIns="0" bIns="0" rtlCol="0" anchor="ctr"/>
-          <a:lstStyle/>
-          <a:p>
-            <a:pPr indent="0" marL="0">
-              <a:buNone/>
-            </a:pPr>
-            <a:r>
-              <a:rPr lang="en-US" sz="1050" b="1" dirty="0">
-                <a:solidFill>
-                  <a:srgbClr val="2B2F36"/>
-                </a:solidFill>
-                <a:latin typeface="Calibri" pitchFamily="34" charset="0"/>
-                <a:ea typeface="Calibri" pitchFamily="34" charset="-122"/>
-                <a:cs typeface="Calibri" pitchFamily="34" charset="-120"/>
-              </a:rPr>
-              <a:t>Qué reconoce</a:t>
-            </a:r>
-            <a:endParaRPr lang="en-US" sz="1050" dirty="0"/>
-          </a:p>
-        </p:txBody>
-      </p:sp>
-      <p:sp>
-        <p:nvSpPr>
-          <p:cNvPr id="13" name="Text 11"/>
-          <p:cNvSpPr txBox="1"/>
-          <p:nvPr/>
-        </p:nvSpPr>
-        <p:spPr>
-          <a:xfrm>
-            <a:off x="2651760" y="1965960"/>
-            <a:ext cx="4160520" cy="457200"/>
-          </a:xfrm>
-          <a:prstGeom prst="rect">
-            <a:avLst/>
-          </a:prstGeom>
-          <a:noFill/>
-          <a:ln/>
-        </p:spPr>
-        <p:txBody>
-          <a:bodyPr wrap="square" lIns="0" tIns="0" rIns="0" bIns="0" rtlCol="0" anchor="ctr"/>
-          <a:lstStyle/>
-          <a:p>
-            <a:pPr indent="0" marL="0">
-              <a:buNone/>
-            </a:pPr>
-            <a:r>
-              <a:rPr lang="en-US" sz="1050" dirty="0">
-                <a:solidFill>
-                  <a:srgbClr val="5B6470"/>
-                </a:solidFill>
-                <a:latin typeface="Calibri" pitchFamily="34" charset="0"/>
-                <a:ea typeface="Calibri" pitchFamily="34" charset="-122"/>
-                <a:cs typeface="Calibri" pitchFamily="34" charset="-120"/>
-              </a:rPr>
-              <a:t>Las competencias adquiridas con el cambio de tareas, en los seis cargos</a:t>
-            </a:r>
-            <a:endParaRPr lang="en-US" sz="1050" dirty="0"/>
-          </a:p>
-        </p:txBody>
-      </p:sp>
-      <p:sp>
-        <p:nvSpPr>
-          <p:cNvPr id="14" name="Text 12"/>
-          <p:cNvSpPr txBox="1"/>
-          <p:nvPr/>
-        </p:nvSpPr>
-        <p:spPr>
-          <a:xfrm>
-            <a:off x="7178040" y="1965960"/>
-            <a:ext cx="4160520" cy="457200"/>
-          </a:xfrm>
-          <a:prstGeom prst="rect">
-            <a:avLst/>
-          </a:prstGeom>
-          <a:noFill/>
-          <a:ln/>
-        </p:spPr>
-        <p:txBody>
-          <a:bodyPr wrap="square" lIns="0" tIns="0" rIns="0" bIns="0" rtlCol="0" anchor="ctr"/>
-          <a:lstStyle/>
-          <a:p>
-            <a:pPr indent="0" marL="0">
-              <a:buNone/>
-            </a:pPr>
-            <a:r>
-              <a:rPr lang="en-US" sz="1050" dirty="0">
-                <a:solidFill>
-                  <a:srgbClr val="5B6470"/>
-                </a:solidFill>
-                <a:latin typeface="Calibri" pitchFamily="34" charset="0"/>
-                <a:ea typeface="Calibri" pitchFamily="34" charset="-122"/>
-                <a:cs typeface="Calibri" pitchFamily="34" charset="-120"/>
-              </a:rPr>
-              <a:t>Las competencias adquiridas y, además, la diferencia de complejidad entre reportes</a:t>
-            </a:r>
-            <a:endParaRPr lang="en-US" sz="1050" dirty="0"/>
-          </a:p>
-        </p:txBody>
-      </p:sp>
-      <p:sp>
-        <p:nvSpPr>
-          <p:cNvPr id="15" name="Text 13"/>
-          <p:cNvSpPr txBox="1"/>
-          <p:nvPr/>
-        </p:nvSpPr>
-        <p:spPr>
-          <a:xfrm>
-            <a:off x="658368" y="2423160"/>
-            <a:ext cx="1810512" cy="457200"/>
-          </a:xfrm>
-          <a:prstGeom prst="rect">
-            <a:avLst/>
-          </a:prstGeom>
-          <a:noFill/>
-          <a:ln/>
-        </p:spPr>
-        <p:txBody>
-          <a:bodyPr wrap="square" lIns="0" tIns="0" rIns="0" bIns="0" rtlCol="0" anchor="ctr"/>
-          <a:lstStyle/>
-          <a:p>
-            <a:pPr indent="0" marL="0">
-              <a:buNone/>
-            </a:pPr>
-            <a:r>
-              <a:rPr lang="en-US" sz="1050" b="1" dirty="0">
-                <a:solidFill>
-                  <a:srgbClr val="2B2F36"/>
-                </a:solidFill>
-                <a:latin typeface="Calibri" pitchFamily="34" charset="0"/>
-                <a:ea typeface="Calibri" pitchFamily="34" charset="-122"/>
-                <a:cs typeface="Calibri" pitchFamily="34" charset="-120"/>
-              </a:rPr>
-              <a:t>Remuneración</a:t>
-            </a:r>
-            <a:endParaRPr lang="en-US" sz="1050" dirty="0"/>
-          </a:p>
-        </p:txBody>
-      </p:sp>
-      <p:sp>
-        <p:nvSpPr>
-          <p:cNvPr id="16" name="Text 14"/>
-          <p:cNvSpPr txBox="1"/>
-          <p:nvPr/>
-        </p:nvSpPr>
-        <p:spPr>
-          <a:xfrm>
-            <a:off x="2651760" y="2423160"/>
-            <a:ext cx="4160520" cy="457200"/>
-          </a:xfrm>
-          <a:prstGeom prst="rect">
-            <a:avLst/>
-          </a:prstGeom>
-          <a:noFill/>
-          <a:ln/>
-        </p:spPr>
-        <p:txBody>
-          <a:bodyPr wrap="square" lIns="0" tIns="0" rIns="0" bIns="0" rtlCol="0" anchor="ctr"/>
-          <a:lstStyle/>
-          <a:p>
-            <a:pPr indent="0" marL="0">
-              <a:buNone/>
-            </a:pPr>
-            <a:r>
-              <a:rPr lang="en-US" sz="1050" dirty="0">
-                <a:solidFill>
-                  <a:srgbClr val="5B6470"/>
-                </a:solidFill>
-                <a:latin typeface="Calibri" pitchFamily="34" charset="0"/>
-                <a:ea typeface="Calibri" pitchFamily="34" charset="-122"/>
-                <a:cs typeface="Calibri" pitchFamily="34" charset="-120"/>
-              </a:rPr>
-              <a:t>Se alinea con las expectativas del mercado para todo el equipo</a:t>
-            </a:r>
-            <a:endParaRPr lang="en-US" sz="1050" dirty="0"/>
-          </a:p>
-        </p:txBody>
-      </p:sp>
-      <p:sp>
-        <p:nvSpPr>
-          <p:cNvPr id="17" name="Text 15"/>
-          <p:cNvSpPr txBox="1"/>
-          <p:nvPr/>
-        </p:nvSpPr>
-        <p:spPr>
-          <a:xfrm>
-            <a:off x="7178040" y="2423160"/>
-            <a:ext cx="4160520" cy="457200"/>
-          </a:xfrm>
-          <a:prstGeom prst="rect">
-            <a:avLst/>
-          </a:prstGeom>
-          <a:noFill/>
-          <a:ln/>
-        </p:spPr>
-        <p:txBody>
-          <a:bodyPr wrap="square" lIns="0" tIns="0" rIns="0" bIns="0" rtlCol="0" anchor="ctr"/>
-          <a:lstStyle/>
-          <a:p>
-            <a:pPr indent="0" marL="0">
-              <a:buNone/>
-            </a:pPr>
-            <a:r>
-              <a:rPr lang="en-US" sz="1050" dirty="0">
-                <a:solidFill>
-                  <a:srgbClr val="5B6470"/>
-                </a:solidFill>
-                <a:latin typeface="Calibri" pitchFamily="34" charset="0"/>
-                <a:ea typeface="Calibri" pitchFamily="34" charset="-122"/>
-                <a:cs typeface="Calibri" pitchFamily="34" charset="-120"/>
-              </a:rPr>
-              <a:t>Se alinea para todo el equipo, con mayor reconocimiento en los dos cargos que asumen los bloques críticos</a:t>
-            </a:r>
-            <a:endParaRPr lang="en-US" sz="1050" dirty="0"/>
-          </a:p>
-        </p:txBody>
-      </p:sp>
-      <p:sp>
-        <p:nvSpPr>
-          <p:cNvPr id="18" name="Shape 16"/>
+          <p:cNvPr id="15" name="Shape 13"/>
           <p:cNvSpPr/>
           <p:nvPr/>
         </p:nvSpPr>
         <p:spPr>
           <a:xfrm>
-            <a:off x="548640" y="2880360"/>
-            <a:ext cx="11091672" cy="457200"/>
+            <a:off x="7086600" y="1965960"/>
+            <a:ext cx="4553712" cy="457200"/>
           </a:xfrm>
           <a:prstGeom prst="rect">
             <a:avLst/>
@@ -2933,13 +2792,130 @@
       </p:sp>
       <p:sp>
         <p:nvSpPr>
+          <p:cNvPr id="16" name="Text 14"/>
+          <p:cNvSpPr txBox="1"/>
+          <p:nvPr/>
+        </p:nvSpPr>
+        <p:spPr>
+          <a:xfrm>
+            <a:off x="658368" y="1965960"/>
+            <a:ext cx="1810512" cy="457200"/>
+          </a:xfrm>
+          <a:prstGeom prst="rect">
+            <a:avLst/>
+          </a:prstGeom>
+          <a:noFill/>
+          <a:ln/>
+        </p:spPr>
+        <p:txBody>
+          <a:bodyPr wrap="square" lIns="0" tIns="0" rIns="0" bIns="0" rtlCol="0" anchor="ctr"/>
+          <a:lstStyle/>
+          <a:p>
+            <a:pPr indent="0" marL="0">
+              <a:buNone/>
+            </a:pPr>
+            <a:r>
+              <a:rPr lang="en-US" sz="1050" b="1" dirty="0">
+                <a:solidFill>
+                  <a:srgbClr val="2B2F36"/>
+                </a:solidFill>
+                <a:latin typeface="Calibri" pitchFamily="34" charset="0"/>
+                <a:ea typeface="Calibri" pitchFamily="34" charset="-122"/>
+                <a:cs typeface="Calibri" pitchFamily="34" charset="-120"/>
+              </a:rPr>
+              <a:t>Qué reconoce</a:t>
+            </a:r>
+            <a:endParaRPr lang="en-US" sz="1050" dirty="0"/>
+          </a:p>
+        </p:txBody>
+      </p:sp>
+      <p:sp>
+        <p:nvSpPr>
+          <p:cNvPr id="17" name="Text 15"/>
+          <p:cNvSpPr txBox="1"/>
+          <p:nvPr/>
+        </p:nvSpPr>
+        <p:spPr>
+          <a:xfrm>
+            <a:off x="2651760" y="1965960"/>
+            <a:ext cx="4160520" cy="457200"/>
+          </a:xfrm>
+          <a:prstGeom prst="rect">
+            <a:avLst/>
+          </a:prstGeom>
+          <a:noFill/>
+          <a:ln/>
+        </p:spPr>
+        <p:txBody>
+          <a:bodyPr wrap="square" lIns="0" tIns="0" rIns="0" bIns="0" rtlCol="0" anchor="ctr"/>
+          <a:lstStyle/>
+          <a:p>
+            <a:pPr indent="0" marL="0">
+              <a:buNone/>
+            </a:pPr>
+            <a:r>
+              <a:rPr lang="en-US" sz="1050" dirty="0">
+                <a:solidFill>
+                  <a:srgbClr val="2B2F36"/>
+                </a:solidFill>
+                <a:latin typeface="Calibri" pitchFamily="34" charset="0"/>
+                <a:ea typeface="Calibri" pitchFamily="34" charset="-122"/>
+                <a:cs typeface="Calibri" pitchFamily="34" charset="-120"/>
+              </a:rPr>
+              <a:t>Las competencias adquiridas y, además, la diferencia de complejidad entre reportes</a:t>
+            </a:r>
+            <a:endParaRPr lang="en-US" sz="1050" dirty="0"/>
+          </a:p>
+        </p:txBody>
+      </p:sp>
+      <p:sp>
+        <p:nvSpPr>
+          <p:cNvPr id="18" name="Text 16"/>
+          <p:cNvSpPr txBox="1"/>
+          <p:nvPr/>
+        </p:nvSpPr>
+        <p:spPr>
+          <a:xfrm>
+            <a:off x="7178040" y="1965960"/>
+            <a:ext cx="4160520" cy="457200"/>
+          </a:xfrm>
+          <a:prstGeom prst="rect">
+            <a:avLst/>
+          </a:prstGeom>
+          <a:noFill/>
+          <a:ln/>
+        </p:spPr>
+        <p:txBody>
+          <a:bodyPr wrap="square" lIns="0" tIns="0" rIns="0" bIns="0" rtlCol="0" anchor="ctr"/>
+          <a:lstStyle/>
+          <a:p>
+            <a:pPr indent="0" marL="0">
+              <a:buNone/>
+            </a:pPr>
+            <a:r>
+              <a:rPr lang="en-US" sz="1050" dirty="0">
+                <a:solidFill>
+                  <a:srgbClr val="5B6470"/>
+                </a:solidFill>
+                <a:latin typeface="Calibri" pitchFamily="34" charset="0"/>
+                <a:ea typeface="Calibri" pitchFamily="34" charset="-122"/>
+                <a:cs typeface="Calibri" pitchFamily="34" charset="-120"/>
+              </a:rPr>
+              <a:t>Las competencias adquiridas con el cambio de tareas, en los seis cargos</a:t>
+            </a:r>
+            <a:endParaRPr lang="en-US" sz="1050" dirty="0"/>
+          </a:p>
+        </p:txBody>
+      </p:sp>
+      <p:sp>
+        <p:nvSpPr>
           <p:cNvPr id="19" name="Text 17"/>
           <p:cNvSpPr txBox="1"/>
           <p:nvPr/>
         </p:nvSpPr>
         <p:spPr>
           <a:xfrm>
-            <a:off x="658368" y="2880360"/>
+            <a:off x="658368" y="2423160"/>
             <a:ext cx="1810512" cy="457200"/>
           </a:xfrm>
           <a:prstGeom prst="rect">
@@ -2964,7 +2940,7 @@
                 <a:ea typeface="Calibri" pitchFamily="34" charset="-122"/>
                 <a:cs typeface="Calibri" pitchFamily="34" charset="-120"/>
               </a:rPr>
-              <a:t>Estructura</a:t>
+              <a:t>Remuneración</a:t>
             </a:r>
             <a:endParaRPr lang="en-US" sz="1050" dirty="0"/>
           </a:p>
@@ -2978,7 +2954,7 @@
         </p:nvSpPr>
         <p:spPr>
           <a:xfrm>
-            <a:off x="2651760" y="2880360"/>
+            <a:off x="2651760" y="2423160"/>
             <a:ext cx="4160520" cy="457200"/>
           </a:xfrm>
           <a:prstGeom prst="rect">
@@ -2997,13 +2973,52 @@
             <a:r>
               <a:rPr lang="en-US" sz="1050" dirty="0">
                 <a:solidFill>
+                  <a:srgbClr val="2B2F36"/>
+                </a:solidFill>
+                <a:latin typeface="Calibri" pitchFamily="34" charset="0"/>
+                <a:ea typeface="Calibri" pitchFamily="34" charset="-122"/>
+                <a:cs typeface="Calibri" pitchFamily="34" charset="-120"/>
+              </a:rPr>
+              <a:t>Se alinea para todo el equipo, con mayor reconocimiento en los dos cargos que asumen los bloques críticos</a:t>
+            </a:r>
+            <a:endParaRPr lang="en-US" sz="1050" dirty="0"/>
+          </a:p>
+        </p:txBody>
+      </p:sp>
+      <p:sp>
+        <p:nvSpPr>
+          <p:cNvPr id="21" name="Text 19"/>
+          <p:cNvSpPr txBox="1"/>
+          <p:nvPr/>
+        </p:nvSpPr>
+        <p:spPr>
+          <a:xfrm>
+            <a:off x="7178040" y="2423160"/>
+            <a:ext cx="4160520" cy="457200"/>
+          </a:xfrm>
+          <a:prstGeom prst="rect">
+            <a:avLst/>
+          </a:prstGeom>
+          <a:noFill/>
+          <a:ln/>
+        </p:spPr>
+        <p:txBody>
+          <a:bodyPr wrap="square" lIns="0" tIns="0" rIns="0" bIns="0" rtlCol="0" anchor="ctr"/>
+          <a:lstStyle/>
+          <a:p>
+            <a:pPr indent="0" marL="0">
+              <a:buNone/>
+            </a:pPr>
+            <a:r>
+              <a:rPr lang="en-US" sz="1050" dirty="0">
+                <a:solidFill>
                   <a:srgbClr val="5B6470"/>
                 </a:solidFill>
                 <a:latin typeface="Calibri" pitchFamily="34" charset="0"/>
                 <a:ea typeface="Calibri" pitchFamily="34" charset="-122"/>
                 <a:cs typeface="Calibri" pitchFamily="34" charset="-120"/>
               </a:rPr>
-              <a:t>Plana: seis especialistas con el mismo grado, un nivel más</a:t>
+              <a:t>Se alinea con las expectativas del mercado para todo el equipo</a:t>
             </a:r>
             <a:endParaRPr lang="en-US" sz="1050" dirty="0"/>
           </a:p>
@@ -3011,170 +3026,14 @@
       </p:sp>
       <p:sp>
         <p:nvSpPr>
-          <p:cNvPr id="21" name="Text 19"/>
-          <p:cNvSpPr txBox="1"/>
-          <p:nvPr/>
-        </p:nvSpPr>
-        <p:spPr>
-          <a:xfrm>
-            <a:off x="7178040" y="2880360"/>
-            <a:ext cx="4160520" cy="457200"/>
-          </a:xfrm>
-          <a:prstGeom prst="rect">
-            <a:avLst/>
-          </a:prstGeom>
-          <a:noFill/>
-          <a:ln/>
-        </p:spPr>
-        <p:txBody>
-          <a:bodyPr wrap="square" lIns="0" tIns="0" rIns="0" bIns="0" rtlCol="0" anchor="ctr"/>
-          <a:lstStyle/>
-          <a:p>
-            <a:pPr indent="0" marL="0">
-              <a:buNone/>
-            </a:pPr>
-            <a:r>
-              <a:rPr lang="en-US" sz="1050" dirty="0">
-                <a:solidFill>
-                  <a:srgbClr val="5B6470"/>
-                </a:solidFill>
-                <a:latin typeface="Calibri" pitchFamily="34" charset="0"/>
-                <a:ea typeface="Calibri" pitchFamily="34" charset="-122"/>
-                <a:cs typeface="Calibri" pitchFamily="34" charset="-120"/>
-              </a:rPr>
-              <a:t>Diferenciada: dos seniors dos niveles más y cuatro plenos un nivel más</a:t>
-            </a:r>
-            <a:endParaRPr lang="en-US" sz="1050" dirty="0"/>
-          </a:p>
-        </p:txBody>
-      </p:sp>
-      <p:sp>
-        <p:nvSpPr>
-          <p:cNvPr id="22" name="Text 20"/>
-          <p:cNvSpPr txBox="1"/>
-          <p:nvPr/>
-        </p:nvSpPr>
-        <p:spPr>
-          <a:xfrm>
-            <a:off x="658368" y="3337560"/>
-            <a:ext cx="1810512" cy="457200"/>
-          </a:xfrm>
-          <a:prstGeom prst="rect">
-            <a:avLst/>
-          </a:prstGeom>
-          <a:noFill/>
-          <a:ln/>
-        </p:spPr>
-        <p:txBody>
-          <a:bodyPr wrap="square" lIns="0" tIns="0" rIns="0" bIns="0" rtlCol="0" anchor="ctr"/>
-          <a:lstStyle/>
-          <a:p>
-            <a:pPr indent="0" marL="0">
-              <a:buNone/>
-            </a:pPr>
-            <a:r>
-              <a:rPr lang="en-US" sz="1050" b="1" dirty="0">
-                <a:solidFill>
-                  <a:srgbClr val="2B2F36"/>
-                </a:solidFill>
-                <a:latin typeface="Calibri" pitchFamily="34" charset="0"/>
-                <a:ea typeface="Calibri" pitchFamily="34" charset="-122"/>
-                <a:cs typeface="Calibri" pitchFamily="34" charset="-120"/>
-              </a:rPr>
-              <a:t>Validación y firma</a:t>
-            </a:r>
-            <a:endParaRPr lang="en-US" sz="1050" dirty="0"/>
-          </a:p>
-        </p:txBody>
-      </p:sp>
-      <p:sp>
-        <p:nvSpPr>
-          <p:cNvPr id="23" name="Text 21"/>
-          <p:cNvSpPr txBox="1"/>
-          <p:nvPr/>
-        </p:nvSpPr>
-        <p:spPr>
-          <a:xfrm>
-            <a:off x="2651760" y="3337560"/>
-            <a:ext cx="4160520" cy="457200"/>
-          </a:xfrm>
-          <a:prstGeom prst="rect">
-            <a:avLst/>
-          </a:prstGeom>
-          <a:noFill/>
-          <a:ln/>
-        </p:spPr>
-        <p:txBody>
-          <a:bodyPr wrap="square" lIns="0" tIns="0" rIns="0" bIns="0" rtlCol="0" anchor="ctr"/>
-          <a:lstStyle/>
-          <a:p>
-            <a:pPr indent="0" marL="0">
-              <a:buNone/>
-            </a:pPr>
-            <a:r>
-              <a:rPr lang="en-US" sz="1050" dirty="0">
-                <a:solidFill>
-                  <a:srgbClr val="5B6470"/>
-                </a:solidFill>
-                <a:latin typeface="Calibri" pitchFamily="34" charset="0"/>
-                <a:ea typeface="Calibri" pitchFamily="34" charset="-122"/>
-                <a:cs typeface="Calibri" pitchFamily="34" charset="-120"/>
-              </a:rPr>
-              <a:t>Se mantienen en el Jefe Normativo</a:t>
-            </a:r>
-            <a:endParaRPr lang="en-US" sz="1050" dirty="0"/>
-          </a:p>
-        </p:txBody>
-      </p:sp>
-      <p:sp>
-        <p:nvSpPr>
-          <p:cNvPr id="24" name="Text 22"/>
-          <p:cNvSpPr txBox="1"/>
-          <p:nvPr/>
-        </p:nvSpPr>
-        <p:spPr>
-          <a:xfrm>
-            <a:off x="7178040" y="3337560"/>
-            <a:ext cx="4160520" cy="457200"/>
-          </a:xfrm>
-          <a:prstGeom prst="rect">
-            <a:avLst/>
-          </a:prstGeom>
-          <a:noFill/>
-          <a:ln/>
-        </p:spPr>
-        <p:txBody>
-          <a:bodyPr wrap="square" lIns="0" tIns="0" rIns="0" bIns="0" rtlCol="0" anchor="ctr"/>
-          <a:lstStyle/>
-          <a:p>
-            <a:pPr indent="0" marL="0">
-              <a:buNone/>
-            </a:pPr>
-            <a:r>
-              <a:rPr lang="en-US" sz="1050" dirty="0">
-                <a:solidFill>
-                  <a:srgbClr val="5B6470"/>
-                </a:solidFill>
-                <a:latin typeface="Calibri" pitchFamily="34" charset="0"/>
-                <a:ea typeface="Calibri" pitchFamily="34" charset="-122"/>
-                <a:cs typeface="Calibri" pitchFamily="34" charset="-120"/>
-              </a:rPr>
-              <a:t>Los seniors validan sus bloques; el Jefe firma</a:t>
-            </a:r>
-            <a:endParaRPr lang="en-US" sz="1050" dirty="0"/>
-          </a:p>
-        </p:txBody>
-      </p:sp>
-      <p:sp>
-        <p:nvSpPr>
-          <p:cNvPr id="25" name="Shape 23"/>
+          <p:cNvPr id="22" name="Shape 20"/>
           <p:cNvSpPr/>
           <p:nvPr/>
         </p:nvSpPr>
         <p:spPr>
           <a:xfrm>
-            <a:off x="548640" y="3794760"/>
-            <a:ext cx="11091672" cy="457200"/>
+            <a:off x="548640" y="2880360"/>
+            <a:ext cx="1965960" cy="457200"/>
           </a:xfrm>
           <a:prstGeom prst="rect">
             <a:avLst/>
@@ -3192,248 +3051,14 @@
       </p:sp>
       <p:sp>
         <p:nvSpPr>
-          <p:cNvPr id="26" name="Text 24"/>
-          <p:cNvSpPr txBox="1"/>
-          <p:nvPr/>
-        </p:nvSpPr>
-        <p:spPr>
-          <a:xfrm>
-            <a:off x="658368" y="3794760"/>
-            <a:ext cx="1810512" cy="457200"/>
-          </a:xfrm>
-          <a:prstGeom prst="rect">
-            <a:avLst/>
-          </a:prstGeom>
-          <a:noFill/>
-          <a:ln/>
-        </p:spPr>
-        <p:txBody>
-          <a:bodyPr wrap="square" lIns="0" tIns="0" rIns="0" bIns="0" rtlCol="0" anchor="ctr"/>
-          <a:lstStyle/>
-          <a:p>
-            <a:pPr indent="0" marL="0">
-              <a:buNone/>
-            </a:pPr>
-            <a:r>
-              <a:rPr lang="en-US" sz="1050" b="1" dirty="0">
-                <a:solidFill>
-                  <a:srgbClr val="2B2F36"/>
-                </a:solidFill>
-                <a:latin typeface="Calibri" pitchFamily="34" charset="0"/>
-                <a:ea typeface="Calibri" pitchFamily="34" charset="-122"/>
-                <a:cs typeface="Calibri" pitchFamily="34" charset="-120"/>
-              </a:rPr>
-              <a:t>Respaldo</a:t>
-            </a:r>
-            <a:endParaRPr lang="en-US" sz="1050" dirty="0"/>
-          </a:p>
-        </p:txBody>
-      </p:sp>
-      <p:sp>
-        <p:nvSpPr>
-          <p:cNvPr id="27" name="Text 25"/>
-          <p:cNvSpPr txBox="1"/>
-          <p:nvPr/>
-        </p:nvSpPr>
-        <p:spPr>
-          <a:xfrm>
-            <a:off x="2651760" y="3794760"/>
-            <a:ext cx="4160520" cy="457200"/>
-          </a:xfrm>
-          <a:prstGeom prst="rect">
-            <a:avLst/>
-          </a:prstGeom>
-          <a:noFill/>
-          <a:ln/>
-        </p:spPr>
-        <p:txBody>
-          <a:bodyPr wrap="square" lIns="0" tIns="0" rIns="0" bIns="0" rtlCol="0" anchor="ctr"/>
-          <a:lstStyle/>
-          <a:p>
-            <a:pPr indent="0" marL="0">
-              <a:buNone/>
-            </a:pPr>
-            <a:r>
-              <a:rPr lang="en-US" sz="1050" dirty="0">
-                <a:solidFill>
-                  <a:srgbClr val="5B6470"/>
-                </a:solidFill>
-                <a:latin typeface="Calibri" pitchFamily="34" charset="0"/>
-                <a:ea typeface="Calibri" pitchFamily="34" charset="-122"/>
-                <a:cs typeface="Calibri" pitchFamily="34" charset="-120"/>
-              </a:rPr>
-              <a:t>Mutuo entre pares: sin dependencia de una sola persona</a:t>
-            </a:r>
-            <a:endParaRPr lang="en-US" sz="1050" dirty="0"/>
-          </a:p>
-        </p:txBody>
-      </p:sp>
-      <p:sp>
-        <p:nvSpPr>
-          <p:cNvPr id="28" name="Text 26"/>
-          <p:cNvSpPr txBox="1"/>
-          <p:nvPr/>
-        </p:nvSpPr>
-        <p:spPr>
-          <a:xfrm>
-            <a:off x="7178040" y="3794760"/>
-            <a:ext cx="4160520" cy="457200"/>
-          </a:xfrm>
-          <a:prstGeom prst="rect">
-            <a:avLst/>
-          </a:prstGeom>
-          <a:noFill/>
-          <a:ln/>
-        </p:spPr>
-        <p:txBody>
-          <a:bodyPr wrap="square" lIns="0" tIns="0" rIns="0" bIns="0" rtlCol="0" anchor="ctr"/>
-          <a:lstStyle/>
-          <a:p>
-            <a:pPr indent="0" marL="0">
-              <a:buNone/>
-            </a:pPr>
-            <a:r>
-              <a:rPr lang="en-US" sz="1050" dirty="0">
-                <a:solidFill>
-                  <a:srgbClr val="5B6470"/>
-                </a:solidFill>
-                <a:latin typeface="Calibri" pitchFamily="34" charset="0"/>
-                <a:ea typeface="Calibri" pitchFamily="34" charset="-122"/>
-                <a:cs typeface="Calibri" pitchFamily="34" charset="-120"/>
-              </a:rPr>
-              <a:t>Seniors respaldan los bloques críticos; plenos se respaldan entre sí</a:t>
-            </a:r>
-            <a:endParaRPr lang="en-US" sz="1050" dirty="0"/>
-          </a:p>
-        </p:txBody>
-      </p:sp>
-      <p:sp>
-        <p:nvSpPr>
-          <p:cNvPr id="29" name="Text 27"/>
-          <p:cNvSpPr txBox="1"/>
-          <p:nvPr/>
-        </p:nvSpPr>
-        <p:spPr>
-          <a:xfrm>
-            <a:off x="658368" y="4251960"/>
-            <a:ext cx="1810512" cy="457200"/>
-          </a:xfrm>
-          <a:prstGeom prst="rect">
-            <a:avLst/>
-          </a:prstGeom>
-          <a:noFill/>
-          <a:ln/>
-        </p:spPr>
-        <p:txBody>
-          <a:bodyPr wrap="square" lIns="0" tIns="0" rIns="0" bIns="0" rtlCol="0" anchor="ctr"/>
-          <a:lstStyle/>
-          <a:p>
-            <a:pPr indent="0" marL="0">
-              <a:buNone/>
-            </a:pPr>
-            <a:r>
-              <a:rPr lang="en-US" sz="1050" b="1" dirty="0">
-                <a:solidFill>
-                  <a:srgbClr val="2B2F36"/>
-                </a:solidFill>
-                <a:latin typeface="Calibri" pitchFamily="34" charset="0"/>
-                <a:ea typeface="Calibri" pitchFamily="34" charset="-122"/>
-                <a:cs typeface="Calibri" pitchFamily="34" charset="-120"/>
-              </a:rPr>
-              <a:t>Equidad interna</a:t>
-            </a:r>
-            <a:endParaRPr lang="en-US" sz="1050" dirty="0"/>
-          </a:p>
-        </p:txBody>
-      </p:sp>
-      <p:sp>
-        <p:nvSpPr>
-          <p:cNvPr id="30" name="Text 28"/>
-          <p:cNvSpPr txBox="1"/>
-          <p:nvPr/>
-        </p:nvSpPr>
-        <p:spPr>
-          <a:xfrm>
-            <a:off x="2651760" y="4251960"/>
-            <a:ext cx="4160520" cy="457200"/>
-          </a:xfrm>
-          <a:prstGeom prst="rect">
-            <a:avLst/>
-          </a:prstGeom>
-          <a:noFill/>
-          <a:ln/>
-        </p:spPr>
-        <p:txBody>
-          <a:bodyPr wrap="square" lIns="0" tIns="0" rIns="0" bIns="0" rtlCol="0" anchor="ctr"/>
-          <a:lstStyle/>
-          <a:p>
-            <a:pPr indent="0" marL="0">
-              <a:buNone/>
-            </a:pPr>
-            <a:r>
-              <a:rPr lang="en-US" sz="1050" dirty="0">
-                <a:solidFill>
-                  <a:srgbClr val="5B6470"/>
-                </a:solidFill>
-                <a:latin typeface="Calibri" pitchFamily="34" charset="0"/>
-                <a:ea typeface="Calibri" pitchFamily="34" charset="-122"/>
-                <a:cs typeface="Calibri" pitchFamily="34" charset="-120"/>
-              </a:rPr>
-              <a:t>Igual para todos, sin criterios de selección</a:t>
-            </a:r>
-            <a:endParaRPr lang="en-US" sz="1050" dirty="0"/>
-          </a:p>
-        </p:txBody>
-      </p:sp>
-      <p:sp>
-        <p:nvSpPr>
-          <p:cNvPr id="31" name="Text 29"/>
-          <p:cNvSpPr txBox="1"/>
-          <p:nvPr/>
-        </p:nvSpPr>
-        <p:spPr>
-          <a:xfrm>
-            <a:off x="7178040" y="4251960"/>
-            <a:ext cx="4160520" cy="457200"/>
-          </a:xfrm>
-          <a:prstGeom prst="rect">
-            <a:avLst/>
-          </a:prstGeom>
-          <a:noFill/>
-          <a:ln/>
-        </p:spPr>
-        <p:txBody>
-          <a:bodyPr wrap="square" lIns="0" tIns="0" rIns="0" bIns="0" rtlCol="0" anchor="ctr"/>
-          <a:lstStyle/>
-          <a:p>
-            <a:pPr indent="0" marL="0">
-              <a:buNone/>
-            </a:pPr>
-            <a:r>
-              <a:rPr lang="en-US" sz="1050" dirty="0">
-                <a:solidFill>
-                  <a:srgbClr val="5B6470"/>
-                </a:solidFill>
-                <a:latin typeface="Calibri" pitchFamily="34" charset="0"/>
-                <a:ea typeface="Calibri" pitchFamily="34" charset="-122"/>
-                <a:cs typeface="Calibri" pitchFamily="34" charset="-120"/>
-              </a:rPr>
-              <a:t>Requiere criterios de selección claros y comunicados</a:t>
-            </a:r>
-            <a:endParaRPr lang="en-US" sz="1050" dirty="0"/>
-          </a:p>
-        </p:txBody>
-      </p:sp>
-      <p:sp>
-        <p:nvSpPr>
-          <p:cNvPr id="32" name="Shape 30"/>
+          <p:cNvPr id="23" name="Shape 21"/>
           <p:cNvSpPr/>
           <p:nvPr/>
         </p:nvSpPr>
         <p:spPr>
           <a:xfrm>
-            <a:off x="548640" y="4709160"/>
-            <a:ext cx="11091672" cy="457200"/>
+            <a:off x="7086600" y="2880360"/>
+            <a:ext cx="4553712" cy="457200"/>
           </a:xfrm>
           <a:prstGeom prst="rect">
             <a:avLst/>
@@ -3451,7 +3076,575 @@
       </p:sp>
       <p:sp>
         <p:nvSpPr>
+          <p:cNvPr id="24" name="Text 22"/>
+          <p:cNvSpPr txBox="1"/>
+          <p:nvPr/>
+        </p:nvSpPr>
+        <p:spPr>
+          <a:xfrm>
+            <a:off x="658368" y="2880360"/>
+            <a:ext cx="1810512" cy="457200"/>
+          </a:xfrm>
+          <a:prstGeom prst="rect">
+            <a:avLst/>
+          </a:prstGeom>
+          <a:noFill/>
+          <a:ln/>
+        </p:spPr>
+        <p:txBody>
+          <a:bodyPr wrap="square" lIns="0" tIns="0" rIns="0" bIns="0" rtlCol="0" anchor="ctr"/>
+          <a:lstStyle/>
+          <a:p>
+            <a:pPr indent="0" marL="0">
+              <a:buNone/>
+            </a:pPr>
+            <a:r>
+              <a:rPr lang="en-US" sz="1050" b="1" dirty="0">
+                <a:solidFill>
+                  <a:srgbClr val="2B2F36"/>
+                </a:solidFill>
+                <a:latin typeface="Calibri" pitchFamily="34" charset="0"/>
+                <a:ea typeface="Calibri" pitchFamily="34" charset="-122"/>
+                <a:cs typeface="Calibri" pitchFamily="34" charset="-120"/>
+              </a:rPr>
+              <a:t>Estructura</a:t>
+            </a:r>
+            <a:endParaRPr lang="en-US" sz="1050" dirty="0"/>
+          </a:p>
+        </p:txBody>
+      </p:sp>
+      <p:sp>
+        <p:nvSpPr>
+          <p:cNvPr id="25" name="Text 23"/>
+          <p:cNvSpPr txBox="1"/>
+          <p:nvPr/>
+        </p:nvSpPr>
+        <p:spPr>
+          <a:xfrm>
+            <a:off x="2651760" y="2880360"/>
+            <a:ext cx="4160520" cy="457200"/>
+          </a:xfrm>
+          <a:prstGeom prst="rect">
+            <a:avLst/>
+          </a:prstGeom>
+          <a:noFill/>
+          <a:ln/>
+        </p:spPr>
+        <p:txBody>
+          <a:bodyPr wrap="square" lIns="0" tIns="0" rIns="0" bIns="0" rtlCol="0" anchor="ctr"/>
+          <a:lstStyle/>
+          <a:p>
+            <a:pPr indent="0" marL="0">
+              <a:buNone/>
+            </a:pPr>
+            <a:r>
+              <a:rPr lang="en-US" sz="1050" dirty="0">
+                <a:solidFill>
+                  <a:srgbClr val="2B2F36"/>
+                </a:solidFill>
+                <a:latin typeface="Calibri" pitchFamily="34" charset="0"/>
+                <a:ea typeface="Calibri" pitchFamily="34" charset="-122"/>
+                <a:cs typeface="Calibri" pitchFamily="34" charset="-120"/>
+              </a:rPr>
+              <a:t>Diferenciada: dos seniors dos niveles más y cuatro plenos un nivel más</a:t>
+            </a:r>
+            <a:endParaRPr lang="en-US" sz="1050" dirty="0"/>
+          </a:p>
+        </p:txBody>
+      </p:sp>
+      <p:sp>
+        <p:nvSpPr>
+          <p:cNvPr id="26" name="Text 24"/>
+          <p:cNvSpPr txBox="1"/>
+          <p:nvPr/>
+        </p:nvSpPr>
+        <p:spPr>
+          <a:xfrm>
+            <a:off x="7178040" y="2880360"/>
+            <a:ext cx="4160520" cy="457200"/>
+          </a:xfrm>
+          <a:prstGeom prst="rect">
+            <a:avLst/>
+          </a:prstGeom>
+          <a:noFill/>
+          <a:ln/>
+        </p:spPr>
+        <p:txBody>
+          <a:bodyPr wrap="square" lIns="0" tIns="0" rIns="0" bIns="0" rtlCol="0" anchor="ctr"/>
+          <a:lstStyle/>
+          <a:p>
+            <a:pPr indent="0" marL="0">
+              <a:buNone/>
+            </a:pPr>
+            <a:r>
+              <a:rPr lang="en-US" sz="1050" dirty="0">
+                <a:solidFill>
+                  <a:srgbClr val="5B6470"/>
+                </a:solidFill>
+                <a:latin typeface="Calibri" pitchFamily="34" charset="0"/>
+                <a:ea typeface="Calibri" pitchFamily="34" charset="-122"/>
+                <a:cs typeface="Calibri" pitchFamily="34" charset="-120"/>
+              </a:rPr>
+              <a:t>Plana: seis especialistas con el mismo grado, un nivel más</a:t>
+            </a:r>
+            <a:endParaRPr lang="en-US" sz="1050" dirty="0"/>
+          </a:p>
+        </p:txBody>
+      </p:sp>
+      <p:sp>
+        <p:nvSpPr>
+          <p:cNvPr id="27" name="Text 25"/>
+          <p:cNvSpPr txBox="1"/>
+          <p:nvPr/>
+        </p:nvSpPr>
+        <p:spPr>
+          <a:xfrm>
+            <a:off x="658368" y="3337560"/>
+            <a:ext cx="1810512" cy="457200"/>
+          </a:xfrm>
+          <a:prstGeom prst="rect">
+            <a:avLst/>
+          </a:prstGeom>
+          <a:noFill/>
+          <a:ln/>
+        </p:spPr>
+        <p:txBody>
+          <a:bodyPr wrap="square" lIns="0" tIns="0" rIns="0" bIns="0" rtlCol="0" anchor="ctr"/>
+          <a:lstStyle/>
+          <a:p>
+            <a:pPr indent="0" marL="0">
+              <a:buNone/>
+            </a:pPr>
+            <a:r>
+              <a:rPr lang="en-US" sz="1050" b="1" dirty="0">
+                <a:solidFill>
+                  <a:srgbClr val="2B2F36"/>
+                </a:solidFill>
+                <a:latin typeface="Calibri" pitchFamily="34" charset="0"/>
+                <a:ea typeface="Calibri" pitchFamily="34" charset="-122"/>
+                <a:cs typeface="Calibri" pitchFamily="34" charset="-120"/>
+              </a:rPr>
+              <a:t>Validación y firma</a:t>
+            </a:r>
+            <a:endParaRPr lang="en-US" sz="1050" dirty="0"/>
+          </a:p>
+        </p:txBody>
+      </p:sp>
+      <p:sp>
+        <p:nvSpPr>
+          <p:cNvPr id="28" name="Text 26"/>
+          <p:cNvSpPr txBox="1"/>
+          <p:nvPr/>
+        </p:nvSpPr>
+        <p:spPr>
+          <a:xfrm>
+            <a:off x="2651760" y="3337560"/>
+            <a:ext cx="4160520" cy="457200"/>
+          </a:xfrm>
+          <a:prstGeom prst="rect">
+            <a:avLst/>
+          </a:prstGeom>
+          <a:noFill/>
+          <a:ln/>
+        </p:spPr>
+        <p:txBody>
+          <a:bodyPr wrap="square" lIns="0" tIns="0" rIns="0" bIns="0" rtlCol="0" anchor="ctr"/>
+          <a:lstStyle/>
+          <a:p>
+            <a:pPr indent="0" marL="0">
+              <a:buNone/>
+            </a:pPr>
+            <a:r>
+              <a:rPr lang="en-US" sz="1050" dirty="0">
+                <a:solidFill>
+                  <a:srgbClr val="2B2F36"/>
+                </a:solidFill>
+                <a:latin typeface="Calibri" pitchFamily="34" charset="0"/>
+                <a:ea typeface="Calibri" pitchFamily="34" charset="-122"/>
+                <a:cs typeface="Calibri" pitchFamily="34" charset="-120"/>
+              </a:rPr>
+              <a:t>Los seniors validan sus bloques; el Jefe firma</a:t>
+            </a:r>
+            <a:endParaRPr lang="en-US" sz="1050" dirty="0"/>
+          </a:p>
+        </p:txBody>
+      </p:sp>
+      <p:sp>
+        <p:nvSpPr>
+          <p:cNvPr id="29" name="Text 27"/>
+          <p:cNvSpPr txBox="1"/>
+          <p:nvPr/>
+        </p:nvSpPr>
+        <p:spPr>
+          <a:xfrm>
+            <a:off x="7178040" y="3337560"/>
+            <a:ext cx="4160520" cy="457200"/>
+          </a:xfrm>
+          <a:prstGeom prst="rect">
+            <a:avLst/>
+          </a:prstGeom>
+          <a:noFill/>
+          <a:ln/>
+        </p:spPr>
+        <p:txBody>
+          <a:bodyPr wrap="square" lIns="0" tIns="0" rIns="0" bIns="0" rtlCol="0" anchor="ctr"/>
+          <a:lstStyle/>
+          <a:p>
+            <a:pPr indent="0" marL="0">
+              <a:buNone/>
+            </a:pPr>
+            <a:r>
+              <a:rPr lang="en-US" sz="1050" dirty="0">
+                <a:solidFill>
+                  <a:srgbClr val="5B6470"/>
+                </a:solidFill>
+                <a:latin typeface="Calibri" pitchFamily="34" charset="0"/>
+                <a:ea typeface="Calibri" pitchFamily="34" charset="-122"/>
+                <a:cs typeface="Calibri" pitchFamily="34" charset="-120"/>
+              </a:rPr>
+              <a:t>Se mantienen en el Jefe Normativo</a:t>
+            </a:r>
+            <a:endParaRPr lang="en-US" sz="1050" dirty="0"/>
+          </a:p>
+        </p:txBody>
+      </p:sp>
+      <p:sp>
+        <p:nvSpPr>
+          <p:cNvPr id="30" name="Shape 28"/>
+          <p:cNvSpPr/>
+          <p:nvPr/>
+        </p:nvSpPr>
+        <p:spPr>
+          <a:xfrm>
+            <a:off x="548640" y="3794760"/>
+            <a:ext cx="1965960" cy="457200"/>
+          </a:xfrm>
+          <a:prstGeom prst="rect">
+            <a:avLst/>
+          </a:prstGeom>
+          <a:solidFill>
+            <a:srgbClr val="F6F7F9"/>
+          </a:solidFill>
+          <a:ln w="12700">
+            <a:solidFill>
+              <a:srgbClr val="F6F7F9"/>
+            </a:solidFill>
+            <a:prstDash val="solid"/>
+          </a:ln>
+        </p:spPr>
+      </p:sp>
+      <p:sp>
+        <p:nvSpPr>
+          <p:cNvPr id="31" name="Shape 29"/>
+          <p:cNvSpPr/>
+          <p:nvPr/>
+        </p:nvSpPr>
+        <p:spPr>
+          <a:xfrm>
+            <a:off x="7086600" y="3794760"/>
+            <a:ext cx="4553712" cy="457200"/>
+          </a:xfrm>
+          <a:prstGeom prst="rect">
+            <a:avLst/>
+          </a:prstGeom>
+          <a:solidFill>
+            <a:srgbClr val="F6F7F9"/>
+          </a:solidFill>
+          <a:ln w="12700">
+            <a:solidFill>
+              <a:srgbClr val="F6F7F9"/>
+            </a:solidFill>
+            <a:prstDash val="solid"/>
+          </a:ln>
+        </p:spPr>
+      </p:sp>
+      <p:sp>
+        <p:nvSpPr>
+          <p:cNvPr id="32" name="Text 30"/>
+          <p:cNvSpPr txBox="1"/>
+          <p:nvPr/>
+        </p:nvSpPr>
+        <p:spPr>
+          <a:xfrm>
+            <a:off x="658368" y="3794760"/>
+            <a:ext cx="1810512" cy="457200"/>
+          </a:xfrm>
+          <a:prstGeom prst="rect">
+            <a:avLst/>
+          </a:prstGeom>
+          <a:noFill/>
+          <a:ln/>
+        </p:spPr>
+        <p:txBody>
+          <a:bodyPr wrap="square" lIns="0" tIns="0" rIns="0" bIns="0" rtlCol="0" anchor="ctr"/>
+          <a:lstStyle/>
+          <a:p>
+            <a:pPr indent="0" marL="0">
+              <a:buNone/>
+            </a:pPr>
+            <a:r>
+              <a:rPr lang="en-US" sz="1050" b="1" dirty="0">
+                <a:solidFill>
+                  <a:srgbClr val="2B2F36"/>
+                </a:solidFill>
+                <a:latin typeface="Calibri" pitchFamily="34" charset="0"/>
+                <a:ea typeface="Calibri" pitchFamily="34" charset="-122"/>
+                <a:cs typeface="Calibri" pitchFamily="34" charset="-120"/>
+              </a:rPr>
+              <a:t>Respaldo</a:t>
+            </a:r>
+            <a:endParaRPr lang="en-US" sz="1050" dirty="0"/>
+          </a:p>
+        </p:txBody>
+      </p:sp>
+      <p:sp>
+        <p:nvSpPr>
           <p:cNvPr id="33" name="Text 31"/>
+          <p:cNvSpPr txBox="1"/>
+          <p:nvPr/>
+        </p:nvSpPr>
+        <p:spPr>
+          <a:xfrm>
+            <a:off x="2651760" y="3794760"/>
+            <a:ext cx="4160520" cy="457200"/>
+          </a:xfrm>
+          <a:prstGeom prst="rect">
+            <a:avLst/>
+          </a:prstGeom>
+          <a:noFill/>
+          <a:ln/>
+        </p:spPr>
+        <p:txBody>
+          <a:bodyPr wrap="square" lIns="0" tIns="0" rIns="0" bIns="0" rtlCol="0" anchor="ctr"/>
+          <a:lstStyle/>
+          <a:p>
+            <a:pPr indent="0" marL="0">
+              <a:buNone/>
+            </a:pPr>
+            <a:r>
+              <a:rPr lang="en-US" sz="1050" dirty="0">
+                <a:solidFill>
+                  <a:srgbClr val="2B2F36"/>
+                </a:solidFill>
+                <a:latin typeface="Calibri" pitchFamily="34" charset="0"/>
+                <a:ea typeface="Calibri" pitchFamily="34" charset="-122"/>
+                <a:cs typeface="Calibri" pitchFamily="34" charset="-120"/>
+              </a:rPr>
+              <a:t>Seniors respaldan los bloques críticos; plenos se respaldan entre sí</a:t>
+            </a:r>
+            <a:endParaRPr lang="en-US" sz="1050" dirty="0"/>
+          </a:p>
+        </p:txBody>
+      </p:sp>
+      <p:sp>
+        <p:nvSpPr>
+          <p:cNvPr id="34" name="Text 32"/>
+          <p:cNvSpPr txBox="1"/>
+          <p:nvPr/>
+        </p:nvSpPr>
+        <p:spPr>
+          <a:xfrm>
+            <a:off x="7178040" y="3794760"/>
+            <a:ext cx="4160520" cy="457200"/>
+          </a:xfrm>
+          <a:prstGeom prst="rect">
+            <a:avLst/>
+          </a:prstGeom>
+          <a:noFill/>
+          <a:ln/>
+        </p:spPr>
+        <p:txBody>
+          <a:bodyPr wrap="square" lIns="0" tIns="0" rIns="0" bIns="0" rtlCol="0" anchor="ctr"/>
+          <a:lstStyle/>
+          <a:p>
+            <a:pPr indent="0" marL="0">
+              <a:buNone/>
+            </a:pPr>
+            <a:r>
+              <a:rPr lang="en-US" sz="1050" dirty="0">
+                <a:solidFill>
+                  <a:srgbClr val="5B6470"/>
+                </a:solidFill>
+                <a:latin typeface="Calibri" pitchFamily="34" charset="0"/>
+                <a:ea typeface="Calibri" pitchFamily="34" charset="-122"/>
+                <a:cs typeface="Calibri" pitchFamily="34" charset="-120"/>
+              </a:rPr>
+              <a:t>Mutuo entre pares: sin dependencia de una sola persona</a:t>
+            </a:r>
+            <a:endParaRPr lang="en-US" sz="1050" dirty="0"/>
+          </a:p>
+        </p:txBody>
+      </p:sp>
+      <p:sp>
+        <p:nvSpPr>
+          <p:cNvPr id="35" name="Text 33"/>
+          <p:cNvSpPr txBox="1"/>
+          <p:nvPr/>
+        </p:nvSpPr>
+        <p:spPr>
+          <a:xfrm>
+            <a:off x="658368" y="4251960"/>
+            <a:ext cx="1810512" cy="457200"/>
+          </a:xfrm>
+          <a:prstGeom prst="rect">
+            <a:avLst/>
+          </a:prstGeom>
+          <a:noFill/>
+          <a:ln/>
+        </p:spPr>
+        <p:txBody>
+          <a:bodyPr wrap="square" lIns="0" tIns="0" rIns="0" bIns="0" rtlCol="0" anchor="ctr"/>
+          <a:lstStyle/>
+          <a:p>
+            <a:pPr indent="0" marL="0">
+              <a:buNone/>
+            </a:pPr>
+            <a:r>
+              <a:rPr lang="en-US" sz="1050" b="1" dirty="0">
+                <a:solidFill>
+                  <a:srgbClr val="2B2F36"/>
+                </a:solidFill>
+                <a:latin typeface="Calibri" pitchFamily="34" charset="0"/>
+                <a:ea typeface="Calibri" pitchFamily="34" charset="-122"/>
+                <a:cs typeface="Calibri" pitchFamily="34" charset="-120"/>
+              </a:rPr>
+              <a:t>Equidad interna</a:t>
+            </a:r>
+            <a:endParaRPr lang="en-US" sz="1050" dirty="0"/>
+          </a:p>
+        </p:txBody>
+      </p:sp>
+      <p:sp>
+        <p:nvSpPr>
+          <p:cNvPr id="36" name="Text 34"/>
+          <p:cNvSpPr txBox="1"/>
+          <p:nvPr/>
+        </p:nvSpPr>
+        <p:spPr>
+          <a:xfrm>
+            <a:off x="2651760" y="4251960"/>
+            <a:ext cx="4160520" cy="457200"/>
+          </a:xfrm>
+          <a:prstGeom prst="rect">
+            <a:avLst/>
+          </a:prstGeom>
+          <a:noFill/>
+          <a:ln/>
+        </p:spPr>
+        <p:txBody>
+          <a:bodyPr wrap="square" lIns="0" tIns="0" rIns="0" bIns="0" rtlCol="0" anchor="ctr"/>
+          <a:lstStyle/>
+          <a:p>
+            <a:pPr indent="0" marL="0">
+              <a:buNone/>
+            </a:pPr>
+            <a:r>
+              <a:rPr lang="en-US" sz="1050" dirty="0">
+                <a:solidFill>
+                  <a:srgbClr val="2B2F36"/>
+                </a:solidFill>
+                <a:latin typeface="Calibri" pitchFamily="34" charset="0"/>
+                <a:ea typeface="Calibri" pitchFamily="34" charset="-122"/>
+                <a:cs typeface="Calibri" pitchFamily="34" charset="-120"/>
+              </a:rPr>
+              <a:t>Requiere criterios de selección claros y comunicados</a:t>
+            </a:r>
+            <a:endParaRPr lang="en-US" sz="1050" dirty="0"/>
+          </a:p>
+        </p:txBody>
+      </p:sp>
+      <p:sp>
+        <p:nvSpPr>
+          <p:cNvPr id="37" name="Text 35"/>
+          <p:cNvSpPr txBox="1"/>
+          <p:nvPr/>
+        </p:nvSpPr>
+        <p:spPr>
+          <a:xfrm>
+            <a:off x="7178040" y="4251960"/>
+            <a:ext cx="4160520" cy="457200"/>
+          </a:xfrm>
+          <a:prstGeom prst="rect">
+            <a:avLst/>
+          </a:prstGeom>
+          <a:noFill/>
+          <a:ln/>
+        </p:spPr>
+        <p:txBody>
+          <a:bodyPr wrap="square" lIns="0" tIns="0" rIns="0" bIns="0" rtlCol="0" anchor="ctr"/>
+          <a:lstStyle/>
+          <a:p>
+            <a:pPr indent="0" marL="0">
+              <a:buNone/>
+            </a:pPr>
+            <a:r>
+              <a:rPr lang="en-US" sz="1050" dirty="0">
+                <a:solidFill>
+                  <a:srgbClr val="5B6470"/>
+                </a:solidFill>
+                <a:latin typeface="Calibri" pitchFamily="34" charset="0"/>
+                <a:ea typeface="Calibri" pitchFamily="34" charset="-122"/>
+                <a:cs typeface="Calibri" pitchFamily="34" charset="-120"/>
+              </a:rPr>
+              <a:t>Igual para todos, sin criterios de selección</a:t>
+            </a:r>
+            <a:endParaRPr lang="en-US" sz="1050" dirty="0"/>
+          </a:p>
+        </p:txBody>
+      </p:sp>
+      <p:sp>
+        <p:nvSpPr>
+          <p:cNvPr id="38" name="Shape 36"/>
+          <p:cNvSpPr/>
+          <p:nvPr/>
+        </p:nvSpPr>
+        <p:spPr>
+          <a:xfrm>
+            <a:off x="548640" y="4709160"/>
+            <a:ext cx="1965960" cy="457200"/>
+          </a:xfrm>
+          <a:prstGeom prst="rect">
+            <a:avLst/>
+          </a:prstGeom>
+          <a:solidFill>
+            <a:srgbClr val="F6F7F9"/>
+          </a:solidFill>
+          <a:ln w="12700">
+            <a:solidFill>
+              <a:srgbClr val="F6F7F9"/>
+            </a:solidFill>
+            <a:prstDash val="solid"/>
+          </a:ln>
+        </p:spPr>
+      </p:sp>
+      <p:sp>
+        <p:nvSpPr>
+          <p:cNvPr id="39" name="Shape 37"/>
+          <p:cNvSpPr/>
+          <p:nvPr/>
+        </p:nvSpPr>
+        <p:spPr>
+          <a:xfrm>
+            <a:off x="7086600" y="4709160"/>
+            <a:ext cx="4553712" cy="457200"/>
+          </a:xfrm>
+          <a:prstGeom prst="rect">
+            <a:avLst/>
+          </a:prstGeom>
+          <a:solidFill>
+            <a:srgbClr val="F6F7F9"/>
+          </a:solidFill>
+          <a:ln w="12700">
+            <a:solidFill>
+              <a:srgbClr val="F6F7F9"/>
+            </a:solidFill>
+            <a:prstDash val="solid"/>
+          </a:ln>
+        </p:spPr>
+      </p:sp>
+      <p:sp>
+        <p:nvSpPr>
+          <p:cNvPr id="40" name="Text 38"/>
           <p:cNvSpPr txBox="1"/>
           <p:nvPr/>
         </p:nvSpPr>
@@ -3490,7 +3683,7 @@
       </p:sp>
       <p:sp>
         <p:nvSpPr>
-          <p:cNvPr id="34" name="Text 32"/>
+          <p:cNvPr id="41" name="Text 39"/>
           <p:cNvSpPr txBox="1"/>
           <p:nvPr/>
         </p:nvSpPr>
@@ -3515,13 +3708,13 @@
             <a:r>
               <a:rPr lang="en-US" sz="1050" dirty="0">
                 <a:solidFill>
-                  <a:srgbClr val="5B6470"/>
-                </a:solidFill>
-                <a:latin typeface="Calibri" pitchFamily="34" charset="0"/>
-                <a:ea typeface="Calibri" pitchFamily="34" charset="-122"/>
-                <a:cs typeface="Calibri" pitchFamily="34" charset="-120"/>
-              </a:rPr>
-              <a:t>Seis cargos, un grado cada uno</a:t>
+                  <a:srgbClr val="2B2F36"/>
+                </a:solidFill>
+                <a:latin typeface="Calibri" pitchFamily="34" charset="0"/>
+                <a:ea typeface="Calibri" pitchFamily="34" charset="-122"/>
+                <a:cs typeface="Calibri" pitchFamily="34" charset="-120"/>
+              </a:rPr>
+              <a:t>Seis cargos: dos suben dos grados y cuatro suben uno</a:t>
             </a:r>
             <a:endParaRPr lang="en-US" sz="1050" dirty="0"/>
           </a:p>
@@ -3529,7 +3722,7 @@
       </p:sp>
       <p:sp>
         <p:nvSpPr>
-          <p:cNvPr id="35" name="Text 33"/>
+          <p:cNvPr id="42" name="Text 40"/>
           <p:cNvSpPr txBox="1"/>
           <p:nvPr/>
         </p:nvSpPr>
@@ -3560,7 +3753,7 @@
                 <a:ea typeface="Calibri" pitchFamily="34" charset="-122"/>
                 <a:cs typeface="Calibri" pitchFamily="34" charset="-120"/>
               </a:rPr>
-              <a:t>Seis cargos: dos suben dos grados y cuatro suben uno</a:t>
+              <a:t>Seis cargos, un grado cada uno</a:t>
             </a:r>
             <a:endParaRPr lang="en-US" sz="1050" dirty="0"/>
           </a:p>
@@ -3568,7 +3761,7 @@
       </p:sp>
       <p:sp>
         <p:nvSpPr>
-          <p:cNvPr id="36" name="Text 34"/>
+          <p:cNvPr id="43" name="Text 41"/>
           <p:cNvSpPr txBox="1"/>
           <p:nvPr/>
         </p:nvSpPr>
@@ -3607,7 +3800,7 @@
       </p:sp>
       <p:sp>
         <p:nvSpPr>
-          <p:cNvPr id="37" name="Text 35"/>
+          <p:cNvPr id="44" name="Text 42"/>
           <p:cNvSpPr txBox="1"/>
           <p:nvPr/>
         </p:nvSpPr>
@@ -3632,13 +3825,13 @@
             <a:r>
               <a:rPr lang="en-US" sz="1050" dirty="0">
                 <a:solidFill>
-                  <a:srgbClr val="5B6470"/>
-                </a:solidFill>
-                <a:latin typeface="Calibri" pitchFamily="34" charset="0"/>
-                <a:ea typeface="Calibri" pitchFamily="34" charset="-122"/>
-                <a:cs typeface="Calibri" pitchFamily="34" charset="-120"/>
-              </a:rPr>
-              <a:t>No abre expectativa de crecimiento posterior</a:t>
+                  <a:srgbClr val="2B2F36"/>
+                </a:solidFill>
+                <a:latin typeface="Calibri" pitchFamily="34" charset="0"/>
+                <a:ea typeface="Calibri" pitchFamily="34" charset="-122"/>
+                <a:cs typeface="Calibri" pitchFamily="34" charset="-120"/>
+              </a:rPr>
+              <a:t>Abre el paso de pleno a senior</a:t>
             </a:r>
             <a:endParaRPr lang="en-US" sz="1050" dirty="0"/>
           </a:p>
@@ -3646,7 +3839,7 @@
       </p:sp>
       <p:sp>
         <p:nvSpPr>
-          <p:cNvPr id="38" name="Text 36"/>
+          <p:cNvPr id="45" name="Text 43"/>
           <p:cNvSpPr txBox="1"/>
           <p:nvPr/>
         </p:nvSpPr>
@@ -3677,7 +3870,7 @@
                 <a:ea typeface="Calibri" pitchFamily="34" charset="-122"/>
                 <a:cs typeface="Calibri" pitchFamily="34" charset="-120"/>
               </a:rPr>
-              <a:t>Abre el paso de pleno a senior</a:t>
+              <a:t>No abre expectativa de crecimiento posterior</a:t>
             </a:r>
             <a:endParaRPr lang="en-US" sz="1050" dirty="0"/>
           </a:p>
@@ -3685,7 +3878,7 @@
       </p:sp>
       <p:sp>
         <p:nvSpPr>
-          <p:cNvPr id="39" name="Text 37"/>
+          <p:cNvPr id="46" name="Text 44"/>
           <p:cNvSpPr txBox="1"/>
           <p:nvPr/>
         </p:nvSpPr>
@@ -3716,7 +3909,7 @@
                 <a:ea typeface="Calibri" pitchFamily="34" charset="-122"/>
                 <a:cs typeface="Calibri" pitchFamily="34" charset="-120"/>
               </a:rPr>
-              <a:t>Ambas parten del mismo diagnóstico y son compatibles con una implementación por etapas. El costo de cada una se presenta al comité con el resultado de la evaluación del perfil de los cargos.</a:t>
+              <a:t>Por qué recomendamos la alternativa 1: reconoce a todo el equipo y, además, alinea grado con complejidad, crea una cadena de validación y abre una ruta de desarrollo. Ambas se costean con el resultado de la evaluación del perfil de los cargos.</a:t>
             </a:r>
             <a:endParaRPr lang="en-US" sz="1050" dirty="0"/>
           </a:p>
@@ -23948,7 +24141,7 @@
                 <a:ea typeface="Calibri" pitchFamily="34" charset="-122"/>
                 <a:cs typeface="Calibri" pitchFamily="34" charset="-120"/>
               </a:rPr>
-              <a:t>De un equipo plano con un mismo grado a dos caminos para alinear la estructura con el trabajo</a:t>
+              <a:t>De un equipo plano con un mismo grado a roles alineados con el trabajo: dos caminos, uno recomendado</a:t>
             </a:r>
             <a:endParaRPr lang="en-US" sz="2600" dirty="0"/>
           </a:p>
@@ -24956,7 +25149,7 @@
           </a:solidFill>
           <a:ln w="9525">
             <a:solidFill>
-              <a:srgbClr val="E3E6EA"/>
+              <a:srgbClr val="6A9B6E"/>
             </a:solidFill>
             <a:prstDash val="solid"/>
           </a:ln>
@@ -24964,14 +25157,80 @@
       </p:sp>
       <p:sp>
         <p:nvSpPr>
-          <p:cNvPr id="39" name="Text 37"/>
+          <p:cNvPr id="39" name="Shape 37"/>
+          <p:cNvSpPr/>
+          <p:nvPr/>
+        </p:nvSpPr>
+        <p:spPr>
+          <a:xfrm>
+            <a:off x="6525768" y="1993392"/>
+            <a:ext cx="1143000" cy="237744"/>
+          </a:xfrm>
+          <a:prstGeom prst="roundRect">
+            <a:avLst>
+              <a:gd name="adj" fmla="val 50000"/>
+            </a:avLst>
+          </a:prstGeom>
+          <a:solidFill>
+            <a:srgbClr val="6A9B6E"/>
+          </a:solidFill>
+          <a:ln w="12700">
+            <a:solidFill>
+              <a:srgbClr val="6A9B6E"/>
+            </a:solidFill>
+            <a:prstDash val="solid"/>
+          </a:ln>
+        </p:spPr>
+      </p:sp>
+      <p:sp>
+        <p:nvSpPr>
+          <p:cNvPr id="40" name="Text 38"/>
+          <p:cNvSpPr txBox="1"/>
+          <p:nvPr/>
+        </p:nvSpPr>
+        <p:spPr>
+          <a:xfrm>
+            <a:off x="6525768" y="1993392"/>
+            <a:ext cx="1143000" cy="237744"/>
+          </a:xfrm>
+          <a:prstGeom prst="rect">
+            <a:avLst/>
+          </a:prstGeom>
+          <a:noFill/>
+          <a:ln/>
+        </p:spPr>
+        <p:txBody>
+          <a:bodyPr wrap="square" lIns="0" tIns="0" rIns="0" bIns="0" rtlCol="0" anchor="ctr"/>
+          <a:lstStyle/>
+          <a:p>
+            <a:pPr algn="ctr" indent="0" marL="0">
+              <a:buNone/>
+            </a:pPr>
+            <a:r>
+              <a:rPr lang="en-US" sz="750" b="1" spc="150" kern="0" dirty="0">
+                <a:solidFill>
+                  <a:srgbClr val="FFFFFF"/>
+                </a:solidFill>
+                <a:latin typeface="Calibri" pitchFamily="34" charset="0"/>
+                <a:ea typeface="Calibri" pitchFamily="34" charset="-122"/>
+                <a:cs typeface="Calibri" pitchFamily="34" charset="-120"/>
+              </a:rPr>
+              <a:t>RECOMENDADA</a:t>
+            </a:r>
+            <a:endParaRPr lang="en-US" sz="750" dirty="0"/>
+          </a:p>
+        </p:txBody>
+      </p:sp>
+      <p:sp>
+        <p:nvSpPr>
+          <p:cNvPr id="41" name="Text 39"/>
           <p:cNvSpPr txBox="1"/>
           <p:nvPr/>
         </p:nvSpPr>
         <p:spPr>
           <a:xfrm>
             <a:off x="4520184" y="1965960"/>
-            <a:ext cx="3148584" cy="256032"/>
+            <a:ext cx="1959864" cy="256032"/>
           </a:xfrm>
           <a:prstGeom prst="rect">
             <a:avLst/>
@@ -24989,13 +25248,13 @@
             <a:r>
               <a:rPr lang="en-US" sz="900" b="1" spc="200" kern="0" dirty="0">
                 <a:solidFill>
-                  <a:srgbClr val="4A6FA5"/>
-                </a:solidFill>
-                <a:latin typeface="Calibri" pitchFamily="34" charset="0"/>
-                <a:ea typeface="Calibri" pitchFamily="34" charset="-122"/>
-                <a:cs typeface="Calibri" pitchFamily="34" charset="-120"/>
-              </a:rPr>
-              <a:t>ALTERNATIVA 1 · UN GRADO MÁS PARA TODOS</a:t>
+                  <a:srgbClr val="4F7A53"/>
+                </a:solidFill>
+                <a:latin typeface="Calibri" pitchFamily="34" charset="0"/>
+                <a:ea typeface="Calibri" pitchFamily="34" charset="-122"/>
+                <a:cs typeface="Calibri" pitchFamily="34" charset="-120"/>
+              </a:rPr>
+              <a:t>ALTERNATIVA 1 · DOS CARGOS SENIOR</a:t>
             </a:r>
             <a:endParaRPr lang="en-US" sz="900" dirty="0"/>
           </a:p>
@@ -25003,7 +25262,7 @@
       </p:sp>
       <p:sp>
         <p:nvSpPr>
-          <p:cNvPr id="40" name="Shape 38"/>
+          <p:cNvPr id="42" name="Shape 40"/>
           <p:cNvSpPr/>
           <p:nvPr/>
         </p:nvSpPr>
@@ -25030,7 +25289,7 @@
       </p:sp>
       <p:sp>
         <p:nvSpPr>
-          <p:cNvPr id="41" name="Text 39"/>
+          <p:cNvPr id="43" name="Text 41"/>
           <p:cNvSpPr txBox="1"/>
           <p:nvPr/>
         </p:nvSpPr>
@@ -25069,7 +25328,7 @@
       </p:sp>
       <p:sp>
         <p:nvSpPr>
-          <p:cNvPr id="42" name="Shape 40"/>
+          <p:cNvPr id="44" name="Shape 42"/>
           <p:cNvSpPr/>
           <p:nvPr/>
         </p:nvSpPr>
@@ -25092,7 +25351,7 @@
       </p:sp>
       <p:sp>
         <p:nvSpPr>
-          <p:cNvPr id="43" name="Shape 41"/>
+          <p:cNvPr id="45" name="Shape 43"/>
           <p:cNvSpPr/>
           <p:nvPr/>
         </p:nvSpPr>
@@ -25119,7 +25378,7 @@
       </p:sp>
       <p:sp>
         <p:nvSpPr>
-          <p:cNvPr id="44" name="Text 42"/>
+          <p:cNvPr id="46" name="Text 44"/>
           <p:cNvSpPr txBox="1"/>
           <p:nvPr/>
         </p:nvSpPr>
@@ -25158,60 +25417,14 @@
       </p:sp>
       <p:sp>
         <p:nvSpPr>
-          <p:cNvPr id="45" name="Shape 43"/>
-          <p:cNvSpPr/>
-          <p:nvPr/>
-        </p:nvSpPr>
-        <p:spPr>
-          <a:xfrm>
-            <a:off x="6094476" y="3236976"/>
-            <a:ext cx="0" cy="256032"/>
-          </a:xfrm>
-          <a:prstGeom prst="line">
-            <a:avLst/>
-          </a:prstGeom>
-          <a:noFill/>
-          <a:ln w="15875">
-            <a:solidFill>
-              <a:srgbClr val="A9BEDC"/>
-            </a:solidFill>
-            <a:prstDash val="solid"/>
-          </a:ln>
-        </p:spPr>
-      </p:sp>
-      <p:sp>
-        <p:nvSpPr>
-          <p:cNvPr id="46" name="Shape 44"/>
-          <p:cNvSpPr/>
-          <p:nvPr/>
-        </p:nvSpPr>
-        <p:spPr>
-          <a:xfrm>
-            <a:off x="4677156" y="3493008"/>
-            <a:ext cx="2834640" cy="0"/>
-          </a:xfrm>
-          <a:prstGeom prst="line">
-            <a:avLst/>
-          </a:prstGeom>
-          <a:noFill/>
-          <a:ln w="15875">
-            <a:solidFill>
-              <a:srgbClr val="A9BEDC"/>
-            </a:solidFill>
-            <a:prstDash val="solid"/>
-          </a:ln>
-        </p:spPr>
-      </p:sp>
-      <p:sp>
-        <p:nvSpPr>
           <p:cNvPr id="47" name="Shape 45"/>
           <p:cNvSpPr/>
           <p:nvPr/>
         </p:nvSpPr>
         <p:spPr>
           <a:xfrm>
-            <a:off x="4677156" y="3493008"/>
-            <a:ext cx="0" cy="164592"/>
+            <a:off x="6094476" y="3236976"/>
+            <a:ext cx="0" cy="1014984"/>
           </a:xfrm>
           <a:prstGeom prst="line">
             <a:avLst/>
@@ -25233,7 +25446,1327 @@
         </p:nvSpPr>
         <p:spPr>
           <a:xfrm>
-            <a:off x="4421124" y="3657600"/>
+            <a:off x="4677156" y="3611880"/>
+            <a:ext cx="2834640" cy="0"/>
+          </a:xfrm>
+          <a:prstGeom prst="line">
+            <a:avLst/>
+          </a:prstGeom>
+          <a:noFill/>
+          <a:ln w="15875">
+            <a:solidFill>
+              <a:srgbClr val="A9BEDC"/>
+            </a:solidFill>
+            <a:prstDash val="solid"/>
+          </a:ln>
+        </p:spPr>
+      </p:sp>
+      <p:sp>
+        <p:nvSpPr>
+          <p:cNvPr id="49" name="Shape 47"/>
+          <p:cNvSpPr/>
+          <p:nvPr/>
+        </p:nvSpPr>
+        <p:spPr>
+          <a:xfrm>
+            <a:off x="4402836" y="3383280"/>
+            <a:ext cx="1234440" cy="457200"/>
+          </a:xfrm>
+          <a:prstGeom prst="roundRect">
+            <a:avLst>
+              <a:gd name="adj" fmla="val 10000"/>
+            </a:avLst>
+          </a:prstGeom>
+          <a:solidFill>
+            <a:srgbClr val="34517D"/>
+          </a:solidFill>
+          <a:ln w="12700">
+            <a:solidFill>
+              <a:srgbClr val="34517D"/>
+            </a:solidFill>
+            <a:prstDash val="solid"/>
+          </a:ln>
+        </p:spPr>
+      </p:sp>
+      <p:sp>
+        <p:nvSpPr>
+          <p:cNvPr id="50" name="Text 48"/>
+          <p:cNvSpPr txBox="1"/>
+          <p:nvPr/>
+        </p:nvSpPr>
+        <p:spPr>
+          <a:xfrm>
+            <a:off x="4439412" y="3383280"/>
+            <a:ext cx="1161288" cy="457200"/>
+          </a:xfrm>
+          <a:prstGeom prst="rect">
+            <a:avLst/>
+          </a:prstGeom>
+          <a:noFill/>
+          <a:ln/>
+        </p:spPr>
+        <p:txBody>
+          <a:bodyPr wrap="square" lIns="0" tIns="0" rIns="0" bIns="0" rtlCol="0" anchor="ctr"/>
+          <a:lstStyle/>
+          <a:p>
+            <a:pPr algn="ctr" indent="0" marL="0">
+              <a:buNone/>
+            </a:pPr>
+            <a:r>
+              <a:rPr lang="en-US" sz="750" b="1" dirty="0">
+                <a:solidFill>
+                  <a:srgbClr val="FFFFFF"/>
+                </a:solidFill>
+                <a:latin typeface="Calibri" pitchFamily="34" charset="0"/>
+                <a:ea typeface="Calibri" pitchFamily="34" charset="-122"/>
+                <a:cs typeface="Calibri" pitchFamily="34" charset="-120"/>
+              </a:rPr>
+              <a:t>Senior Especialista</a:t>
+            </a:r>
+            <a:endParaRPr lang="en-US" sz="750" dirty="0"/>
+          </a:p>
+          <a:p>
+            <a:pPr algn="ctr" indent="0" marL="0">
+              <a:buNone/>
+            </a:pPr>
+            <a:r>
+              <a:rPr lang="en-US" sz="750" b="1" dirty="0">
+                <a:solidFill>
+                  <a:srgbClr val="FFFFFF"/>
+                </a:solidFill>
+                <a:latin typeface="Calibri" pitchFamily="34" charset="0"/>
+                <a:ea typeface="Calibri" pitchFamily="34" charset="-122"/>
+                <a:cs typeface="Calibri" pitchFamily="34" charset="-120"/>
+              </a:rPr>
+              <a:t>Normativo</a:t>
+            </a:r>
+            <a:endParaRPr lang="en-US" sz="750" dirty="0"/>
+          </a:p>
+        </p:txBody>
+      </p:sp>
+      <p:sp>
+        <p:nvSpPr>
+          <p:cNvPr id="51" name="Shape 49"/>
+          <p:cNvSpPr/>
+          <p:nvPr/>
+        </p:nvSpPr>
+        <p:spPr>
+          <a:xfrm>
+            <a:off x="5500116" y="3273552"/>
+            <a:ext cx="274320" cy="274320"/>
+          </a:xfrm>
+          <a:prstGeom prst="ellipse">
+            <a:avLst/>
+          </a:prstGeom>
+          <a:solidFill>
+            <a:srgbClr val="6A9B6E"/>
+          </a:solidFill>
+          <a:ln w="12700">
+            <a:solidFill>
+              <a:srgbClr val="FFFFFF"/>
+            </a:solidFill>
+            <a:prstDash val="solid"/>
+          </a:ln>
+        </p:spPr>
+      </p:sp>
+      <p:sp>
+        <p:nvSpPr>
+          <p:cNvPr id="52" name="Text 50"/>
+          <p:cNvSpPr txBox="1"/>
+          <p:nvPr/>
+        </p:nvSpPr>
+        <p:spPr>
+          <a:xfrm>
+            <a:off x="5500116" y="3273552"/>
+            <a:ext cx="274320" cy="274320"/>
+          </a:xfrm>
+          <a:prstGeom prst="rect">
+            <a:avLst/>
+          </a:prstGeom>
+          <a:noFill/>
+          <a:ln/>
+        </p:spPr>
+        <p:txBody>
+          <a:bodyPr wrap="square" lIns="0" tIns="0" rIns="0" bIns="0" rtlCol="0" anchor="ctr"/>
+          <a:lstStyle/>
+          <a:p>
+            <a:pPr algn="ctr" indent="0" marL="0">
+              <a:buNone/>
+            </a:pPr>
+            <a:r>
+              <a:rPr lang="en-US" sz="800" b="1" dirty="0">
+                <a:solidFill>
+                  <a:srgbClr val="FFFFFF"/>
+                </a:solidFill>
+                <a:latin typeface="Calibri" pitchFamily="34" charset="0"/>
+                <a:ea typeface="Calibri" pitchFamily="34" charset="-122"/>
+                <a:cs typeface="Calibri" pitchFamily="34" charset="-120"/>
+              </a:rPr>
+              <a:t>+2</a:t>
+            </a:r>
+            <a:endParaRPr lang="en-US" sz="800" dirty="0"/>
+          </a:p>
+        </p:txBody>
+      </p:sp>
+      <p:sp>
+        <p:nvSpPr>
+          <p:cNvPr id="53" name="Shape 51"/>
+          <p:cNvSpPr/>
+          <p:nvPr/>
+        </p:nvSpPr>
+        <p:spPr>
+          <a:xfrm>
+            <a:off x="6551676" y="3383280"/>
+            <a:ext cx="1234440" cy="457200"/>
+          </a:xfrm>
+          <a:prstGeom prst="roundRect">
+            <a:avLst>
+              <a:gd name="adj" fmla="val 10000"/>
+            </a:avLst>
+          </a:prstGeom>
+          <a:solidFill>
+            <a:srgbClr val="34517D"/>
+          </a:solidFill>
+          <a:ln w="12700">
+            <a:solidFill>
+              <a:srgbClr val="34517D"/>
+            </a:solidFill>
+            <a:prstDash val="solid"/>
+          </a:ln>
+        </p:spPr>
+      </p:sp>
+      <p:sp>
+        <p:nvSpPr>
+          <p:cNvPr id="54" name="Text 52"/>
+          <p:cNvSpPr txBox="1"/>
+          <p:nvPr/>
+        </p:nvSpPr>
+        <p:spPr>
+          <a:xfrm>
+            <a:off x="6588252" y="3383280"/>
+            <a:ext cx="1161288" cy="457200"/>
+          </a:xfrm>
+          <a:prstGeom prst="rect">
+            <a:avLst/>
+          </a:prstGeom>
+          <a:noFill/>
+          <a:ln/>
+        </p:spPr>
+        <p:txBody>
+          <a:bodyPr wrap="square" lIns="0" tIns="0" rIns="0" bIns="0" rtlCol="0" anchor="ctr"/>
+          <a:lstStyle/>
+          <a:p>
+            <a:pPr algn="ctr" indent="0" marL="0">
+              <a:buNone/>
+            </a:pPr>
+            <a:r>
+              <a:rPr lang="en-US" sz="750" b="1" dirty="0">
+                <a:solidFill>
+                  <a:srgbClr val="FFFFFF"/>
+                </a:solidFill>
+                <a:latin typeface="Calibri" pitchFamily="34" charset="0"/>
+                <a:ea typeface="Calibri" pitchFamily="34" charset="-122"/>
+                <a:cs typeface="Calibri" pitchFamily="34" charset="-120"/>
+              </a:rPr>
+              <a:t>Senior TI</a:t>
+            </a:r>
+            <a:endParaRPr lang="en-US" sz="750" dirty="0"/>
+          </a:p>
+          <a:p>
+            <a:pPr algn="ctr" indent="0" marL="0">
+              <a:buNone/>
+            </a:pPr>
+            <a:r>
+              <a:rPr lang="en-US" sz="750" b="1" dirty="0">
+                <a:solidFill>
+                  <a:srgbClr val="FFFFFF"/>
+                </a:solidFill>
+                <a:latin typeface="Calibri" pitchFamily="34" charset="0"/>
+                <a:ea typeface="Calibri" pitchFamily="34" charset="-122"/>
+                <a:cs typeface="Calibri" pitchFamily="34" charset="-120"/>
+              </a:rPr>
+              <a:t>(datos y automatización)</a:t>
+            </a:r>
+            <a:endParaRPr lang="en-US" sz="750" dirty="0"/>
+          </a:p>
+        </p:txBody>
+      </p:sp>
+      <p:sp>
+        <p:nvSpPr>
+          <p:cNvPr id="55" name="Shape 53"/>
+          <p:cNvSpPr/>
+          <p:nvPr/>
+        </p:nvSpPr>
+        <p:spPr>
+          <a:xfrm>
+            <a:off x="7648956" y="3273552"/>
+            <a:ext cx="274320" cy="274320"/>
+          </a:xfrm>
+          <a:prstGeom prst="ellipse">
+            <a:avLst/>
+          </a:prstGeom>
+          <a:solidFill>
+            <a:srgbClr val="6A9B6E"/>
+          </a:solidFill>
+          <a:ln w="12700">
+            <a:solidFill>
+              <a:srgbClr val="FFFFFF"/>
+            </a:solidFill>
+            <a:prstDash val="solid"/>
+          </a:ln>
+        </p:spPr>
+      </p:sp>
+      <p:sp>
+        <p:nvSpPr>
+          <p:cNvPr id="56" name="Text 54"/>
+          <p:cNvSpPr txBox="1"/>
+          <p:nvPr/>
+        </p:nvSpPr>
+        <p:spPr>
+          <a:xfrm>
+            <a:off x="7648956" y="3273552"/>
+            <a:ext cx="274320" cy="274320"/>
+          </a:xfrm>
+          <a:prstGeom prst="rect">
+            <a:avLst/>
+          </a:prstGeom>
+          <a:noFill/>
+          <a:ln/>
+        </p:spPr>
+        <p:txBody>
+          <a:bodyPr wrap="square" lIns="0" tIns="0" rIns="0" bIns="0" rtlCol="0" anchor="ctr"/>
+          <a:lstStyle/>
+          <a:p>
+            <a:pPr algn="ctr" indent="0" marL="0">
+              <a:buNone/>
+            </a:pPr>
+            <a:r>
+              <a:rPr lang="en-US" sz="800" b="1" dirty="0">
+                <a:solidFill>
+                  <a:srgbClr val="FFFFFF"/>
+                </a:solidFill>
+                <a:latin typeface="Calibri" pitchFamily="34" charset="0"/>
+                <a:ea typeface="Calibri" pitchFamily="34" charset="-122"/>
+                <a:cs typeface="Calibri" pitchFamily="34" charset="-120"/>
+              </a:rPr>
+              <a:t>+2</a:t>
+            </a:r>
+            <a:endParaRPr lang="en-US" sz="800" dirty="0"/>
+          </a:p>
+        </p:txBody>
+      </p:sp>
+      <p:sp>
+        <p:nvSpPr>
+          <p:cNvPr id="57" name="Shape 55"/>
+          <p:cNvSpPr/>
+          <p:nvPr/>
+        </p:nvSpPr>
+        <p:spPr>
+          <a:xfrm>
+            <a:off x="4887468" y="4251960"/>
+            <a:ext cx="2414016" cy="0"/>
+          </a:xfrm>
+          <a:prstGeom prst="line">
+            <a:avLst/>
+          </a:prstGeom>
+          <a:noFill/>
+          <a:ln w="15875">
+            <a:solidFill>
+              <a:srgbClr val="A9BEDC"/>
+            </a:solidFill>
+            <a:prstDash val="solid"/>
+          </a:ln>
+        </p:spPr>
+      </p:sp>
+      <p:sp>
+        <p:nvSpPr>
+          <p:cNvPr id="58" name="Shape 56"/>
+          <p:cNvSpPr/>
+          <p:nvPr/>
+        </p:nvSpPr>
+        <p:spPr>
+          <a:xfrm>
+            <a:off x="4887468" y="4251960"/>
+            <a:ext cx="0" cy="164592"/>
+          </a:xfrm>
+          <a:prstGeom prst="line">
+            <a:avLst/>
+          </a:prstGeom>
+          <a:noFill/>
+          <a:ln w="15875">
+            <a:solidFill>
+              <a:srgbClr val="A9BEDC"/>
+            </a:solidFill>
+            <a:prstDash val="solid"/>
+          </a:ln>
+        </p:spPr>
+      </p:sp>
+      <p:sp>
+        <p:nvSpPr>
+          <p:cNvPr id="59" name="Shape 57"/>
+          <p:cNvSpPr/>
+          <p:nvPr/>
+        </p:nvSpPr>
+        <p:spPr>
+          <a:xfrm>
+            <a:off x="4530852" y="4416552"/>
+            <a:ext cx="713232" cy="384048"/>
+          </a:xfrm>
+          <a:prstGeom prst="roundRect">
+            <a:avLst>
+              <a:gd name="adj" fmla="val 11905"/>
+            </a:avLst>
+          </a:prstGeom>
+          <a:solidFill>
+            <a:srgbClr val="4A6FA5"/>
+          </a:solidFill>
+          <a:ln w="12700">
+            <a:solidFill>
+              <a:srgbClr val="4A6FA5"/>
+            </a:solidFill>
+            <a:prstDash val="solid"/>
+          </a:ln>
+        </p:spPr>
+      </p:sp>
+      <p:sp>
+        <p:nvSpPr>
+          <p:cNvPr id="60" name="Text 58"/>
+          <p:cNvSpPr txBox="1"/>
+          <p:nvPr/>
+        </p:nvSpPr>
+        <p:spPr>
+          <a:xfrm>
+            <a:off x="4567428" y="4416552"/>
+            <a:ext cx="640080" cy="384048"/>
+          </a:xfrm>
+          <a:prstGeom prst="rect">
+            <a:avLst/>
+          </a:prstGeom>
+          <a:noFill/>
+          <a:ln/>
+        </p:spPr>
+        <p:txBody>
+          <a:bodyPr wrap="square" lIns="0" tIns="0" rIns="0" bIns="0" rtlCol="0" anchor="ctr"/>
+          <a:lstStyle/>
+          <a:p>
+            <a:pPr algn="ctr" indent="0" marL="0">
+              <a:buNone/>
+            </a:pPr>
+            <a:r>
+              <a:rPr lang="en-US" sz="800" b="1" dirty="0">
+                <a:solidFill>
+                  <a:srgbClr val="FFFFFF"/>
+                </a:solidFill>
+                <a:latin typeface="Calibri" pitchFamily="34" charset="0"/>
+                <a:ea typeface="Calibri" pitchFamily="34" charset="-122"/>
+                <a:cs typeface="Calibri" pitchFamily="34" charset="-120"/>
+              </a:rPr>
+              <a:t>Pleno</a:t>
+            </a:r>
+            <a:endParaRPr lang="en-US" sz="800" dirty="0"/>
+          </a:p>
+        </p:txBody>
+      </p:sp>
+      <p:sp>
+        <p:nvSpPr>
+          <p:cNvPr id="61" name="Shape 59"/>
+          <p:cNvSpPr/>
+          <p:nvPr/>
+        </p:nvSpPr>
+        <p:spPr>
+          <a:xfrm>
+            <a:off x="5692140" y="4251960"/>
+            <a:ext cx="0" cy="164592"/>
+          </a:xfrm>
+          <a:prstGeom prst="line">
+            <a:avLst/>
+          </a:prstGeom>
+          <a:noFill/>
+          <a:ln w="15875">
+            <a:solidFill>
+              <a:srgbClr val="A9BEDC"/>
+            </a:solidFill>
+            <a:prstDash val="solid"/>
+          </a:ln>
+        </p:spPr>
+      </p:sp>
+      <p:sp>
+        <p:nvSpPr>
+          <p:cNvPr id="62" name="Shape 60"/>
+          <p:cNvSpPr/>
+          <p:nvPr/>
+        </p:nvSpPr>
+        <p:spPr>
+          <a:xfrm>
+            <a:off x="5335524" y="4416552"/>
+            <a:ext cx="713232" cy="384048"/>
+          </a:xfrm>
+          <a:prstGeom prst="roundRect">
+            <a:avLst>
+              <a:gd name="adj" fmla="val 11905"/>
+            </a:avLst>
+          </a:prstGeom>
+          <a:solidFill>
+            <a:srgbClr val="4A6FA5"/>
+          </a:solidFill>
+          <a:ln w="12700">
+            <a:solidFill>
+              <a:srgbClr val="4A6FA5"/>
+            </a:solidFill>
+            <a:prstDash val="solid"/>
+          </a:ln>
+        </p:spPr>
+      </p:sp>
+      <p:sp>
+        <p:nvSpPr>
+          <p:cNvPr id="63" name="Text 61"/>
+          <p:cNvSpPr txBox="1"/>
+          <p:nvPr/>
+        </p:nvSpPr>
+        <p:spPr>
+          <a:xfrm>
+            <a:off x="5372100" y="4416552"/>
+            <a:ext cx="640080" cy="384048"/>
+          </a:xfrm>
+          <a:prstGeom prst="rect">
+            <a:avLst/>
+          </a:prstGeom>
+          <a:noFill/>
+          <a:ln/>
+        </p:spPr>
+        <p:txBody>
+          <a:bodyPr wrap="square" lIns="0" tIns="0" rIns="0" bIns="0" rtlCol="0" anchor="ctr"/>
+          <a:lstStyle/>
+          <a:p>
+            <a:pPr algn="ctr" indent="0" marL="0">
+              <a:buNone/>
+            </a:pPr>
+            <a:r>
+              <a:rPr lang="en-US" sz="800" b="1" dirty="0">
+                <a:solidFill>
+                  <a:srgbClr val="FFFFFF"/>
+                </a:solidFill>
+                <a:latin typeface="Calibri" pitchFamily="34" charset="0"/>
+                <a:ea typeface="Calibri" pitchFamily="34" charset="-122"/>
+                <a:cs typeface="Calibri" pitchFamily="34" charset="-120"/>
+              </a:rPr>
+              <a:t>Pleno</a:t>
+            </a:r>
+            <a:endParaRPr lang="en-US" sz="800" dirty="0"/>
+          </a:p>
+        </p:txBody>
+      </p:sp>
+      <p:sp>
+        <p:nvSpPr>
+          <p:cNvPr id="64" name="Shape 62"/>
+          <p:cNvSpPr/>
+          <p:nvPr/>
+        </p:nvSpPr>
+        <p:spPr>
+          <a:xfrm>
+            <a:off x="6496812" y="4251960"/>
+            <a:ext cx="0" cy="164592"/>
+          </a:xfrm>
+          <a:prstGeom prst="line">
+            <a:avLst/>
+          </a:prstGeom>
+          <a:noFill/>
+          <a:ln w="15875">
+            <a:solidFill>
+              <a:srgbClr val="A9BEDC"/>
+            </a:solidFill>
+            <a:prstDash val="solid"/>
+          </a:ln>
+        </p:spPr>
+      </p:sp>
+      <p:sp>
+        <p:nvSpPr>
+          <p:cNvPr id="65" name="Shape 63"/>
+          <p:cNvSpPr/>
+          <p:nvPr/>
+        </p:nvSpPr>
+        <p:spPr>
+          <a:xfrm>
+            <a:off x="6140196" y="4416552"/>
+            <a:ext cx="713232" cy="384048"/>
+          </a:xfrm>
+          <a:prstGeom prst="roundRect">
+            <a:avLst>
+              <a:gd name="adj" fmla="val 11905"/>
+            </a:avLst>
+          </a:prstGeom>
+          <a:solidFill>
+            <a:srgbClr val="4A6FA5"/>
+          </a:solidFill>
+          <a:ln w="12700">
+            <a:solidFill>
+              <a:srgbClr val="4A6FA5"/>
+            </a:solidFill>
+            <a:prstDash val="solid"/>
+          </a:ln>
+        </p:spPr>
+      </p:sp>
+      <p:sp>
+        <p:nvSpPr>
+          <p:cNvPr id="66" name="Text 64"/>
+          <p:cNvSpPr txBox="1"/>
+          <p:nvPr/>
+        </p:nvSpPr>
+        <p:spPr>
+          <a:xfrm>
+            <a:off x="6176772" y="4416552"/>
+            <a:ext cx="640080" cy="384048"/>
+          </a:xfrm>
+          <a:prstGeom prst="rect">
+            <a:avLst/>
+          </a:prstGeom>
+          <a:noFill/>
+          <a:ln/>
+        </p:spPr>
+        <p:txBody>
+          <a:bodyPr wrap="square" lIns="0" tIns="0" rIns="0" bIns="0" rtlCol="0" anchor="ctr"/>
+          <a:lstStyle/>
+          <a:p>
+            <a:pPr algn="ctr" indent="0" marL="0">
+              <a:buNone/>
+            </a:pPr>
+            <a:r>
+              <a:rPr lang="en-US" sz="800" b="1" dirty="0">
+                <a:solidFill>
+                  <a:srgbClr val="FFFFFF"/>
+                </a:solidFill>
+                <a:latin typeface="Calibri" pitchFamily="34" charset="0"/>
+                <a:ea typeface="Calibri" pitchFamily="34" charset="-122"/>
+                <a:cs typeface="Calibri" pitchFamily="34" charset="-120"/>
+              </a:rPr>
+              <a:t>Pleno</a:t>
+            </a:r>
+            <a:endParaRPr lang="en-US" sz="800" dirty="0"/>
+          </a:p>
+        </p:txBody>
+      </p:sp>
+      <p:sp>
+        <p:nvSpPr>
+          <p:cNvPr id="67" name="Shape 65"/>
+          <p:cNvSpPr/>
+          <p:nvPr/>
+        </p:nvSpPr>
+        <p:spPr>
+          <a:xfrm>
+            <a:off x="7301484" y="4251960"/>
+            <a:ext cx="0" cy="164592"/>
+          </a:xfrm>
+          <a:prstGeom prst="line">
+            <a:avLst/>
+          </a:prstGeom>
+          <a:noFill/>
+          <a:ln w="15875">
+            <a:solidFill>
+              <a:srgbClr val="A9BEDC"/>
+            </a:solidFill>
+            <a:prstDash val="solid"/>
+          </a:ln>
+        </p:spPr>
+      </p:sp>
+      <p:sp>
+        <p:nvSpPr>
+          <p:cNvPr id="68" name="Shape 66"/>
+          <p:cNvSpPr/>
+          <p:nvPr/>
+        </p:nvSpPr>
+        <p:spPr>
+          <a:xfrm>
+            <a:off x="6944868" y="4416552"/>
+            <a:ext cx="713232" cy="384048"/>
+          </a:xfrm>
+          <a:prstGeom prst="roundRect">
+            <a:avLst>
+              <a:gd name="adj" fmla="val 11905"/>
+            </a:avLst>
+          </a:prstGeom>
+          <a:solidFill>
+            <a:srgbClr val="4A6FA5"/>
+          </a:solidFill>
+          <a:ln w="12700">
+            <a:solidFill>
+              <a:srgbClr val="4A6FA5"/>
+            </a:solidFill>
+            <a:prstDash val="solid"/>
+          </a:ln>
+        </p:spPr>
+      </p:sp>
+      <p:sp>
+        <p:nvSpPr>
+          <p:cNvPr id="69" name="Text 67"/>
+          <p:cNvSpPr txBox="1"/>
+          <p:nvPr/>
+        </p:nvSpPr>
+        <p:spPr>
+          <a:xfrm>
+            <a:off x="6981444" y="4416552"/>
+            <a:ext cx="640080" cy="384048"/>
+          </a:xfrm>
+          <a:prstGeom prst="rect">
+            <a:avLst/>
+          </a:prstGeom>
+          <a:noFill/>
+          <a:ln/>
+        </p:spPr>
+        <p:txBody>
+          <a:bodyPr wrap="square" lIns="0" tIns="0" rIns="0" bIns="0" rtlCol="0" anchor="ctr"/>
+          <a:lstStyle/>
+          <a:p>
+            <a:pPr algn="ctr" indent="0" marL="0">
+              <a:buNone/>
+            </a:pPr>
+            <a:r>
+              <a:rPr lang="en-US" sz="800" b="1" dirty="0">
+                <a:solidFill>
+                  <a:srgbClr val="FFFFFF"/>
+                </a:solidFill>
+                <a:latin typeface="Calibri" pitchFamily="34" charset="0"/>
+                <a:ea typeface="Calibri" pitchFamily="34" charset="-122"/>
+                <a:cs typeface="Calibri" pitchFamily="34" charset="-120"/>
+              </a:rPr>
+              <a:t>Pleno</a:t>
+            </a:r>
+            <a:endParaRPr lang="en-US" sz="800" dirty="0"/>
+          </a:p>
+        </p:txBody>
+      </p:sp>
+      <p:sp>
+        <p:nvSpPr>
+          <p:cNvPr id="70" name="Shape 68"/>
+          <p:cNvSpPr/>
+          <p:nvPr/>
+        </p:nvSpPr>
+        <p:spPr>
+          <a:xfrm>
+            <a:off x="5079492" y="4297680"/>
+            <a:ext cx="274320" cy="274320"/>
+          </a:xfrm>
+          <a:prstGeom prst="ellipse">
+            <a:avLst/>
+          </a:prstGeom>
+          <a:solidFill>
+            <a:srgbClr val="6A9B6E"/>
+          </a:solidFill>
+          <a:ln w="12700">
+            <a:solidFill>
+              <a:srgbClr val="FFFFFF"/>
+            </a:solidFill>
+            <a:prstDash val="solid"/>
+          </a:ln>
+        </p:spPr>
+      </p:sp>
+      <p:sp>
+        <p:nvSpPr>
+          <p:cNvPr id="71" name="Text 69"/>
+          <p:cNvSpPr txBox="1"/>
+          <p:nvPr/>
+        </p:nvSpPr>
+        <p:spPr>
+          <a:xfrm>
+            <a:off x="5079492" y="4297680"/>
+            <a:ext cx="274320" cy="274320"/>
+          </a:xfrm>
+          <a:prstGeom prst="rect">
+            <a:avLst/>
+          </a:prstGeom>
+          <a:noFill/>
+          <a:ln/>
+        </p:spPr>
+        <p:txBody>
+          <a:bodyPr wrap="square" lIns="0" tIns="0" rIns="0" bIns="0" rtlCol="0" anchor="ctr"/>
+          <a:lstStyle/>
+          <a:p>
+            <a:pPr algn="ctr" indent="0" marL="0">
+              <a:buNone/>
+            </a:pPr>
+            <a:r>
+              <a:rPr lang="en-US" sz="800" b="1" dirty="0">
+                <a:solidFill>
+                  <a:srgbClr val="FFFFFF"/>
+                </a:solidFill>
+                <a:latin typeface="Calibri" pitchFamily="34" charset="0"/>
+                <a:ea typeface="Calibri" pitchFamily="34" charset="-122"/>
+                <a:cs typeface="Calibri" pitchFamily="34" charset="-120"/>
+              </a:rPr>
+              <a:t>+1</a:t>
+            </a:r>
+            <a:endParaRPr lang="en-US" sz="800" dirty="0"/>
+          </a:p>
+        </p:txBody>
+      </p:sp>
+      <p:sp>
+        <p:nvSpPr>
+          <p:cNvPr id="72" name="Shape 70"/>
+          <p:cNvSpPr/>
+          <p:nvPr/>
+        </p:nvSpPr>
+        <p:spPr>
+          <a:xfrm>
+            <a:off x="5884164" y="4297680"/>
+            <a:ext cx="274320" cy="274320"/>
+          </a:xfrm>
+          <a:prstGeom prst="ellipse">
+            <a:avLst/>
+          </a:prstGeom>
+          <a:solidFill>
+            <a:srgbClr val="6A9B6E"/>
+          </a:solidFill>
+          <a:ln w="12700">
+            <a:solidFill>
+              <a:srgbClr val="FFFFFF"/>
+            </a:solidFill>
+            <a:prstDash val="solid"/>
+          </a:ln>
+        </p:spPr>
+      </p:sp>
+      <p:sp>
+        <p:nvSpPr>
+          <p:cNvPr id="73" name="Text 71"/>
+          <p:cNvSpPr txBox="1"/>
+          <p:nvPr/>
+        </p:nvSpPr>
+        <p:spPr>
+          <a:xfrm>
+            <a:off x="5884164" y="4297680"/>
+            <a:ext cx="274320" cy="274320"/>
+          </a:xfrm>
+          <a:prstGeom prst="rect">
+            <a:avLst/>
+          </a:prstGeom>
+          <a:noFill/>
+          <a:ln/>
+        </p:spPr>
+        <p:txBody>
+          <a:bodyPr wrap="square" lIns="0" tIns="0" rIns="0" bIns="0" rtlCol="0" anchor="ctr"/>
+          <a:lstStyle/>
+          <a:p>
+            <a:pPr algn="ctr" indent="0" marL="0">
+              <a:buNone/>
+            </a:pPr>
+            <a:r>
+              <a:rPr lang="en-US" sz="800" b="1" dirty="0">
+                <a:solidFill>
+                  <a:srgbClr val="FFFFFF"/>
+                </a:solidFill>
+                <a:latin typeface="Calibri" pitchFamily="34" charset="0"/>
+                <a:ea typeface="Calibri" pitchFamily="34" charset="-122"/>
+                <a:cs typeface="Calibri" pitchFamily="34" charset="-120"/>
+              </a:rPr>
+              <a:t>+1</a:t>
+            </a:r>
+            <a:endParaRPr lang="en-US" sz="800" dirty="0"/>
+          </a:p>
+        </p:txBody>
+      </p:sp>
+      <p:sp>
+        <p:nvSpPr>
+          <p:cNvPr id="74" name="Shape 72"/>
+          <p:cNvSpPr/>
+          <p:nvPr/>
+        </p:nvSpPr>
+        <p:spPr>
+          <a:xfrm>
+            <a:off x="6688836" y="4297680"/>
+            <a:ext cx="274320" cy="274320"/>
+          </a:xfrm>
+          <a:prstGeom prst="ellipse">
+            <a:avLst/>
+          </a:prstGeom>
+          <a:solidFill>
+            <a:srgbClr val="6A9B6E"/>
+          </a:solidFill>
+          <a:ln w="12700">
+            <a:solidFill>
+              <a:srgbClr val="FFFFFF"/>
+            </a:solidFill>
+            <a:prstDash val="solid"/>
+          </a:ln>
+        </p:spPr>
+      </p:sp>
+      <p:sp>
+        <p:nvSpPr>
+          <p:cNvPr id="75" name="Text 73"/>
+          <p:cNvSpPr txBox="1"/>
+          <p:nvPr/>
+        </p:nvSpPr>
+        <p:spPr>
+          <a:xfrm>
+            <a:off x="6688836" y="4297680"/>
+            <a:ext cx="274320" cy="274320"/>
+          </a:xfrm>
+          <a:prstGeom prst="rect">
+            <a:avLst/>
+          </a:prstGeom>
+          <a:noFill/>
+          <a:ln/>
+        </p:spPr>
+        <p:txBody>
+          <a:bodyPr wrap="square" lIns="0" tIns="0" rIns="0" bIns="0" rtlCol="0" anchor="ctr"/>
+          <a:lstStyle/>
+          <a:p>
+            <a:pPr algn="ctr" indent="0" marL="0">
+              <a:buNone/>
+            </a:pPr>
+            <a:r>
+              <a:rPr lang="en-US" sz="800" b="1" dirty="0">
+                <a:solidFill>
+                  <a:srgbClr val="FFFFFF"/>
+                </a:solidFill>
+                <a:latin typeface="Calibri" pitchFamily="34" charset="0"/>
+                <a:ea typeface="Calibri" pitchFamily="34" charset="-122"/>
+                <a:cs typeface="Calibri" pitchFamily="34" charset="-120"/>
+              </a:rPr>
+              <a:t>+1</a:t>
+            </a:r>
+            <a:endParaRPr lang="en-US" sz="800" dirty="0"/>
+          </a:p>
+        </p:txBody>
+      </p:sp>
+      <p:sp>
+        <p:nvSpPr>
+          <p:cNvPr id="76" name="Shape 74"/>
+          <p:cNvSpPr/>
+          <p:nvPr/>
+        </p:nvSpPr>
+        <p:spPr>
+          <a:xfrm>
+            <a:off x="7493508" y="4297680"/>
+            <a:ext cx="274320" cy="274320"/>
+          </a:xfrm>
+          <a:prstGeom prst="ellipse">
+            <a:avLst/>
+          </a:prstGeom>
+          <a:solidFill>
+            <a:srgbClr val="6A9B6E"/>
+          </a:solidFill>
+          <a:ln w="12700">
+            <a:solidFill>
+              <a:srgbClr val="FFFFFF"/>
+            </a:solidFill>
+            <a:prstDash val="solid"/>
+          </a:ln>
+        </p:spPr>
+      </p:sp>
+      <p:sp>
+        <p:nvSpPr>
+          <p:cNvPr id="77" name="Text 75"/>
+          <p:cNvSpPr txBox="1"/>
+          <p:nvPr/>
+        </p:nvSpPr>
+        <p:spPr>
+          <a:xfrm>
+            <a:off x="7493508" y="4297680"/>
+            <a:ext cx="274320" cy="274320"/>
+          </a:xfrm>
+          <a:prstGeom prst="rect">
+            <a:avLst/>
+          </a:prstGeom>
+          <a:noFill/>
+          <a:ln/>
+        </p:spPr>
+        <p:txBody>
+          <a:bodyPr wrap="square" lIns="0" tIns="0" rIns="0" bIns="0" rtlCol="0" anchor="ctr"/>
+          <a:lstStyle/>
+          <a:p>
+            <a:pPr algn="ctr" indent="0" marL="0">
+              <a:buNone/>
+            </a:pPr>
+            <a:r>
+              <a:rPr lang="en-US" sz="800" b="1" dirty="0">
+                <a:solidFill>
+                  <a:srgbClr val="FFFFFF"/>
+                </a:solidFill>
+                <a:latin typeface="Calibri" pitchFamily="34" charset="0"/>
+                <a:ea typeface="Calibri" pitchFamily="34" charset="-122"/>
+                <a:cs typeface="Calibri" pitchFamily="34" charset="-120"/>
+              </a:rPr>
+              <a:t>+1</a:t>
+            </a:r>
+            <a:endParaRPr lang="en-US" sz="800" dirty="0"/>
+          </a:p>
+        </p:txBody>
+      </p:sp>
+      <p:sp>
+        <p:nvSpPr>
+          <p:cNvPr id="78" name="Text 76"/>
+          <p:cNvSpPr txBox="1"/>
+          <p:nvPr/>
+        </p:nvSpPr>
+        <p:spPr>
+          <a:xfrm>
+            <a:off x="4337304" y="4828032"/>
+            <a:ext cx="3514344" cy="237744"/>
+          </a:xfrm>
+          <a:prstGeom prst="rect">
+            <a:avLst/>
+          </a:prstGeom>
+          <a:noFill/>
+          <a:ln/>
+        </p:spPr>
+        <p:txBody>
+          <a:bodyPr wrap="square" lIns="0" tIns="0" rIns="0" bIns="0" rtlCol="0" anchor="ctr"/>
+          <a:lstStyle/>
+          <a:p>
+            <a:pPr algn="ctr" indent="0" marL="0">
+              <a:buNone/>
+            </a:pPr>
+            <a:r>
+              <a:rPr lang="en-US" sz="900" dirty="0">
+                <a:solidFill>
+                  <a:srgbClr val="5B6470"/>
+                </a:solidFill>
+                <a:latin typeface="Calibri" pitchFamily="34" charset="0"/>
+                <a:ea typeface="Calibri" pitchFamily="34" charset="-122"/>
+                <a:cs typeface="Calibri" pitchFamily="34" charset="-120"/>
+              </a:rPr>
+              <a:t>Dos seniors, grado +2; cuatro plenos, grado +1</a:t>
+            </a:r>
+            <a:endParaRPr lang="en-US" sz="900" dirty="0"/>
+          </a:p>
+        </p:txBody>
+      </p:sp>
+      <p:sp>
+        <p:nvSpPr>
+          <p:cNvPr id="79" name="Text 77"/>
+          <p:cNvSpPr txBox="1"/>
+          <p:nvPr/>
+        </p:nvSpPr>
+        <p:spPr>
+          <a:xfrm>
+            <a:off x="4520184" y="5074920"/>
+            <a:ext cx="3148584" cy="822960"/>
+          </a:xfrm>
+          <a:prstGeom prst="rect">
+            <a:avLst/>
+          </a:prstGeom>
+          <a:noFill/>
+          <a:ln/>
+        </p:spPr>
+        <p:txBody>
+          <a:bodyPr wrap="square" lIns="0" tIns="0" rIns="0" bIns="0" rtlCol="0" anchor="t"/>
+          <a:lstStyle/>
+          <a:p>
+            <a:pPr indent="0" marL="0">
+              <a:buNone/>
+            </a:pPr>
+            <a:r>
+              <a:rPr lang="en-US" sz="950" dirty="0">
+                <a:solidFill>
+                  <a:srgbClr val="5B6470"/>
+                </a:solidFill>
+                <a:latin typeface="Calibri" pitchFamily="34" charset="0"/>
+                <a:ea typeface="Calibri" pitchFamily="34" charset="-122"/>
+                <a:cs typeface="Calibri" pitchFamily="34" charset="-120"/>
+              </a:rPr>
+              <a:t>Todo el equipo sube un grado; los dos seniors suben dos, asumen los bloques críticos (Deudores y REDEC; datos, automatización y controles) y la validación. Los plenos ejecutan bajo control dual con ruta a senior.</a:t>
+            </a:r>
+            <a:endParaRPr lang="en-US" sz="950" dirty="0"/>
+          </a:p>
+        </p:txBody>
+      </p:sp>
+      <p:sp>
+        <p:nvSpPr>
+          <p:cNvPr id="80" name="Shape 78"/>
+          <p:cNvSpPr/>
+          <p:nvPr/>
+        </p:nvSpPr>
+        <p:spPr>
+          <a:xfrm>
+            <a:off x="8125968" y="1874520"/>
+            <a:ext cx="3514344" cy="4069080"/>
+          </a:xfrm>
+          <a:prstGeom prst="roundRect">
+            <a:avLst>
+              <a:gd name="adj" fmla="val 1561"/>
+            </a:avLst>
+          </a:prstGeom>
+          <a:solidFill>
+            <a:srgbClr val="FFFFFF"/>
+          </a:solidFill>
+          <a:ln w="9525">
+            <a:solidFill>
+              <a:srgbClr val="E3E6EA"/>
+            </a:solidFill>
+            <a:prstDash val="solid"/>
+          </a:ln>
+        </p:spPr>
+      </p:sp>
+      <p:sp>
+        <p:nvSpPr>
+          <p:cNvPr id="81" name="Text 79"/>
+          <p:cNvSpPr txBox="1"/>
+          <p:nvPr/>
+        </p:nvSpPr>
+        <p:spPr>
+          <a:xfrm>
+            <a:off x="8308848" y="1965960"/>
+            <a:ext cx="3148584" cy="256032"/>
+          </a:xfrm>
+          <a:prstGeom prst="rect">
+            <a:avLst/>
+          </a:prstGeom>
+          <a:noFill/>
+          <a:ln/>
+        </p:spPr>
+        <p:txBody>
+          <a:bodyPr wrap="square" lIns="0" tIns="0" rIns="0" bIns="0" rtlCol="0" anchor="ctr"/>
+          <a:lstStyle/>
+          <a:p>
+            <a:pPr indent="0" marL="0">
+              <a:buNone/>
+            </a:pPr>
+            <a:r>
+              <a:rPr lang="en-US" sz="900" b="1" spc="200" kern="0" dirty="0">
+                <a:solidFill>
+                  <a:srgbClr val="8A94A0"/>
+                </a:solidFill>
+                <a:latin typeface="Calibri" pitchFamily="34" charset="0"/>
+                <a:ea typeface="Calibri" pitchFamily="34" charset="-122"/>
+                <a:cs typeface="Calibri" pitchFamily="34" charset="-120"/>
+              </a:rPr>
+              <a:t>ALTERNATIVA 2 · UN GRADO MÁS PARA TODOS</a:t>
+            </a:r>
+            <a:endParaRPr lang="en-US" sz="900" dirty="0"/>
+          </a:p>
+        </p:txBody>
+      </p:sp>
+      <p:sp>
+        <p:nvSpPr>
+          <p:cNvPr id="82" name="Shape 80"/>
+          <p:cNvSpPr/>
+          <p:nvPr/>
+        </p:nvSpPr>
+        <p:spPr>
+          <a:xfrm>
+            <a:off x="9197340" y="2377440"/>
+            <a:ext cx="1371600" cy="329184"/>
+          </a:xfrm>
+          <a:prstGeom prst="roundRect">
+            <a:avLst>
+              <a:gd name="adj" fmla="val 13889"/>
+            </a:avLst>
+          </a:prstGeom>
+          <a:solidFill>
+            <a:srgbClr val="E6ECF5"/>
+          </a:solidFill>
+          <a:ln w="12700">
+            <a:solidFill>
+              <a:srgbClr val="E6ECF5"/>
+            </a:solidFill>
+            <a:prstDash val="solid"/>
+          </a:ln>
+        </p:spPr>
+      </p:sp>
+      <p:sp>
+        <p:nvSpPr>
+          <p:cNvPr id="83" name="Text 81"/>
+          <p:cNvSpPr txBox="1"/>
+          <p:nvPr/>
+        </p:nvSpPr>
+        <p:spPr>
+          <a:xfrm>
+            <a:off x="9233916" y="2377440"/>
+            <a:ext cx="1298448" cy="329184"/>
+          </a:xfrm>
+          <a:prstGeom prst="rect">
+            <a:avLst/>
+          </a:prstGeom>
+          <a:noFill/>
+          <a:ln/>
+        </p:spPr>
+        <p:txBody>
+          <a:bodyPr wrap="square" lIns="0" tIns="0" rIns="0" bIns="0" rtlCol="0" anchor="ctr"/>
+          <a:lstStyle/>
+          <a:p>
+            <a:pPr algn="ctr" indent="0" marL="0">
+              <a:buNone/>
+            </a:pPr>
+            <a:r>
+              <a:rPr lang="en-US" sz="850" b="1" dirty="0">
+                <a:solidFill>
+                  <a:srgbClr val="34517D"/>
+                </a:solidFill>
+                <a:latin typeface="Calibri" pitchFamily="34" charset="0"/>
+                <a:ea typeface="Calibri" pitchFamily="34" charset="-122"/>
+                <a:cs typeface="Calibri" pitchFamily="34" charset="-120"/>
+              </a:rPr>
+              <a:t>Subgerente</a:t>
+            </a:r>
+            <a:endParaRPr lang="en-US" sz="850" dirty="0"/>
+          </a:p>
+        </p:txBody>
+      </p:sp>
+      <p:sp>
+        <p:nvSpPr>
+          <p:cNvPr id="84" name="Shape 82"/>
+          <p:cNvSpPr/>
+          <p:nvPr/>
+        </p:nvSpPr>
+        <p:spPr>
+          <a:xfrm>
+            <a:off x="9883140" y="2706624"/>
+            <a:ext cx="0" cy="201168"/>
+          </a:xfrm>
+          <a:prstGeom prst="line">
+            <a:avLst/>
+          </a:prstGeom>
+          <a:noFill/>
+          <a:ln w="15875">
+            <a:solidFill>
+              <a:srgbClr val="A9BEDC"/>
+            </a:solidFill>
+            <a:prstDash val="solid"/>
+          </a:ln>
+        </p:spPr>
+      </p:sp>
+      <p:sp>
+        <p:nvSpPr>
+          <p:cNvPr id="85" name="Shape 83"/>
+          <p:cNvSpPr/>
+          <p:nvPr/>
+        </p:nvSpPr>
+        <p:spPr>
+          <a:xfrm>
+            <a:off x="9197340" y="2907792"/>
+            <a:ext cx="1371600" cy="329184"/>
+          </a:xfrm>
+          <a:prstGeom prst="roundRect">
+            <a:avLst>
+              <a:gd name="adj" fmla="val 13889"/>
+            </a:avLst>
+          </a:prstGeom>
+          <a:solidFill>
+            <a:srgbClr val="E6ECF5"/>
+          </a:solidFill>
+          <a:ln w="12700">
+            <a:solidFill>
+              <a:srgbClr val="E6ECF5"/>
+            </a:solidFill>
+            <a:prstDash val="solid"/>
+          </a:ln>
+        </p:spPr>
+      </p:sp>
+      <p:sp>
+        <p:nvSpPr>
+          <p:cNvPr id="86" name="Text 84"/>
+          <p:cNvSpPr txBox="1"/>
+          <p:nvPr/>
+        </p:nvSpPr>
+        <p:spPr>
+          <a:xfrm>
+            <a:off x="9233916" y="2907792"/>
+            <a:ext cx="1298448" cy="329184"/>
+          </a:xfrm>
+          <a:prstGeom prst="rect">
+            <a:avLst/>
+          </a:prstGeom>
+          <a:noFill/>
+          <a:ln/>
+        </p:spPr>
+        <p:txBody>
+          <a:bodyPr wrap="square" lIns="0" tIns="0" rIns="0" bIns="0" rtlCol="0" anchor="ctr"/>
+          <a:lstStyle/>
+          <a:p>
+            <a:pPr algn="ctr" indent="0" marL="0">
+              <a:buNone/>
+            </a:pPr>
+            <a:r>
+              <a:rPr lang="en-US" sz="850" b="1" dirty="0">
+                <a:solidFill>
+                  <a:srgbClr val="34517D"/>
+                </a:solidFill>
+                <a:latin typeface="Calibri" pitchFamily="34" charset="0"/>
+                <a:ea typeface="Calibri" pitchFamily="34" charset="-122"/>
+                <a:cs typeface="Calibri" pitchFamily="34" charset="-120"/>
+              </a:rPr>
+              <a:t>Jefe Normativo</a:t>
+            </a:r>
+            <a:endParaRPr lang="en-US" sz="850" dirty="0"/>
+          </a:p>
+        </p:txBody>
+      </p:sp>
+      <p:sp>
+        <p:nvSpPr>
+          <p:cNvPr id="87" name="Shape 85"/>
+          <p:cNvSpPr/>
+          <p:nvPr/>
+        </p:nvSpPr>
+        <p:spPr>
+          <a:xfrm>
+            <a:off x="9883140" y="3236976"/>
+            <a:ext cx="0" cy="256032"/>
+          </a:xfrm>
+          <a:prstGeom prst="line">
+            <a:avLst/>
+          </a:prstGeom>
+          <a:noFill/>
+          <a:ln w="15875">
+            <a:solidFill>
+              <a:srgbClr val="A9BEDC"/>
+            </a:solidFill>
+            <a:prstDash val="solid"/>
+          </a:ln>
+        </p:spPr>
+      </p:sp>
+      <p:sp>
+        <p:nvSpPr>
+          <p:cNvPr id="88" name="Shape 86"/>
+          <p:cNvSpPr/>
+          <p:nvPr/>
+        </p:nvSpPr>
+        <p:spPr>
+          <a:xfrm>
+            <a:off x="8465820" y="3493008"/>
+            <a:ext cx="2834640" cy="0"/>
+          </a:xfrm>
+          <a:prstGeom prst="line">
+            <a:avLst/>
+          </a:prstGeom>
+          <a:noFill/>
+          <a:ln w="15875">
+            <a:solidFill>
+              <a:srgbClr val="A9BEDC"/>
+            </a:solidFill>
+            <a:prstDash val="solid"/>
+          </a:ln>
+        </p:spPr>
+      </p:sp>
+      <p:sp>
+        <p:nvSpPr>
+          <p:cNvPr id="89" name="Shape 87"/>
+          <p:cNvSpPr/>
+          <p:nvPr/>
+        </p:nvSpPr>
+        <p:spPr>
+          <a:xfrm>
+            <a:off x="8465820" y="3493008"/>
+            <a:ext cx="0" cy="164592"/>
+          </a:xfrm>
+          <a:prstGeom prst="line">
+            <a:avLst/>
+          </a:prstGeom>
+          <a:noFill/>
+          <a:ln w="15875">
+            <a:solidFill>
+              <a:srgbClr val="A9BEDC"/>
+            </a:solidFill>
+            <a:prstDash val="solid"/>
+          </a:ln>
+        </p:spPr>
+      </p:sp>
+      <p:sp>
+        <p:nvSpPr>
+          <p:cNvPr id="90" name="Shape 88"/>
+          <p:cNvSpPr/>
+          <p:nvPr/>
+        </p:nvSpPr>
+        <p:spPr>
+          <a:xfrm>
+            <a:off x="8209788" y="3657600"/>
             <a:ext cx="512064" cy="566928"/>
           </a:xfrm>
           <a:prstGeom prst="roundRect">
@@ -25242,11 +26775,11 @@
             </a:avLst>
           </a:prstGeom>
           <a:solidFill>
-            <a:srgbClr val="4A6FA5"/>
+            <a:srgbClr val="A9BEDC"/>
           </a:solidFill>
           <a:ln w="12700">
             <a:solidFill>
-              <a:srgbClr val="4A6FA5"/>
+              <a:srgbClr val="A9BEDC"/>
             </a:solidFill>
             <a:prstDash val="solid"/>
           </a:ln>
@@ -25254,13 +26787,13 @@
       </p:sp>
       <p:sp>
         <p:nvSpPr>
-          <p:cNvPr id="49" name="Text 47"/>
-          <p:cNvSpPr txBox="1"/>
-          <p:nvPr/>
-        </p:nvSpPr>
-        <p:spPr>
-          <a:xfrm>
-            <a:off x="4457700" y="3657600"/>
+          <p:cNvPr id="91" name="Text 89"/>
+          <p:cNvSpPr txBox="1"/>
+          <p:nvPr/>
+        </p:nvSpPr>
+        <p:spPr>
+          <a:xfrm>
+            <a:off x="8246364" y="3657600"/>
             <a:ext cx="438912" cy="566928"/>
           </a:xfrm>
           <a:prstGeom prst="rect">
@@ -25279,7 +26812,7 @@
             <a:r>
               <a:rPr lang="en-US" sz="700" b="1" dirty="0">
                 <a:solidFill>
-                  <a:srgbClr val="FFFFFF"/>
+                  <a:srgbClr val="2B2F36"/>
                 </a:solidFill>
                 <a:latin typeface="Calibri" pitchFamily="34" charset="0"/>
                 <a:ea typeface="Calibri" pitchFamily="34" charset="-122"/>
@@ -25296,7 +26829,7 @@
             <a:r>
               <a:rPr lang="en-US" sz="700" b="1" dirty="0">
                 <a:solidFill>
-                  <a:srgbClr val="FFFFFF"/>
+                  <a:srgbClr val="2B2F36"/>
                 </a:solidFill>
                 <a:latin typeface="Calibri" pitchFamily="34" charset="0"/>
                 <a:ea typeface="Calibri" pitchFamily="34" charset="-122"/>
@@ -25310,13 +26843,13 @@
       </p:sp>
       <p:sp>
         <p:nvSpPr>
-          <p:cNvPr id="50" name="Shape 48"/>
+          <p:cNvPr id="92" name="Shape 90"/>
           <p:cNvSpPr/>
           <p:nvPr/>
         </p:nvSpPr>
         <p:spPr>
           <a:xfrm>
-            <a:off x="5244084" y="3493008"/>
+            <a:off x="9032748" y="3493008"/>
             <a:ext cx="0" cy="164592"/>
           </a:xfrm>
           <a:prstGeom prst="line">
@@ -25333,13 +26866,13 @@
       </p:sp>
       <p:sp>
         <p:nvSpPr>
-          <p:cNvPr id="51" name="Shape 49"/>
+          <p:cNvPr id="93" name="Shape 91"/>
           <p:cNvSpPr/>
           <p:nvPr/>
         </p:nvSpPr>
         <p:spPr>
           <a:xfrm>
-            <a:off x="4988052" y="3657600"/>
+            <a:off x="8776716" y="3657600"/>
             <a:ext cx="512064" cy="566928"/>
           </a:xfrm>
           <a:prstGeom prst="roundRect">
@@ -25348,11 +26881,11 @@
             </a:avLst>
           </a:prstGeom>
           <a:solidFill>
-            <a:srgbClr val="4A6FA5"/>
+            <a:srgbClr val="A9BEDC"/>
           </a:solidFill>
           <a:ln w="12700">
             <a:solidFill>
-              <a:srgbClr val="4A6FA5"/>
+              <a:srgbClr val="A9BEDC"/>
             </a:solidFill>
             <a:prstDash val="solid"/>
           </a:ln>
@@ -25360,13 +26893,13 @@
       </p:sp>
       <p:sp>
         <p:nvSpPr>
-          <p:cNvPr id="52" name="Text 50"/>
-          <p:cNvSpPr txBox="1"/>
-          <p:nvPr/>
-        </p:nvSpPr>
-        <p:spPr>
-          <a:xfrm>
-            <a:off x="5024628" y="3657600"/>
+          <p:cNvPr id="94" name="Text 92"/>
+          <p:cNvSpPr txBox="1"/>
+          <p:nvPr/>
+        </p:nvSpPr>
+        <p:spPr>
+          <a:xfrm>
+            <a:off x="8813292" y="3657600"/>
             <a:ext cx="438912" cy="566928"/>
           </a:xfrm>
           <a:prstGeom prst="rect">
@@ -25385,7 +26918,7 @@
             <a:r>
               <a:rPr lang="en-US" sz="700" b="1" dirty="0">
                 <a:solidFill>
-                  <a:srgbClr val="FFFFFF"/>
+                  <a:srgbClr val="2B2F36"/>
                 </a:solidFill>
                 <a:latin typeface="Calibri" pitchFamily="34" charset="0"/>
                 <a:ea typeface="Calibri" pitchFamily="34" charset="-122"/>
@@ -25402,7 +26935,7 @@
             <a:r>
               <a:rPr lang="en-US" sz="700" b="1" dirty="0">
                 <a:solidFill>
-                  <a:srgbClr val="FFFFFF"/>
+                  <a:srgbClr val="2B2F36"/>
                 </a:solidFill>
                 <a:latin typeface="Calibri" pitchFamily="34" charset="0"/>
                 <a:ea typeface="Calibri" pitchFamily="34" charset="-122"/>
@@ -25416,13 +26949,13 @@
       </p:sp>
       <p:sp>
         <p:nvSpPr>
-          <p:cNvPr id="53" name="Shape 51"/>
+          <p:cNvPr id="95" name="Shape 93"/>
           <p:cNvSpPr/>
           <p:nvPr/>
         </p:nvSpPr>
         <p:spPr>
           <a:xfrm>
-            <a:off x="5811012" y="3493008"/>
+            <a:off x="9599676" y="3493008"/>
             <a:ext cx="0" cy="164592"/>
           </a:xfrm>
           <a:prstGeom prst="line">
@@ -25439,13 +26972,13 @@
       </p:sp>
       <p:sp>
         <p:nvSpPr>
-          <p:cNvPr id="54" name="Shape 52"/>
+          <p:cNvPr id="96" name="Shape 94"/>
           <p:cNvSpPr/>
           <p:nvPr/>
         </p:nvSpPr>
         <p:spPr>
           <a:xfrm>
-            <a:off x="5554980" y="3657600"/>
+            <a:off x="9343644" y="3657600"/>
             <a:ext cx="512064" cy="566928"/>
           </a:xfrm>
           <a:prstGeom prst="roundRect">
@@ -25454,11 +26987,11 @@
             </a:avLst>
           </a:prstGeom>
           <a:solidFill>
-            <a:srgbClr val="4A6FA5"/>
+            <a:srgbClr val="A9BEDC"/>
           </a:solidFill>
           <a:ln w="12700">
             <a:solidFill>
-              <a:srgbClr val="4A6FA5"/>
+              <a:srgbClr val="A9BEDC"/>
             </a:solidFill>
             <a:prstDash val="solid"/>
           </a:ln>
@@ -25466,13 +26999,13 @@
       </p:sp>
       <p:sp>
         <p:nvSpPr>
-          <p:cNvPr id="55" name="Text 53"/>
-          <p:cNvSpPr txBox="1"/>
-          <p:nvPr/>
-        </p:nvSpPr>
-        <p:spPr>
-          <a:xfrm>
-            <a:off x="5591556" y="3657600"/>
+          <p:cNvPr id="97" name="Text 95"/>
+          <p:cNvSpPr txBox="1"/>
+          <p:nvPr/>
+        </p:nvSpPr>
+        <p:spPr>
+          <a:xfrm>
+            <a:off x="9380220" y="3657600"/>
             <a:ext cx="438912" cy="566928"/>
           </a:xfrm>
           <a:prstGeom prst="rect">
@@ -25491,7 +27024,7 @@
             <a:r>
               <a:rPr lang="en-US" sz="700" b="1" dirty="0">
                 <a:solidFill>
-                  <a:srgbClr val="FFFFFF"/>
+                  <a:srgbClr val="2B2F36"/>
                 </a:solidFill>
                 <a:latin typeface="Calibri" pitchFamily="34" charset="0"/>
                 <a:ea typeface="Calibri" pitchFamily="34" charset="-122"/>
@@ -25508,7 +27041,7 @@
             <a:r>
               <a:rPr lang="en-US" sz="700" b="1" dirty="0">
                 <a:solidFill>
-                  <a:srgbClr val="FFFFFF"/>
+                  <a:srgbClr val="2B2F36"/>
                 </a:solidFill>
                 <a:latin typeface="Calibri" pitchFamily="34" charset="0"/>
                 <a:ea typeface="Calibri" pitchFamily="34" charset="-122"/>
@@ -25522,13 +27055,13 @@
       </p:sp>
       <p:sp>
         <p:nvSpPr>
-          <p:cNvPr id="56" name="Shape 54"/>
+          <p:cNvPr id="98" name="Shape 96"/>
           <p:cNvSpPr/>
           <p:nvPr/>
         </p:nvSpPr>
         <p:spPr>
           <a:xfrm>
-            <a:off x="6377940" y="3493008"/>
+            <a:off x="10166604" y="3493008"/>
             <a:ext cx="0" cy="164592"/>
           </a:xfrm>
           <a:prstGeom prst="line">
@@ -25545,13 +27078,13 @@
       </p:sp>
       <p:sp>
         <p:nvSpPr>
-          <p:cNvPr id="57" name="Shape 55"/>
+          <p:cNvPr id="99" name="Shape 97"/>
           <p:cNvSpPr/>
           <p:nvPr/>
         </p:nvSpPr>
         <p:spPr>
           <a:xfrm>
-            <a:off x="6121908" y="3657600"/>
+            <a:off x="9910572" y="3657600"/>
             <a:ext cx="512064" cy="566928"/>
           </a:xfrm>
           <a:prstGeom prst="roundRect">
@@ -25560,11 +27093,11 @@
             </a:avLst>
           </a:prstGeom>
           <a:solidFill>
-            <a:srgbClr val="4A6FA5"/>
+            <a:srgbClr val="A9BEDC"/>
           </a:solidFill>
           <a:ln w="12700">
             <a:solidFill>
-              <a:srgbClr val="4A6FA5"/>
+              <a:srgbClr val="A9BEDC"/>
             </a:solidFill>
             <a:prstDash val="solid"/>
           </a:ln>
@@ -25572,13 +27105,13 @@
       </p:sp>
       <p:sp>
         <p:nvSpPr>
-          <p:cNvPr id="58" name="Text 56"/>
-          <p:cNvSpPr txBox="1"/>
-          <p:nvPr/>
-        </p:nvSpPr>
-        <p:spPr>
-          <a:xfrm>
-            <a:off x="6158484" y="3657600"/>
+          <p:cNvPr id="100" name="Text 98"/>
+          <p:cNvSpPr txBox="1"/>
+          <p:nvPr/>
+        </p:nvSpPr>
+        <p:spPr>
+          <a:xfrm>
+            <a:off x="9947148" y="3657600"/>
             <a:ext cx="438912" cy="566928"/>
           </a:xfrm>
           <a:prstGeom prst="rect">
@@ -25597,7 +27130,7 @@
             <a:r>
               <a:rPr lang="en-US" sz="700" b="1" dirty="0">
                 <a:solidFill>
-                  <a:srgbClr val="FFFFFF"/>
+                  <a:srgbClr val="2B2F36"/>
                 </a:solidFill>
                 <a:latin typeface="Calibri" pitchFamily="34" charset="0"/>
                 <a:ea typeface="Calibri" pitchFamily="34" charset="-122"/>
@@ -25614,7 +27147,7 @@
             <a:r>
               <a:rPr lang="en-US" sz="700" b="1" dirty="0">
                 <a:solidFill>
-                  <a:srgbClr val="FFFFFF"/>
+                  <a:srgbClr val="2B2F36"/>
                 </a:solidFill>
                 <a:latin typeface="Calibri" pitchFamily="34" charset="0"/>
                 <a:ea typeface="Calibri" pitchFamily="34" charset="-122"/>
@@ -25628,13 +27161,13 @@
       </p:sp>
       <p:sp>
         <p:nvSpPr>
-          <p:cNvPr id="59" name="Shape 57"/>
+          <p:cNvPr id="101" name="Shape 99"/>
           <p:cNvSpPr/>
           <p:nvPr/>
         </p:nvSpPr>
         <p:spPr>
           <a:xfrm>
-            <a:off x="6944868" y="3493008"/>
+            <a:off x="10733532" y="3493008"/>
             <a:ext cx="0" cy="164592"/>
           </a:xfrm>
           <a:prstGeom prst="line">
@@ -25651,13 +27184,13 @@
       </p:sp>
       <p:sp>
         <p:nvSpPr>
-          <p:cNvPr id="60" name="Shape 58"/>
+          <p:cNvPr id="102" name="Shape 100"/>
           <p:cNvSpPr/>
           <p:nvPr/>
         </p:nvSpPr>
         <p:spPr>
           <a:xfrm>
-            <a:off x="6688836" y="3657600"/>
+            <a:off x="10477500" y="3657600"/>
             <a:ext cx="512064" cy="566928"/>
           </a:xfrm>
           <a:prstGeom prst="roundRect">
@@ -25666,11 +27199,11 @@
             </a:avLst>
           </a:prstGeom>
           <a:solidFill>
-            <a:srgbClr val="4A6FA5"/>
+            <a:srgbClr val="A9BEDC"/>
           </a:solidFill>
           <a:ln w="12700">
             <a:solidFill>
-              <a:srgbClr val="4A6FA5"/>
+              <a:srgbClr val="A9BEDC"/>
             </a:solidFill>
             <a:prstDash val="solid"/>
           </a:ln>
@@ -25678,13 +27211,13 @@
       </p:sp>
       <p:sp>
         <p:nvSpPr>
-          <p:cNvPr id="61" name="Text 59"/>
-          <p:cNvSpPr txBox="1"/>
-          <p:nvPr/>
-        </p:nvSpPr>
-        <p:spPr>
-          <a:xfrm>
-            <a:off x="6725412" y="3657600"/>
+          <p:cNvPr id="103" name="Text 101"/>
+          <p:cNvSpPr txBox="1"/>
+          <p:nvPr/>
+        </p:nvSpPr>
+        <p:spPr>
+          <a:xfrm>
+            <a:off x="10514076" y="3657600"/>
             <a:ext cx="438912" cy="566928"/>
           </a:xfrm>
           <a:prstGeom prst="rect">
@@ -25703,7 +27236,7 @@
             <a:r>
               <a:rPr lang="en-US" sz="700" b="1" dirty="0">
                 <a:solidFill>
-                  <a:srgbClr val="FFFFFF"/>
+                  <a:srgbClr val="2B2F36"/>
                 </a:solidFill>
                 <a:latin typeface="Calibri" pitchFamily="34" charset="0"/>
                 <a:ea typeface="Calibri" pitchFamily="34" charset="-122"/>
@@ -25720,7 +27253,7 @@
             <a:r>
               <a:rPr lang="en-US" sz="700" b="1" dirty="0">
                 <a:solidFill>
-                  <a:srgbClr val="FFFFFF"/>
+                  <a:srgbClr val="2B2F36"/>
                 </a:solidFill>
                 <a:latin typeface="Calibri" pitchFamily="34" charset="0"/>
                 <a:ea typeface="Calibri" pitchFamily="34" charset="-122"/>
@@ -25734,13 +27267,13 @@
       </p:sp>
       <p:sp>
         <p:nvSpPr>
-          <p:cNvPr id="62" name="Shape 60"/>
+          <p:cNvPr id="104" name="Shape 102"/>
           <p:cNvSpPr/>
           <p:nvPr/>
         </p:nvSpPr>
         <p:spPr>
           <a:xfrm>
-            <a:off x="7511796" y="3493008"/>
+            <a:off x="11300460" y="3493008"/>
             <a:ext cx="0" cy="164592"/>
           </a:xfrm>
           <a:prstGeom prst="line">
@@ -25757,13 +27290,13 @@
       </p:sp>
       <p:sp>
         <p:nvSpPr>
-          <p:cNvPr id="63" name="Shape 61"/>
+          <p:cNvPr id="105" name="Shape 103"/>
           <p:cNvSpPr/>
           <p:nvPr/>
         </p:nvSpPr>
         <p:spPr>
           <a:xfrm>
-            <a:off x="7255764" y="3657600"/>
+            <a:off x="11044428" y="3657600"/>
             <a:ext cx="512064" cy="566928"/>
           </a:xfrm>
           <a:prstGeom prst="roundRect">
@@ -25772,11 +27305,11 @@
             </a:avLst>
           </a:prstGeom>
           <a:solidFill>
-            <a:srgbClr val="4A6FA5"/>
+            <a:srgbClr val="A9BEDC"/>
           </a:solidFill>
           <a:ln w="12700">
             <a:solidFill>
-              <a:srgbClr val="4A6FA5"/>
+              <a:srgbClr val="A9BEDC"/>
             </a:solidFill>
             <a:prstDash val="solid"/>
           </a:ln>
@@ -25784,13 +27317,13 @@
       </p:sp>
       <p:sp>
         <p:nvSpPr>
-          <p:cNvPr id="64" name="Text 62"/>
-          <p:cNvSpPr txBox="1"/>
-          <p:nvPr/>
-        </p:nvSpPr>
-        <p:spPr>
-          <a:xfrm>
-            <a:off x="7292340" y="3657600"/>
+          <p:cNvPr id="106" name="Text 104"/>
+          <p:cNvSpPr txBox="1"/>
+          <p:nvPr/>
+        </p:nvSpPr>
+        <p:spPr>
+          <a:xfrm>
+            <a:off x="11081004" y="3657600"/>
             <a:ext cx="438912" cy="566928"/>
           </a:xfrm>
           <a:prstGeom prst="rect">
@@ -25809,7 +27342,7 @@
             <a:r>
               <a:rPr lang="en-US" sz="700" b="1" dirty="0">
                 <a:solidFill>
-                  <a:srgbClr val="FFFFFF"/>
+                  <a:srgbClr val="2B2F36"/>
                 </a:solidFill>
                 <a:latin typeface="Calibri" pitchFamily="34" charset="0"/>
                 <a:ea typeface="Calibri" pitchFamily="34" charset="-122"/>
@@ -25826,7 +27359,7 @@
             <a:r>
               <a:rPr lang="en-US" sz="700" b="1" dirty="0">
                 <a:solidFill>
-                  <a:srgbClr val="FFFFFF"/>
+                  <a:srgbClr val="2B2F36"/>
                 </a:solidFill>
                 <a:latin typeface="Calibri" pitchFamily="34" charset="0"/>
                 <a:ea typeface="Calibri" pitchFamily="34" charset="-122"/>
@@ -25840,13 +27373,13 @@
       </p:sp>
       <p:sp>
         <p:nvSpPr>
-          <p:cNvPr id="65" name="Shape 63"/>
+          <p:cNvPr id="107" name="Shape 105"/>
           <p:cNvSpPr/>
           <p:nvPr/>
         </p:nvSpPr>
         <p:spPr>
           <a:xfrm>
-            <a:off x="4750308" y="3529584"/>
+            <a:off x="8538972" y="3529584"/>
             <a:ext cx="274320" cy="274320"/>
           </a:xfrm>
           <a:prstGeom prst="ellipse">
@@ -25865,13 +27398,13 @@
       </p:sp>
       <p:sp>
         <p:nvSpPr>
-          <p:cNvPr id="66" name="Text 64"/>
-          <p:cNvSpPr txBox="1"/>
-          <p:nvPr/>
-        </p:nvSpPr>
-        <p:spPr>
-          <a:xfrm>
-            <a:off x="4750308" y="3529584"/>
+          <p:cNvPr id="108" name="Text 106"/>
+          <p:cNvSpPr txBox="1"/>
+          <p:nvPr/>
+        </p:nvSpPr>
+        <p:spPr>
+          <a:xfrm>
+            <a:off x="8538972" y="3529584"/>
             <a:ext cx="274320" cy="274320"/>
           </a:xfrm>
           <a:prstGeom prst="rect">
@@ -25904,13 +27437,13 @@
       </p:sp>
       <p:sp>
         <p:nvSpPr>
-          <p:cNvPr id="67" name="Shape 65"/>
+          <p:cNvPr id="109" name="Shape 107"/>
           <p:cNvSpPr/>
           <p:nvPr/>
         </p:nvSpPr>
         <p:spPr>
           <a:xfrm>
-            <a:off x="5317236" y="3529584"/>
+            <a:off x="9105900" y="3529584"/>
             <a:ext cx="274320" cy="274320"/>
           </a:xfrm>
           <a:prstGeom prst="ellipse">
@@ -25929,13 +27462,13 @@
       </p:sp>
       <p:sp>
         <p:nvSpPr>
-          <p:cNvPr id="68" name="Text 66"/>
-          <p:cNvSpPr txBox="1"/>
-          <p:nvPr/>
-        </p:nvSpPr>
-        <p:spPr>
-          <a:xfrm>
-            <a:off x="5317236" y="3529584"/>
+          <p:cNvPr id="110" name="Text 108"/>
+          <p:cNvSpPr txBox="1"/>
+          <p:nvPr/>
+        </p:nvSpPr>
+        <p:spPr>
+          <a:xfrm>
+            <a:off x="9105900" y="3529584"/>
             <a:ext cx="274320" cy="274320"/>
           </a:xfrm>
           <a:prstGeom prst="rect">
@@ -25968,13 +27501,13 @@
       </p:sp>
       <p:sp>
         <p:nvSpPr>
-          <p:cNvPr id="69" name="Shape 67"/>
+          <p:cNvPr id="111" name="Shape 109"/>
           <p:cNvSpPr/>
           <p:nvPr/>
         </p:nvSpPr>
         <p:spPr>
           <a:xfrm>
-            <a:off x="5884164" y="3529584"/>
+            <a:off x="9672828" y="3529584"/>
             <a:ext cx="274320" cy="274320"/>
           </a:xfrm>
           <a:prstGeom prst="ellipse">
@@ -25993,13 +27526,13 @@
       </p:sp>
       <p:sp>
         <p:nvSpPr>
-          <p:cNvPr id="70" name="Text 68"/>
-          <p:cNvSpPr txBox="1"/>
-          <p:nvPr/>
-        </p:nvSpPr>
-        <p:spPr>
-          <a:xfrm>
-            <a:off x="5884164" y="3529584"/>
+          <p:cNvPr id="112" name="Text 110"/>
+          <p:cNvSpPr txBox="1"/>
+          <p:nvPr/>
+        </p:nvSpPr>
+        <p:spPr>
+          <a:xfrm>
+            <a:off x="9672828" y="3529584"/>
             <a:ext cx="274320" cy="274320"/>
           </a:xfrm>
           <a:prstGeom prst="rect">
@@ -26032,13 +27565,13 @@
       </p:sp>
       <p:sp>
         <p:nvSpPr>
-          <p:cNvPr id="71" name="Shape 69"/>
+          <p:cNvPr id="113" name="Shape 111"/>
           <p:cNvSpPr/>
           <p:nvPr/>
         </p:nvSpPr>
         <p:spPr>
           <a:xfrm>
-            <a:off x="6451092" y="3529584"/>
+            <a:off x="10239756" y="3529584"/>
             <a:ext cx="274320" cy="274320"/>
           </a:xfrm>
           <a:prstGeom prst="ellipse">
@@ -26057,13 +27590,13 @@
       </p:sp>
       <p:sp>
         <p:nvSpPr>
-          <p:cNvPr id="72" name="Text 70"/>
-          <p:cNvSpPr txBox="1"/>
-          <p:nvPr/>
-        </p:nvSpPr>
-        <p:spPr>
-          <a:xfrm>
-            <a:off x="6451092" y="3529584"/>
+          <p:cNvPr id="114" name="Text 112"/>
+          <p:cNvSpPr txBox="1"/>
+          <p:nvPr/>
+        </p:nvSpPr>
+        <p:spPr>
+          <a:xfrm>
+            <a:off x="10239756" y="3529584"/>
             <a:ext cx="274320" cy="274320"/>
           </a:xfrm>
           <a:prstGeom prst="rect">
@@ -26096,13 +27629,13 @@
       </p:sp>
       <p:sp>
         <p:nvSpPr>
-          <p:cNvPr id="73" name="Shape 71"/>
+          <p:cNvPr id="115" name="Shape 113"/>
           <p:cNvSpPr/>
           <p:nvPr/>
         </p:nvSpPr>
         <p:spPr>
           <a:xfrm>
-            <a:off x="7018020" y="3529584"/>
+            <a:off x="10806684" y="3529584"/>
             <a:ext cx="274320" cy="274320"/>
           </a:xfrm>
           <a:prstGeom prst="ellipse">
@@ -26121,13 +27654,13 @@
       </p:sp>
       <p:sp>
         <p:nvSpPr>
-          <p:cNvPr id="74" name="Text 72"/>
-          <p:cNvSpPr txBox="1"/>
-          <p:nvPr/>
-        </p:nvSpPr>
-        <p:spPr>
-          <a:xfrm>
-            <a:off x="7018020" y="3529584"/>
+          <p:cNvPr id="116" name="Text 114"/>
+          <p:cNvSpPr txBox="1"/>
+          <p:nvPr/>
+        </p:nvSpPr>
+        <p:spPr>
+          <a:xfrm>
+            <a:off x="10806684" y="3529584"/>
             <a:ext cx="274320" cy="274320"/>
           </a:xfrm>
           <a:prstGeom prst="rect">
@@ -26160,13 +27693,13 @@
       </p:sp>
       <p:sp>
         <p:nvSpPr>
-          <p:cNvPr id="75" name="Shape 73"/>
+          <p:cNvPr id="117" name="Shape 115"/>
           <p:cNvSpPr/>
           <p:nvPr/>
         </p:nvSpPr>
         <p:spPr>
           <a:xfrm>
-            <a:off x="7584948" y="3529584"/>
+            <a:off x="11373612" y="3529584"/>
             <a:ext cx="274320" cy="274320"/>
           </a:xfrm>
           <a:prstGeom prst="ellipse">
@@ -26185,13 +27718,13 @@
       </p:sp>
       <p:sp>
         <p:nvSpPr>
-          <p:cNvPr id="76" name="Text 74"/>
-          <p:cNvSpPr txBox="1"/>
-          <p:nvPr/>
-        </p:nvSpPr>
-        <p:spPr>
-          <a:xfrm>
-            <a:off x="7584948" y="3529584"/>
+          <p:cNvPr id="118" name="Text 116"/>
+          <p:cNvSpPr txBox="1"/>
+          <p:nvPr/>
+        </p:nvSpPr>
+        <p:spPr>
+          <a:xfrm>
+            <a:off x="11373612" y="3529584"/>
             <a:ext cx="274320" cy="274320"/>
           </a:xfrm>
           <a:prstGeom prst="rect">
@@ -26224,13 +27757,13 @@
       </p:sp>
       <p:sp>
         <p:nvSpPr>
-          <p:cNvPr id="77" name="Text 75"/>
-          <p:cNvSpPr txBox="1"/>
-          <p:nvPr/>
-        </p:nvSpPr>
-        <p:spPr>
-          <a:xfrm>
-            <a:off x="4337304" y="4343400"/>
+          <p:cNvPr id="119" name="Text 117"/>
+          <p:cNvSpPr txBox="1"/>
+          <p:nvPr/>
+        </p:nvSpPr>
+        <p:spPr>
+          <a:xfrm>
+            <a:off x="8125968" y="4343400"/>
             <a:ext cx="3514344" cy="274320"/>
           </a:xfrm>
           <a:prstGeom prst="rect">
@@ -26263,1281 +27796,7 @@
       </p:sp>
       <p:sp>
         <p:nvSpPr>
-          <p:cNvPr id="78" name="Text 76"/>
-          <p:cNvSpPr txBox="1"/>
-          <p:nvPr/>
-        </p:nvSpPr>
-        <p:spPr>
-          <a:xfrm>
-            <a:off x="4520184" y="5074920"/>
-            <a:ext cx="3148584" cy="822960"/>
-          </a:xfrm>
-          <a:prstGeom prst="rect">
-            <a:avLst/>
-          </a:prstGeom>
-          <a:noFill/>
-          <a:ln/>
-        </p:spPr>
-        <p:txBody>
-          <a:bodyPr wrap="square" lIns="0" tIns="0" rIns="0" bIns="0" rtlCol="0" anchor="t"/>
-          <a:lstStyle/>
-          <a:p>
-            <a:pPr indent="0" marL="0">
-              <a:buNone/>
-            </a:pPr>
-            <a:r>
-              <a:rPr lang="en-US" sz="950" dirty="0">
-                <a:solidFill>
-                  <a:srgbClr val="5B6470"/>
-                </a:solidFill>
-                <a:latin typeface="Calibri" pitchFamily="34" charset="0"/>
-                <a:ea typeface="Calibri" pitchFamily="34" charset="-122"/>
-                <a:cs typeface="Calibri" pitchFamily="34" charset="-120"/>
-              </a:rPr>
-              <a:t>Reconoce las competencias adquiridas en todo el equipo y conserva el respaldo mutuo entre pares. La estructura sigue siendo plana.</a:t>
-            </a:r>
-            <a:endParaRPr lang="en-US" sz="950" dirty="0"/>
-          </a:p>
-        </p:txBody>
-      </p:sp>
-      <p:sp>
-        <p:nvSpPr>
-          <p:cNvPr id="79" name="Shape 77"/>
-          <p:cNvSpPr/>
-          <p:nvPr/>
-        </p:nvSpPr>
-        <p:spPr>
-          <a:xfrm>
-            <a:off x="8125968" y="1874520"/>
-            <a:ext cx="3514344" cy="4069080"/>
-          </a:xfrm>
-          <a:prstGeom prst="roundRect">
-            <a:avLst>
-              <a:gd name="adj" fmla="val 1561"/>
-            </a:avLst>
-          </a:prstGeom>
-          <a:solidFill>
-            <a:srgbClr val="FFFFFF"/>
-          </a:solidFill>
-          <a:ln w="9525">
-            <a:solidFill>
-              <a:srgbClr val="E3E6EA"/>
-            </a:solidFill>
-            <a:prstDash val="solid"/>
-          </a:ln>
-        </p:spPr>
-      </p:sp>
-      <p:sp>
-        <p:nvSpPr>
-          <p:cNvPr id="80" name="Text 78"/>
-          <p:cNvSpPr txBox="1"/>
-          <p:nvPr/>
-        </p:nvSpPr>
-        <p:spPr>
-          <a:xfrm>
-            <a:off x="8308848" y="1965960"/>
-            <a:ext cx="3148584" cy="256032"/>
-          </a:xfrm>
-          <a:prstGeom prst="rect">
-            <a:avLst/>
-          </a:prstGeom>
-          <a:noFill/>
-          <a:ln/>
-        </p:spPr>
-        <p:txBody>
-          <a:bodyPr wrap="square" lIns="0" tIns="0" rIns="0" bIns="0" rtlCol="0" anchor="ctr"/>
-          <a:lstStyle/>
-          <a:p>
-            <a:pPr indent="0" marL="0">
-              <a:buNone/>
-            </a:pPr>
-            <a:r>
-              <a:rPr lang="en-US" sz="900" b="1" spc="200" kern="0" dirty="0">
-                <a:solidFill>
-                  <a:srgbClr val="4A6FA5"/>
-                </a:solidFill>
-                <a:latin typeface="Calibri" pitchFamily="34" charset="0"/>
-                <a:ea typeface="Calibri" pitchFamily="34" charset="-122"/>
-                <a:cs typeface="Calibri" pitchFamily="34" charset="-120"/>
-              </a:rPr>
-              <a:t>ALTERNATIVA 2 · DOS CARGOS SENIOR</a:t>
-            </a:r>
-            <a:endParaRPr lang="en-US" sz="900" dirty="0"/>
-          </a:p>
-        </p:txBody>
-      </p:sp>
-      <p:sp>
-        <p:nvSpPr>
-          <p:cNvPr id="81" name="Shape 79"/>
-          <p:cNvSpPr/>
-          <p:nvPr/>
-        </p:nvSpPr>
-        <p:spPr>
-          <a:xfrm>
-            <a:off x="9197340" y="2377440"/>
-            <a:ext cx="1371600" cy="329184"/>
-          </a:xfrm>
-          <a:prstGeom prst="roundRect">
-            <a:avLst>
-              <a:gd name="adj" fmla="val 13889"/>
-            </a:avLst>
-          </a:prstGeom>
-          <a:solidFill>
-            <a:srgbClr val="E6ECF5"/>
-          </a:solidFill>
-          <a:ln w="12700">
-            <a:solidFill>
-              <a:srgbClr val="E6ECF5"/>
-            </a:solidFill>
-            <a:prstDash val="solid"/>
-          </a:ln>
-        </p:spPr>
-      </p:sp>
-      <p:sp>
-        <p:nvSpPr>
-          <p:cNvPr id="82" name="Text 80"/>
-          <p:cNvSpPr txBox="1"/>
-          <p:nvPr/>
-        </p:nvSpPr>
-        <p:spPr>
-          <a:xfrm>
-            <a:off x="9233916" y="2377440"/>
-            <a:ext cx="1298448" cy="329184"/>
-          </a:xfrm>
-          <a:prstGeom prst="rect">
-            <a:avLst/>
-          </a:prstGeom>
-          <a:noFill/>
-          <a:ln/>
-        </p:spPr>
-        <p:txBody>
-          <a:bodyPr wrap="square" lIns="0" tIns="0" rIns="0" bIns="0" rtlCol="0" anchor="ctr"/>
-          <a:lstStyle/>
-          <a:p>
-            <a:pPr algn="ctr" indent="0" marL="0">
-              <a:buNone/>
-            </a:pPr>
-            <a:r>
-              <a:rPr lang="en-US" sz="850" b="1" dirty="0">
-                <a:solidFill>
-                  <a:srgbClr val="34517D"/>
-                </a:solidFill>
-                <a:latin typeface="Calibri" pitchFamily="34" charset="0"/>
-                <a:ea typeface="Calibri" pitchFamily="34" charset="-122"/>
-                <a:cs typeface="Calibri" pitchFamily="34" charset="-120"/>
-              </a:rPr>
-              <a:t>Subgerente</a:t>
-            </a:r>
-            <a:endParaRPr lang="en-US" sz="850" dirty="0"/>
-          </a:p>
-        </p:txBody>
-      </p:sp>
-      <p:sp>
-        <p:nvSpPr>
-          <p:cNvPr id="83" name="Shape 81"/>
-          <p:cNvSpPr/>
-          <p:nvPr/>
-        </p:nvSpPr>
-        <p:spPr>
-          <a:xfrm>
-            <a:off x="9883140" y="2706624"/>
-            <a:ext cx="0" cy="201168"/>
-          </a:xfrm>
-          <a:prstGeom prst="line">
-            <a:avLst/>
-          </a:prstGeom>
-          <a:noFill/>
-          <a:ln w="15875">
-            <a:solidFill>
-              <a:srgbClr val="A9BEDC"/>
-            </a:solidFill>
-            <a:prstDash val="solid"/>
-          </a:ln>
-        </p:spPr>
-      </p:sp>
-      <p:sp>
-        <p:nvSpPr>
-          <p:cNvPr id="84" name="Shape 82"/>
-          <p:cNvSpPr/>
-          <p:nvPr/>
-        </p:nvSpPr>
-        <p:spPr>
-          <a:xfrm>
-            <a:off x="9197340" y="2907792"/>
-            <a:ext cx="1371600" cy="329184"/>
-          </a:xfrm>
-          <a:prstGeom prst="roundRect">
-            <a:avLst>
-              <a:gd name="adj" fmla="val 13889"/>
-            </a:avLst>
-          </a:prstGeom>
-          <a:solidFill>
-            <a:srgbClr val="E6ECF5"/>
-          </a:solidFill>
-          <a:ln w="12700">
-            <a:solidFill>
-              <a:srgbClr val="E6ECF5"/>
-            </a:solidFill>
-            <a:prstDash val="solid"/>
-          </a:ln>
-        </p:spPr>
-      </p:sp>
-      <p:sp>
-        <p:nvSpPr>
-          <p:cNvPr id="85" name="Text 83"/>
-          <p:cNvSpPr txBox="1"/>
-          <p:nvPr/>
-        </p:nvSpPr>
-        <p:spPr>
-          <a:xfrm>
-            <a:off x="9233916" y="2907792"/>
-            <a:ext cx="1298448" cy="329184"/>
-          </a:xfrm>
-          <a:prstGeom prst="rect">
-            <a:avLst/>
-          </a:prstGeom>
-          <a:noFill/>
-          <a:ln/>
-        </p:spPr>
-        <p:txBody>
-          <a:bodyPr wrap="square" lIns="0" tIns="0" rIns="0" bIns="0" rtlCol="0" anchor="ctr"/>
-          <a:lstStyle/>
-          <a:p>
-            <a:pPr algn="ctr" indent="0" marL="0">
-              <a:buNone/>
-            </a:pPr>
-            <a:r>
-              <a:rPr lang="en-US" sz="850" b="1" dirty="0">
-                <a:solidFill>
-                  <a:srgbClr val="34517D"/>
-                </a:solidFill>
-                <a:latin typeface="Calibri" pitchFamily="34" charset="0"/>
-                <a:ea typeface="Calibri" pitchFamily="34" charset="-122"/>
-                <a:cs typeface="Calibri" pitchFamily="34" charset="-120"/>
-              </a:rPr>
-              <a:t>Jefe Normativo</a:t>
-            </a:r>
-            <a:endParaRPr lang="en-US" sz="850" dirty="0"/>
-          </a:p>
-        </p:txBody>
-      </p:sp>
-      <p:sp>
-        <p:nvSpPr>
-          <p:cNvPr id="86" name="Shape 84"/>
-          <p:cNvSpPr/>
-          <p:nvPr/>
-        </p:nvSpPr>
-        <p:spPr>
-          <a:xfrm>
-            <a:off x="9883140" y="3236976"/>
-            <a:ext cx="0" cy="1014984"/>
-          </a:xfrm>
-          <a:prstGeom prst="line">
-            <a:avLst/>
-          </a:prstGeom>
-          <a:noFill/>
-          <a:ln w="15875">
-            <a:solidFill>
-              <a:srgbClr val="A9BEDC"/>
-            </a:solidFill>
-            <a:prstDash val="solid"/>
-          </a:ln>
-        </p:spPr>
-      </p:sp>
-      <p:sp>
-        <p:nvSpPr>
-          <p:cNvPr id="87" name="Shape 85"/>
-          <p:cNvSpPr/>
-          <p:nvPr/>
-        </p:nvSpPr>
-        <p:spPr>
-          <a:xfrm>
-            <a:off x="8465820" y="3611880"/>
-            <a:ext cx="2834640" cy="0"/>
-          </a:xfrm>
-          <a:prstGeom prst="line">
-            <a:avLst/>
-          </a:prstGeom>
-          <a:noFill/>
-          <a:ln w="15875">
-            <a:solidFill>
-              <a:srgbClr val="A9BEDC"/>
-            </a:solidFill>
-            <a:prstDash val="solid"/>
-          </a:ln>
-        </p:spPr>
-      </p:sp>
-      <p:sp>
-        <p:nvSpPr>
-          <p:cNvPr id="88" name="Shape 86"/>
-          <p:cNvSpPr/>
-          <p:nvPr/>
-        </p:nvSpPr>
-        <p:spPr>
-          <a:xfrm>
-            <a:off x="8191500" y="3383280"/>
-            <a:ext cx="1234440" cy="457200"/>
-          </a:xfrm>
-          <a:prstGeom prst="roundRect">
-            <a:avLst>
-              <a:gd name="adj" fmla="val 10000"/>
-            </a:avLst>
-          </a:prstGeom>
-          <a:solidFill>
-            <a:srgbClr val="34517D"/>
-          </a:solidFill>
-          <a:ln w="12700">
-            <a:solidFill>
-              <a:srgbClr val="34517D"/>
-            </a:solidFill>
-            <a:prstDash val="solid"/>
-          </a:ln>
-        </p:spPr>
-      </p:sp>
-      <p:sp>
-        <p:nvSpPr>
-          <p:cNvPr id="89" name="Text 87"/>
-          <p:cNvSpPr txBox="1"/>
-          <p:nvPr/>
-        </p:nvSpPr>
-        <p:spPr>
-          <a:xfrm>
-            <a:off x="8228076" y="3383280"/>
-            <a:ext cx="1161288" cy="457200"/>
-          </a:xfrm>
-          <a:prstGeom prst="rect">
-            <a:avLst/>
-          </a:prstGeom>
-          <a:noFill/>
-          <a:ln/>
-        </p:spPr>
-        <p:txBody>
-          <a:bodyPr wrap="square" lIns="0" tIns="0" rIns="0" bIns="0" rtlCol="0" anchor="ctr"/>
-          <a:lstStyle/>
-          <a:p>
-            <a:pPr algn="ctr" indent="0" marL="0">
-              <a:buNone/>
-            </a:pPr>
-            <a:r>
-              <a:rPr lang="en-US" sz="750" b="1" dirty="0">
-                <a:solidFill>
-                  <a:srgbClr val="FFFFFF"/>
-                </a:solidFill>
-                <a:latin typeface="Calibri" pitchFamily="34" charset="0"/>
-                <a:ea typeface="Calibri" pitchFamily="34" charset="-122"/>
-                <a:cs typeface="Calibri" pitchFamily="34" charset="-120"/>
-              </a:rPr>
-              <a:t>Senior Especialista</a:t>
-            </a:r>
-            <a:endParaRPr lang="en-US" sz="750" dirty="0"/>
-          </a:p>
-          <a:p>
-            <a:pPr algn="ctr" indent="0" marL="0">
-              <a:buNone/>
-            </a:pPr>
-            <a:r>
-              <a:rPr lang="en-US" sz="750" b="1" dirty="0">
-                <a:solidFill>
-                  <a:srgbClr val="FFFFFF"/>
-                </a:solidFill>
-                <a:latin typeface="Calibri" pitchFamily="34" charset="0"/>
-                <a:ea typeface="Calibri" pitchFamily="34" charset="-122"/>
-                <a:cs typeface="Calibri" pitchFamily="34" charset="-120"/>
-              </a:rPr>
-              <a:t>Normativo</a:t>
-            </a:r>
-            <a:endParaRPr lang="en-US" sz="750" dirty="0"/>
-          </a:p>
-        </p:txBody>
-      </p:sp>
-      <p:sp>
-        <p:nvSpPr>
-          <p:cNvPr id="90" name="Shape 88"/>
-          <p:cNvSpPr/>
-          <p:nvPr/>
-        </p:nvSpPr>
-        <p:spPr>
-          <a:xfrm>
-            <a:off x="9288780" y="3273552"/>
-            <a:ext cx="274320" cy="274320"/>
-          </a:xfrm>
-          <a:prstGeom prst="ellipse">
-            <a:avLst/>
-          </a:prstGeom>
-          <a:solidFill>
-            <a:srgbClr val="6A9B6E"/>
-          </a:solidFill>
-          <a:ln w="12700">
-            <a:solidFill>
-              <a:srgbClr val="FFFFFF"/>
-            </a:solidFill>
-            <a:prstDash val="solid"/>
-          </a:ln>
-        </p:spPr>
-      </p:sp>
-      <p:sp>
-        <p:nvSpPr>
-          <p:cNvPr id="91" name="Text 89"/>
-          <p:cNvSpPr txBox="1"/>
-          <p:nvPr/>
-        </p:nvSpPr>
-        <p:spPr>
-          <a:xfrm>
-            <a:off x="9288780" y="3273552"/>
-            <a:ext cx="274320" cy="274320"/>
-          </a:xfrm>
-          <a:prstGeom prst="rect">
-            <a:avLst/>
-          </a:prstGeom>
-          <a:noFill/>
-          <a:ln/>
-        </p:spPr>
-        <p:txBody>
-          <a:bodyPr wrap="square" lIns="0" tIns="0" rIns="0" bIns="0" rtlCol="0" anchor="ctr"/>
-          <a:lstStyle/>
-          <a:p>
-            <a:pPr algn="ctr" indent="0" marL="0">
-              <a:buNone/>
-            </a:pPr>
-            <a:r>
-              <a:rPr lang="en-US" sz="800" b="1" dirty="0">
-                <a:solidFill>
-                  <a:srgbClr val="FFFFFF"/>
-                </a:solidFill>
-                <a:latin typeface="Calibri" pitchFamily="34" charset="0"/>
-                <a:ea typeface="Calibri" pitchFamily="34" charset="-122"/>
-                <a:cs typeface="Calibri" pitchFamily="34" charset="-120"/>
-              </a:rPr>
-              <a:t>+2</a:t>
-            </a:r>
-            <a:endParaRPr lang="en-US" sz="800" dirty="0"/>
-          </a:p>
-        </p:txBody>
-      </p:sp>
-      <p:sp>
-        <p:nvSpPr>
-          <p:cNvPr id="92" name="Shape 90"/>
-          <p:cNvSpPr/>
-          <p:nvPr/>
-        </p:nvSpPr>
-        <p:spPr>
-          <a:xfrm>
-            <a:off x="10340340" y="3383280"/>
-            <a:ext cx="1234440" cy="457200"/>
-          </a:xfrm>
-          <a:prstGeom prst="roundRect">
-            <a:avLst>
-              <a:gd name="adj" fmla="val 10000"/>
-            </a:avLst>
-          </a:prstGeom>
-          <a:solidFill>
-            <a:srgbClr val="34517D"/>
-          </a:solidFill>
-          <a:ln w="12700">
-            <a:solidFill>
-              <a:srgbClr val="34517D"/>
-            </a:solidFill>
-            <a:prstDash val="solid"/>
-          </a:ln>
-        </p:spPr>
-      </p:sp>
-      <p:sp>
-        <p:nvSpPr>
-          <p:cNvPr id="93" name="Text 91"/>
-          <p:cNvSpPr txBox="1"/>
-          <p:nvPr/>
-        </p:nvSpPr>
-        <p:spPr>
-          <a:xfrm>
-            <a:off x="10376916" y="3383280"/>
-            <a:ext cx="1161288" cy="457200"/>
-          </a:xfrm>
-          <a:prstGeom prst="rect">
-            <a:avLst/>
-          </a:prstGeom>
-          <a:noFill/>
-          <a:ln/>
-        </p:spPr>
-        <p:txBody>
-          <a:bodyPr wrap="square" lIns="0" tIns="0" rIns="0" bIns="0" rtlCol="0" anchor="ctr"/>
-          <a:lstStyle/>
-          <a:p>
-            <a:pPr algn="ctr" indent="0" marL="0">
-              <a:buNone/>
-            </a:pPr>
-            <a:r>
-              <a:rPr lang="en-US" sz="750" b="1" dirty="0">
-                <a:solidFill>
-                  <a:srgbClr val="FFFFFF"/>
-                </a:solidFill>
-                <a:latin typeface="Calibri" pitchFamily="34" charset="0"/>
-                <a:ea typeface="Calibri" pitchFamily="34" charset="-122"/>
-                <a:cs typeface="Calibri" pitchFamily="34" charset="-120"/>
-              </a:rPr>
-              <a:t>Senior TI</a:t>
-            </a:r>
-            <a:endParaRPr lang="en-US" sz="750" dirty="0"/>
-          </a:p>
-          <a:p>
-            <a:pPr algn="ctr" indent="0" marL="0">
-              <a:buNone/>
-            </a:pPr>
-            <a:r>
-              <a:rPr lang="en-US" sz="750" b="1" dirty="0">
-                <a:solidFill>
-                  <a:srgbClr val="FFFFFF"/>
-                </a:solidFill>
-                <a:latin typeface="Calibri" pitchFamily="34" charset="0"/>
-                <a:ea typeface="Calibri" pitchFamily="34" charset="-122"/>
-                <a:cs typeface="Calibri" pitchFamily="34" charset="-120"/>
-              </a:rPr>
-              <a:t>(datos y automatización)</a:t>
-            </a:r>
-            <a:endParaRPr lang="en-US" sz="750" dirty="0"/>
-          </a:p>
-        </p:txBody>
-      </p:sp>
-      <p:sp>
-        <p:nvSpPr>
-          <p:cNvPr id="94" name="Shape 92"/>
-          <p:cNvSpPr/>
-          <p:nvPr/>
-        </p:nvSpPr>
-        <p:spPr>
-          <a:xfrm>
-            <a:off x="11437620" y="3273552"/>
-            <a:ext cx="274320" cy="274320"/>
-          </a:xfrm>
-          <a:prstGeom prst="ellipse">
-            <a:avLst/>
-          </a:prstGeom>
-          <a:solidFill>
-            <a:srgbClr val="6A9B6E"/>
-          </a:solidFill>
-          <a:ln w="12700">
-            <a:solidFill>
-              <a:srgbClr val="FFFFFF"/>
-            </a:solidFill>
-            <a:prstDash val="solid"/>
-          </a:ln>
-        </p:spPr>
-      </p:sp>
-      <p:sp>
-        <p:nvSpPr>
-          <p:cNvPr id="95" name="Text 93"/>
-          <p:cNvSpPr txBox="1"/>
-          <p:nvPr/>
-        </p:nvSpPr>
-        <p:spPr>
-          <a:xfrm>
-            <a:off x="11437620" y="3273552"/>
-            <a:ext cx="274320" cy="274320"/>
-          </a:xfrm>
-          <a:prstGeom prst="rect">
-            <a:avLst/>
-          </a:prstGeom>
-          <a:noFill/>
-          <a:ln/>
-        </p:spPr>
-        <p:txBody>
-          <a:bodyPr wrap="square" lIns="0" tIns="0" rIns="0" bIns="0" rtlCol="0" anchor="ctr"/>
-          <a:lstStyle/>
-          <a:p>
-            <a:pPr algn="ctr" indent="0" marL="0">
-              <a:buNone/>
-            </a:pPr>
-            <a:r>
-              <a:rPr lang="en-US" sz="800" b="1" dirty="0">
-                <a:solidFill>
-                  <a:srgbClr val="FFFFFF"/>
-                </a:solidFill>
-                <a:latin typeface="Calibri" pitchFamily="34" charset="0"/>
-                <a:ea typeface="Calibri" pitchFamily="34" charset="-122"/>
-                <a:cs typeface="Calibri" pitchFamily="34" charset="-120"/>
-              </a:rPr>
-              <a:t>+2</a:t>
-            </a:r>
-            <a:endParaRPr lang="en-US" sz="800" dirty="0"/>
-          </a:p>
-        </p:txBody>
-      </p:sp>
-      <p:sp>
-        <p:nvSpPr>
-          <p:cNvPr id="96" name="Shape 94"/>
-          <p:cNvSpPr/>
-          <p:nvPr/>
-        </p:nvSpPr>
-        <p:spPr>
-          <a:xfrm>
-            <a:off x="8676132" y="4251960"/>
-            <a:ext cx="2414016" cy="0"/>
-          </a:xfrm>
-          <a:prstGeom prst="line">
-            <a:avLst/>
-          </a:prstGeom>
-          <a:noFill/>
-          <a:ln w="15875">
-            <a:solidFill>
-              <a:srgbClr val="A9BEDC"/>
-            </a:solidFill>
-            <a:prstDash val="solid"/>
-          </a:ln>
-        </p:spPr>
-      </p:sp>
-      <p:sp>
-        <p:nvSpPr>
-          <p:cNvPr id="97" name="Shape 95"/>
-          <p:cNvSpPr/>
-          <p:nvPr/>
-        </p:nvSpPr>
-        <p:spPr>
-          <a:xfrm>
-            <a:off x="8676132" y="4251960"/>
-            <a:ext cx="0" cy="164592"/>
-          </a:xfrm>
-          <a:prstGeom prst="line">
-            <a:avLst/>
-          </a:prstGeom>
-          <a:noFill/>
-          <a:ln w="15875">
-            <a:solidFill>
-              <a:srgbClr val="A9BEDC"/>
-            </a:solidFill>
-            <a:prstDash val="solid"/>
-          </a:ln>
-        </p:spPr>
-      </p:sp>
-      <p:sp>
-        <p:nvSpPr>
-          <p:cNvPr id="98" name="Shape 96"/>
-          <p:cNvSpPr/>
-          <p:nvPr/>
-        </p:nvSpPr>
-        <p:spPr>
-          <a:xfrm>
-            <a:off x="8319516" y="4416552"/>
-            <a:ext cx="713232" cy="384048"/>
-          </a:xfrm>
-          <a:prstGeom prst="roundRect">
-            <a:avLst>
-              <a:gd name="adj" fmla="val 11905"/>
-            </a:avLst>
-          </a:prstGeom>
-          <a:solidFill>
-            <a:srgbClr val="4A6FA5"/>
-          </a:solidFill>
-          <a:ln w="12700">
-            <a:solidFill>
-              <a:srgbClr val="4A6FA5"/>
-            </a:solidFill>
-            <a:prstDash val="solid"/>
-          </a:ln>
-        </p:spPr>
-      </p:sp>
-      <p:sp>
-        <p:nvSpPr>
-          <p:cNvPr id="99" name="Text 97"/>
-          <p:cNvSpPr txBox="1"/>
-          <p:nvPr/>
-        </p:nvSpPr>
-        <p:spPr>
-          <a:xfrm>
-            <a:off x="8356092" y="4416552"/>
-            <a:ext cx="640080" cy="384048"/>
-          </a:xfrm>
-          <a:prstGeom prst="rect">
-            <a:avLst/>
-          </a:prstGeom>
-          <a:noFill/>
-          <a:ln/>
-        </p:spPr>
-        <p:txBody>
-          <a:bodyPr wrap="square" lIns="0" tIns="0" rIns="0" bIns="0" rtlCol="0" anchor="ctr"/>
-          <a:lstStyle/>
-          <a:p>
-            <a:pPr algn="ctr" indent="0" marL="0">
-              <a:buNone/>
-            </a:pPr>
-            <a:r>
-              <a:rPr lang="en-US" sz="800" b="1" dirty="0">
-                <a:solidFill>
-                  <a:srgbClr val="FFFFFF"/>
-                </a:solidFill>
-                <a:latin typeface="Calibri" pitchFamily="34" charset="0"/>
-                <a:ea typeface="Calibri" pitchFamily="34" charset="-122"/>
-                <a:cs typeface="Calibri" pitchFamily="34" charset="-120"/>
-              </a:rPr>
-              <a:t>Pleno</a:t>
-            </a:r>
-            <a:endParaRPr lang="en-US" sz="800" dirty="0"/>
-          </a:p>
-        </p:txBody>
-      </p:sp>
-      <p:sp>
-        <p:nvSpPr>
-          <p:cNvPr id="100" name="Shape 98"/>
-          <p:cNvSpPr/>
-          <p:nvPr/>
-        </p:nvSpPr>
-        <p:spPr>
-          <a:xfrm>
-            <a:off x="9480804" y="4251960"/>
-            <a:ext cx="0" cy="164592"/>
-          </a:xfrm>
-          <a:prstGeom prst="line">
-            <a:avLst/>
-          </a:prstGeom>
-          <a:noFill/>
-          <a:ln w="15875">
-            <a:solidFill>
-              <a:srgbClr val="A9BEDC"/>
-            </a:solidFill>
-            <a:prstDash val="solid"/>
-          </a:ln>
-        </p:spPr>
-      </p:sp>
-      <p:sp>
-        <p:nvSpPr>
-          <p:cNvPr id="101" name="Shape 99"/>
-          <p:cNvSpPr/>
-          <p:nvPr/>
-        </p:nvSpPr>
-        <p:spPr>
-          <a:xfrm>
-            <a:off x="9124188" y="4416552"/>
-            <a:ext cx="713232" cy="384048"/>
-          </a:xfrm>
-          <a:prstGeom prst="roundRect">
-            <a:avLst>
-              <a:gd name="adj" fmla="val 11905"/>
-            </a:avLst>
-          </a:prstGeom>
-          <a:solidFill>
-            <a:srgbClr val="4A6FA5"/>
-          </a:solidFill>
-          <a:ln w="12700">
-            <a:solidFill>
-              <a:srgbClr val="4A6FA5"/>
-            </a:solidFill>
-            <a:prstDash val="solid"/>
-          </a:ln>
-        </p:spPr>
-      </p:sp>
-      <p:sp>
-        <p:nvSpPr>
-          <p:cNvPr id="102" name="Text 100"/>
-          <p:cNvSpPr txBox="1"/>
-          <p:nvPr/>
-        </p:nvSpPr>
-        <p:spPr>
-          <a:xfrm>
-            <a:off x="9160764" y="4416552"/>
-            <a:ext cx="640080" cy="384048"/>
-          </a:xfrm>
-          <a:prstGeom prst="rect">
-            <a:avLst/>
-          </a:prstGeom>
-          <a:noFill/>
-          <a:ln/>
-        </p:spPr>
-        <p:txBody>
-          <a:bodyPr wrap="square" lIns="0" tIns="0" rIns="0" bIns="0" rtlCol="0" anchor="ctr"/>
-          <a:lstStyle/>
-          <a:p>
-            <a:pPr algn="ctr" indent="0" marL="0">
-              <a:buNone/>
-            </a:pPr>
-            <a:r>
-              <a:rPr lang="en-US" sz="800" b="1" dirty="0">
-                <a:solidFill>
-                  <a:srgbClr val="FFFFFF"/>
-                </a:solidFill>
-                <a:latin typeface="Calibri" pitchFamily="34" charset="0"/>
-                <a:ea typeface="Calibri" pitchFamily="34" charset="-122"/>
-                <a:cs typeface="Calibri" pitchFamily="34" charset="-120"/>
-              </a:rPr>
-              <a:t>Pleno</a:t>
-            </a:r>
-            <a:endParaRPr lang="en-US" sz="800" dirty="0"/>
-          </a:p>
-        </p:txBody>
-      </p:sp>
-      <p:sp>
-        <p:nvSpPr>
-          <p:cNvPr id="103" name="Shape 101"/>
-          <p:cNvSpPr/>
-          <p:nvPr/>
-        </p:nvSpPr>
-        <p:spPr>
-          <a:xfrm>
-            <a:off x="10285476" y="4251960"/>
-            <a:ext cx="0" cy="164592"/>
-          </a:xfrm>
-          <a:prstGeom prst="line">
-            <a:avLst/>
-          </a:prstGeom>
-          <a:noFill/>
-          <a:ln w="15875">
-            <a:solidFill>
-              <a:srgbClr val="A9BEDC"/>
-            </a:solidFill>
-            <a:prstDash val="solid"/>
-          </a:ln>
-        </p:spPr>
-      </p:sp>
-      <p:sp>
-        <p:nvSpPr>
-          <p:cNvPr id="104" name="Shape 102"/>
-          <p:cNvSpPr/>
-          <p:nvPr/>
-        </p:nvSpPr>
-        <p:spPr>
-          <a:xfrm>
-            <a:off x="9928860" y="4416552"/>
-            <a:ext cx="713232" cy="384048"/>
-          </a:xfrm>
-          <a:prstGeom prst="roundRect">
-            <a:avLst>
-              <a:gd name="adj" fmla="val 11905"/>
-            </a:avLst>
-          </a:prstGeom>
-          <a:solidFill>
-            <a:srgbClr val="4A6FA5"/>
-          </a:solidFill>
-          <a:ln w="12700">
-            <a:solidFill>
-              <a:srgbClr val="4A6FA5"/>
-            </a:solidFill>
-            <a:prstDash val="solid"/>
-          </a:ln>
-        </p:spPr>
-      </p:sp>
-      <p:sp>
-        <p:nvSpPr>
-          <p:cNvPr id="105" name="Text 103"/>
-          <p:cNvSpPr txBox="1"/>
-          <p:nvPr/>
-        </p:nvSpPr>
-        <p:spPr>
-          <a:xfrm>
-            <a:off x="9965436" y="4416552"/>
-            <a:ext cx="640080" cy="384048"/>
-          </a:xfrm>
-          <a:prstGeom prst="rect">
-            <a:avLst/>
-          </a:prstGeom>
-          <a:noFill/>
-          <a:ln/>
-        </p:spPr>
-        <p:txBody>
-          <a:bodyPr wrap="square" lIns="0" tIns="0" rIns="0" bIns="0" rtlCol="0" anchor="ctr"/>
-          <a:lstStyle/>
-          <a:p>
-            <a:pPr algn="ctr" indent="0" marL="0">
-              <a:buNone/>
-            </a:pPr>
-            <a:r>
-              <a:rPr lang="en-US" sz="800" b="1" dirty="0">
-                <a:solidFill>
-                  <a:srgbClr val="FFFFFF"/>
-                </a:solidFill>
-                <a:latin typeface="Calibri" pitchFamily="34" charset="0"/>
-                <a:ea typeface="Calibri" pitchFamily="34" charset="-122"/>
-                <a:cs typeface="Calibri" pitchFamily="34" charset="-120"/>
-              </a:rPr>
-              <a:t>Pleno</a:t>
-            </a:r>
-            <a:endParaRPr lang="en-US" sz="800" dirty="0"/>
-          </a:p>
-        </p:txBody>
-      </p:sp>
-      <p:sp>
-        <p:nvSpPr>
-          <p:cNvPr id="106" name="Shape 104"/>
-          <p:cNvSpPr/>
-          <p:nvPr/>
-        </p:nvSpPr>
-        <p:spPr>
-          <a:xfrm>
-            <a:off x="11090148" y="4251960"/>
-            <a:ext cx="0" cy="164592"/>
-          </a:xfrm>
-          <a:prstGeom prst="line">
-            <a:avLst/>
-          </a:prstGeom>
-          <a:noFill/>
-          <a:ln w="15875">
-            <a:solidFill>
-              <a:srgbClr val="A9BEDC"/>
-            </a:solidFill>
-            <a:prstDash val="solid"/>
-          </a:ln>
-        </p:spPr>
-      </p:sp>
-      <p:sp>
-        <p:nvSpPr>
-          <p:cNvPr id="107" name="Shape 105"/>
-          <p:cNvSpPr/>
-          <p:nvPr/>
-        </p:nvSpPr>
-        <p:spPr>
-          <a:xfrm>
-            <a:off x="10733532" y="4416552"/>
-            <a:ext cx="713232" cy="384048"/>
-          </a:xfrm>
-          <a:prstGeom prst="roundRect">
-            <a:avLst>
-              <a:gd name="adj" fmla="val 11905"/>
-            </a:avLst>
-          </a:prstGeom>
-          <a:solidFill>
-            <a:srgbClr val="4A6FA5"/>
-          </a:solidFill>
-          <a:ln w="12700">
-            <a:solidFill>
-              <a:srgbClr val="4A6FA5"/>
-            </a:solidFill>
-            <a:prstDash val="solid"/>
-          </a:ln>
-        </p:spPr>
-      </p:sp>
-      <p:sp>
-        <p:nvSpPr>
-          <p:cNvPr id="108" name="Text 106"/>
-          <p:cNvSpPr txBox="1"/>
-          <p:nvPr/>
-        </p:nvSpPr>
-        <p:spPr>
-          <a:xfrm>
-            <a:off x="10770108" y="4416552"/>
-            <a:ext cx="640080" cy="384048"/>
-          </a:xfrm>
-          <a:prstGeom prst="rect">
-            <a:avLst/>
-          </a:prstGeom>
-          <a:noFill/>
-          <a:ln/>
-        </p:spPr>
-        <p:txBody>
-          <a:bodyPr wrap="square" lIns="0" tIns="0" rIns="0" bIns="0" rtlCol="0" anchor="ctr"/>
-          <a:lstStyle/>
-          <a:p>
-            <a:pPr algn="ctr" indent="0" marL="0">
-              <a:buNone/>
-            </a:pPr>
-            <a:r>
-              <a:rPr lang="en-US" sz="800" b="1" dirty="0">
-                <a:solidFill>
-                  <a:srgbClr val="FFFFFF"/>
-                </a:solidFill>
-                <a:latin typeface="Calibri" pitchFamily="34" charset="0"/>
-                <a:ea typeface="Calibri" pitchFamily="34" charset="-122"/>
-                <a:cs typeface="Calibri" pitchFamily="34" charset="-120"/>
-              </a:rPr>
-              <a:t>Pleno</a:t>
-            </a:r>
-            <a:endParaRPr lang="en-US" sz="800" dirty="0"/>
-          </a:p>
-        </p:txBody>
-      </p:sp>
-      <p:sp>
-        <p:nvSpPr>
-          <p:cNvPr id="109" name="Shape 107"/>
-          <p:cNvSpPr/>
-          <p:nvPr/>
-        </p:nvSpPr>
-        <p:spPr>
-          <a:xfrm>
-            <a:off x="8868156" y="4297680"/>
-            <a:ext cx="274320" cy="274320"/>
-          </a:xfrm>
-          <a:prstGeom prst="ellipse">
-            <a:avLst/>
-          </a:prstGeom>
-          <a:solidFill>
-            <a:srgbClr val="6A9B6E"/>
-          </a:solidFill>
-          <a:ln w="12700">
-            <a:solidFill>
-              <a:srgbClr val="FFFFFF"/>
-            </a:solidFill>
-            <a:prstDash val="solid"/>
-          </a:ln>
-        </p:spPr>
-      </p:sp>
-      <p:sp>
-        <p:nvSpPr>
-          <p:cNvPr id="110" name="Text 108"/>
-          <p:cNvSpPr txBox="1"/>
-          <p:nvPr/>
-        </p:nvSpPr>
-        <p:spPr>
-          <a:xfrm>
-            <a:off x="8868156" y="4297680"/>
-            <a:ext cx="274320" cy="274320"/>
-          </a:xfrm>
-          <a:prstGeom prst="rect">
-            <a:avLst/>
-          </a:prstGeom>
-          <a:noFill/>
-          <a:ln/>
-        </p:spPr>
-        <p:txBody>
-          <a:bodyPr wrap="square" lIns="0" tIns="0" rIns="0" bIns="0" rtlCol="0" anchor="ctr"/>
-          <a:lstStyle/>
-          <a:p>
-            <a:pPr algn="ctr" indent="0" marL="0">
-              <a:buNone/>
-            </a:pPr>
-            <a:r>
-              <a:rPr lang="en-US" sz="800" b="1" dirty="0">
-                <a:solidFill>
-                  <a:srgbClr val="FFFFFF"/>
-                </a:solidFill>
-                <a:latin typeface="Calibri" pitchFamily="34" charset="0"/>
-                <a:ea typeface="Calibri" pitchFamily="34" charset="-122"/>
-                <a:cs typeface="Calibri" pitchFamily="34" charset="-120"/>
-              </a:rPr>
-              <a:t>+1</a:t>
-            </a:r>
-            <a:endParaRPr lang="en-US" sz="800" dirty="0"/>
-          </a:p>
-        </p:txBody>
-      </p:sp>
-      <p:sp>
-        <p:nvSpPr>
-          <p:cNvPr id="111" name="Shape 109"/>
-          <p:cNvSpPr/>
-          <p:nvPr/>
-        </p:nvSpPr>
-        <p:spPr>
-          <a:xfrm>
-            <a:off x="9672828" y="4297680"/>
-            <a:ext cx="274320" cy="274320"/>
-          </a:xfrm>
-          <a:prstGeom prst="ellipse">
-            <a:avLst/>
-          </a:prstGeom>
-          <a:solidFill>
-            <a:srgbClr val="6A9B6E"/>
-          </a:solidFill>
-          <a:ln w="12700">
-            <a:solidFill>
-              <a:srgbClr val="FFFFFF"/>
-            </a:solidFill>
-            <a:prstDash val="solid"/>
-          </a:ln>
-        </p:spPr>
-      </p:sp>
-      <p:sp>
-        <p:nvSpPr>
-          <p:cNvPr id="112" name="Text 110"/>
-          <p:cNvSpPr txBox="1"/>
-          <p:nvPr/>
-        </p:nvSpPr>
-        <p:spPr>
-          <a:xfrm>
-            <a:off x="9672828" y="4297680"/>
-            <a:ext cx="274320" cy="274320"/>
-          </a:xfrm>
-          <a:prstGeom prst="rect">
-            <a:avLst/>
-          </a:prstGeom>
-          <a:noFill/>
-          <a:ln/>
-        </p:spPr>
-        <p:txBody>
-          <a:bodyPr wrap="square" lIns="0" tIns="0" rIns="0" bIns="0" rtlCol="0" anchor="ctr"/>
-          <a:lstStyle/>
-          <a:p>
-            <a:pPr algn="ctr" indent="0" marL="0">
-              <a:buNone/>
-            </a:pPr>
-            <a:r>
-              <a:rPr lang="en-US" sz="800" b="1" dirty="0">
-                <a:solidFill>
-                  <a:srgbClr val="FFFFFF"/>
-                </a:solidFill>
-                <a:latin typeface="Calibri" pitchFamily="34" charset="0"/>
-                <a:ea typeface="Calibri" pitchFamily="34" charset="-122"/>
-                <a:cs typeface="Calibri" pitchFamily="34" charset="-120"/>
-              </a:rPr>
-              <a:t>+1</a:t>
-            </a:r>
-            <a:endParaRPr lang="en-US" sz="800" dirty="0"/>
-          </a:p>
-        </p:txBody>
-      </p:sp>
-      <p:sp>
-        <p:nvSpPr>
-          <p:cNvPr id="113" name="Shape 111"/>
-          <p:cNvSpPr/>
-          <p:nvPr/>
-        </p:nvSpPr>
-        <p:spPr>
-          <a:xfrm>
-            <a:off x="10477500" y="4297680"/>
-            <a:ext cx="274320" cy="274320"/>
-          </a:xfrm>
-          <a:prstGeom prst="ellipse">
-            <a:avLst/>
-          </a:prstGeom>
-          <a:solidFill>
-            <a:srgbClr val="6A9B6E"/>
-          </a:solidFill>
-          <a:ln w="12700">
-            <a:solidFill>
-              <a:srgbClr val="FFFFFF"/>
-            </a:solidFill>
-            <a:prstDash val="solid"/>
-          </a:ln>
-        </p:spPr>
-      </p:sp>
-      <p:sp>
-        <p:nvSpPr>
-          <p:cNvPr id="114" name="Text 112"/>
-          <p:cNvSpPr txBox="1"/>
-          <p:nvPr/>
-        </p:nvSpPr>
-        <p:spPr>
-          <a:xfrm>
-            <a:off x="10477500" y="4297680"/>
-            <a:ext cx="274320" cy="274320"/>
-          </a:xfrm>
-          <a:prstGeom prst="rect">
-            <a:avLst/>
-          </a:prstGeom>
-          <a:noFill/>
-          <a:ln/>
-        </p:spPr>
-        <p:txBody>
-          <a:bodyPr wrap="square" lIns="0" tIns="0" rIns="0" bIns="0" rtlCol="0" anchor="ctr"/>
-          <a:lstStyle/>
-          <a:p>
-            <a:pPr algn="ctr" indent="0" marL="0">
-              <a:buNone/>
-            </a:pPr>
-            <a:r>
-              <a:rPr lang="en-US" sz="800" b="1" dirty="0">
-                <a:solidFill>
-                  <a:srgbClr val="FFFFFF"/>
-                </a:solidFill>
-                <a:latin typeface="Calibri" pitchFamily="34" charset="0"/>
-                <a:ea typeface="Calibri" pitchFamily="34" charset="-122"/>
-                <a:cs typeface="Calibri" pitchFamily="34" charset="-120"/>
-              </a:rPr>
-              <a:t>+1</a:t>
-            </a:r>
-            <a:endParaRPr lang="en-US" sz="800" dirty="0"/>
-          </a:p>
-        </p:txBody>
-      </p:sp>
-      <p:sp>
-        <p:nvSpPr>
-          <p:cNvPr id="115" name="Shape 113"/>
-          <p:cNvSpPr/>
-          <p:nvPr/>
-        </p:nvSpPr>
-        <p:spPr>
-          <a:xfrm>
-            <a:off x="11282172" y="4297680"/>
-            <a:ext cx="274320" cy="274320"/>
-          </a:xfrm>
-          <a:prstGeom prst="ellipse">
-            <a:avLst/>
-          </a:prstGeom>
-          <a:solidFill>
-            <a:srgbClr val="6A9B6E"/>
-          </a:solidFill>
-          <a:ln w="12700">
-            <a:solidFill>
-              <a:srgbClr val="FFFFFF"/>
-            </a:solidFill>
-            <a:prstDash val="solid"/>
-          </a:ln>
-        </p:spPr>
-      </p:sp>
-      <p:sp>
-        <p:nvSpPr>
-          <p:cNvPr id="116" name="Text 114"/>
-          <p:cNvSpPr txBox="1"/>
-          <p:nvPr/>
-        </p:nvSpPr>
-        <p:spPr>
-          <a:xfrm>
-            <a:off x="11282172" y="4297680"/>
-            <a:ext cx="274320" cy="274320"/>
-          </a:xfrm>
-          <a:prstGeom prst="rect">
-            <a:avLst/>
-          </a:prstGeom>
-          <a:noFill/>
-          <a:ln/>
-        </p:spPr>
-        <p:txBody>
-          <a:bodyPr wrap="square" lIns="0" tIns="0" rIns="0" bIns="0" rtlCol="0" anchor="ctr"/>
-          <a:lstStyle/>
-          <a:p>
-            <a:pPr algn="ctr" indent="0" marL="0">
-              <a:buNone/>
-            </a:pPr>
-            <a:r>
-              <a:rPr lang="en-US" sz="800" b="1" dirty="0">
-                <a:solidFill>
-                  <a:srgbClr val="FFFFFF"/>
-                </a:solidFill>
-                <a:latin typeface="Calibri" pitchFamily="34" charset="0"/>
-                <a:ea typeface="Calibri" pitchFamily="34" charset="-122"/>
-                <a:cs typeface="Calibri" pitchFamily="34" charset="-120"/>
-              </a:rPr>
-              <a:t>+1</a:t>
-            </a:r>
-            <a:endParaRPr lang="en-US" sz="800" dirty="0"/>
-          </a:p>
-        </p:txBody>
-      </p:sp>
-      <p:sp>
-        <p:nvSpPr>
-          <p:cNvPr id="117" name="Text 115"/>
-          <p:cNvSpPr txBox="1"/>
-          <p:nvPr/>
-        </p:nvSpPr>
-        <p:spPr>
-          <a:xfrm>
-            <a:off x="8125968" y="4828032"/>
-            <a:ext cx="3514344" cy="237744"/>
-          </a:xfrm>
-          <a:prstGeom prst="rect">
-            <a:avLst/>
-          </a:prstGeom>
-          <a:noFill/>
-          <a:ln/>
-        </p:spPr>
-        <p:txBody>
-          <a:bodyPr wrap="square" lIns="0" tIns="0" rIns="0" bIns="0" rtlCol="0" anchor="ctr"/>
-          <a:lstStyle/>
-          <a:p>
-            <a:pPr algn="ctr" indent="0" marL="0">
-              <a:buNone/>
-            </a:pPr>
-            <a:r>
-              <a:rPr lang="en-US" sz="900" dirty="0">
-                <a:solidFill>
-                  <a:srgbClr val="5B6470"/>
-                </a:solidFill>
-                <a:latin typeface="Calibri" pitchFamily="34" charset="0"/>
-                <a:ea typeface="Calibri" pitchFamily="34" charset="-122"/>
-                <a:cs typeface="Calibri" pitchFamily="34" charset="-120"/>
-              </a:rPr>
-              <a:t>Dos seniors, grado +2; cuatro plenos, grado +1</a:t>
-            </a:r>
-            <a:endParaRPr lang="en-US" sz="900" dirty="0"/>
-          </a:p>
-        </p:txBody>
-      </p:sp>
-      <p:sp>
-        <p:nvSpPr>
-          <p:cNvPr id="118" name="Text 116"/>
+          <p:cNvPr id="120" name="Text 118"/>
           <p:cNvSpPr txBox="1"/>
           <p:nvPr/>
         </p:nvSpPr>
@@ -27568,7 +27827,7 @@
                 <a:ea typeface="Calibri" pitchFamily="34" charset="-122"/>
                 <a:cs typeface="Calibri" pitchFamily="34" charset="-120"/>
               </a:rPr>
-              <a:t>Todo el equipo sube un grado; los dos seniors suben dos, asumen los bloques críticos (Deudores y REDEC; datos, automatización y controles) y la validación. Los plenos ejecutan bajo control dual con ruta a senior.</a:t>
+              <a:t>Reconoce las competencias adquiridas en todo el equipo y conserva el respaldo mutuo entre pares. La estructura sigue siendo plana.</a:t>
             </a:r>
             <a:endParaRPr lang="en-US" sz="950" dirty="0"/>
           </a:p>
@@ -27576,7 +27835,7 @@
       </p:sp>
       <p:sp>
         <p:nvSpPr>
-          <p:cNvPr id="119" name="Text 117"/>
+          <p:cNvPr id="121" name="Text 119"/>
           <p:cNvSpPr txBox="1"/>
           <p:nvPr/>
         </p:nvSpPr>
